--- a/Studies/Prosperity-Economics-And-Right-Use/Prosperity-Economics-And-Right-Use-Madhyasth-Darshan.pptx
+++ b/Studies/Prosperity-Economics-And-Right-Use/Prosperity-Economics-And-Right-Use-Madhyasth-Darshan.pptx
@@ -21,8 +21,8 @@
     <p:sldId id="269" r:id="rId21"/>
     <p:sldId id="270" r:id="rId22"/>
     <p:sldId id="271" r:id="rId23"/>
+    <p:sldId id="273" r:id="rId25"/>
     <p:sldId id="272" r:id="rId24"/>
-    <p:sldId id="273" r:id="rId25"/>
     <p:sldId id="274" r:id="rId26"/>
     <p:sldId id="275" r:id="rId27"/>
     <p:sldId id="276" r:id="rId28"/>
@@ -31,6 +31,8 @@
     <p:sldId id="279" r:id="rId31"/>
     <p:sldId id="280" r:id="rId32"/>
     <p:sldId id="281" r:id="rId33"/>
+    <p:sldId id="287" r:id="rId39"/>
+    <p:sldId id="288" r:id="rId40"/>
     <p:sldId id="282" r:id="rId34"/>
     <p:sldId id="283" r:id="rId35"/>
     <p:sldId id="284" r:id="rId36"/>
@@ -538,13 +540,13 @@
           <a:p/>
           <a:p>
             <a:r>
-              <a:t>The study's principal source is Avartansheel Arthshastra, Shri A. Nagraj's treatise on cyclical economics, read through the project's working English translation. It draws as well on Madhyasth Darshan, Jeevan Vidya, Samadhanatmak Bhautikvad, Karm Darshan, Janvad and Adhyatmvad, and it compares the darshan's account with economic theory, with Indian and Advaita teaching on desire, and with the sciences of satiation and natural limits.</a:t>
+              <a:t>The study's principal source is Avartansheel Arthshastra, Shri A. Nagraj's treatise on cyclical economics, read through the project's working English translation. It draws as well on Madhyasth Darshan, Jeevan Vidya, Samadhanatmak Bhautikvad, Karm Darshan, Janvad and Adhyatmvad, and it compares the darshan's account with classical, Marxian, marginalist, institutional, ecological and Gandhian economics, with Indian and Advaita teaching on desire, and with the sciences of satiation and natural limits.</a:t>
             </a:r>
           </a:p>
           <a:p/>
           <a:p>
             <a:r>
-              <a:t>The deck follows the study in five parts: balance in nature and in the body; the source of insatiability; cyclical economics; comparison; and what measurement and artificial intelligence can contribute, and what they must leave to people.</a:t>
+              <a:t>The deck follows the study in five parts: balance in nature and in the body; the source of insatiability and the genealogy of money and profit; cyclical economics; comparison with economic traditions and the sciences; and why intelligent systems and multi-level AI agents across the ten-tier order are needed to accelerate transition and keep the cycle in balance, while leaving normative judgement to people.</a:t>
             </a:r>
           </a:p>
         </p:txBody>
@@ -696,19 +698,19 @@
           <a:lstStyle/>
           <a:p>
             <a:r>
-              <a:t>Profit has always meant giving less and getting more, and prevailing economics has fixed no limit to how much less and how much more (AA p. 5). Madhyasth Darshan defines profit against labour: seeking more worth than the labour performed, obtaining a higher value in exchange for a lower one (MVD pp. 57, 66).</a:t>
+              <a:t>The treatise traces how exchange left usefulness behind. Early humans recognised natural resources, shared within the family, and bartered between communities. Seats of state and religion then imposed taxation to sustain non-producing rulers and retainers, and moved exchange from barter to metal coins and finally to paper currency. In that transition, neither unrestrained market economics nor state-regulated economics freed society from exploitation (AA pp. 1–8). Profit means giving less and getting more, and Madhyasth Darshan defines it against labour: seeking more worth than the labour performed (MVD pp. 57, 66).</a:t>
             </a:r>
           </a:p>
           <a:p/>
           <a:p>
             <a:r>
-              <a:t>Accumulation settles on money because money escapes the constraint that governs real goods. Metal became the symbol of objects and paper the symbol of metal, so that economics became the study of a symbol (AA pp. 5–6, 52). However much currency exists, it cannot replace grain for one person or quench one person's thirst (AA p. 6; JV pp. 151–152). The accumulation is only of money, which is symbolic value (MVD p. 182). Once objects are subject to currency, labour is subject to it too, and accumulated currency becomes the measure of a person's standing (AA p. 45). Changes in price over decades are changes in the symbol alone (AA pp. 52–53).</a:t>
+              <a:t>Accumulation settles on money because money escapes the decay that governs real goods. Metal became the symbol of objects and paper the symbol of metal (AA pp. 5–6, 52). Paper currency carries three allurements: it is easily carried from place to place, easily hidden, and easily received and paid (AA p. 45). Once currency becomes the measure of standing, trade expands into seven kinds: strength, learning, knowledge, position, beauty, objects, and deceptive speech are all bought and sold (AA pp. 45–46).</a:t>
             </a:r>
           </a:p>
           <a:p/>
           <a:p>
             <a:r>
-              <a:t>Two consequences follow. Artificial scarcity becomes a principal technique for gaining profit. And because accumulation has no satiation point, it cannot be accessible to all, since the earth is limited (AA p. 52). Those who produce are unable to accumulate, and the producer of objects has generally remained poor (AA pp. 7, 75).</a:t>
+              <a:t>Artificial scarcity becomes a principal technique for profit, and because accumulation has no satiation point on a limited earth, it cannot be accessible to all (AA p. 52). Those who produce cannot accumulate, and those who accumulate become slack in production (AA pp. 7, 75).</a:t>
             </a:r>
           </a:p>
         </p:txBody>
@@ -860,7 +862,7 @@
           <a:lstStyle/>
           <a:p>
             <a:r>
-              <a:t>Cyclical economics is the right use, security and prosperity of resources, artha, in the form of body, mind and wealth (AA p. 25). The means of a human being are only body, mind and wealth (MVD p. 243). When the mind works through the body by a realisation-based method, labour applied with skill and proficiency to natural abundance produces objects that carry usefulness value and aesthetic value. These objects are wealth, dhan. Wealth is only the produced object, not money (AA pp. 25, 105).</a:t>
+              <a:t>Cyclical economics is the right use, security and prosperity of resources, artha, in the form of body, mind and wealth (AA p. 25). The means of a human being are only body, mind and wealth (MVD p. 243). In doing so, the five powers of jeevan project into human living through bodily skill and proficiency, and reflect back in mutual evaluation across family and society (AA pp. 18–19, 48–50). Labour applied with skill and proficiency to natural abundance produces objects that carry usefulness value and aesthetic value. These objects are wealth, dhan. Wealth is only the produced object, not money (AA pp. 25, 105).</a:t>
             </a:r>
           </a:p>
           <a:p/>
@@ -1264,19 +1266,19 @@
           <a:lstStyle/>
           <a:p>
             <a:r>
-              <a:t>Use, right use and purposeful use name three levels at which resources serve human purposes. Use is the utilisation of body, mind and wealth in the nourishment and protection of the body and in the motion of society. Right use is their utilisation in orderliness and in the motion of undivided society. Purposeful use is their utilisation in evidencing, from generation to generation, knowledge of coexistence, of jeevan, and of humane conduct (AA pp. 72, 94; MVD p. 56). In terms of scale, production is used within the family, rightly used in society, and put to purpose in the universal order (KD p. 116). The treatise pairs use with justice, right use with resolution, and purposeful use with authenticity (AA p. 116).</a:t>
+              <a:t>Before objects can be valued in exchange, the treatise defines the three levels at which resources serve human purposes: use, right use and purposeful use. Use is the utilisation of body, mind and wealth in the nourishment and protection of the body and in the motion of society. Right use is their utilisation in orderliness and in the motion of undivided society. Purposeful use is their utilisation in evidencing, from generation to generation, knowledge of coexistence, of jeevan, and of humane conduct (AA pp. 72, 94; MVD p. 56). In scale, production is used within the family, rightly used in society, and put to purpose in the universal order (KD p. 116). The treatise pairs use with justice, right use with resolution, and purposeful use with authenticity (AA p. 116).</a:t>
             </a:r>
           </a:p>
           <a:p/>
           <a:p>
             <a:r>
-              <a:t>Values are ordered by what they serve. In offering and surrender, object values are dedicated to civic values, civic values to established values, established values to human values, and human values to jeevan values, happiness, peace, contentment and bliss (AA p. 92).</a:t>
+              <a:t>This places economics within the darshan's hierarchy of thirty values across five categories: two object values (usefulness and artistic value), nine civic values, nine established values, one human value (steadfastness, courage, generosity, kindness, grace and compassion), and four jeevan values (happiness, peace, contentment and bliss), alongside five obligatory allegiances (AA pp. 20–24, 92).</a:t>
             </a:r>
           </a:p>
           <a:p/>
           <a:p>
             <a:r>
-              <a:t>Karm Darshan ranks wealth by the same logic. Wealth placed in the service of liberation, dharma or the fulfilment of desire is ranked high; those purposes placed in the service of wealth are ranked low; wealth sought for its own sake falls in between (KD p. 4).</a:t>
+              <a:t>Karm Darshan ranks wealth by the same logic: wealth placed in the service of liberation, dharma or the fulfilment of desire ranks high; higher purposes made to serve wealth rank low (KD p. 4).</a:t>
             </a:r>
           </a:p>
         </p:txBody>
@@ -1346,19 +1348,19 @@
           <a:lstStyle/>
           <a:p>
             <a:r>
-              <a:t>The ethics of the economy are stated in terms of character. Humane character consists of righteous wealth, marital faithfulness, and kindness in work and behaviour (AA p. 54). Righteous wealth, svadhan, is wealth received as the remuneration of one's own labour, as a gift, or as an award for a special display of art, technique or scholarship (AA p. 140; AVD p. 170). Its opposite, ill-gotten wealth, is obtained through exploitation and hypocrisy, and the darshan counts it, with adultery and hurting others, as crime (MVD pp. 59, 263).</a:t>
+              <a:t>The ethics of the economy are stated in terms of character. Humane character consists of righteous wealth, marital faithfulness, and kindness in work and behaviour (AA p. 54). Righteous wealth, svadhan, is wealth received as the remuneration of one's own labour, as a gift, or as an award for a special display of art, technique or scholarship (AA p. 140; AVD p. 170). Its opposite, ill-gotten wealth obtained through exploitation and hypocrisy, is counted as crime (MVD pp. 59, 263), and moral accountability extends across doing, commissioning and consenting in body, speech and mind (KD pp. 1–2, 117; SB pp. 207, 258).</a:t>
             </a:r>
           </a:p>
           <a:p/>
           <a:p>
             <a:r>
-              <a:t>The darshan does not ask people to renounce wealth. The motives for progeny, wealth and reputation are humane propensities (MVD pp. 59, 137). What changes is their orientation: people, wealth and reputation are assets of the family and of the undivided society (MVD p. 221), and wealth finds its satisfaction through generosity, the happy offering of body, mind and wealth for the awakening, health and prosperity of others (MVD pp. 211, 339; AA p. 22).</a:t>
+              <a:t>The darshan distinguishes animal instincts from the three humane motives: progeny (putreshana), wealth (vitteshana), and public welfare or reputation (lokeshana), with public welfare highest (MVD pp. 318, 320). It also contrasts five kinds of human living: servile, voluptuary and glorious humans driven by sensory interest, the virtuous human on the path of awakening, and the capable human living by values (AA pp. 101–102).</a:t>
             </a:r>
           </a:p>
           <a:p/>
           <a:p>
             <a:r>
-              <a:t>Within the family goods are shared; between families they are exchanged (AA p. 1). Those who cannot produce are provided for through kindness, including help to the helpless, the distressed, the sick and those struck by calamity (AA pp. 23–24, 140). Once a family is resolved and prosperous, the propensity of benevolence answers where its surplus goes (KD p. 116).</a:t>
+              <a:t>Within the family goods are shared; between families they are exchanged (AA p. 1). Those who cannot produce are cared for through kindness, and surplus flows into generosity and benevolence (MVD p. 339; KD p. 116).</a:t>
             </a:r>
           </a:p>
         </p:txBody>
@@ -1510,19 +1512,19 @@
           <a:lstStyle/>
           <a:p>
             <a:r>
-              <a:t>The provision cycle is nested within the cycles of nature, and its production must keep them intact. Natural assets, minerals and vegetation, are to be used in proportion to their production; their production is not to be obstructed; and human beings are to become helpful in it. Without keeping nature prosperous, the human being cannot be prosperous (AA pp. 142, 146; KD p. 7).</a:t>
+              <a:t>The provision cycle is nested within the cycles of nature, and the treatise draws a sharp line between production (utpadan) and extraction (paddat-prapti). Production is inherently cyclical and leaves natural equilibrium undisturbed; drawing coal and mineral oil from the earth is mere extraction, not production (AA p. 78). Natural assets, minerals and vegetation, are to be used in proportion to their regeneration; their production is not to be obstructed; and human beings are to become helpful in it. Without keeping nature prosperous, the human being cannot be prosperous (AA pp. 142, 146; KD p. 7).</a:t>
             </a:r>
           </a:p>
           <a:p/>
           <a:p>
             <a:r>
-              <a:t>Madhyasth Darshan sets out the same rule as lawful and unlawful conduct. Spending minerals and forests in proportion to their regeneration, being complementary in the balance of natural abundance, and maintaining circularity are lawful; spending beyond regeneration, disproportionate extraction, and exploiting non-renewable materials are not (MVD p. 263). Its state policy names production security as maintained through the principle of maintaining nature's balance (MVD p. 264).</a:t>
+              <a:t>Madhyasth Darshan sets out the same rule as lawful and unlawful conduct: spending minerals and forests in proportion to regeneration and maintaining circularity are lawful; spending beyond regeneration and exploiting non-renewables are not (MVD p. 263).</a:t>
             </a:r>
           </a:p>
           <a:p/>
           <a:p>
             <a:r>
-              <a:t>The treatise is specific about energy. Mineral oil, coal and radioactive fuels are the most harmful; flowing and falling water, wind, solar heat and gas from dung and refuse are pollution-free. Vegetable oil from roadside trees forms a closed cycle: tree, seed, oil, smoke taken up by trees, and seed again (AA pp. 31–33, 106–107). Determining the land of a village also determines how many families it can support with prosperity (AA p. 92).</a:t>
+              <a:t>Flowing and falling water, wind, solar heat, biogas from dung and refuse, and vegetable oil from roadside trees provide cyclical, pollution-free energy (AA pp. 31–33, 106–107). Determining the land of a village also determines how many families it can support with prosperity (AA p. 92).</a:t>
             </a:r>
           </a:p>
         </p:txBody>
@@ -1592,19 +1594,19 @@
           <a:lstStyle/>
           <a:p>
             <a:r>
-              <a:t>Machine production is not contrary to economics (AA p. 47). Technique multiplies the speed of whatever humans do. Until people can live as members of society and of an orderly system, that multiplication increases the speed of problems and the number of crimes; only with such understanding do machines become available to every family as prosperity (SB p. 267).</a:t>
+              <a:t>In the cyclical economy, every villager is trained across multiple occupations, planned jointly by the education, production and exchange-reserve committees, so that no one suffers occupational fear (AA pp. 64–65, 131). Research and dissemination are inseparable: just as one grain multiplies into hundreds only when sown in the field, knowledge and skill reach fruition through dissemination, not through patent monopolies that sell research while concealing the method (AA pp. 56–58; JV pp. 88–89).</a:t>
             </a:r>
           </a:p>
           <a:p/>
           <a:p>
             <a:r>
-              <a:t>The treatise names two drives that kept technique from serving this purpose: the preoccupation with making all production automatic, and the centralisation of industry. Both rest on capital investment and on buying labour power. Automatic production reduced the number of people engaged in production, so that of two equally educated people one finds work and the other feels useless (AA p. 107). Janvad observes that a working mindset has given way to a managing mindset (JVD p. 35).</a:t>
+              <a:t>Machine production is not contrary to economics (AA p. 47), but technique multiplies the speed of whatever humans do, problems included (SB p. 267). Preoccupation with full automation and centralised industry, resting on capital and bought labour power, displaced producers and replaced a working mindset with a managing mindset (AA p. 107; JVD p. 35).</a:t>
             </a:r>
           </a:p>
           <a:p/>
           <a:p>
             <a:r>
-              <a:t>Against this, every person is to be engaged in production according to capacity, receptivity and ability (MVD p. 265). When every member of every family takes part in production, poverty, deprivation and the trap of accumulation and comfort are left behind together (JVD p. 216). Means rightly used increase from generation to generation while the time required decreases (AA p. 118). The criterion is twofold: raise the usefulness labour establishes and reduce its time, while keeping every person a producer.</a:t>
+              <a:t>Against this, every person is to be engaged in production according to capacity, receptivity and ability (MVD p. 265). Means rightly used increase the usefulness labour establishes and reduce the time production takes across generations, while keeping every member of every family a producer (AA p. 118; JVD p. 216).</a:t>
             </a:r>
           </a:p>
         </p:txBody>
@@ -1674,19 +1676,19 @@
           <a:lstStyle/>
           <a:p>
             <a:r>
-              <a:t>Economics in isolation has no definition or standing (AA p. 117). Cyclical economics is one part of self-governance, which means accessibility to justice, to production and to exchange, sustained by education-sanskar and health-restraint (AA p. 63). The five dimensions are drawn as a circle joined to a pentagon: education-sanskar to understanding, health-restraint to expression consistent with science and wisdom, justice-security to honesty, production to prosperity, and exchange-reserve to balance (AA p. 112).</a:t>
+              <a:t>Economics in isolation has no definition or standing (AA p. 117). Self-governance rests on authority (the strength of understanding), identity (evidencing it in living), and independence (unconstrained participation in family and universal orderliness; AA pp. 104–105). The five dimensions link education-sanskar to understanding, health-restraint to balanced expression, justice-security to honesty, production to prosperity, and exchange-reserve to balance (AA p. 112).</a:t>
             </a:r>
           </a:p>
           <a:p/>
           <a:p>
             <a:r>
-              <a:t>The village of about a hundred families is the first unit. Ten families form a family cluster, ten clusters a village council, and so on through ten tiers to a world family council, each with five committees (AA pp. 27–28). Production scale rises with the tier: cottage industry in the village, large industry at the region and world (AA pp. 29–30, 115).</a:t>
+              <a:t>Ten families form a family cluster, ten clusters a hundred-family village with nine branches of production (agriculture, go-shala, forestry, cottage crafts and related work; AA pp. 133–136), and ten tiers reach the world family council. Representatives are selected by mutual recognition with zero election expenditure and serve part-time while continuing production, keeping at least eighty percent of society prosperous in production and twenty percent in coordination (AA pp. 27–30, 110, 127; MVD p. 259).</a:t>
             </a:r>
           </a:p>
           <a:p/>
           <a:p>
             <a:r>
-              <a:t>The darshan names three policies: protection is state policy, right use is moral policy, and production beyond the family's needs is economic policy (KD p. 67). Its state policy sets out six securities, including exchange security through the evaluation of human labour, and exchange between nations too is to be free of profit and loss, based on object value and labour value (MVD pp. 264–268). Today, countries with large foreign exchange reserves are able to exploit others (JVD p. 32).</a:t>
+              <a:t>Moral policy is the right use of resources, economic policy is production beyond family need, and state policy is protection across the six securities, with moral policy primary (KD pp. 14, 67; MVD pp. 264–271).</a:t>
             </a:r>
           </a:p>
         </p:txBody>
@@ -1838,19 +1840,19 @@
           <a:lstStyle/>
           <a:p>
             <a:r>
-              <a:t>The traditions disagree most sharply on the source of insatiable want. Neoclassical theory takes non-satiation as given and does not ask its source. Aristotle distinguished household management, limited by need, from wealth-getting for its own sake, which has no limit; Marx contrasted selling in order to buy, which ends in use, with buying in order to sell for more, whose movement is limitless. Keynes distinguished absolute needs, which can be met, from relative needs, which may be insatiable; Veblen and Hirsch located insatiability in status and positional goods. Ecological economists explain continued growth through debt, competition and employment. Kumarappa contrasted an economy of transience with an economy of permanence. The Gita and Advaita trace desire to ignorance of the Self.</a:t>
+              <a:t>The traditions disagree most sharply on the source of insatiable want and how labour and need are valued. Since Jevons, Menger and Walras (1871), marginalist and neoclassical theory abandoned classical labour value for subjective marginal utility and took non-satiation and scarcity as given (Robbins 1932). Aristotle and Marx located limitlessness in money-making and the circuit of capital; in the Critique of the Gotha Programme (1875), Marx separated post-capitalist distribution into a first stage of labour-time certificates and a distant stage of need-based sharing, whereas the darshan pairs family need-sharing with inter-family labour-value exchange simultaneously (AA pp. 1, 119–120).</a:t>
             </a:r>
           </a:p>
           <a:p/>
           <a:p>
             <a:r>
-              <a:t>The darshan places the source in the joint form: a jeevan whose higher activities lack understanding, whose discontent is read as a shortage of objects, and whose capacity for selection and taste is left without regulation. On this account the other explanations describe real consequences of the same error.</a:t>
+              <a:t>Keynes, Veblen and Hirsch located insatiability in relative and positional goods; Polanyi (1944) showed how treating land, labour and money as fictitious commodities disembeds the economy from society; ecological economists point to debt and throughput limits; Kumarappa and Schumacher ground permanence in village production and moral restraint; and Advaita traces desire to ignorance of the Self.</a:t>
             </a:r>
           </a:p>
           <a:p/>
           <a:p>
             <a:r>
-              <a:t>On what closes the cycle, ecological economics closes material loops, and Daly's steady state addresses throughput. Only the darshan, Gandhian economics and in part Keynes make the definiteness of need a condition of the economy's structure.</a:t>
+              <a:t>The darshan places the root in the joint form: a jeevan whose unexpressed higher activities read their discontent as a shortage of objects. Only the darshan, Gandhian economics and in part Keynes make the definiteness of need a structural condition of the economy.</a:t>
             </a:r>
           </a:p>
         </p:txBody>
@@ -1920,19 +1922,13 @@
           <a:lstStyle/>
           <a:p>
             <a:r>
-              <a:t>The study does not treat economic theory as an adversary. Six lessons bear directly on cyclical economics.</a:t>
+              <a:t>Six lessons from economic theory bear directly on cyclical economics.</a:t>
             </a:r>
           </a:p>
           <a:p/>
           <a:p>
             <a:r>
-              <a:t>First, coordination beyond the village needs information. Hayek argued that prices communicate knowledge dispersed among many people, and the treatise's own transitional use of market rates shows that a labour-based system must obtain that knowledge in another form. Second, prosperity and production security can be evidenced only if they are measured; national accounting, input–output analysis, material-flow accounting and life-cycle assessment provide methods. Third, Elinor Ostrom showed that communities can govern shared resources, which bears on the village's jurisdiction over forests, water and minerals. Fourth, theories of human need, from Max-Neef, Doyal and Gough, can sharpen the family's assessment of need. Fifth, money today is mostly credit created by banks when they lend; the darshan's critique of symbolic value can address that system directly. Sixth, Leontief's input–output tables, and Cockshott and Cottrell's work on labour-time accounting, show how the labour embodied in complex goods can be computed.</a:t>
-            </a:r>
-          </a:p>
-          <a:p/>
-          <a:p>
-            <a:r>
-              <a:t>Neoclassical economics coordinates without a stopping point. Its tools can serve a cyclical economy once that economy supplies the criteria the discipline leaves out.</a:t>
+              <a:t>First, coordination beyond the village needs active information processing: Hayek showed that market prices compress dispersed knowledge, so a non-price system must supply that coordination in another way. Second, prosperity and production security must be measured through national accounts, input–output tables, material-flow accounting and life-cycle assessment. Third, Elinor Ostrom's polycentric commons governance and Karl Polanyi's analysis of embeddedness and fictitious commodities show how land, labour and credit are kept within social bounds. Fourth, the need and capability frameworks of Max-Neef, Doyal and Gough, and Amartya Sen sharpen the family's assessment of need against adaptive preference. Fifth, modern money is credit created by commercial banks at interest (BoE 2014), while mutual-credit clearing networks such as Switzerland's WIR (Stodder 2009) demonstrate interest-free ledger clearing of the kind used by the village exchange-reserve. Sixth, Leontief's input–output analysis, Cockshott and Cottrell's labour-time calculation, and Ricardo's theory of differential rent (1817) show how embodied labour, capital depreciation, and unequal soil or mineral fertility can be separated and computed.</a:t>
             </a:r>
           </a:p>
         </p:txBody>
@@ -2002,19 +1998,19 @@
           <a:lstStyle/>
           <a:p>
             <a:r>
-              <a:t>The darshan joins two kinds of order in one sequence. Knowledge is law, law is regulation, and regulation is balance; balanced living is justice in humans; living within universal orderliness with justice is dharma; and realisation in coexistence is dharma and truth (MVD p. 173). Law, regulation and balance are already evident in the orders other than the human, which are bound by their own laws (AA p. 117). Justice, dharma and truth are the evaluations by which humans establish their own orderliness, and the treatise describes them as still under review in human tradition (AA p. 18).</a:t>
+              <a:t>The darshan joins two kinds of order in one sequence. Knowledge is law, law is regulation, and regulation is balance; balanced living is justice in humans; living within universal orderliness with justice is dharma; and realisation in coexistence is dharma and truth (MVD p. 173). Law, regulation and balance are already evident in the orders other than the human (AA p. 117). Justice, dharma and truth are the evaluations by which humans establish their own orderliness, and the treatise describes them as still under review in human tradition (AA p. 18).</a:t>
             </a:r>
           </a:p>
           <a:p/>
           <a:p>
             <a:r>
-              <a:t>This suggests a division of labour. Where a relation can be stated as a quantity, a rate or a rule, it can be measured, recorded and in part handled by an instrument. Where a question concerns the fulfilment of a relationship, the purpose of a choice, or its accord with coexistence, it belongs to human evaluation. The treatise already prescribes surveys and committee evaluations, and expects computers in the exchange-reserve and a computer system linking committees from village to world (AA pp. 122–125, 132, 138).</a:t>
+              <a:t>This sets the division of labour for any instrument. Where a relation is governed by law, regulation or balance and can be stated as a quantity, rate, constraint or rule, it can be measured, modelled and partly handled by an instrument. Where a question concerns the fulfilment of a relationship, the purpose of a choice, or its accord with coexistence, it belongs to human evaluation.</a:t>
             </a:r>
           </a:p>
           <a:p/>
           <a:p>
             <a:r>
-              <a:t>Karm Darshan gives the rule for trusting instruments. Every instrument embodies the mentality of those who plan it and falls short of the purpose it was planned for; trust and use should stay below that purpose, and every signal must still be read by a human being (KD p. 139).</a:t>
+              <a:t>Every instrument is conceived, planned and produced by humans, embodies their mentality, and falls short of its purpose: trust and use must stay below that purpose, and every signal must be read by a human being (KD p. 139). Present AI systems belong to the material order as insentient instruments, yantra, that either amplify delusion or, directed by humane criteria, make the basis of decisions visible.</a:t>
             </a:r>
           </a:p>
         </p:txBody>
@@ -2084,19 +2080,19 @@
           <a:lstStyle/>
           <a:p>
             <a:r>
-              <a:t>Each condition of the cycle can fail in a recognisable way, and most failures leave traces in records long before they become crises. The study pairs each condition with what can be recorded, the early signal of failure, and the question the signal raises for people.</a:t>
+              <a:t>Each condition of the cycle can fail in a recognisable way, and most failures leave traces in records long before they become crises. Within the multi-level architecture of §8.3, the Family, Committee and Regional AI Agents watch these indicators continuously and route early warnings to the responsible human unit.</a:t>
             </a:r>
           </a:p>
           <a:p/>
           <a:p>
             <a:r>
-              <a:t>Need is definite: the signal is use rising faster than the family's assessed need, and the question is whether the assessment is true to the family's need and fair to each member. Labour receives its value: the signal is producers receiving less than the labour value of what they make, or a widening gap between producer and consumer, and the question is whether the fruit of this labour is being exploited. Exchange follows labour value: the signal is ratios drifting and margins appearing between villages. Everyone takes part in production: the signal is people displaced and skills left idle. Goods are used, not hoarded: the signal is stock ageing in store and balances accumulating. Natural assets are used in proportion to their production: the signal is drawdown, falling fertility, soils turning acidic or saline.</a:t>
+              <a:t>Need is definite: the Family Agent flags use rising faster than the family's assessed need, returning the question of whether the assessment is true and fair. Labour receives its value: the Production and Exchange-Reserve Agents flag producers receiving less than labour value or a widening producer–consumer gap. Exchange follows labour value: regional agents flag drifting ratios or unauthorised margins. Everyone takes part in production: committee agents flag displaced workers or idle skills and alert the Education-Sanskar Agent to plan training. Goods are used, not hoarded: agents flag ageing stock and idle balances. Natural assets are used in proportion to regeneration: agents flag drawdown or soil acidity and salinity.</a:t>
             </a:r>
           </a:p>
           <a:p/>
           <a:p>
             <a:r>
-              <a:t>The table in the study also covers cyclical energy, village autonomy, and education and health. In every row, the instrument's work ends at the question; the answer belongs to people.</a:t>
+              <a:t>In every row, the agent's work ends by presenting the causal trace and the question to the family, committee or council responsible; the decision belongs to people.</a:t>
             </a:r>
           </a:p>
         </p:txBody>
@@ -2166,19 +2162,19 @@
           <a:lstStyle/>
           <a:p>
             <a:r>
-              <a:t>The darshan's valuation of labour needs records: the pace of work in each activity, the time and means each product requires, the quantities producers achieve under different conditions, and the remuneration they actually receive (AA pp. 66, 119, 145). Within a village these can be kept by hand. Between villages and regions, and for products assembled from many inputs, they become a large accounting task, and this is where computing systems help most directly.</a:t>
+              <a:t>The darshan's valuation of labour needs records: the pace of work in each activity, the time and means each product requires, the quantities producers achieve under different conditions, and the remuneration they actually receive (AA pp. 66, 119, 145). Within a single village for wheat, these can be kept by hand. Across villages, districts and tiers, and for industrial goods assembled from many inputs, the connected Production and Exchange-Reserve Agents of §8.3 perform the computation.</a:t>
             </a:r>
           </a:p>
           <a:p/>
           <a:p>
             <a:r>
-              <a:t>A system can keep labour records for each kind of product and compute a common value of labour from the range of yields across many villages, as the treatise does for wheat within one village (AA p. 66). It can compute the labour embodied in complex goods by tracing inputs back through the chain of production, using input–output methods from economics. During the transition it can keep prices and labour values side by side, so the second and third stages have the figures they need (AA pp. 142–143). It can show each producer what their labour established and what they received, and help plan training for the work a village needs (AA p. 131).</a:t>
+              <a:t>The agents compute common labour values across villages, updating them as generational means reduce the labour required per unit (AA pp. 66, 118, 145). They trace embodied labour through multi-stage input–output tables (Leontief 1936), including tool and building depreciation without charging interest. Across regions with unequal soil fertility, rainfall or mineral access, they separate natural endowment (Ricardo 1817) from human effort so midpoint valuation does not penalise less fertile villages. During the transition they maintain currency prices and labour values side by side for Stages 2 and 3 (AA pp. 142–143).</a:t>
             </a:r>
           </a:p>
           <a:p/>
           <a:p>
             <a:r>
-              <a:t>The method of valuation remains a human decision: the village council decides how values are set, and the committees fix the quantity, quality and value of labour (AA pp. 67, 143). Inside the family, contributions are not weighed at all.</a:t>
+              <a:t>The method of valuation remains a human decision: the village council sets the consolidation method, and the production and exchange-reserve committees fix the quantity, quality and value of labour (AA pp. 67, 143). Inside the family, nothing is weighed.</a:t>
             </a:r>
           </a:p>
         </p:txBody>
@@ -2248,19 +2244,19 @@
           <a:lstStyle/>
           <a:p>
             <a:r>
-              <a:t>To keep the cycle in balance, a system can maintain the village survey as a living record, track stock and its age, compare extraction with regeneration for each natural asset, and estimate from the land and water how many families a village can support with prosperity (AA p. 92). Where a rule has been settled by the people concerned, such as the share of a forest that may be cut in a year, it can apply the rule and report what it did. Across tiers it can show a district the balance of production and need, plan which village supplies what another lacks, and keep exchange between regions at labour value (AA p. 72; MVD p. 268).</a:t>
+              <a:t>Across the ten tiers, the agent network keeps the cycle in balance and lowers the barrier to transition. When a new cluster of families or villages begins transitioning inside today's market economy, pre-configured agents immediately connect its exchange-reserve to regional labour-value benchmarks and mutual-credit clearing, routing surpluses to cover deficits without speculative middlemen or interest rates (AA pp. 72, 115, 118, 142–143; MVD p. 268).</a:t>
             </a:r>
           </a:p>
           <a:p/>
           <a:p>
             <a:r>
-              <a:t>The criterion for technique applies to AI with special force. AI can take over drudgery and reduce the time production takes, which is the generational gain the treatise expects from means rightly used (AA p. 118). It can also concentrate capital and displace producers, the very drives the treatise identifies as obstacles (AA p. 107; JVD p. 35). A cyclical economy would keep every person engaged in production (MVD p. 265). Its knowledge, models and records would be shared, since research and dissemination are inseparable (AA pp. 56–58, 132).</a:t>
+              <a:t>The darshan's criterion for technique governs deployment: AI must reduce drudgery and production time while keeping every person a participant in physical production (MVD p. 265; AA p. 107; JVD p. 35), and all models, weights and agricultural or craft records must remain an open commons rather than proprietary intellectual property (AA pp. 29, 56–58, 132).</a:t>
             </a:r>
           </a:p>
           <a:p/>
           <a:p>
             <a:r>
-              <a:t>Today's recommendation and advertising systems give the selection–taste cycle an instrument tuned to keep it running. Directed by use and right use, the same capacities can help a family keep to its assessed needs.</a:t>
+              <a:t>Four safeguards keep the agent network subordinate to people (§8.8): no optimisation for profit or attention capture; strict data subsidiarity (personal logs belong to the person, family records to the family, village records to the villagers; AA p. 128); inspectable rules that prevent technocratic rulership (AA p. 82); and counting AI's own energy and mineral footprint within regenerative limits.</a:t>
             </a:r>
           </a:p>
         </p:txBody>
@@ -2336,7 +2332,7 @@
           <a:p/>
           <a:p>
             <a:r>
-              <a:t>First, the body's needs are definite, so the body by itself could come to balance with the rest of nature like any other organism. Second, human want is not definite. The darshan explains why: jeevan, the conscious unit, seeks continuity of happiness, and in delusion it reads its own dissatisfaction as a shortage of objects. Third, cyclical economics closes the cycle at the points where it now runs open: need assessed in the family, labour applied to natural abundance, goods produced for use, exchange at the value of labour, and the remainder given to right use. Fourth, instruments, including artificial intelligence, can help keep that cycle in balance and give labour its value, while the judgements of justice, dharma and truth stay with people.</a:t>
+              <a:t>First, the body's needs are definite, so the body by itself could come to balance with the rest of nature like any other organism. Second, human want is not definite. The darshan explains why: jeevan, the conscious unit, seeks continuity of happiness, and in delusion it reads its own dissatisfaction as a shortage of objects. Third, cyclical economics closes the cycle at the points where it now runs open: need assessed in the family, labour applied to natural abundance, goods produced for use, right use and purposeful use, exchange at the value of labour, and production kept within nature's regeneration. Fourth, passive databases and networks alone cannot establish or run such an order; intelligent systems and AI agents paired with individuals, families, committees and councils across all ten tiers can accelerate transition and keep the cycle in balance, while the judgements of justice, dharma and truth stay with people.</a:t>
             </a:r>
           </a:p>
           <a:p/>
@@ -2412,25 +2408,19 @@
           <a:lstStyle/>
           <a:p>
             <a:r>
-              <a:t>The critical review weighs the darshan's account as the study weighs every tradition.</a:t>
+              <a:t>The critical review weighs the darshan's account alongside neoclassical, Marxian, ecological and Gandhian economics and Advaita.</a:t>
             </a:r>
           </a:p>
           <a:p/>
           <a:p>
             <a:r>
-              <a:t>Its strengths: it explains insatiability rather than postulating it, through the distinction between the body's definite needs and jeevan's need for continuing happiness. It unifies diagnoses other traditions hold separately: limitless money-making, relative needs, throughput, and desire. Its definition of wealth as produced objects and of capital as human labour power keeps economics tied to provision. Its cycle closes need, use and regeneration together. Its policy names the value of human labour explicitly, and it gives a staged path of transition and a clear rule for instruments.</a:t>
+              <a:t>Its strengths: it explains insatiability rather than postulating it; unifies diagnoses of limitless money-making, disembedded markets, positional goods, throughput and desire; defines wealth as produced objects and capital as human labour power; pairs need-based sharing inside the family with equal labour-value exchange between families and regions simultaneously; closes need, use and natural regeneration together; names the value of labour in policy; and gives a three-stage transition path and a clear boundary for instruments.</a:t>
             </a:r>
           </a:p>
           <a:p/>
           <a:p>
             <a:r>
-              <a:t>Its open problems: how family-level assessment of need aggregates across a district or a nation; how common values of labour are set when skills and conditions differ widely, and how far computed labour values for complex goods can be relied on; what replaces the information carried by prices in the third stage; how machines and AI can reduce drudgery without displacing people from production; and what observations in communities practising the darshan would show that needs become definite, that producers receive the value of their labour, and that material throughput falls.</a:t>
-            </a:r>
-          </a:p>
-          <a:p/>
-          <a:p>
-            <a:r>
-              <a:t>The darshan gives the most complete account of why economies do not reach balance; its practicability depends on understanding it has yet to evidence at scale.</a:t>
+              <a:t>Its open problems: how family need assessments aggregate at scale; how common labour values account for complex multi-stage inputs, capital depreciation without interest, and Ricardian differential fertility across regions; how a federated network of AI agents paired with committees across the ten tiers can replace price and interest signals without creating a technocratic bottleneck; how automation reduces drudgery without displacing producers; and how communities govern Personal, Family and Committee AI Agents without ceding to them the judgements of justice, dharma and truth.</a:t>
             </a:r>
           </a:p>
         </p:txBody>
@@ -2506,13 +2496,171 @@
           <a:p/>
           <a:p>
             <a:r>
-              <a:t>Cyclical economics answers by closing the cycle where it now runs open. Need is assessed and made definite within the family. Labour applied to natural abundance produces objects for use; the objects nourish and protect the body and sustain social life, which renews the capacity to produce. Labour is valued by the usefulness it establishes, and exchange follows that value, so that remuneration equals production. Production stays within the proportions of natural regeneration, and the remainder flows into right use.</a:t>
+              <a:t>Cyclical economics answers by closing the cycle where it now runs open: definite need assessed in the family, labour valued by the usefulness it establishes, exchange at labour value free of profit and loss, production within natural regeneration, and the remainder flowing into right use across the five dimensions and ten tiers of self-governance.</a:t>
             </a:r>
           </a:p>
           <a:p/>
           <a:p>
             <a:r>
-              <a:t>Instruments, including AI, can help bring the economy into balance and give labour its true value: they can measure, account, warn and apply settled rules, and show each producer what their labour established. They must return to people the questions of whether a need is real, an exchange just and a valuation fair, and they must keep every person a participant in production. The economy the darshan describes depends finally on understanding. Instruments can show quickly where understanding is missing; they cannot supply it.</a:t>
+              <a:t>Passive databases and network connectivity alone cannot establish or run this order while keeping governance part-time and every citizen a producer. Intelligent systems and AI agents paired with every human unit, from the Personal AI Assistant and the Family AI Agent to the Committee and Council Agents across all ten tiers, can lower the barrier to transition and keep the cycle legible and coordinated, while returning to people the judgements of justice, dharma and truth.</a:t>
+            </a:r>
+          </a:p>
+        </p:txBody>
+      </p:sp>
+      <p:sp>
+        <p:nvSpPr>
+          <p:cNvPr id="4" name="Slide Number Placeholder 3"/>
+          <p:cNvSpPr>
+            <a:spLocks noGrp="1"/>
+          </p:cNvSpPr>
+          <p:nvPr>
+            <p:ph type="sldNum" idx="5" sz="quarter"/>
+          </p:nvPr>
+        </p:nvSpPr>
+        <p:spPr/>
+      </p:sp>
+    </p:spTree>
+  </p:cSld>
+  <p:clrMapOvr>
+    <a:masterClrMapping/>
+  </p:clrMapOvr>
+</p:notes>
+</file>
+
+<file path=ppt/notesSlides/notesSlide32.xml><?xml version="1.0" encoding="utf-8"?>
+<p:notes xmlns:a="http://schemas.openxmlformats.org/drawingml/2006/main" xmlns:p="http://schemas.openxmlformats.org/presentationml/2006/main" xmlns:r="http://schemas.openxmlformats.org/officeDocument/2006/relationships">
+  <p:cSld>
+    <p:spTree>
+      <p:nvGrpSpPr>
+        <p:cNvPr id="1" name=""/>
+        <p:cNvGrpSpPr/>
+        <p:nvPr/>
+      </p:nvGrpSpPr>
+      <p:grpSpPr>
+        <a:xfrm>
+          <a:off x="0" y="0"/>
+          <a:ext cx="0" cy="0"/>
+          <a:chOff x="0" y="0"/>
+          <a:chExt cx="0" cy="0"/>
+        </a:xfrm>
+      </p:grpSpPr>
+      <p:sp>
+        <p:nvSpPr>
+          <p:cNvPr id="2" name="Slide Image Placeholder 1"/>
+          <p:cNvSpPr>
+            <a:spLocks noGrp="1"/>
+          </p:cNvSpPr>
+          <p:nvPr>
+            <p:ph type="sldImg" idx="2"/>
+          </p:nvPr>
+        </p:nvSpPr>
+        <p:spPr/>
+      </p:sp>
+      <p:sp>
+        <p:nvSpPr>
+          <p:cNvPr id="3" name="Notes Placeholder 2"/>
+          <p:cNvSpPr>
+            <a:spLocks noGrp="1"/>
+          </p:cNvSpPr>
+          <p:nvPr>
+            <p:ph type="body" idx="3" sz="quarter"/>
+          </p:nvPr>
+        </p:nvSpPr>
+        <p:spPr/>
+        <p:txBody>
+          <a:bodyPr/>
+          <a:lstStyle/>
+          <a:p>
+            <a:r>
+              <a:t>Writing in the 1990s, Shri A. Nagraj anticipated computers in the village exchange-reserve (AA p. 138) and a computer network linking committees from the village to the world (AA p. 132). Yet passive databases and network connectivity alone cannot establish the cyclical economy or enable a fast transition from the current market system, because of four structural bottlenecks.</a:t>
+            </a:r>
+          </a:p>
+          <a:p/>
+          <a:p>
+            <a:r>
+              <a:t>First, the staffing constraint: council and committee members are part-time representatives who continue their own physical production (AA p. 127), the village exchange-reserve has as few as three staff members (AA p. 138), and eighty percent of society remains in production (MVD p. 259). Manual database querying across ten tiers would either stall or create a full-time managerial bureaucracy (JVD p. 35). Second, non-price coordination: replacing scalar market prices across millions of goods, capital depreciation and Ricardian fertility differences requires continuous input–output propagation and option generation. Third, qualitative-to-quantitative translation: surveys, family need assessments and joint training plans involve natural language that static forms cannot interpret without turning producers into clerks. Fourth, the transition bottleneck: because the system must be built by people still moving toward awakening (anubhav-gami) inside a profit economy, active intelligent agents are needed to give reflective feedback before habits harden and to run the dual currency-and-labour ledgers of Stages 1 and 2 (AA pp. 142–143).</a:t>
+            </a:r>
+          </a:p>
+        </p:txBody>
+      </p:sp>
+      <p:sp>
+        <p:nvSpPr>
+          <p:cNvPr id="4" name="Slide Number Placeholder 3"/>
+          <p:cNvSpPr>
+            <a:spLocks noGrp="1"/>
+          </p:cNvSpPr>
+          <p:nvPr>
+            <p:ph type="sldNum" idx="5" sz="quarter"/>
+          </p:nvPr>
+        </p:nvSpPr>
+        <p:spPr/>
+      </p:sp>
+    </p:spTree>
+  </p:cSld>
+  <p:clrMapOvr>
+    <a:masterClrMapping/>
+  </p:clrMapOvr>
+</p:notes>
+</file>
+
+<file path=ppt/notesSlides/notesSlide33.xml><?xml version="1.0" encoding="utf-8"?>
+<p:notes xmlns:a="http://schemas.openxmlformats.org/drawingml/2006/main" xmlns:p="http://schemas.openxmlformats.org/presentationml/2006/main" xmlns:r="http://schemas.openxmlformats.org/officeDocument/2006/relationships">
+  <p:cSld>
+    <p:spTree>
+      <p:nvGrpSpPr>
+        <p:cNvPr id="1" name=""/>
+        <p:cNvGrpSpPr/>
+        <p:nvPr/>
+      </p:nvGrpSpPr>
+      <p:grpSpPr>
+        <a:xfrm>
+          <a:off x="0" y="0"/>
+          <a:ext cx="0" cy="0"/>
+          <a:chOff x="0" y="0"/>
+          <a:chExt cx="0" cy="0"/>
+        </a:xfrm>
+      </p:grpSpPr>
+      <p:sp>
+        <p:nvSpPr>
+          <p:cNvPr id="2" name="Slide Image Placeholder 1"/>
+          <p:cNvSpPr>
+            <a:spLocks noGrp="1"/>
+          </p:cNvSpPr>
+          <p:nvPr>
+            <p:ph type="sldImg" idx="2"/>
+          </p:nvPr>
+        </p:nvSpPr>
+        <p:spPr/>
+      </p:sp>
+      <p:sp>
+        <p:nvSpPr>
+          <p:cNvPr id="3" name="Notes Placeholder 2"/>
+          <p:cNvSpPr>
+            <a:spLocks noGrp="1"/>
+          </p:cNvSpPr>
+          <p:nvPr>
+            <p:ph type="body" idx="3" sz="quarter"/>
+          </p:nvPr>
+        </p:nvSpPr>
+        <p:spPr/>
+        <p:txBody>
+          <a:bodyPr/>
+          <a:lstStyle/>
+          <a:p>
+            <a:r>
+              <a:t>The companion technical note on a personal AI assistant showed how an AI agent designed under the darshan's criteria can help an individual in transition (anubhav-gami) overcome delusion by serving as a diagnostic mirror for priya-hita-labha impulses, an educational companion for coexistence study and multi-occupation skills, and a practical work log. Establishing and governing a cyclical economy requires extending that architecture to every unit in the ten-tier family-rooted self-governing order.</a:t>
+            </a:r>
+          </a:p>
+          <a:p/>
+          <a:p>
+            <a:r>
+              <a:t>At the family level (10–12 members; AA pp. 14, 26, 65), a Family AI Agent helps the household assess its common and special aspirations (AA p. 112), tracks actual use and stock age against hoarding or spoilage, coordinates restful family production without weighing individual labour shares (AA pp. 119–120), and publishes only aggregate need and surplus to the village. At Tiers 1 and 2, Cluster, Village Council, and five Committee Agents (production-work, exchange-reserve, education-sanskar, health-restraint, and justice-security) maintain the living village survey, link the five dimensions horizontally, and run the three-stage transition ledgers alongside the three-person exchange-reserve staff (AA pp. 125–145).</a:t>
+            </a:r>
+          </a:p>
+          <a:p/>
+          <a:p>
+            <a:r>
+              <a:t>Across Tiers 3 to 10, federated Council and Committee Agents match inter-village surpluses and deficits at labour value (AA p. 72), coordinate cottage, small, medium and large industry (AA p. 115), onboard newly transitioning villages, and monitor planetary regeneration boundaries (MVD p. 268). At every level, the human unit retains normative judgement.</a:t>
             </a:r>
           </a:p>
         </p:txBody>
@@ -6620,7 +6768,7 @@
                 </a:solidFill>
                 <a:latin typeface="Calibri"/>
               </a:rPr>
-              <a:t>AA · MVD · JV · SB · KD · JVD · AVD  ·  1 / 31</a:t>
+              <a:t>AA · MVD · JV · SB · KD · JVD · AVD  ·  1 / 33</a:t>
             </a:r>
           </a:p>
         </p:txBody>
@@ -7759,7 +7907,7 @@
                 </a:solidFill>
                 <a:latin typeface="Calibri"/>
               </a:rPr>
-              <a:t>KD p. 115  ·  SB p. 234  ·  Robbins 1932  ·  AnalyticMadhyasthDarshan.org  ·  10 / 31</a:t>
+              <a:t>KD p. 115  ·  SB p. 234  ·  Robbins 1932  ·  AnalyticMadhyasthDarshan.org  ·  10 / 33</a:t>
             </a:r>
           </a:p>
         </p:txBody>
@@ -8539,7 +8687,7 @@
                 </a:solidFill>
                 <a:latin typeface="Calibri"/>
               </a:rPr>
-              <a:t>Seeking more worth than the labour performed: a higher value in exchange for a lower one. It has no fixed limit.</a:t>
+              <a:t>Seeking more worth than the labour performed. Neither unrestrained nor state-regulated currency economies remove profit-obsession.</a:t>
             </a:r>
           </a:p>
         </p:txBody>
@@ -8624,7 +8772,7 @@
                 </a:solidFill>
                 <a:latin typeface="Cambria"/>
               </a:rPr>
-              <a:t>Artificial scarcity</a:t>
+              <a:t>Three allurements &amp; seven trades</a:t>
             </a:r>
           </a:p>
         </p:txBody>
@@ -8663,7 +8811,7 @@
                 </a:solidFill>
                 <a:latin typeface="Calibri"/>
               </a:rPr>
-              <a:t>Where currency is concentrated, objects are held back from the motion that makes them accessible to all.</a:t>
+              <a:t>Paper is easily carried, hidden and paid; objects, strength, learning, knowledge, position and beauty are all sold for currency.</a:t>
             </a:r>
           </a:p>
         </p:txBody>
@@ -8865,7 +9013,7 @@
                 </a:solidFill>
                 <a:latin typeface="Calibri"/>
               </a:rPr>
-              <a:t>AA pp. 5–7, 45, 52–53, 75  ·  MVD pp. 57, 66, 182  ·  JV pp. 151–152  ·  AnalyticMadhyasthDarshan.org  ·  11 / 31</a:t>
+              <a:t>AA pp. 1–8, 45–46, 52–53, 75  ·  MVD pp. 57, 66, 182  ·  JV pp. 151–152  ·  AnalyticMadhyasthDarshan.org  ·  11 / 33</a:t>
             </a:r>
           </a:p>
         </p:txBody>
@@ -9962,7 +10110,7 @@
                 </a:solidFill>
                 <a:latin typeface="Calibri"/>
               </a:rPr>
-              <a:t>AA pp. 30–31, 47, 70–71, 74, 82  ·  KD §3.7  ·  AnalyticMadhyasthDarshan.org  ·  12 / 31</a:t>
+              <a:t>AA pp. 30–31, 47, 70–71, 74, 82  ·  KD §3.7  ·  AnalyticMadhyasthDarshan.org  ·  12 / 33</a:t>
             </a:r>
           </a:p>
         </p:txBody>
@@ -10749,7 +10897,7 @@
                 </a:solidFill>
                 <a:latin typeface="Calibri"/>
               </a:rPr>
-              <a:t>AA pp. 25, 73, 105  ·  MVD pp. 56, 243  ·  SB p. 268  ·  JV p. 151  ·  JVD p. 215  ·  AnalyticMadhyasthDarshan.org  ·  13 / 31</a:t>
+              <a:t>AA pp. 18–19, 25, 48–50, 73, 105  ·  MVD pp. 56, 243  ·  SB p. 268  ·  JVD p. 215  ·  AnalyticMadhyasthDarshan.org  ·  13 / 33</a:t>
             </a:r>
           </a:p>
         </p:txBody>
@@ -11869,7 +12017,7 @@
                 </a:solidFill>
                 <a:latin typeface="Calibri"/>
               </a:rPr>
-              <a:t>AA pp. 15, 34–35, 42  ·  MVD p. 152  ·  AnalyticMadhyasthDarshan.org  ·  14 / 31</a:t>
+              <a:t>AA pp. 15, 34–35, 42  ·  MVD p. 152  ·  AnalyticMadhyasthDarshan.org  ·  14 / 33</a:t>
             </a:r>
           </a:p>
         </p:txBody>
@@ -13183,7 +13331,7 @@
                 </a:solidFill>
                 <a:latin typeface="Calibri"/>
               </a:rPr>
-              <a:t>AA pp. 26, 106, 118  ·  JV p. 154  ·  AnalyticMadhyasthDarshan.org  ·  15 / 31</a:t>
+              <a:t>AA pp. 26, 106, 118  ·  JV p. 154  ·  AnalyticMadhyasthDarshan.org  ·  15 / 33</a:t>
             </a:r>
           </a:p>
         </p:txBody>
@@ -13993,7 +14141,7 @@
                 </a:solidFill>
                 <a:latin typeface="Calibri"/>
               </a:rPr>
-              <a:t>AA pp. 14, 26, 62–63, 65, 76, 113–114  ·  MVD p. 71  ·  JV p. 153  ·  KD p. 115  ·  AnalyticMadhyasthDarshan.org  ·  16 / 31</a:t>
+              <a:t>AA pp. 14, 26, 62–63, 65, 76, 113–114  ·  MVD p. 71  ·  JV p. 153  ·  KD p. 115  ·  AnalyticMadhyasthDarshan.org  ·  16 / 33</a:t>
             </a:r>
           </a:p>
         </p:txBody>
@@ -14190,7 +14338,7 @@
                 </a:solidFill>
                 <a:latin typeface="Calibri"/>
               </a:rPr>
-              <a:t>III  ·  THE VALUE OF LABOUR  ·  §§3.5, 3.12</a:t>
+              <a:t>III  ·  THE VALUE OF LABOUR  ·  §§3.6, 3.12</a:t>
             </a:r>
           </a:p>
         </p:txBody>
@@ -15200,7 +15348,7 @@
                 </a:solidFill>
                 <a:latin typeface="Calibri"/>
               </a:rPr>
-              <a:t>AA pp. 49, 66, 112, 119–120, 145  ·  MVD pp. 265–268  ·  Axiology §§1.1, 1.5–1.6  ·  AnalyticMadhyasthDarshan.org  ·  17 / 31</a:t>
+              <a:t>AA pp. 49, 66, 112, 119–120, 145  ·  MVD pp. 265–268  ·  Axiology §§1.1, 1.5–1.6  ·  AnalyticMadhyasthDarshan.org  ·  18 / 33</a:t>
             </a:r>
           </a:p>
         </p:txBody>
@@ -15397,7 +15545,7 @@
                 </a:solidFill>
                 <a:latin typeface="Calibri"/>
               </a:rPr>
-              <a:t>III  ·  THREE LEVELS OF USE  ·  §3.6</a:t>
+              <a:t>III  ·  THREE LEVELS OF USE  ·  §3.5</a:t>
             </a:r>
           </a:p>
         </p:txBody>
@@ -17068,7 +17216,7 @@
                 </a:solidFill>
                 <a:latin typeface="Calibri"/>
               </a:rPr>
-              <a:t>AA pp. 68, 72, 92, 94, 116  ·  MVD p. 56  ·  KD pp. 4, 116  ·  AnalyticMadhyasthDarshan.org  ·  18 / 31</a:t>
+              <a:t>AA pp. 20–24, 68, 72, 92, 94, 116  ·  MVD p. 56  ·  KD pp. 4, 116  ·  AnalyticMadhyasthDarshan.org  ·  17 / 33</a:t>
             </a:r>
           </a:p>
         </p:txBody>
@@ -17265,7 +17413,7 @@
                 </a:solidFill>
                 <a:latin typeface="Calibri"/>
               </a:rPr>
-              <a:t>III  ·  CHARACTER  ·  §3.9</a:t>
+              <a:t>III  ·  CHARACTER  ·  §3.7</a:t>
             </a:r>
           </a:p>
         </p:txBody>
@@ -17513,7 +17661,7 @@
                 </a:solidFill>
                 <a:latin typeface="Cambria"/>
               </a:rPr>
-              <a:t>Wealth is not renounced</a:t>
+              <a:t>Three motives &amp; responsibility</a:t>
             </a:r>
           </a:p>
         </p:txBody>
@@ -17552,7 +17700,7 @@
                 </a:solidFill>
                 <a:latin typeface="Calibri"/>
               </a:rPr>
-              <a:t>The motives for progeny, wealth and reputation are humane; they become assets of the family and society.</a:t>
+              <a:t>Progeny, wealth and public welfare are humane motives, with public welfare highest; responsibility covers doing, commissioning and consenting.</a:t>
             </a:r>
           </a:p>
         </p:txBody>
@@ -17878,7 +18026,7 @@
                 </a:solidFill>
                 <a:latin typeface="Calibri"/>
               </a:rPr>
-              <a:t>AA pp. 1, 22–24, 54, 102, 140  ·  MVD pp. 59, 137, 211, 221, 263, 339  ·  AVD p. 170  ·  KD p. 116  ·  AnalyticMadhyasthDarshan.org  ·  19 / 31</a:t>
+              <a:t>AA pp. 1, 22–24, 54, 101–102, 140  ·  MVD pp. 59, 211, 263, 318–320, 339  ·  KD pp. 1–2, 116–117  ·  AnalyticMadhyasthDarshan.org  ·  19 / 33</a:t>
             </a:r>
           </a:p>
         </p:txBody>
@@ -18665,7 +18813,7 @@
                 </a:solidFill>
                 <a:latin typeface="Calibri"/>
               </a:rPr>
-              <a:t>Study, opening and §1  ·  AnalyticMadhyasthDarshan.org  ·  2 / 31</a:t>
+              <a:t>Study, opening and §1  ·  AnalyticMadhyasthDarshan.org  ·  2 / 33</a:t>
             </a:r>
           </a:p>
         </p:txBody>
@@ -18862,7 +19010,7 @@
                 </a:solidFill>
                 <a:latin typeface="Calibri"/>
               </a:rPr>
-              <a:t>III  ·  NATURE'S BALANCE  ·  §3.7</a:t>
+              <a:t>III  ·  NATURE'S BALANCE  ·  §3.8</a:t>
             </a:r>
           </a:p>
         </p:txBody>
@@ -19686,7 +19834,7 @@
                 </a:solidFill>
                 <a:latin typeface="Cambria"/>
               </a:rPr>
-              <a:t>Without a prosperous nature</a:t>
+              <a:t>Production vs. extraction</a:t>
             </a:r>
           </a:p>
         </p:txBody>
@@ -19725,7 +19873,7 @@
                 </a:solidFill>
                 <a:latin typeface="Calibri"/>
               </a:rPr>
-              <a:t>the human cannot be prosperous. Production security is maintained through nature's balance.</a:t>
+              <a:t>Production is cyclical and leaves earth's balance undisturbed; digging coal and oil is extraction, not production.</a:t>
             </a:r>
           </a:p>
         </p:txBody>
@@ -19764,7 +19912,7 @@
                 </a:solidFill>
                 <a:latin typeface="Calibri"/>
               </a:rPr>
-              <a:t>MVD pp. 263–264  ·  AA pp. 31–33, 92, 106–107, 114, 134–135, 142, 146  ·  KD p. 7  ·  AnalyticMadhyasthDarshan.org  ·  20 / 31</a:t>
+              <a:t>MVD pp. 263–264  ·  AA pp. 31–33, 78, 92, 106–107, 114, 142, 146  ·  KD p. 7  ·  AnalyticMadhyasthDarshan.org  ·  20 / 33</a:t>
             </a:r>
           </a:p>
         </p:txBody>
@@ -19961,7 +20109,7 @@
                 </a:solidFill>
                 <a:latin typeface="Calibri"/>
               </a:rPr>
-              <a:t>III  ·  TECHNIQUE  ·  §3.11</a:t>
+              <a:t>III  ·  SKILL AND TECHNIQUE  ·  §§3.9–3.10</a:t>
             </a:r>
           </a:p>
         </p:txBody>
@@ -20000,7 +20148,7 @@
                 </a:solidFill>
                 <a:latin typeface="Cambria"/>
               </a:rPr>
-              <a:t>Machines and Participation</a:t>
+              <a:t>Skills, Machines, and Participation</a:t>
             </a:r>
           </a:p>
         </p:txBody>
@@ -20085,7 +20233,7 @@
                 </a:solidFill>
                 <a:latin typeface="Cambria"/>
               </a:rPr>
-              <a:t>Technique multiplies speed</a:t>
+              <a:t>Open skills &amp; dissemination</a:t>
             </a:r>
           </a:p>
         </p:txBody>
@@ -20124,7 +20272,7 @@
                 </a:solidFill>
                 <a:latin typeface="Calibri"/>
               </a:rPr>
-              <a:t>Of whatever humans do: without social understanding, it multiplies problems too.</a:t>
+              <a:t>Research and dissemination are inseparable; multi-occupation skills are taught to all, never enclosed by patents.</a:t>
             </a:r>
           </a:p>
         </p:txBody>
@@ -20660,7 +20808,7 @@
                 </a:solidFill>
                 <a:latin typeface="Calibri"/>
               </a:rPr>
-              <a:t>SB p. 267  ·  AA pp. 47, 75–76, 107, 115, 118, 137  ·  JVD pp. 35, 216  ·  MVD p. 265  ·  AnalyticMadhyasthDarshan.org  ·  21 / 31</a:t>
+              <a:t>SB p. 267  ·  AA pp. 29, 47, 56–58, 107, 118, 131  ·  JV pp. 88–89  ·  JVD pp. 35, 216  ·  MVD p. 265  ·  21 / 33</a:t>
             </a:r>
           </a:p>
         </p:txBody>
@@ -20857,7 +21005,7 @@
                 </a:solidFill>
                 <a:latin typeface="Calibri"/>
               </a:rPr>
-              <a:t>III  ·  ORDERLINESS  ·  §§3.8, 3.12</a:t>
+              <a:t>III  ·  ORDERLINESS  ·  §§3.11–3.12</a:t>
             </a:r>
           </a:p>
         </p:txBody>
@@ -21525,7 +21673,7 @@
                 </a:solidFill>
                 <a:latin typeface="Calibri"/>
               </a:rPr>
-              <a:t>A village of about 100 families; ten tiers of councils, each with five committees. Small industry below, large industry at higher tiers.</a:t>
+              <a:t>A 100-family village with nine production branches; ten tiers of part-time councils (zero election cost); 80% in production, 20% in service.</a:t>
             </a:r>
           </a:p>
         </p:txBody>
@@ -21766,7 +21914,7 @@
                 </a:solidFill>
                 <a:latin typeface="Calibri"/>
               </a:rPr>
-              <a:t>AA pp. 27–30, 63, 110, 112, 115, 117  ·  MVD pp. 233, 264–271  ·  KD p. 67  ·  JVD p. 32  ·  AnalyticMadhyasthDarshan.org  ·  22 / 31</a:t>
+              <a:t>AA pp. 27–30, 63, 104–105, 110–117, 127, 133–136  ·  MVD pp. 233, 259, 264–271  ·  KD p. 67  ·  22 / 33</a:t>
             </a:r>
           </a:p>
         </p:txBody>
@@ -22741,7 +22889,7 @@
                 </a:solidFill>
                 <a:latin typeface="Calibri"/>
               </a:rPr>
-              <a:t>AA pp. 122–125, 136–138, 142–143  ·  JV pp. 153–154  ·  JVD pp. 217–218  ·  AVD p. 52  ·  AnalyticMadhyasthDarshan.org  ·  23 / 31</a:t>
+              <a:t>AA pp. 122–125, 136–138, 142–143  ·  JV pp. 153–154  ·  JVD pp. 217–218  ·  AVD p. 52  ·  AnalyticMadhyasthDarshan.org  ·  23 / 33</a:t>
             </a:r>
           </a:p>
         </p:txBody>
@@ -23511,7 +23659,7 @@
                 </a:solidFill>
                 <a:latin typeface="Calibri"/>
               </a:rPr>
-              <a:t>Neoclassical economics</a:t>
+              <a:t>Neoclassical &amp; marginalist</a:t>
             </a:r>
           </a:p>
         </p:txBody>
@@ -23550,7 +23698,7 @@
                 </a:solidFill>
                 <a:latin typeface="Calibri"/>
               </a:rPr>
-              <a:t>Taken as given: non-satiation and scarcity</a:t>
+              <a:t>Non-satiation; marginal utility (Jevons)</a:t>
             </a:r>
           </a:p>
         </p:txBody>
@@ -23794,7 +23942,7 @@
                 </a:solidFill>
                 <a:latin typeface="Calibri"/>
               </a:rPr>
-              <a:t>Use limits household acquisition</a:t>
+              <a:t>Use limits household; abolish capital</a:t>
             </a:r>
           </a:p>
         </p:txBody>
@@ -24565,7 +24713,7 @@
                 </a:solidFill>
                 <a:latin typeface="Calibri"/>
               </a:rPr>
-              <a:t>Study §§4–7  ·  Robbins 1932  ·  Keynes 1930  ·  Daly 1974  ·  Kumarappa 1945  ·  BG 3.37–39  ·  AnalyticMadhyasthDarshan.org  ·  24 / 31</a:t>
+              <a:t>Study §§4–7  ·  Jevons 1871  ·  Marx 1875  ·  Robbins 1932  ·  Polanyi 1944  ·  Daly 1974  ·  Kumarappa 1945  ·  24 / 33</a:t>
             </a:r>
           </a:p>
         </p:txBody>
@@ -25134,7 +25282,7 @@
                 </a:solidFill>
                 <a:latin typeface="Cambria"/>
               </a:rPr>
-              <a:t>Commons</a:t>
+              <a:t>Commons &amp; embeddedness</a:t>
             </a:r>
           </a:p>
         </p:txBody>
@@ -25173,7 +25321,7 @@
                 </a:solidFill>
                 <a:latin typeface="Calibri"/>
               </a:rPr>
-              <a:t>shared assets can be governed (Ostrom)</a:t>
+              <a:t>polycentric rules; non-commodities (Ostrom, Polanyi)</a:t>
             </a:r>
           </a:p>
         </p:txBody>
@@ -25258,7 +25406,7 @@
                 </a:solidFill>
                 <a:latin typeface="Cambria"/>
               </a:rPr>
-              <a:t>Needs theory</a:t>
+              <a:t>Needs &amp; capabilities</a:t>
             </a:r>
           </a:p>
         </p:txBody>
@@ -25297,7 +25445,7 @@
                 </a:solidFill>
                 <a:latin typeface="Calibri"/>
               </a:rPr>
-              <a:t>finite, classifiable needs (Max-Neef)</a:t>
+              <a:t>objective needs &amp; functionings (Max-Neef, Sen)</a:t>
             </a:r>
           </a:p>
         </p:txBody>
@@ -25382,7 +25530,7 @@
                 </a:solidFill>
                 <a:latin typeface="Cambria"/>
               </a:rPr>
-              <a:t>Money as credit</a:t>
+              <a:t>Credit &amp; mutual clearing</a:t>
             </a:r>
           </a:p>
         </p:txBody>
@@ -25421,7 +25569,7 @@
                 </a:solidFill>
                 <a:latin typeface="Calibri"/>
               </a:rPr>
-              <a:t>banks create money by lending</a:t>
+              <a:t>bank credit vs. interest-free WIR clearing (Stodder)</a:t>
             </a:r>
           </a:p>
         </p:txBody>
@@ -25506,7 +25654,7 @@
                 </a:solidFill>
                 <a:latin typeface="Cambria"/>
               </a:rPr>
-              <a:t>Labour accounting</a:t>
+              <a:t>Labour &amp; rent accounting</a:t>
             </a:r>
           </a:p>
         </p:txBody>
@@ -25545,7 +25693,7 @@
                 </a:solidFill>
                 <a:latin typeface="Calibri"/>
               </a:rPr>
-              <a:t>embodied labour can be computed</a:t>
+              <a:t>input–output, depreciation &amp; differential rent (Ricardo)</a:t>
             </a:r>
           </a:p>
         </p:txBody>
@@ -25754,7 +25902,7 @@
                 </a:solidFill>
                 <a:latin typeface="Calibri"/>
               </a:rPr>
-              <a:t>Hayek 1945  ·  Leontief 1936  ·  Ostrom 2010  ·  Max-Neef et al. 1989  ·  BoE 2014  ·  Cockshott and Cottrell 1993  ·  AnalyticMadhyasthDarshan.org  ·  25 / 31</a:t>
+              <a:t>Ricardo 1817  ·  Leontief 1936  ·  Polanyi 1944  ·  Hayek 1945  ·  Sen 1999  ·  Stodder 2009  ·  Ostrom 2010  ·  25 / 33</a:t>
             </a:r>
           </a:p>
         </p:txBody>
@@ -26416,7 +26564,7 @@
                 </a:solidFill>
                 <a:latin typeface="Calibri"/>
               </a:rPr>
-              <a:t>MVD p. 173  ·  AA pp. 18, 117, 122–125, 132, 138  ·  KD p. 139  ·  SB p. 267  ·  AnalyticMadhyasthDarshan.org  ·  26 / 31</a:t>
+              <a:t>MVD p. 173  ·  AA pp. 18, 117  ·  KD p. 139  ·  SB p. 267  ·  AI Study §§1.2–1.5  ·  AnalyticMadhyasthDarshan.org  ·  26 / 33</a:t>
             </a:r>
           </a:p>
         </p:txBody>
@@ -26613,7 +26761,7 @@
                 </a:solidFill>
                 <a:latin typeface="Calibri"/>
               </a:rPr>
-              <a:t>V  ·  FAILURE POINTS  ·  §8.2</a:t>
+              <a:t>V  ·  FAILURE POINTS  ·  §8.4</a:t>
             </a:r>
           </a:p>
         </p:txBody>
@@ -28074,7 +28222,7 @@
                 </a:solidFill>
                 <a:latin typeface="Calibri"/>
               </a:rPr>
-              <a:t>Study §8.2  ·  AA pp. 26, 49, 106, 119, 127, 142–146  ·  MVD pp. 263–268  ·  AnalyticMadhyasthDarshan.org  ·  27 / 31</a:t>
+              <a:t>Study §8.4  ·  AA pp. 26, 49, 106, 119, 127, 142–146  ·  MVD pp. 263–268  ·  AnalyticMadhyasthDarshan.org  ·  29 / 33</a:t>
             </a:r>
           </a:p>
         </p:txBody>
@@ -28271,7 +28419,7 @@
                 </a:solidFill>
                 <a:latin typeface="Calibri"/>
               </a:rPr>
-              <a:t>V  ·  VALUING LABOUR  ·  §8.3</a:t>
+              <a:t>V  ·  VALUING LABOUR  ·  §8.5</a:t>
             </a:r>
           </a:p>
         </p:txBody>
@@ -28310,7 +28458,7 @@
                 </a:solidFill>
                 <a:latin typeface="Cambria"/>
               </a:rPr>
-              <a:t>AI to Give Labour Its Value</a:t>
+              <a:t>AI Agents to Give Labour Its Value</a:t>
             </a:r>
           </a:p>
         </p:txBody>
@@ -28691,7 +28839,7 @@
                 </a:solidFill>
                 <a:latin typeface="Calibri"/>
               </a:rPr>
-              <a:t>input–output tracing</a:t>
+              <a:t>I–O, depreciation, rent</a:t>
             </a:r>
           </a:p>
         </p:txBody>
@@ -29141,7 +29289,7 @@
                 </a:solidFill>
                 <a:latin typeface="Cambria"/>
               </a:rPr>
-              <a:t>What the instrument carries</a:t>
+              <a:t>What the agent network computes</a:t>
             </a:r>
           </a:p>
         </p:txBody>
@@ -29180,7 +29328,7 @@
                 </a:solidFill>
                 <a:latin typeface="Calibri"/>
               </a:rPr>
-              <a:t>Records, computation, and the figures the second and third stages of the transition need; matching skills to the work a village needs.</a:t>
+              <a:t>Multi-village midpoint values, Leontief input–output chains, tool depreciation without interest, Ricardian soil adjustments, and 3-stage dual ledgers.</a:t>
             </a:r>
           </a:p>
         </p:txBody>
@@ -29382,7 +29530,7 @@
                 </a:solidFill>
                 <a:latin typeface="Calibri"/>
               </a:rPr>
-              <a:t>Study §§4.10, 8.3  ·  AA pp. 66–67, 119–120, 131, 142–145  ·  Leontief 1936  ·  AnalyticMadhyasthDarshan.org  ·  28 / 31</a:t>
+              <a:t>Study §§4.2, 4.10, 8.5  ·  AA pp. 66–67, 118–120, 131, 142–145  ·  Ricardo 1817  ·  Leontief 1936  ·  30 / 33</a:t>
             </a:r>
           </a:p>
         </p:txBody>
@@ -29579,7 +29727,7 @@
                 </a:solidFill>
                 <a:latin typeface="Calibri"/>
               </a:rPr>
-              <a:t>V  ·  BALANCE AND PARTICIPATION  ·  §§8.4–8.6</a:t>
+              <a:t>V  ·  BALANCE AND SAFEGUARDS  ·  §§8.6–8.8</a:t>
             </a:r>
           </a:p>
         </p:txBody>
@@ -29618,7 +29766,7 @@
                 </a:solidFill>
                 <a:latin typeface="Cambria"/>
               </a:rPr>
-              <a:t>AI to Keep the Cycle in Balance</a:t>
+              <a:t>Keeping the Cycle Balanced and Governed</a:t>
             </a:r>
           </a:p>
         </p:txBody>
@@ -29788,7 +29936,7 @@
                 </a:solidFill>
                 <a:latin typeface="Cambria"/>
               </a:rPr>
-              <a:t>Keep it visible</a:t>
+              <a:t>Accelerate transition</a:t>
             </a:r>
           </a:p>
         </p:txBody>
@@ -29827,7 +29975,7 @@
                 </a:solidFill>
                 <a:latin typeface="Calibri"/>
               </a:rPr>
-              <a:t>A living village survey; stock and its age; extraction against regeneration; how many families the land supports.</a:t>
+              <a:t>Living surveys, inter-tier surplus routing at labour value, and pre-configured agents that onboard new villages into the 3 stages.</a:t>
             </a:r>
           </a:p>
         </p:txBody>
@@ -29912,7 +30060,7 @@
                 </a:solidFill>
                 <a:latin typeface="Cambria"/>
               </a:rPr>
-              <a:t>Keep everyone producing</a:t>
+              <a:t>Participation &amp; commons</a:t>
             </a:r>
           </a:p>
         </p:txBody>
@@ -29951,7 +30099,7 @@
                 </a:solidFill>
                 <a:latin typeface="Calibri"/>
               </a:rPr>
-              <a:t>Reduce drudgery and time; never displace producers or concentrate the means.</a:t>
+              <a:t>Reduce drudgery without displacing producers; keep all models, weights and protocols open as shared generational means.</a:t>
             </a:r>
           </a:p>
         </p:txBody>
@@ -30036,7 +30184,7 @@
                 </a:solidFill>
                 <a:latin typeface="Cambria"/>
               </a:rPr>
-              <a:t>Keep knowledge common</a:t>
+              <a:t>Subsidiarity &amp; boundaries</a:t>
             </a:r>
           </a:p>
         </p:txBody>
@@ -30075,7 +30223,7 @@
                 </a:solidFill>
                 <a:latin typeface="Calibri"/>
               </a:rPr>
-              <a:t>Models and records shared as means handed down, never enclosed for profit.</a:t>
+              <a:t>Data stays with person, family and village; never optimise for profit or rule; return justice, dharma and truth to people.</a:t>
             </a:r>
           </a:p>
         </p:txBody>
@@ -30284,7 +30432,7 @@
                 </a:solidFill>
                 <a:latin typeface="Calibri"/>
               </a:rPr>
-              <a:t>Study §§8.4–8.7  ·  AA pp. 29, 56–58, 72, 92, 107, 118, 132  ·  MVD pp. 265, 268  ·  JVD p. 35  ·  AnalyticMadhyasthDarshan.org  ·  29 / 31</a:t>
+              <a:t>Study §§8.6–8.8  ·  AA pp. 29, 56–58, 72, 82, 92, 107, 118, 128, 132  ·  MVD pp. 265, 268  ·  JVD p. 35  ·  31 / 33</a:t>
             </a:r>
           </a:p>
         </p:txBody>
@@ -31028,7 +31176,7 @@
                 </a:solidFill>
                 <a:latin typeface="Cambria"/>
               </a:rPr>
-              <a:t>Instruments help</a:t>
+              <a:t>AI agents help</a:t>
             </a:r>
           </a:p>
           <a:p>
@@ -31044,7 +31192,7 @@
                 </a:solidFill>
                 <a:latin typeface="Calibri"/>
               </a:rPr>
-              <a:t>balance and value
+              <a:t>transition &amp; balance
 §8</a:t>
             </a:r>
           </a:p>
@@ -31665,7 +31813,7 @@
                 </a:solidFill>
                 <a:latin typeface="Calibri"/>
               </a:rPr>
-              <a:t>Study, opening and §§1–3, 8  ·  AnalyticMadhyasthDarshan.org  ·  3 / 31</a:t>
+              <a:t>Study, opening and §§1–3, 8  ·  AnalyticMadhyasthDarshan.org  ·  3 / 33</a:t>
             </a:r>
           </a:p>
         </p:txBody>
@@ -32235,7 +32383,7 @@
                 </a:solidFill>
                 <a:latin typeface="Calibri"/>
               </a:rPr>
-              <a:t>Closes need, use and regeneration together</a:t>
+              <a:t>Pairs family need-sharing with labour-value exchange</a:t>
             </a:r>
           </a:p>
         </p:txBody>
@@ -32652,7 +32800,7 @@
                 </a:solidFill>
                 <a:latin typeface="Calibri"/>
               </a:rPr>
-              <a:t>Labour values for complex goods</a:t>
+              <a:t>Embodied labour, depreciation &amp; Ricardian rent</a:t>
             </a:r>
           </a:p>
         </p:txBody>
@@ -32735,7 +32883,7 @@
                 </a:solidFill>
                 <a:latin typeface="Calibri"/>
               </a:rPr>
-              <a:t>Coordination without prices</a:t>
+              <a:t>10-tier coordination via AI agents without bureaucracy</a:t>
             </a:r>
           </a:p>
         </p:txBody>
@@ -32901,7 +33049,7 @@
                 </a:solidFill>
                 <a:latin typeface="Calibri"/>
               </a:rPr>
-              <a:t>Evidence from practising communities</a:t>
+              <a:t>Governing multi-level agents without ceding judgement</a:t>
             </a:r>
           </a:p>
         </p:txBody>
@@ -32979,7 +33127,7 @@
                 </a:solidFill>
                 <a:latin typeface="Calibri"/>
               </a:rPr>
-              <a:t>Study §§9.1, 9.7  ·  AnalyticMadhyasthDarshan.org  ·  30 / 31</a:t>
+              <a:t>Study §§9.1–9.7  ·  AnalyticMadhyasthDarshan.org  ·  32 / 33</a:t>
             </a:r>
           </a:p>
         </p:txBody>
@@ -33635,7 +33783,7 @@
                 </a:solidFill>
                 <a:latin typeface="Calibri"/>
               </a:rPr>
-              <a:t>Instruments can show quickly where understanding is missing; they cannot supply it.</a:t>
+              <a:t>Multi-level AI agents can accelerate the transition and make balance visible; understanding and judgement belong to people.</a:t>
             </a:r>
           </a:p>
         </p:txBody>
@@ -33713,7 +33861,2544 @@
                 </a:solidFill>
                 <a:latin typeface="Calibri"/>
               </a:rPr>
-              <a:t>AnalyticMadhyasthDarshan.org  ·  31 / 31</a:t>
+              <a:t>AnalyticMadhyasthDarshan.org  ·  33 / 33</a:t>
+            </a:r>
+          </a:p>
+        </p:txBody>
+      </p:sp>
+    </p:spTree>
+  </p:cSld>
+  <p:clrMapOvr>
+    <a:masterClrMapping/>
+  </p:clrMapOvr>
+</p:sld>
+</file>
+
+<file path=ppt/slides/slide32.xml><?xml version="1.0" encoding="utf-8"?>
+<p:sld xmlns:a="http://schemas.openxmlformats.org/drawingml/2006/main" xmlns:p="http://schemas.openxmlformats.org/presentationml/2006/main" xmlns:r="http://schemas.openxmlformats.org/officeDocument/2006/relationships">
+  <p:cSld>
+    <p:spTree>
+      <p:nvGrpSpPr>
+        <p:cNvPr id="1" name=""/>
+        <p:cNvGrpSpPr/>
+        <p:nvPr/>
+      </p:nvGrpSpPr>
+      <p:grpSpPr/>
+      <p:sp>
+        <p:nvSpPr>
+          <p:cNvPr id="2" name="Oval 1"/>
+          <p:cNvSpPr/>
+          <p:nvPr/>
+        </p:nvSpPr>
+        <p:spPr>
+          <a:xfrm>
+            <a:off x="457200" y="384048"/>
+            <a:ext cx="365760" cy="365760"/>
+          </a:xfrm>
+          <a:prstGeom prst="ellipse">
+            <a:avLst/>
+          </a:prstGeom>
+          <a:noFill/>
+          <a:ln w="12700">
+            <a:solidFill>
+              <a:srgbClr val="3B4A7A"/>
+            </a:solidFill>
+          </a:ln>
+          <a:effectLst/>
+        </p:spPr>
+        <p:style>
+          <a:lnRef idx="1">
+            <a:schemeClr val="accent1"/>
+          </a:lnRef>
+          <a:fillRef idx="3">
+            <a:schemeClr val="accent1"/>
+          </a:fillRef>
+          <a:effectRef idx="2">
+            <a:schemeClr val="accent1"/>
+          </a:effectRef>
+          <a:fontRef idx="minor">
+            <a:schemeClr val="lt1"/>
+          </a:fontRef>
+        </p:style>
+        <p:txBody>
+          <a:bodyPr rtlCol="0" anchor="ctr"/>
+          <a:lstStyle/>
+          <a:p>
+            <a:pPr algn="ctr"/>
+          </a:p>
+        </p:txBody>
+      </p:sp>
+      <p:sp>
+        <p:nvSpPr>
+          <p:cNvPr id="3" name="Oval 2"/>
+          <p:cNvSpPr/>
+          <p:nvPr/>
+        </p:nvSpPr>
+        <p:spPr>
+          <a:xfrm>
+            <a:off x="530352" y="457200"/>
+            <a:ext cx="219456" cy="219456"/>
+          </a:xfrm>
+          <a:prstGeom prst="ellipse">
+            <a:avLst/>
+          </a:prstGeom>
+          <a:noFill/>
+          <a:ln w="12700">
+            <a:solidFill>
+              <a:srgbClr val="3B4A7A"/>
+            </a:solidFill>
+          </a:ln>
+          <a:effectLst/>
+        </p:spPr>
+        <p:style>
+          <a:lnRef idx="1">
+            <a:schemeClr val="accent1"/>
+          </a:lnRef>
+          <a:fillRef idx="3">
+            <a:schemeClr val="accent1"/>
+          </a:fillRef>
+          <a:effectRef idx="2">
+            <a:schemeClr val="accent1"/>
+          </a:effectRef>
+          <a:fontRef idx="minor">
+            <a:schemeClr val="lt1"/>
+          </a:fontRef>
+        </p:style>
+        <p:txBody>
+          <a:bodyPr rtlCol="0" anchor="ctr"/>
+          <a:lstStyle/>
+          <a:p>
+            <a:pPr algn="ctr"/>
+          </a:p>
+        </p:txBody>
+      </p:sp>
+      <p:sp>
+        <p:nvSpPr>
+          <p:cNvPr id="4" name="Oval 3"/>
+          <p:cNvSpPr/>
+          <p:nvPr/>
+        </p:nvSpPr>
+        <p:spPr>
+          <a:xfrm>
+            <a:off x="594360" y="521207"/>
+            <a:ext cx="91440" cy="91440"/>
+          </a:xfrm>
+          <a:prstGeom prst="ellipse">
+            <a:avLst/>
+          </a:prstGeom>
+          <a:solidFill>
+            <a:srgbClr val="C9821E"/>
+          </a:solidFill>
+          <a:ln>
+            <a:noFill/>
+          </a:ln>
+          <a:effectLst/>
+        </p:spPr>
+        <p:style>
+          <a:lnRef idx="1">
+            <a:schemeClr val="accent1"/>
+          </a:lnRef>
+          <a:fillRef idx="3">
+            <a:schemeClr val="accent1"/>
+          </a:fillRef>
+          <a:effectRef idx="2">
+            <a:schemeClr val="accent1"/>
+          </a:effectRef>
+          <a:fontRef idx="minor">
+            <a:schemeClr val="lt1"/>
+          </a:fontRef>
+        </p:style>
+        <p:txBody>
+          <a:bodyPr rtlCol="0" anchor="ctr"/>
+          <a:lstStyle/>
+          <a:p>
+            <a:pPr algn="ctr"/>
+          </a:p>
+        </p:txBody>
+      </p:sp>
+      <p:sp>
+        <p:nvSpPr>
+          <p:cNvPr id="5" name="TextBox 4"/>
+          <p:cNvSpPr txBox="1"/>
+          <p:nvPr/>
+        </p:nvSpPr>
+        <p:spPr>
+          <a:xfrm>
+            <a:off x="960120" y="256032"/>
+            <a:ext cx="7680960" cy="237744"/>
+          </a:xfrm>
+          <a:prstGeom prst="rect">
+            <a:avLst/>
+          </a:prstGeom>
+          <a:noFill/>
+        </p:spPr>
+        <p:txBody>
+          <a:bodyPr wrap="square" lIns="0" rIns="0" tIns="0" bIns="0" anchor="ctr">
+            <a:spAutoFit/>
+          </a:bodyPr>
+          <a:lstStyle/>
+          <a:p>
+            <a:pPr>
+              <a:spcAft>
+                <a:spcPts val="0"/>
+              </a:spcAft>
+            </a:pPr>
+            <a:r>
+              <a:rPr sz="1050" b="1" i="0">
+                <a:solidFill>
+                  <a:srgbClr val="9A6414"/>
+                </a:solidFill>
+                <a:latin typeface="Calibri"/>
+              </a:rPr>
+              <a:t>V  ·  BEYOND DATABASES  ·  §8.2</a:t>
+            </a:r>
+          </a:p>
+        </p:txBody>
+      </p:sp>
+      <p:sp>
+        <p:nvSpPr>
+          <p:cNvPr id="6" name="TextBox 5"/>
+          <p:cNvSpPr txBox="1"/>
+          <p:nvPr/>
+        </p:nvSpPr>
+        <p:spPr>
+          <a:xfrm>
+            <a:off x="960120" y="457200"/>
+            <a:ext cx="7726679" cy="566928"/>
+          </a:xfrm>
+          <a:prstGeom prst="rect">
+            <a:avLst/>
+          </a:prstGeom>
+          <a:noFill/>
+        </p:spPr>
+        <p:txBody>
+          <a:bodyPr wrap="square" lIns="0" rIns="0" tIns="0" bIns="0" anchor="ctr">
+            <a:spAutoFit/>
+          </a:bodyPr>
+          <a:lstStyle/>
+          <a:p>
+            <a:pPr>
+              <a:spcAft>
+                <a:spcPts val="0"/>
+              </a:spcAft>
+            </a:pPr>
+            <a:r>
+              <a:rPr sz="3000" b="1" i="0">
+                <a:solidFill>
+                  <a:srgbClr val="1E2447"/>
+                </a:solidFill>
+                <a:latin typeface="Cambria"/>
+              </a:rPr>
+              <a:t>Why Databases Alone Are Not Enough</a:t>
+            </a:r>
+          </a:p>
+        </p:txBody>
+      </p:sp>
+      <p:sp>
+        <p:nvSpPr>
+          <p:cNvPr id="7" name="Rounded Rectangle 6"/>
+          <p:cNvSpPr/>
+          <p:nvPr/>
+        </p:nvSpPr>
+        <p:spPr>
+          <a:xfrm>
+            <a:off x="640080" y="1280160"/>
+            <a:ext cx="3840480" cy="1417320"/>
+          </a:xfrm>
+          <a:prstGeom prst="roundRect">
+            <a:avLst>
+              <a:gd name="adj" fmla="val 7000"/>
+            </a:avLst>
+          </a:prstGeom>
+          <a:solidFill>
+            <a:srgbClr val="EEF1F8"/>
+          </a:solidFill>
+          <a:ln>
+            <a:noFill/>
+          </a:ln>
+          <a:effectLst/>
+        </p:spPr>
+        <p:style>
+          <a:lnRef idx="1">
+            <a:schemeClr val="accent1"/>
+          </a:lnRef>
+          <a:fillRef idx="3">
+            <a:schemeClr val="accent1"/>
+          </a:fillRef>
+          <a:effectRef idx="2">
+            <a:schemeClr val="accent1"/>
+          </a:effectRef>
+          <a:fontRef idx="minor">
+            <a:schemeClr val="lt1"/>
+          </a:fontRef>
+        </p:style>
+        <p:txBody>
+          <a:bodyPr rtlCol="0" anchor="ctr"/>
+          <a:lstStyle/>
+          <a:p>
+            <a:pPr algn="ctr"/>
+          </a:p>
+        </p:txBody>
+      </p:sp>
+      <p:sp>
+        <p:nvSpPr>
+          <p:cNvPr id="8" name="TextBox 7"/>
+          <p:cNvSpPr txBox="1"/>
+          <p:nvPr/>
+        </p:nvSpPr>
+        <p:spPr>
+          <a:xfrm>
+            <a:off x="822959" y="1399031"/>
+            <a:ext cx="3474720" cy="274320"/>
+          </a:xfrm>
+          <a:prstGeom prst="rect">
+            <a:avLst/>
+          </a:prstGeom>
+          <a:noFill/>
+        </p:spPr>
+        <p:txBody>
+          <a:bodyPr wrap="square" lIns="0" rIns="0" tIns="0" bIns="0" anchor="ctr">
+            <a:spAutoFit/>
+          </a:bodyPr>
+          <a:lstStyle/>
+          <a:p>
+            <a:pPr>
+              <a:spcAft>
+                <a:spcPts val="0"/>
+              </a:spcAft>
+            </a:pPr>
+            <a:r>
+              <a:rPr sz="1300" b="1" i="0">
+                <a:solidFill>
+                  <a:srgbClr val="1E2447"/>
+                </a:solidFill>
+                <a:latin typeface="Cambria"/>
+              </a:rPr>
+              <a:t>Part-time governance constraint</a:t>
+            </a:r>
+          </a:p>
+        </p:txBody>
+      </p:sp>
+      <p:sp>
+        <p:nvSpPr>
+          <p:cNvPr id="9" name="TextBox 8"/>
+          <p:cNvSpPr txBox="1"/>
+          <p:nvPr/>
+        </p:nvSpPr>
+        <p:spPr>
+          <a:xfrm>
+            <a:off x="822959" y="1719072"/>
+            <a:ext cx="3474720" cy="868680"/>
+          </a:xfrm>
+          <a:prstGeom prst="rect">
+            <a:avLst/>
+          </a:prstGeom>
+          <a:noFill/>
+        </p:spPr>
+        <p:txBody>
+          <a:bodyPr wrap="square" lIns="0" rIns="0" tIns="0" bIns="0" anchor="t">
+            <a:spAutoFit/>
+          </a:bodyPr>
+          <a:lstStyle/>
+          <a:p>
+            <a:pPr>
+              <a:spcAft>
+                <a:spcPts val="0"/>
+              </a:spcAft>
+            </a:pPr>
+            <a:r>
+              <a:rPr sz="1150" b="0" i="0">
+                <a:solidFill>
+                  <a:srgbClr val="5A6377"/>
+                </a:solidFill>
+                <a:latin typeface="Calibri"/>
+              </a:rPr>
+              <a:t>Councils serve part-time while producing (AA p. 127) and the exchange-reserve has 3 staff (p. 138); manual databases would force a bureaucracy.</a:t>
+            </a:r>
+          </a:p>
+        </p:txBody>
+      </p:sp>
+      <p:sp>
+        <p:nvSpPr>
+          <p:cNvPr id="10" name="Rounded Rectangle 9"/>
+          <p:cNvSpPr/>
+          <p:nvPr/>
+        </p:nvSpPr>
+        <p:spPr>
+          <a:xfrm>
+            <a:off x="4663440" y="1280160"/>
+            <a:ext cx="3840480" cy="1417320"/>
+          </a:xfrm>
+          <a:prstGeom prst="roundRect">
+            <a:avLst>
+              <a:gd name="adj" fmla="val 7000"/>
+            </a:avLst>
+          </a:prstGeom>
+          <a:solidFill>
+            <a:srgbClr val="EEF1F8"/>
+          </a:solidFill>
+          <a:ln>
+            <a:noFill/>
+          </a:ln>
+          <a:effectLst/>
+        </p:spPr>
+        <p:style>
+          <a:lnRef idx="1">
+            <a:schemeClr val="accent1"/>
+          </a:lnRef>
+          <a:fillRef idx="3">
+            <a:schemeClr val="accent1"/>
+          </a:fillRef>
+          <a:effectRef idx="2">
+            <a:schemeClr val="accent1"/>
+          </a:effectRef>
+          <a:fontRef idx="minor">
+            <a:schemeClr val="lt1"/>
+          </a:fontRef>
+        </p:style>
+        <p:txBody>
+          <a:bodyPr rtlCol="0" anchor="ctr"/>
+          <a:lstStyle/>
+          <a:p>
+            <a:pPr algn="ctr"/>
+          </a:p>
+        </p:txBody>
+      </p:sp>
+      <p:sp>
+        <p:nvSpPr>
+          <p:cNvPr id="11" name="TextBox 10"/>
+          <p:cNvSpPr txBox="1"/>
+          <p:nvPr/>
+        </p:nvSpPr>
+        <p:spPr>
+          <a:xfrm>
+            <a:off x="4846320" y="1399031"/>
+            <a:ext cx="3474720" cy="274320"/>
+          </a:xfrm>
+          <a:prstGeom prst="rect">
+            <a:avLst/>
+          </a:prstGeom>
+          <a:noFill/>
+        </p:spPr>
+        <p:txBody>
+          <a:bodyPr wrap="square" lIns="0" rIns="0" tIns="0" bIns="0" anchor="ctr">
+            <a:spAutoFit/>
+          </a:bodyPr>
+          <a:lstStyle/>
+          <a:p>
+            <a:pPr>
+              <a:spcAft>
+                <a:spcPts val="0"/>
+              </a:spcAft>
+            </a:pPr>
+            <a:r>
+              <a:rPr sz="1300" b="1" i="0">
+                <a:solidFill>
+                  <a:srgbClr val="1E2447"/>
+                </a:solidFill>
+                <a:latin typeface="Cambria"/>
+              </a:rPr>
+              <a:t>Non-price calculation at scale</a:t>
+            </a:r>
+          </a:p>
+        </p:txBody>
+      </p:sp>
+      <p:sp>
+        <p:nvSpPr>
+          <p:cNvPr id="12" name="TextBox 11"/>
+          <p:cNvSpPr txBox="1"/>
+          <p:nvPr/>
+        </p:nvSpPr>
+        <p:spPr>
+          <a:xfrm>
+            <a:off x="4846320" y="1719072"/>
+            <a:ext cx="3474720" cy="868680"/>
+          </a:xfrm>
+          <a:prstGeom prst="rect">
+            <a:avLst/>
+          </a:prstGeom>
+          <a:noFill/>
+        </p:spPr>
+        <p:txBody>
+          <a:bodyPr wrap="square" lIns="0" rIns="0" tIns="0" bIns="0" anchor="t">
+            <a:spAutoFit/>
+          </a:bodyPr>
+          <a:lstStyle/>
+          <a:p>
+            <a:pPr>
+              <a:spcAft>
+                <a:spcPts val="0"/>
+              </a:spcAft>
+            </a:pPr>
+            <a:r>
+              <a:rPr sz="1150" b="0" i="0">
+                <a:solidFill>
+                  <a:srgbClr val="5A6377"/>
+                </a:solidFill>
+                <a:latin typeface="Calibri"/>
+              </a:rPr>
+              <a:t>Replacing prices across millions of inputs, tool depreciation and Ricardian soil differences needs active input–output and constraint solving.</a:t>
+            </a:r>
+          </a:p>
+        </p:txBody>
+      </p:sp>
+      <p:sp>
+        <p:nvSpPr>
+          <p:cNvPr id="13" name="Rounded Rectangle 12"/>
+          <p:cNvSpPr/>
+          <p:nvPr/>
+        </p:nvSpPr>
+        <p:spPr>
+          <a:xfrm>
+            <a:off x="640080" y="2880360"/>
+            <a:ext cx="3840480" cy="1280160"/>
+          </a:xfrm>
+          <a:prstGeom prst="roundRect">
+            <a:avLst>
+              <a:gd name="adj" fmla="val 7000"/>
+            </a:avLst>
+          </a:prstGeom>
+          <a:solidFill>
+            <a:srgbClr val="FAF1DF"/>
+          </a:solidFill>
+          <a:ln>
+            <a:noFill/>
+          </a:ln>
+          <a:effectLst/>
+        </p:spPr>
+        <p:style>
+          <a:lnRef idx="1">
+            <a:schemeClr val="accent1"/>
+          </a:lnRef>
+          <a:fillRef idx="3">
+            <a:schemeClr val="accent1"/>
+          </a:fillRef>
+          <a:effectRef idx="2">
+            <a:schemeClr val="accent1"/>
+          </a:effectRef>
+          <a:fontRef idx="minor">
+            <a:schemeClr val="lt1"/>
+          </a:fontRef>
+        </p:style>
+        <p:txBody>
+          <a:bodyPr rtlCol="0" anchor="ctr"/>
+          <a:lstStyle/>
+          <a:p>
+            <a:pPr algn="ctr"/>
+          </a:p>
+        </p:txBody>
+      </p:sp>
+      <p:sp>
+        <p:nvSpPr>
+          <p:cNvPr id="14" name="TextBox 13"/>
+          <p:cNvSpPr txBox="1"/>
+          <p:nvPr/>
+        </p:nvSpPr>
+        <p:spPr>
+          <a:xfrm>
+            <a:off x="822959" y="2999232"/>
+            <a:ext cx="3474720" cy="274320"/>
+          </a:xfrm>
+          <a:prstGeom prst="rect">
+            <a:avLst/>
+          </a:prstGeom>
+          <a:noFill/>
+        </p:spPr>
+        <p:txBody>
+          <a:bodyPr wrap="square" lIns="0" rIns="0" tIns="0" bIns="0" anchor="ctr">
+            <a:spAutoFit/>
+          </a:bodyPr>
+          <a:lstStyle/>
+          <a:p>
+            <a:pPr>
+              <a:spcAft>
+                <a:spcPts val="0"/>
+              </a:spcAft>
+            </a:pPr>
+            <a:r>
+              <a:rPr sz="1300" b="1" i="0">
+                <a:solidFill>
+                  <a:srgbClr val="9A6414"/>
+                </a:solidFill>
+                <a:latin typeface="Cambria"/>
+              </a:rPr>
+              <a:t>Qualitative to quantitative</a:t>
+            </a:r>
+          </a:p>
+        </p:txBody>
+      </p:sp>
+      <p:sp>
+        <p:nvSpPr>
+          <p:cNvPr id="15" name="TextBox 14"/>
+          <p:cNvSpPr txBox="1"/>
+          <p:nvPr/>
+        </p:nvSpPr>
+        <p:spPr>
+          <a:xfrm>
+            <a:off x="822959" y="3319271"/>
+            <a:ext cx="3474720" cy="731519"/>
+          </a:xfrm>
+          <a:prstGeom prst="rect">
+            <a:avLst/>
+          </a:prstGeom>
+          <a:noFill/>
+        </p:spPr>
+        <p:txBody>
+          <a:bodyPr wrap="square" lIns="0" rIns="0" tIns="0" bIns="0" anchor="t">
+            <a:spAutoFit/>
+          </a:bodyPr>
+          <a:lstStyle/>
+          <a:p>
+            <a:pPr>
+              <a:spcAft>
+                <a:spcPts val="0"/>
+              </a:spcAft>
+            </a:pPr>
+            <a:r>
+              <a:rPr sz="1150" b="0" i="0">
+                <a:solidFill>
+                  <a:srgbClr val="5A6377"/>
+                </a:solidFill>
+                <a:latin typeface="Calibri"/>
+              </a:rPr>
+              <a:t>Village surveys, family needs and skill plans combine numbers with local language; intelligent agents keep producers from becoming clerks.</a:t>
+            </a:r>
+          </a:p>
+        </p:txBody>
+      </p:sp>
+      <p:sp>
+        <p:nvSpPr>
+          <p:cNvPr id="16" name="Rounded Rectangle 15"/>
+          <p:cNvSpPr/>
+          <p:nvPr/>
+        </p:nvSpPr>
+        <p:spPr>
+          <a:xfrm>
+            <a:off x="4663440" y="2880360"/>
+            <a:ext cx="3840480" cy="1280160"/>
+          </a:xfrm>
+          <a:prstGeom prst="roundRect">
+            <a:avLst>
+              <a:gd name="adj" fmla="val 7000"/>
+            </a:avLst>
+          </a:prstGeom>
+          <a:solidFill>
+            <a:srgbClr val="FAF1DF"/>
+          </a:solidFill>
+          <a:ln>
+            <a:noFill/>
+          </a:ln>
+          <a:effectLst/>
+        </p:spPr>
+        <p:style>
+          <a:lnRef idx="1">
+            <a:schemeClr val="accent1"/>
+          </a:lnRef>
+          <a:fillRef idx="3">
+            <a:schemeClr val="accent1"/>
+          </a:fillRef>
+          <a:effectRef idx="2">
+            <a:schemeClr val="accent1"/>
+          </a:effectRef>
+          <a:fontRef idx="minor">
+            <a:schemeClr val="lt1"/>
+          </a:fontRef>
+        </p:style>
+        <p:txBody>
+          <a:bodyPr rtlCol="0" anchor="ctr"/>
+          <a:lstStyle/>
+          <a:p>
+            <a:pPr algn="ctr"/>
+          </a:p>
+        </p:txBody>
+      </p:sp>
+      <p:sp>
+        <p:nvSpPr>
+          <p:cNvPr id="17" name="TextBox 16"/>
+          <p:cNvSpPr txBox="1"/>
+          <p:nvPr/>
+        </p:nvSpPr>
+        <p:spPr>
+          <a:xfrm>
+            <a:off x="4846320" y="2999232"/>
+            <a:ext cx="3474720" cy="274320"/>
+          </a:xfrm>
+          <a:prstGeom prst="rect">
+            <a:avLst/>
+          </a:prstGeom>
+          <a:noFill/>
+        </p:spPr>
+        <p:txBody>
+          <a:bodyPr wrap="square" lIns="0" rIns="0" tIns="0" bIns="0" anchor="ctr">
+            <a:spAutoFit/>
+          </a:bodyPr>
+          <a:lstStyle/>
+          <a:p>
+            <a:pPr>
+              <a:spcAft>
+                <a:spcPts val="0"/>
+              </a:spcAft>
+            </a:pPr>
+            <a:r>
+              <a:rPr sz="1300" b="1" i="0">
+                <a:solidFill>
+                  <a:srgbClr val="9A6414"/>
+                </a:solidFill>
+                <a:latin typeface="Cambria"/>
+              </a:rPr>
+              <a:t>Transition before full awakening</a:t>
+            </a:r>
+          </a:p>
+        </p:txBody>
+      </p:sp>
+      <p:sp>
+        <p:nvSpPr>
+          <p:cNvPr id="18" name="TextBox 17"/>
+          <p:cNvSpPr txBox="1"/>
+          <p:nvPr/>
+        </p:nvSpPr>
+        <p:spPr>
+          <a:xfrm>
+            <a:off x="4846320" y="3319271"/>
+            <a:ext cx="3474720" cy="731519"/>
+          </a:xfrm>
+          <a:prstGeom prst="rect">
+            <a:avLst/>
+          </a:prstGeom>
+          <a:noFill/>
+        </p:spPr>
+        <p:txBody>
+          <a:bodyPr wrap="square" lIns="0" rIns="0" tIns="0" bIns="0" anchor="t">
+            <a:spAutoFit/>
+          </a:bodyPr>
+          <a:lstStyle/>
+          <a:p>
+            <a:pPr>
+              <a:spcAft>
+                <a:spcPts val="0"/>
+              </a:spcAft>
+            </a:pPr>
+            <a:r>
+              <a:rPr sz="1150" b="0" i="0">
+                <a:solidFill>
+                  <a:srgbClr val="5A6377"/>
+                </a:solidFill>
+                <a:latin typeface="Calibri"/>
+              </a:rPr>
+              <a:t>Anubhav-gami people and villages need real-time mirrors and dual currency/labour ledgers across the 3 stages (AA pp. 142–143).</a:t>
+            </a:r>
+          </a:p>
+        </p:txBody>
+      </p:sp>
+      <p:sp>
+        <p:nvSpPr>
+          <p:cNvPr id="19" name="TextBox 18"/>
+          <p:cNvSpPr txBox="1"/>
+          <p:nvPr/>
+        </p:nvSpPr>
+        <p:spPr>
+          <a:xfrm>
+            <a:off x="640080" y="4279392"/>
+            <a:ext cx="7863840" cy="329184"/>
+          </a:xfrm>
+          <a:prstGeom prst="rect">
+            <a:avLst/>
+          </a:prstGeom>
+          <a:noFill/>
+        </p:spPr>
+        <p:txBody>
+          <a:bodyPr wrap="square" lIns="0" rIns="0" tIns="0" bIns="0" anchor="ctr">
+            <a:spAutoFit/>
+          </a:bodyPr>
+          <a:lstStyle/>
+          <a:p>
+            <a:pPr>
+              <a:spcAft>
+                <a:spcPts val="0"/>
+              </a:spcAft>
+            </a:pPr>
+            <a:r>
+              <a:rPr sz="1150" b="0" i="1">
+                <a:solidFill>
+                  <a:srgbClr val="1E2447"/>
+                </a:solidFill>
+                <a:latin typeface="Calibri"/>
+              </a:rPr>
+              <a:t>Passive databases only store records after the fact; intelligent agents are needed as core transition infrastructure.</a:t>
+            </a:r>
+          </a:p>
+        </p:txBody>
+      </p:sp>
+      <p:sp>
+        <p:nvSpPr>
+          <p:cNvPr id="20" name="TextBox 19"/>
+          <p:cNvSpPr txBox="1"/>
+          <p:nvPr/>
+        </p:nvSpPr>
+        <p:spPr>
+          <a:xfrm>
+            <a:off x="502920" y="4828032"/>
+            <a:ext cx="8138160" cy="256032"/>
+          </a:xfrm>
+          <a:prstGeom prst="rect">
+            <a:avLst/>
+          </a:prstGeom>
+          <a:noFill/>
+        </p:spPr>
+        <p:txBody>
+          <a:bodyPr wrap="square" lIns="0" rIns="0" tIns="0" bIns="0" anchor="ctr">
+            <a:spAutoFit/>
+          </a:bodyPr>
+          <a:lstStyle/>
+          <a:p>
+            <a:pPr>
+              <a:spcAft>
+                <a:spcPts val="0"/>
+              </a:spcAft>
+            </a:pPr>
+            <a:r>
+              <a:rPr sz="950" b="0" i="1">
+                <a:solidFill>
+                  <a:srgbClr val="5A6377"/>
+                </a:solidFill>
+                <a:latin typeface="Calibri"/>
+              </a:rPr>
+              <a:t>Study §8.2  ·  AA pp. 72, 107, 122–127, 131–132, 136–138, 142–149  ·  MVD p. 259  ·  JVD p. 35  ·  27 / 33</a:t>
+            </a:r>
+          </a:p>
+        </p:txBody>
+      </p:sp>
+      <p:sp>
+        <p:nvSpPr>
+          <p:cNvPr id="7" name="Rounded Rectangle 6"/>
+          <p:cNvSpPr/>
+          <p:nvPr/>
+        </p:nvSpPr>
+        <p:spPr>
+          <a:xfrm>
+            <a:off x="7031736" y="1042415"/>
+            <a:ext cx="1463040" cy="182880"/>
+          </a:xfrm>
+          <a:prstGeom prst="roundRect">
+            <a:avLst>
+              <a:gd name="adj" fmla="val 7000"/>
+            </a:avLst>
+          </a:prstGeom>
+          <a:solidFill>
+            <a:srgbClr val="C9821E"/>
+          </a:solidFill>
+          <a:ln>
+            <a:noFill/>
+          </a:ln>
+          <a:effectLst/>
+        </p:spPr>
+        <p:style>
+          <a:lnRef idx="1">
+            <a:schemeClr val="accent1"/>
+          </a:lnRef>
+          <a:fillRef idx="3">
+            <a:schemeClr val="accent1"/>
+          </a:fillRef>
+          <a:effectRef idx="2">
+            <a:schemeClr val="accent1"/>
+          </a:effectRef>
+          <a:fontRef idx="minor">
+            <a:schemeClr val="lt1"/>
+          </a:fontRef>
+        </p:style>
+        <p:txBody>
+          <a:bodyPr rtlCol="0" anchor="ctr"/>
+          <a:lstStyle/>
+          <a:p>
+            <a:pPr algn="ctr"/>
+          </a:p>
+        </p:txBody>
+      </p:sp>
+      <p:sp>
+        <p:nvSpPr>
+          <p:cNvPr id="8" name="TextBox 7"/>
+          <p:cNvSpPr txBox="1"/>
+          <p:nvPr/>
+        </p:nvSpPr>
+        <p:spPr>
+          <a:xfrm>
+            <a:off x="7031736" y="1042415"/>
+            <a:ext cx="1463040" cy="182880"/>
+          </a:xfrm>
+          <a:prstGeom prst="rect">
+            <a:avLst/>
+          </a:prstGeom>
+          <a:noFill/>
+        </p:spPr>
+        <p:txBody>
+          <a:bodyPr wrap="square" lIns="0" rIns="0" tIns="0" bIns="0" anchor="ctr">
+            <a:spAutoFit/>
+          </a:bodyPr>
+          <a:lstStyle/>
+          <a:p>
+            <a:pPr algn="ctr">
+              <a:spcAft>
+                <a:spcPts val="0"/>
+              </a:spcAft>
+            </a:pPr>
+            <a:r>
+              <a:rPr sz="750" b="1" i="0">
+                <a:solidFill>
+                  <a:srgbClr val="FFFFFF"/>
+                </a:solidFill>
+                <a:latin typeface="Calibri"/>
+              </a:rPr>
+              <a:t>THIS STUDY'S PROPOSAL</a:t>
+            </a:r>
+          </a:p>
+        </p:txBody>
+      </p:sp>
+    </p:spTree>
+  </p:cSld>
+  <p:clrMapOvr>
+    <a:masterClrMapping/>
+  </p:clrMapOvr>
+</p:sld>
+</file>
+
+<file path=ppt/slides/slide33.xml><?xml version="1.0" encoding="utf-8"?>
+<p:sld xmlns:a="http://schemas.openxmlformats.org/drawingml/2006/main" xmlns:p="http://schemas.openxmlformats.org/presentationml/2006/main" xmlns:r="http://schemas.openxmlformats.org/officeDocument/2006/relationships">
+  <p:cSld>
+    <p:spTree>
+      <p:nvGrpSpPr>
+        <p:cNvPr id="1" name=""/>
+        <p:cNvGrpSpPr/>
+        <p:nvPr/>
+      </p:nvGrpSpPr>
+      <p:grpSpPr/>
+      <p:sp>
+        <p:nvSpPr>
+          <p:cNvPr id="2" name="Oval 1"/>
+          <p:cNvSpPr/>
+          <p:nvPr/>
+        </p:nvSpPr>
+        <p:spPr>
+          <a:xfrm>
+            <a:off x="457200" y="384048"/>
+            <a:ext cx="365760" cy="365760"/>
+          </a:xfrm>
+          <a:prstGeom prst="ellipse">
+            <a:avLst/>
+          </a:prstGeom>
+          <a:noFill/>
+          <a:ln w="12700">
+            <a:solidFill>
+              <a:srgbClr val="3B4A7A"/>
+            </a:solidFill>
+          </a:ln>
+          <a:effectLst/>
+        </p:spPr>
+        <p:style>
+          <a:lnRef idx="1">
+            <a:schemeClr val="accent1"/>
+          </a:lnRef>
+          <a:fillRef idx="3">
+            <a:schemeClr val="accent1"/>
+          </a:fillRef>
+          <a:effectRef idx="2">
+            <a:schemeClr val="accent1"/>
+          </a:effectRef>
+          <a:fontRef idx="minor">
+            <a:schemeClr val="lt1"/>
+          </a:fontRef>
+        </p:style>
+        <p:txBody>
+          <a:bodyPr rtlCol="0" anchor="ctr"/>
+          <a:lstStyle/>
+          <a:p>
+            <a:pPr algn="ctr"/>
+          </a:p>
+        </p:txBody>
+      </p:sp>
+      <p:sp>
+        <p:nvSpPr>
+          <p:cNvPr id="3" name="Oval 2"/>
+          <p:cNvSpPr/>
+          <p:nvPr/>
+        </p:nvSpPr>
+        <p:spPr>
+          <a:xfrm>
+            <a:off x="530352" y="457200"/>
+            <a:ext cx="219456" cy="219456"/>
+          </a:xfrm>
+          <a:prstGeom prst="ellipse">
+            <a:avLst/>
+          </a:prstGeom>
+          <a:noFill/>
+          <a:ln w="12700">
+            <a:solidFill>
+              <a:srgbClr val="3B4A7A"/>
+            </a:solidFill>
+          </a:ln>
+          <a:effectLst/>
+        </p:spPr>
+        <p:style>
+          <a:lnRef idx="1">
+            <a:schemeClr val="accent1"/>
+          </a:lnRef>
+          <a:fillRef idx="3">
+            <a:schemeClr val="accent1"/>
+          </a:fillRef>
+          <a:effectRef idx="2">
+            <a:schemeClr val="accent1"/>
+          </a:effectRef>
+          <a:fontRef idx="minor">
+            <a:schemeClr val="lt1"/>
+          </a:fontRef>
+        </p:style>
+        <p:txBody>
+          <a:bodyPr rtlCol="0" anchor="ctr"/>
+          <a:lstStyle/>
+          <a:p>
+            <a:pPr algn="ctr"/>
+          </a:p>
+        </p:txBody>
+      </p:sp>
+      <p:sp>
+        <p:nvSpPr>
+          <p:cNvPr id="4" name="Oval 3"/>
+          <p:cNvSpPr/>
+          <p:nvPr/>
+        </p:nvSpPr>
+        <p:spPr>
+          <a:xfrm>
+            <a:off x="594360" y="521207"/>
+            <a:ext cx="91440" cy="91440"/>
+          </a:xfrm>
+          <a:prstGeom prst="ellipse">
+            <a:avLst/>
+          </a:prstGeom>
+          <a:solidFill>
+            <a:srgbClr val="C9821E"/>
+          </a:solidFill>
+          <a:ln>
+            <a:noFill/>
+          </a:ln>
+          <a:effectLst/>
+        </p:spPr>
+        <p:style>
+          <a:lnRef idx="1">
+            <a:schemeClr val="accent1"/>
+          </a:lnRef>
+          <a:fillRef idx="3">
+            <a:schemeClr val="accent1"/>
+          </a:fillRef>
+          <a:effectRef idx="2">
+            <a:schemeClr val="accent1"/>
+          </a:effectRef>
+          <a:fontRef idx="minor">
+            <a:schemeClr val="lt1"/>
+          </a:fontRef>
+        </p:style>
+        <p:txBody>
+          <a:bodyPr rtlCol="0" anchor="ctr"/>
+          <a:lstStyle/>
+          <a:p>
+            <a:pPr algn="ctr"/>
+          </a:p>
+        </p:txBody>
+      </p:sp>
+      <p:sp>
+        <p:nvSpPr>
+          <p:cNvPr id="5" name="TextBox 4"/>
+          <p:cNvSpPr txBox="1"/>
+          <p:nvPr/>
+        </p:nvSpPr>
+        <p:spPr>
+          <a:xfrm>
+            <a:off x="960120" y="256032"/>
+            <a:ext cx="7680960" cy="237744"/>
+          </a:xfrm>
+          <a:prstGeom prst="rect">
+            <a:avLst/>
+          </a:prstGeom>
+          <a:noFill/>
+        </p:spPr>
+        <p:txBody>
+          <a:bodyPr wrap="square" lIns="0" rIns="0" tIns="0" bIns="0" anchor="ctr">
+            <a:spAutoFit/>
+          </a:bodyPr>
+          <a:lstStyle/>
+          <a:p>
+            <a:pPr>
+              <a:spcAft>
+                <a:spcPts val="0"/>
+              </a:spcAft>
+            </a:pPr>
+            <a:r>
+              <a:rPr sz="1050" b="1" i="0">
+                <a:solidFill>
+                  <a:srgbClr val="9A6414"/>
+                </a:solidFill>
+                <a:latin typeface="Calibri"/>
+              </a:rPr>
+              <a:t>V  ·  MULTI-LEVEL AGENTS  ·  §8.3</a:t>
+            </a:r>
+          </a:p>
+        </p:txBody>
+      </p:sp>
+      <p:sp>
+        <p:nvSpPr>
+          <p:cNvPr id="6" name="TextBox 5"/>
+          <p:cNvSpPr txBox="1"/>
+          <p:nvPr/>
+        </p:nvSpPr>
+        <p:spPr>
+          <a:xfrm>
+            <a:off x="960120" y="457200"/>
+            <a:ext cx="7726679" cy="566928"/>
+          </a:xfrm>
+          <a:prstGeom prst="rect">
+            <a:avLst/>
+          </a:prstGeom>
+          <a:noFill/>
+        </p:spPr>
+        <p:txBody>
+          <a:bodyPr wrap="square" lIns="0" rIns="0" tIns="0" bIns="0" anchor="ctr">
+            <a:spAutoFit/>
+          </a:bodyPr>
+          <a:lstStyle/>
+          <a:p>
+            <a:pPr>
+              <a:spcAft>
+                <a:spcPts val="0"/>
+              </a:spcAft>
+            </a:pPr>
+            <a:r>
+              <a:rPr sz="3000" b="1" i="0">
+                <a:solidFill>
+                  <a:srgbClr val="1E2447"/>
+                </a:solidFill>
+                <a:latin typeface="Cambria"/>
+              </a:rPr>
+              <a:t>AI Agents Across the Ten-Tier Order</a:t>
+            </a:r>
+          </a:p>
+        </p:txBody>
+      </p:sp>
+      <p:sp>
+        <p:nvSpPr>
+          <p:cNvPr id="7" name="Rounded Rectangle 6"/>
+          <p:cNvSpPr/>
+          <p:nvPr/>
+        </p:nvSpPr>
+        <p:spPr>
+          <a:xfrm>
+            <a:off x="7031736" y="1042415"/>
+            <a:ext cx="1463040" cy="182880"/>
+          </a:xfrm>
+          <a:prstGeom prst="roundRect">
+            <a:avLst>
+              <a:gd name="adj" fmla="val 7000"/>
+            </a:avLst>
+          </a:prstGeom>
+          <a:solidFill>
+            <a:srgbClr val="C9821E"/>
+          </a:solidFill>
+          <a:ln>
+            <a:noFill/>
+          </a:ln>
+          <a:effectLst/>
+        </p:spPr>
+        <p:style>
+          <a:lnRef idx="1">
+            <a:schemeClr val="accent1"/>
+          </a:lnRef>
+          <a:fillRef idx="3">
+            <a:schemeClr val="accent1"/>
+          </a:fillRef>
+          <a:effectRef idx="2">
+            <a:schemeClr val="accent1"/>
+          </a:effectRef>
+          <a:fontRef idx="minor">
+            <a:schemeClr val="lt1"/>
+          </a:fontRef>
+        </p:style>
+        <p:txBody>
+          <a:bodyPr rtlCol="0" anchor="ctr"/>
+          <a:lstStyle/>
+          <a:p>
+            <a:pPr algn="ctr"/>
+          </a:p>
+        </p:txBody>
+      </p:sp>
+      <p:sp>
+        <p:nvSpPr>
+          <p:cNvPr id="8" name="TextBox 7"/>
+          <p:cNvSpPr txBox="1"/>
+          <p:nvPr/>
+        </p:nvSpPr>
+        <p:spPr>
+          <a:xfrm>
+            <a:off x="7031736" y="1042415"/>
+            <a:ext cx="1463040" cy="182880"/>
+          </a:xfrm>
+          <a:prstGeom prst="rect">
+            <a:avLst/>
+          </a:prstGeom>
+          <a:noFill/>
+        </p:spPr>
+        <p:txBody>
+          <a:bodyPr wrap="square" lIns="0" rIns="0" tIns="0" bIns="0" anchor="ctr">
+            <a:spAutoFit/>
+          </a:bodyPr>
+          <a:lstStyle/>
+          <a:p>
+            <a:pPr algn="ctr">
+              <a:spcAft>
+                <a:spcPts val="0"/>
+              </a:spcAft>
+            </a:pPr>
+            <a:r>
+              <a:rPr sz="750" b="1" i="0">
+                <a:solidFill>
+                  <a:srgbClr val="FFFFFF"/>
+                </a:solidFill>
+                <a:latin typeface="Calibri"/>
+              </a:rPr>
+              <a:t>THIS STUDY'S PROPOSAL</a:t>
+            </a:r>
+          </a:p>
+        </p:txBody>
+      </p:sp>
+      <p:sp>
+        <p:nvSpPr>
+          <p:cNvPr id="9" name="Rectangle 8"/>
+          <p:cNvSpPr/>
+          <p:nvPr/>
+        </p:nvSpPr>
+        <p:spPr>
+          <a:xfrm>
+            <a:off x="640080" y="1280160"/>
+            <a:ext cx="7863840" cy="292608"/>
+          </a:xfrm>
+          <a:prstGeom prst="rect">
+            <a:avLst/>
+          </a:prstGeom>
+          <a:solidFill>
+            <a:srgbClr val="1E2447"/>
+          </a:solidFill>
+          <a:ln>
+            <a:noFill/>
+          </a:ln>
+          <a:effectLst/>
+        </p:spPr>
+        <p:style>
+          <a:lnRef idx="1">
+            <a:schemeClr val="accent1"/>
+          </a:lnRef>
+          <a:fillRef idx="3">
+            <a:schemeClr val="accent1"/>
+          </a:fillRef>
+          <a:effectRef idx="2">
+            <a:schemeClr val="accent1"/>
+          </a:effectRef>
+          <a:fontRef idx="minor">
+            <a:schemeClr val="lt1"/>
+          </a:fontRef>
+        </p:style>
+        <p:txBody>
+          <a:bodyPr rtlCol="0" anchor="ctr"/>
+          <a:lstStyle/>
+          <a:p>
+            <a:pPr algn="ctr"/>
+          </a:p>
+        </p:txBody>
+      </p:sp>
+      <p:sp>
+        <p:nvSpPr>
+          <p:cNvPr id="10" name="TextBox 9"/>
+          <p:cNvSpPr txBox="1"/>
+          <p:nvPr/>
+        </p:nvSpPr>
+        <p:spPr>
+          <a:xfrm>
+            <a:off x="731519" y="1280160"/>
+            <a:ext cx="2103120" cy="292608"/>
+          </a:xfrm>
+          <a:prstGeom prst="rect">
+            <a:avLst/>
+          </a:prstGeom>
+          <a:noFill/>
+        </p:spPr>
+        <p:txBody>
+          <a:bodyPr wrap="square" lIns="0" rIns="0" tIns="0" bIns="0" anchor="ctr">
+            <a:spAutoFit/>
+          </a:bodyPr>
+          <a:lstStyle/>
+          <a:p>
+            <a:pPr>
+              <a:spcAft>
+                <a:spcPts val="0"/>
+              </a:spcAft>
+            </a:pPr>
+            <a:r>
+              <a:rPr sz="1050" b="1" i="0">
+                <a:solidFill>
+                  <a:srgbClr val="FFFFFF"/>
+                </a:solidFill>
+                <a:latin typeface="Calibri"/>
+              </a:rPr>
+              <a:t>Human unit</a:t>
+            </a:r>
+          </a:p>
+        </p:txBody>
+      </p:sp>
+      <p:sp>
+        <p:nvSpPr>
+          <p:cNvPr id="11" name="TextBox 10"/>
+          <p:cNvSpPr txBox="1"/>
+          <p:nvPr/>
+        </p:nvSpPr>
+        <p:spPr>
+          <a:xfrm>
+            <a:off x="2971800" y="1280160"/>
+            <a:ext cx="2651760" cy="292608"/>
+          </a:xfrm>
+          <a:prstGeom prst="rect">
+            <a:avLst/>
+          </a:prstGeom>
+          <a:noFill/>
+        </p:spPr>
+        <p:txBody>
+          <a:bodyPr wrap="square" lIns="0" rIns="0" tIns="0" bIns="0" anchor="ctr">
+            <a:spAutoFit/>
+          </a:bodyPr>
+          <a:lstStyle/>
+          <a:p>
+            <a:pPr>
+              <a:spcAft>
+                <a:spcPts val="0"/>
+              </a:spcAft>
+            </a:pPr>
+            <a:r>
+              <a:rPr sz="1050" b="1" i="0">
+                <a:solidFill>
+                  <a:srgbClr val="FFFFFF"/>
+                </a:solidFill>
+                <a:latin typeface="Calibri"/>
+              </a:rPr>
+              <a:t>Paired AI agent &amp; role in the cycle</a:t>
+            </a:r>
+          </a:p>
+        </p:txBody>
+      </p:sp>
+      <p:sp>
+        <p:nvSpPr>
+          <p:cNvPr id="12" name="TextBox 11"/>
+          <p:cNvSpPr txBox="1"/>
+          <p:nvPr/>
+        </p:nvSpPr>
+        <p:spPr>
+          <a:xfrm>
+            <a:off x="5760720" y="1280160"/>
+            <a:ext cx="2697480" cy="292608"/>
+          </a:xfrm>
+          <a:prstGeom prst="rect">
+            <a:avLst/>
+          </a:prstGeom>
+          <a:noFill/>
+        </p:spPr>
+        <p:txBody>
+          <a:bodyPr wrap="square" lIns="0" rIns="0" tIns="0" bIns="0" anchor="ctr">
+            <a:spAutoFit/>
+          </a:bodyPr>
+          <a:lstStyle/>
+          <a:p>
+            <a:pPr>
+              <a:spcAft>
+                <a:spcPts val="0"/>
+              </a:spcAft>
+            </a:pPr>
+            <a:r>
+              <a:rPr sz="1050" b="1" i="0">
+                <a:solidFill>
+                  <a:srgbClr val="FFFFFF"/>
+                </a:solidFill>
+                <a:latin typeface="Calibri"/>
+              </a:rPr>
+              <a:t>Judgement kept by people</a:t>
+            </a:r>
+          </a:p>
+        </p:txBody>
+      </p:sp>
+      <p:sp>
+        <p:nvSpPr>
+          <p:cNvPr id="13" name="Rectangle 12"/>
+          <p:cNvSpPr/>
+          <p:nvPr/>
+        </p:nvSpPr>
+        <p:spPr>
+          <a:xfrm>
+            <a:off x="640080" y="1572768"/>
+            <a:ext cx="7863840" cy="402336"/>
+          </a:xfrm>
+          <a:prstGeom prst="rect">
+            <a:avLst/>
+          </a:prstGeom>
+          <a:solidFill>
+            <a:srgbClr val="EEF1F8"/>
+          </a:solidFill>
+          <a:ln>
+            <a:noFill/>
+          </a:ln>
+          <a:effectLst/>
+        </p:spPr>
+        <p:style>
+          <a:lnRef idx="1">
+            <a:schemeClr val="accent1"/>
+          </a:lnRef>
+          <a:fillRef idx="3">
+            <a:schemeClr val="accent1"/>
+          </a:fillRef>
+          <a:effectRef idx="2">
+            <a:schemeClr val="accent1"/>
+          </a:effectRef>
+          <a:fontRef idx="minor">
+            <a:schemeClr val="lt1"/>
+          </a:fontRef>
+        </p:style>
+        <p:txBody>
+          <a:bodyPr rtlCol="0" anchor="ctr"/>
+          <a:lstStyle/>
+          <a:p>
+            <a:pPr algn="ctr"/>
+          </a:p>
+        </p:txBody>
+      </p:sp>
+      <p:sp>
+        <p:nvSpPr>
+          <p:cNvPr id="14" name="Rectangle 13"/>
+          <p:cNvSpPr/>
+          <p:nvPr/>
+        </p:nvSpPr>
+        <p:spPr>
+          <a:xfrm>
+            <a:off x="640080" y="1965960"/>
+            <a:ext cx="7863840" cy="9144"/>
+          </a:xfrm>
+          <a:prstGeom prst="rect">
+            <a:avLst/>
+          </a:prstGeom>
+          <a:solidFill>
+            <a:srgbClr val="D5DBEA"/>
+          </a:solidFill>
+          <a:ln>
+            <a:noFill/>
+          </a:ln>
+          <a:effectLst/>
+        </p:spPr>
+        <p:style>
+          <a:lnRef idx="1">
+            <a:schemeClr val="accent1"/>
+          </a:lnRef>
+          <a:fillRef idx="3">
+            <a:schemeClr val="accent1"/>
+          </a:fillRef>
+          <a:effectRef idx="2">
+            <a:schemeClr val="accent1"/>
+          </a:effectRef>
+          <a:fontRef idx="minor">
+            <a:schemeClr val="lt1"/>
+          </a:fontRef>
+        </p:style>
+        <p:txBody>
+          <a:bodyPr rtlCol="0" anchor="ctr"/>
+          <a:lstStyle/>
+          <a:p>
+            <a:pPr algn="ctr"/>
+          </a:p>
+        </p:txBody>
+      </p:sp>
+      <p:sp>
+        <p:nvSpPr>
+          <p:cNvPr id="15" name="TextBox 14"/>
+          <p:cNvSpPr txBox="1"/>
+          <p:nvPr/>
+        </p:nvSpPr>
+        <p:spPr>
+          <a:xfrm>
+            <a:off x="731519" y="1600200"/>
+            <a:ext cx="2075688" cy="347472"/>
+          </a:xfrm>
+          <a:prstGeom prst="rect">
+            <a:avLst/>
+          </a:prstGeom>
+          <a:noFill/>
+        </p:spPr>
+        <p:txBody>
+          <a:bodyPr wrap="square" lIns="0" rIns="0" tIns="0" bIns="0" anchor="ctr">
+            <a:spAutoFit/>
+          </a:bodyPr>
+          <a:lstStyle/>
+          <a:p>
+            <a:pPr>
+              <a:spcAft>
+                <a:spcPts val="0"/>
+              </a:spcAft>
+            </a:pPr>
+            <a:r>
+              <a:rPr sz="1050" b="1" i="0">
+                <a:solidFill>
+                  <a:srgbClr val="1E2447"/>
+                </a:solidFill>
+                <a:latin typeface="Calibri"/>
+              </a:rPr>
+              <a:t>Individual (anubhav-gami)</a:t>
+            </a:r>
+          </a:p>
+        </p:txBody>
+      </p:sp>
+      <p:sp>
+        <p:nvSpPr>
+          <p:cNvPr id="16" name="TextBox 15"/>
+          <p:cNvSpPr txBox="1"/>
+          <p:nvPr/>
+        </p:nvSpPr>
+        <p:spPr>
+          <a:xfrm>
+            <a:off x="2971800" y="1600200"/>
+            <a:ext cx="2624327" cy="347472"/>
+          </a:xfrm>
+          <a:prstGeom prst="rect">
+            <a:avLst/>
+          </a:prstGeom>
+          <a:noFill/>
+        </p:spPr>
+        <p:txBody>
+          <a:bodyPr wrap="square" lIns="0" rIns="0" tIns="0" bIns="0" anchor="ctr">
+            <a:spAutoFit/>
+          </a:bodyPr>
+          <a:lstStyle/>
+          <a:p>
+            <a:pPr>
+              <a:spcAft>
+                <a:spcPts val="0"/>
+              </a:spcAft>
+            </a:pPr>
+            <a:r>
+              <a:rPr sz="1000" b="0" i="0">
+                <a:solidFill>
+                  <a:srgbClr val="5A6377"/>
+                </a:solidFill>
+                <a:latin typeface="Calibri"/>
+              </a:rPr>
+              <a:t>Personal Assistant: mirror &amp; study</a:t>
+            </a:r>
+          </a:p>
+        </p:txBody>
+      </p:sp>
+      <p:sp>
+        <p:nvSpPr>
+          <p:cNvPr id="17" name="TextBox 16"/>
+          <p:cNvSpPr txBox="1"/>
+          <p:nvPr/>
+        </p:nvSpPr>
+        <p:spPr>
+          <a:xfrm>
+            <a:off x="5760720" y="1600200"/>
+            <a:ext cx="2670048" cy="347472"/>
+          </a:xfrm>
+          <a:prstGeom prst="rect">
+            <a:avLst/>
+          </a:prstGeom>
+          <a:noFill/>
+        </p:spPr>
+        <p:txBody>
+          <a:bodyPr wrap="square" lIns="0" rIns="0" tIns="0" bIns="0" anchor="ctr">
+            <a:spAutoFit/>
+          </a:bodyPr>
+          <a:lstStyle/>
+          <a:p>
+            <a:pPr>
+              <a:spcAft>
+                <a:spcPts val="0"/>
+              </a:spcAft>
+            </a:pPr>
+            <a:r>
+              <a:rPr sz="1000" b="0" i="0">
+                <a:solidFill>
+                  <a:srgbClr val="5A6377"/>
+                </a:solidFill>
+                <a:latin typeface="Calibri"/>
+              </a:rPr>
+              <a:t>Self-examination, sanskar, work</a:t>
+            </a:r>
+          </a:p>
+        </p:txBody>
+      </p:sp>
+      <p:sp>
+        <p:nvSpPr>
+          <p:cNvPr id="18" name="Rectangle 17"/>
+          <p:cNvSpPr/>
+          <p:nvPr/>
+        </p:nvSpPr>
+        <p:spPr>
+          <a:xfrm>
+            <a:off x="640080" y="2368296"/>
+            <a:ext cx="7863840" cy="9144"/>
+          </a:xfrm>
+          <a:prstGeom prst="rect">
+            <a:avLst/>
+          </a:prstGeom>
+          <a:solidFill>
+            <a:srgbClr val="D5DBEA"/>
+          </a:solidFill>
+          <a:ln>
+            <a:noFill/>
+          </a:ln>
+          <a:effectLst/>
+        </p:spPr>
+        <p:style>
+          <a:lnRef idx="1">
+            <a:schemeClr val="accent1"/>
+          </a:lnRef>
+          <a:fillRef idx="3">
+            <a:schemeClr val="accent1"/>
+          </a:fillRef>
+          <a:effectRef idx="2">
+            <a:schemeClr val="accent1"/>
+          </a:effectRef>
+          <a:fontRef idx="minor">
+            <a:schemeClr val="lt1"/>
+          </a:fontRef>
+        </p:style>
+        <p:txBody>
+          <a:bodyPr rtlCol="0" anchor="ctr"/>
+          <a:lstStyle/>
+          <a:p>
+            <a:pPr algn="ctr"/>
+          </a:p>
+        </p:txBody>
+      </p:sp>
+      <p:sp>
+        <p:nvSpPr>
+          <p:cNvPr id="19" name="TextBox 18"/>
+          <p:cNvSpPr txBox="1"/>
+          <p:nvPr/>
+        </p:nvSpPr>
+        <p:spPr>
+          <a:xfrm>
+            <a:off x="731519" y="2002536"/>
+            <a:ext cx="2075688" cy="347472"/>
+          </a:xfrm>
+          <a:prstGeom prst="rect">
+            <a:avLst/>
+          </a:prstGeom>
+          <a:noFill/>
+        </p:spPr>
+        <p:txBody>
+          <a:bodyPr wrap="square" lIns="0" rIns="0" tIns="0" bIns="0" anchor="ctr">
+            <a:spAutoFit/>
+          </a:bodyPr>
+          <a:lstStyle/>
+          <a:p>
+            <a:pPr>
+              <a:spcAft>
+                <a:spcPts val="0"/>
+              </a:spcAft>
+            </a:pPr>
+            <a:r>
+              <a:rPr sz="1050" b="1" i="0">
+                <a:solidFill>
+                  <a:srgbClr val="1E2447"/>
+                </a:solidFill>
+                <a:latin typeface="Calibri"/>
+              </a:rPr>
+              <a:t>Family (10–12 members)</a:t>
+            </a:r>
+          </a:p>
+        </p:txBody>
+      </p:sp>
+      <p:sp>
+        <p:nvSpPr>
+          <p:cNvPr id="20" name="TextBox 19"/>
+          <p:cNvSpPr txBox="1"/>
+          <p:nvPr/>
+        </p:nvSpPr>
+        <p:spPr>
+          <a:xfrm>
+            <a:off x="2971800" y="2002536"/>
+            <a:ext cx="2624327" cy="347472"/>
+          </a:xfrm>
+          <a:prstGeom prst="rect">
+            <a:avLst/>
+          </a:prstGeom>
+          <a:noFill/>
+        </p:spPr>
+        <p:txBody>
+          <a:bodyPr wrap="square" lIns="0" rIns="0" tIns="0" bIns="0" anchor="ctr">
+            <a:spAutoFit/>
+          </a:bodyPr>
+          <a:lstStyle/>
+          <a:p>
+            <a:pPr>
+              <a:spcAft>
+                <a:spcPts val="0"/>
+              </a:spcAft>
+            </a:pPr>
+            <a:r>
+              <a:rPr sz="1000" b="0" i="0">
+                <a:solidFill>
+                  <a:srgbClr val="5A6377"/>
+                </a:solidFill>
+                <a:latin typeface="Calibri"/>
+              </a:rPr>
+              <a:t>Family Agent: need &amp; restful work</a:t>
+            </a:r>
+          </a:p>
+        </p:txBody>
+      </p:sp>
+      <p:sp>
+        <p:nvSpPr>
+          <p:cNvPr id="21" name="TextBox 20"/>
+          <p:cNvSpPr txBox="1"/>
+          <p:nvPr/>
+        </p:nvSpPr>
+        <p:spPr>
+          <a:xfrm>
+            <a:off x="5760720" y="2002536"/>
+            <a:ext cx="2670048" cy="347472"/>
+          </a:xfrm>
+          <a:prstGeom prst="rect">
+            <a:avLst/>
+          </a:prstGeom>
+          <a:noFill/>
+        </p:spPr>
+        <p:txBody>
+          <a:bodyPr wrap="square" lIns="0" rIns="0" tIns="0" bIns="0" anchor="ctr">
+            <a:spAutoFit/>
+          </a:bodyPr>
+          <a:lstStyle/>
+          <a:p>
+            <a:pPr>
+              <a:spcAft>
+                <a:spcPts val="0"/>
+              </a:spcAft>
+            </a:pPr>
+            <a:r>
+              <a:rPr sz="1000" b="0" i="0">
+                <a:solidFill>
+                  <a:srgbClr val="5A6377"/>
+                </a:solidFill>
+                <a:latin typeface="Calibri"/>
+              </a:rPr>
+              <a:t>True family need, care, sharing</a:t>
+            </a:r>
+          </a:p>
+        </p:txBody>
+      </p:sp>
+      <p:sp>
+        <p:nvSpPr>
+          <p:cNvPr id="22" name="Rectangle 21"/>
+          <p:cNvSpPr/>
+          <p:nvPr/>
+        </p:nvSpPr>
+        <p:spPr>
+          <a:xfrm>
+            <a:off x="640080" y="2377440"/>
+            <a:ext cx="7863840" cy="402336"/>
+          </a:xfrm>
+          <a:prstGeom prst="rect">
+            <a:avLst/>
+          </a:prstGeom>
+          <a:solidFill>
+            <a:srgbClr val="EEF1F8"/>
+          </a:solidFill>
+          <a:ln>
+            <a:noFill/>
+          </a:ln>
+          <a:effectLst/>
+        </p:spPr>
+        <p:style>
+          <a:lnRef idx="1">
+            <a:schemeClr val="accent1"/>
+          </a:lnRef>
+          <a:fillRef idx="3">
+            <a:schemeClr val="accent1"/>
+          </a:fillRef>
+          <a:effectRef idx="2">
+            <a:schemeClr val="accent1"/>
+          </a:effectRef>
+          <a:fontRef idx="minor">
+            <a:schemeClr val="lt1"/>
+          </a:fontRef>
+        </p:style>
+        <p:txBody>
+          <a:bodyPr rtlCol="0" anchor="ctr"/>
+          <a:lstStyle/>
+          <a:p>
+            <a:pPr algn="ctr"/>
+          </a:p>
+        </p:txBody>
+      </p:sp>
+      <p:sp>
+        <p:nvSpPr>
+          <p:cNvPr id="23" name="Rectangle 22"/>
+          <p:cNvSpPr/>
+          <p:nvPr/>
+        </p:nvSpPr>
+        <p:spPr>
+          <a:xfrm>
+            <a:off x="640080" y="2770632"/>
+            <a:ext cx="7863840" cy="9144"/>
+          </a:xfrm>
+          <a:prstGeom prst="rect">
+            <a:avLst/>
+          </a:prstGeom>
+          <a:solidFill>
+            <a:srgbClr val="D5DBEA"/>
+          </a:solidFill>
+          <a:ln>
+            <a:noFill/>
+          </a:ln>
+          <a:effectLst/>
+        </p:spPr>
+        <p:style>
+          <a:lnRef idx="1">
+            <a:schemeClr val="accent1"/>
+          </a:lnRef>
+          <a:fillRef idx="3">
+            <a:schemeClr val="accent1"/>
+          </a:fillRef>
+          <a:effectRef idx="2">
+            <a:schemeClr val="accent1"/>
+          </a:effectRef>
+          <a:fontRef idx="minor">
+            <a:schemeClr val="lt1"/>
+          </a:fontRef>
+        </p:style>
+        <p:txBody>
+          <a:bodyPr rtlCol="0" anchor="ctr"/>
+          <a:lstStyle/>
+          <a:p>
+            <a:pPr algn="ctr"/>
+          </a:p>
+        </p:txBody>
+      </p:sp>
+      <p:sp>
+        <p:nvSpPr>
+          <p:cNvPr id="24" name="TextBox 23"/>
+          <p:cNvSpPr txBox="1"/>
+          <p:nvPr/>
+        </p:nvSpPr>
+        <p:spPr>
+          <a:xfrm>
+            <a:off x="731519" y="2404872"/>
+            <a:ext cx="2075688" cy="347472"/>
+          </a:xfrm>
+          <a:prstGeom prst="rect">
+            <a:avLst/>
+          </a:prstGeom>
+          <a:noFill/>
+        </p:spPr>
+        <p:txBody>
+          <a:bodyPr wrap="square" lIns="0" rIns="0" tIns="0" bIns="0" anchor="ctr">
+            <a:spAutoFit/>
+          </a:bodyPr>
+          <a:lstStyle/>
+          <a:p>
+            <a:pPr>
+              <a:spcAft>
+                <a:spcPts val="0"/>
+              </a:spcAft>
+            </a:pPr>
+            <a:r>
+              <a:rPr sz="1050" b="1" i="0">
+                <a:solidFill>
+                  <a:srgbClr val="1E2447"/>
+                </a:solidFill>
+                <a:latin typeface="Calibri"/>
+              </a:rPr>
+              <a:t>Family cluster (Tier 1)</a:t>
+            </a:r>
+          </a:p>
+        </p:txBody>
+      </p:sp>
+      <p:sp>
+        <p:nvSpPr>
+          <p:cNvPr id="25" name="TextBox 24"/>
+          <p:cNvSpPr txBox="1"/>
+          <p:nvPr/>
+        </p:nvSpPr>
+        <p:spPr>
+          <a:xfrm>
+            <a:off x="2971800" y="2404872"/>
+            <a:ext cx="2624327" cy="347472"/>
+          </a:xfrm>
+          <a:prstGeom prst="rect">
+            <a:avLst/>
+          </a:prstGeom>
+          <a:noFill/>
+        </p:spPr>
+        <p:txBody>
+          <a:bodyPr wrap="square" lIns="0" rIns="0" tIns="0" bIns="0" anchor="ctr">
+            <a:spAutoFit/>
+          </a:bodyPr>
+          <a:lstStyle/>
+          <a:p>
+            <a:pPr>
+              <a:spcAft>
+                <a:spcPts val="0"/>
+              </a:spcAft>
+            </a:pPr>
+            <a:r>
+              <a:rPr sz="1000" b="0" i="0">
+                <a:solidFill>
+                  <a:srgbClr val="5A6377"/>
+                </a:solidFill>
+                <a:latin typeface="Calibri"/>
+              </a:rPr>
+              <a:t>Cluster Agent: 10-family synthesis</a:t>
+            </a:r>
+          </a:p>
+        </p:txBody>
+      </p:sp>
+      <p:sp>
+        <p:nvSpPr>
+          <p:cNvPr id="26" name="TextBox 25"/>
+          <p:cNvSpPr txBox="1"/>
+          <p:nvPr/>
+        </p:nvSpPr>
+        <p:spPr>
+          <a:xfrm>
+            <a:off x="5760720" y="2404872"/>
+            <a:ext cx="2670048" cy="347472"/>
+          </a:xfrm>
+          <a:prstGeom prst="rect">
+            <a:avLst/>
+          </a:prstGeom>
+          <a:noFill/>
+        </p:spPr>
+        <p:txBody>
+          <a:bodyPr wrap="square" lIns="0" rIns="0" tIns="0" bIns="0" anchor="ctr">
+            <a:spAutoFit/>
+          </a:bodyPr>
+          <a:lstStyle/>
+          <a:p>
+            <a:pPr>
+              <a:spcAft>
+                <a:spcPts val="0"/>
+              </a:spcAft>
+            </a:pPr>
+            <a:r>
+              <a:rPr sz="1000" b="0" i="0">
+                <a:solidFill>
+                  <a:srgbClr val="5A6377"/>
+                </a:solidFill>
+                <a:latin typeface="Calibri"/>
+              </a:rPr>
+              <a:t>Evaluating representatives, aid</a:t>
+            </a:r>
+          </a:p>
+        </p:txBody>
+      </p:sp>
+      <p:sp>
+        <p:nvSpPr>
+          <p:cNvPr id="27" name="Rectangle 26"/>
+          <p:cNvSpPr/>
+          <p:nvPr/>
+        </p:nvSpPr>
+        <p:spPr>
+          <a:xfrm>
+            <a:off x="640080" y="3172968"/>
+            <a:ext cx="7863840" cy="9144"/>
+          </a:xfrm>
+          <a:prstGeom prst="rect">
+            <a:avLst/>
+          </a:prstGeom>
+          <a:solidFill>
+            <a:srgbClr val="D5DBEA"/>
+          </a:solidFill>
+          <a:ln>
+            <a:noFill/>
+          </a:ln>
+          <a:effectLst/>
+        </p:spPr>
+        <p:style>
+          <a:lnRef idx="1">
+            <a:schemeClr val="accent1"/>
+          </a:lnRef>
+          <a:fillRef idx="3">
+            <a:schemeClr val="accent1"/>
+          </a:fillRef>
+          <a:effectRef idx="2">
+            <a:schemeClr val="accent1"/>
+          </a:effectRef>
+          <a:fontRef idx="minor">
+            <a:schemeClr val="lt1"/>
+          </a:fontRef>
+        </p:style>
+        <p:txBody>
+          <a:bodyPr rtlCol="0" anchor="ctr"/>
+          <a:lstStyle/>
+          <a:p>
+            <a:pPr algn="ctr"/>
+          </a:p>
+        </p:txBody>
+      </p:sp>
+      <p:sp>
+        <p:nvSpPr>
+          <p:cNvPr id="28" name="TextBox 27"/>
+          <p:cNvSpPr txBox="1"/>
+          <p:nvPr/>
+        </p:nvSpPr>
+        <p:spPr>
+          <a:xfrm>
+            <a:off x="731519" y="2807208"/>
+            <a:ext cx="2075688" cy="347472"/>
+          </a:xfrm>
+          <a:prstGeom prst="rect">
+            <a:avLst/>
+          </a:prstGeom>
+          <a:noFill/>
+        </p:spPr>
+        <p:txBody>
+          <a:bodyPr wrap="square" lIns="0" rIns="0" tIns="0" bIns="0" anchor="ctr">
+            <a:spAutoFit/>
+          </a:bodyPr>
+          <a:lstStyle/>
+          <a:p>
+            <a:pPr>
+              <a:spcAft>
+                <a:spcPts val="0"/>
+              </a:spcAft>
+            </a:pPr>
+            <a:r>
+              <a:rPr sz="1050" b="1" i="0">
+                <a:solidFill>
+                  <a:srgbClr val="1E2447"/>
+                </a:solidFill>
+                <a:latin typeface="Calibri"/>
+              </a:rPr>
+              <a:t>Village &amp; 5 committees</a:t>
+            </a:r>
+          </a:p>
+        </p:txBody>
+      </p:sp>
+      <p:sp>
+        <p:nvSpPr>
+          <p:cNvPr id="29" name="TextBox 28"/>
+          <p:cNvSpPr txBox="1"/>
+          <p:nvPr/>
+        </p:nvSpPr>
+        <p:spPr>
+          <a:xfrm>
+            <a:off x="2971800" y="2807208"/>
+            <a:ext cx="2624327" cy="347472"/>
+          </a:xfrm>
+          <a:prstGeom prst="rect">
+            <a:avLst/>
+          </a:prstGeom>
+          <a:noFill/>
+        </p:spPr>
+        <p:txBody>
+          <a:bodyPr wrap="square" lIns="0" rIns="0" tIns="0" bIns="0" anchor="ctr">
+            <a:spAutoFit/>
+          </a:bodyPr>
+          <a:lstStyle/>
+          <a:p>
+            <a:pPr>
+              <a:spcAft>
+                <a:spcPts val="0"/>
+              </a:spcAft>
+            </a:pPr>
+            <a:r>
+              <a:rPr sz="1000" b="0" i="0">
+                <a:solidFill>
+                  <a:srgbClr val="5A6377"/>
+                </a:solidFill>
+                <a:latin typeface="Calibri"/>
+              </a:rPr>
+              <a:t>Village Agents: survey &amp; 3-stage</a:t>
+            </a:r>
+          </a:p>
+        </p:txBody>
+      </p:sp>
+      <p:sp>
+        <p:nvSpPr>
+          <p:cNvPr id="30" name="TextBox 29"/>
+          <p:cNvSpPr txBox="1"/>
+          <p:nvPr/>
+        </p:nvSpPr>
+        <p:spPr>
+          <a:xfrm>
+            <a:off x="5760720" y="2807208"/>
+            <a:ext cx="2670048" cy="347472"/>
+          </a:xfrm>
+          <a:prstGeom prst="rect">
+            <a:avLst/>
+          </a:prstGeom>
+          <a:noFill/>
+        </p:spPr>
+        <p:txBody>
+          <a:bodyPr wrap="square" lIns="0" rIns="0" tIns="0" bIns="0" anchor="ctr">
+            <a:spAutoFit/>
+          </a:bodyPr>
+          <a:lstStyle/>
+          <a:p>
+            <a:pPr>
+              <a:spcAft>
+                <a:spcPts val="0"/>
+              </a:spcAft>
+            </a:pPr>
+            <a:r>
+              <a:rPr sz="1000" b="0" i="0">
+                <a:solidFill>
+                  <a:srgbClr val="5A6377"/>
+                </a:solidFill>
+                <a:latin typeface="Calibri"/>
+              </a:rPr>
+              <a:t>Labour values, training, justice</a:t>
+            </a:r>
+          </a:p>
+        </p:txBody>
+      </p:sp>
+      <p:sp>
+        <p:nvSpPr>
+          <p:cNvPr id="31" name="Rectangle 30"/>
+          <p:cNvSpPr/>
+          <p:nvPr/>
+        </p:nvSpPr>
+        <p:spPr>
+          <a:xfrm>
+            <a:off x="640080" y="3182112"/>
+            <a:ext cx="7863840" cy="402336"/>
+          </a:xfrm>
+          <a:prstGeom prst="rect">
+            <a:avLst/>
+          </a:prstGeom>
+          <a:solidFill>
+            <a:srgbClr val="EEF1F8"/>
+          </a:solidFill>
+          <a:ln>
+            <a:noFill/>
+          </a:ln>
+          <a:effectLst/>
+        </p:spPr>
+        <p:style>
+          <a:lnRef idx="1">
+            <a:schemeClr val="accent1"/>
+          </a:lnRef>
+          <a:fillRef idx="3">
+            <a:schemeClr val="accent1"/>
+          </a:fillRef>
+          <a:effectRef idx="2">
+            <a:schemeClr val="accent1"/>
+          </a:effectRef>
+          <a:fontRef idx="minor">
+            <a:schemeClr val="lt1"/>
+          </a:fontRef>
+        </p:style>
+        <p:txBody>
+          <a:bodyPr rtlCol="0" anchor="ctr"/>
+          <a:lstStyle/>
+          <a:p>
+            <a:pPr algn="ctr"/>
+          </a:p>
+        </p:txBody>
+      </p:sp>
+      <p:sp>
+        <p:nvSpPr>
+          <p:cNvPr id="32" name="Rectangle 31"/>
+          <p:cNvSpPr/>
+          <p:nvPr/>
+        </p:nvSpPr>
+        <p:spPr>
+          <a:xfrm>
+            <a:off x="640080" y="3575304"/>
+            <a:ext cx="7863840" cy="9144"/>
+          </a:xfrm>
+          <a:prstGeom prst="rect">
+            <a:avLst/>
+          </a:prstGeom>
+          <a:solidFill>
+            <a:srgbClr val="D5DBEA"/>
+          </a:solidFill>
+          <a:ln>
+            <a:noFill/>
+          </a:ln>
+          <a:effectLst/>
+        </p:spPr>
+        <p:style>
+          <a:lnRef idx="1">
+            <a:schemeClr val="accent1"/>
+          </a:lnRef>
+          <a:fillRef idx="3">
+            <a:schemeClr val="accent1"/>
+          </a:fillRef>
+          <a:effectRef idx="2">
+            <a:schemeClr val="accent1"/>
+          </a:effectRef>
+          <a:fontRef idx="minor">
+            <a:schemeClr val="lt1"/>
+          </a:fontRef>
+        </p:style>
+        <p:txBody>
+          <a:bodyPr rtlCol="0" anchor="ctr"/>
+          <a:lstStyle/>
+          <a:p>
+            <a:pPr algn="ctr"/>
+          </a:p>
+        </p:txBody>
+      </p:sp>
+      <p:sp>
+        <p:nvSpPr>
+          <p:cNvPr id="33" name="TextBox 32"/>
+          <p:cNvSpPr txBox="1"/>
+          <p:nvPr/>
+        </p:nvSpPr>
+        <p:spPr>
+          <a:xfrm>
+            <a:off x="731519" y="3209544"/>
+            <a:ext cx="2075688" cy="347472"/>
+          </a:xfrm>
+          <a:prstGeom prst="rect">
+            <a:avLst/>
+          </a:prstGeom>
+          <a:noFill/>
+        </p:spPr>
+        <p:txBody>
+          <a:bodyPr wrap="square" lIns="0" rIns="0" tIns="0" bIns="0" anchor="ctr">
+            <a:spAutoFit/>
+          </a:bodyPr>
+          <a:lstStyle/>
+          <a:p>
+            <a:pPr>
+              <a:spcAft>
+                <a:spcPts val="0"/>
+              </a:spcAft>
+            </a:pPr>
+            <a:r>
+              <a:rPr sz="1050" b="1" i="0">
+                <a:solidFill>
+                  <a:srgbClr val="1E2447"/>
+                </a:solidFill>
+                <a:latin typeface="Calibri"/>
+              </a:rPr>
+              <a:t>Regional tiers (3–9)</a:t>
+            </a:r>
+          </a:p>
+        </p:txBody>
+      </p:sp>
+      <p:sp>
+        <p:nvSpPr>
+          <p:cNvPr id="34" name="TextBox 33"/>
+          <p:cNvSpPr txBox="1"/>
+          <p:nvPr/>
+        </p:nvSpPr>
+        <p:spPr>
+          <a:xfrm>
+            <a:off x="2971800" y="3209544"/>
+            <a:ext cx="2624327" cy="347472"/>
+          </a:xfrm>
+          <a:prstGeom prst="rect">
+            <a:avLst/>
+          </a:prstGeom>
+          <a:noFill/>
+        </p:spPr>
+        <p:txBody>
+          <a:bodyPr wrap="square" lIns="0" rIns="0" tIns="0" bIns="0" anchor="ctr">
+            <a:spAutoFit/>
+          </a:bodyPr>
+          <a:lstStyle/>
+          <a:p>
+            <a:pPr>
+              <a:spcAft>
+                <a:spcPts val="0"/>
+              </a:spcAft>
+            </a:pPr>
+            <a:r>
+              <a:rPr sz="1000" b="0" i="0">
+                <a:solidFill>
+                  <a:srgbClr val="5A6377"/>
+                </a:solidFill>
+                <a:latin typeface="Calibri"/>
+              </a:rPr>
+              <a:t>Regional Agents: I–O &amp; rent match</a:t>
+            </a:r>
+          </a:p>
+        </p:txBody>
+      </p:sp>
+      <p:sp>
+        <p:nvSpPr>
+          <p:cNvPr id="35" name="TextBox 34"/>
+          <p:cNvSpPr txBox="1"/>
+          <p:nvPr/>
+        </p:nvSpPr>
+        <p:spPr>
+          <a:xfrm>
+            <a:off x="5760720" y="3209544"/>
+            <a:ext cx="2670048" cy="347472"/>
+          </a:xfrm>
+          <a:prstGeom prst="rect">
+            <a:avLst/>
+          </a:prstGeom>
+          <a:noFill/>
+        </p:spPr>
+        <p:txBody>
+          <a:bodyPr wrap="square" lIns="0" rIns="0" tIns="0" bIns="0" anchor="ctr">
+            <a:spAutoFit/>
+          </a:bodyPr>
+          <a:lstStyle/>
+          <a:p>
+            <a:pPr>
+              <a:spcAft>
+                <a:spcPts val="0"/>
+              </a:spcAft>
+            </a:pPr>
+            <a:r>
+              <a:rPr sz="1000" b="0" i="0">
+                <a:solidFill>
+                  <a:srgbClr val="5A6377"/>
+                </a:solidFill>
+                <a:latin typeface="Calibri"/>
+              </a:rPr>
+              <a:t>Exchange rules &amp; infrastructure</a:t>
+            </a:r>
+          </a:p>
+        </p:txBody>
+      </p:sp>
+      <p:sp>
+        <p:nvSpPr>
+          <p:cNvPr id="36" name="Rectangle 35"/>
+          <p:cNvSpPr/>
+          <p:nvPr/>
+        </p:nvSpPr>
+        <p:spPr>
+          <a:xfrm>
+            <a:off x="640080" y="3977640"/>
+            <a:ext cx="7863840" cy="9144"/>
+          </a:xfrm>
+          <a:prstGeom prst="rect">
+            <a:avLst/>
+          </a:prstGeom>
+          <a:solidFill>
+            <a:srgbClr val="D5DBEA"/>
+          </a:solidFill>
+          <a:ln>
+            <a:noFill/>
+          </a:ln>
+          <a:effectLst/>
+        </p:spPr>
+        <p:style>
+          <a:lnRef idx="1">
+            <a:schemeClr val="accent1"/>
+          </a:lnRef>
+          <a:fillRef idx="3">
+            <a:schemeClr val="accent1"/>
+          </a:fillRef>
+          <a:effectRef idx="2">
+            <a:schemeClr val="accent1"/>
+          </a:effectRef>
+          <a:fontRef idx="minor">
+            <a:schemeClr val="lt1"/>
+          </a:fontRef>
+        </p:style>
+        <p:txBody>
+          <a:bodyPr rtlCol="0" anchor="ctr"/>
+          <a:lstStyle/>
+          <a:p>
+            <a:pPr algn="ctr"/>
+          </a:p>
+        </p:txBody>
+      </p:sp>
+      <p:sp>
+        <p:nvSpPr>
+          <p:cNvPr id="37" name="TextBox 36"/>
+          <p:cNvSpPr txBox="1"/>
+          <p:nvPr/>
+        </p:nvSpPr>
+        <p:spPr>
+          <a:xfrm>
+            <a:off x="731519" y="3611879"/>
+            <a:ext cx="2075688" cy="347472"/>
+          </a:xfrm>
+          <a:prstGeom prst="rect">
+            <a:avLst/>
+          </a:prstGeom>
+          <a:noFill/>
+        </p:spPr>
+        <p:txBody>
+          <a:bodyPr wrap="square" lIns="0" rIns="0" tIns="0" bIns="0" anchor="ctr">
+            <a:spAutoFit/>
+          </a:bodyPr>
+          <a:lstStyle/>
+          <a:p>
+            <a:pPr>
+              <a:spcAft>
+                <a:spcPts val="0"/>
+              </a:spcAft>
+            </a:pPr>
+            <a:r>
+              <a:rPr sz="1050" b="1" i="0">
+                <a:solidFill>
+                  <a:srgbClr val="1E2447"/>
+                </a:solidFill>
+                <a:latin typeface="Calibri"/>
+              </a:rPr>
+              <a:t>World council (Tier 10)</a:t>
+            </a:r>
+          </a:p>
+        </p:txBody>
+      </p:sp>
+      <p:sp>
+        <p:nvSpPr>
+          <p:cNvPr id="38" name="TextBox 37"/>
+          <p:cNvSpPr txBox="1"/>
+          <p:nvPr/>
+        </p:nvSpPr>
+        <p:spPr>
+          <a:xfrm>
+            <a:off x="2971800" y="3611879"/>
+            <a:ext cx="2624327" cy="347472"/>
+          </a:xfrm>
+          <a:prstGeom prst="rect">
+            <a:avLst/>
+          </a:prstGeom>
+          <a:noFill/>
+        </p:spPr>
+        <p:txBody>
+          <a:bodyPr wrap="square" lIns="0" rIns="0" tIns="0" bIns="0" anchor="ctr">
+            <a:spAutoFit/>
+          </a:bodyPr>
+          <a:lstStyle/>
+          <a:p>
+            <a:pPr>
+              <a:spcAft>
+                <a:spcPts val="0"/>
+              </a:spcAft>
+            </a:pPr>
+            <a:r>
+              <a:rPr sz="1000" b="0" i="0">
+                <a:solidFill>
+                  <a:srgbClr val="5A6377"/>
+                </a:solidFill>
+                <a:latin typeface="Calibri"/>
+              </a:rPr>
+              <a:t>Global Agents: planetary bounds</a:t>
+            </a:r>
+          </a:p>
+        </p:txBody>
+      </p:sp>
+      <p:sp>
+        <p:nvSpPr>
+          <p:cNvPr id="39" name="TextBox 38"/>
+          <p:cNvSpPr txBox="1"/>
+          <p:nvPr/>
+        </p:nvSpPr>
+        <p:spPr>
+          <a:xfrm>
+            <a:off x="5760720" y="3611879"/>
+            <a:ext cx="2670048" cy="347472"/>
+          </a:xfrm>
+          <a:prstGeom prst="rect">
+            <a:avLst/>
+          </a:prstGeom>
+          <a:noFill/>
+        </p:spPr>
+        <p:txBody>
+          <a:bodyPr wrap="square" lIns="0" rIns="0" tIns="0" bIns="0" anchor="ctr">
+            <a:spAutoFit/>
+          </a:bodyPr>
+          <a:lstStyle/>
+          <a:p>
+            <a:pPr>
+              <a:spcAft>
+                <a:spcPts val="0"/>
+              </a:spcAft>
+            </a:pPr>
+            <a:r>
+              <a:rPr sz="1000" b="0" i="0">
+                <a:solidFill>
+                  <a:srgbClr val="5A6377"/>
+                </a:solidFill>
+                <a:latin typeface="Calibri"/>
+              </a:rPr>
+              <a:t>Global covenants on coexistence</a:t>
+            </a:r>
+          </a:p>
+        </p:txBody>
+      </p:sp>
+      <p:sp>
+        <p:nvSpPr>
+          <p:cNvPr id="40" name="TextBox 39"/>
+          <p:cNvSpPr txBox="1"/>
+          <p:nvPr/>
+        </p:nvSpPr>
+        <p:spPr>
+          <a:xfrm>
+            <a:off x="640080" y="4343400"/>
+            <a:ext cx="7863840" cy="329184"/>
+          </a:xfrm>
+          <a:prstGeom prst="rect">
+            <a:avLst/>
+          </a:prstGeom>
+          <a:noFill/>
+        </p:spPr>
+        <p:txBody>
+          <a:bodyPr wrap="square" lIns="0" rIns="0" tIns="0" bIns="0" anchor="ctr">
+            <a:spAutoFit/>
+          </a:bodyPr>
+          <a:lstStyle/>
+          <a:p>
+            <a:pPr>
+              <a:spcAft>
+                <a:spcPts val="0"/>
+              </a:spcAft>
+            </a:pPr>
+            <a:r>
+              <a:rPr sz="1150" b="0" i="1">
+                <a:solidFill>
+                  <a:srgbClr val="1E2447"/>
+                </a:solidFill>
+                <a:latin typeface="Calibri"/>
+              </a:rPr>
+              <a:t>Every human unit from the person and family to the ten tiers works with a paired agent; authority stays with people.</a:t>
+            </a:r>
+          </a:p>
+        </p:txBody>
+      </p:sp>
+      <p:sp>
+        <p:nvSpPr>
+          <p:cNvPr id="41" name="TextBox 40"/>
+          <p:cNvSpPr txBox="1"/>
+          <p:nvPr/>
+        </p:nvSpPr>
+        <p:spPr>
+          <a:xfrm>
+            <a:off x="502920" y="4828032"/>
+            <a:ext cx="8138160" cy="256032"/>
+          </a:xfrm>
+          <a:prstGeom prst="rect">
+            <a:avLst/>
+          </a:prstGeom>
+          <a:noFill/>
+        </p:spPr>
+        <p:txBody>
+          <a:bodyPr wrap="square" lIns="0" rIns="0" tIns="0" bIns="0" anchor="ctr">
+            <a:spAutoFit/>
+          </a:bodyPr>
+          <a:lstStyle/>
+          <a:p>
+            <a:pPr>
+              <a:spcAft>
+                <a:spcPts val="0"/>
+              </a:spcAft>
+            </a:pPr>
+            <a:r>
+              <a:rPr sz="950" b="0" i="1">
+                <a:solidFill>
+                  <a:srgbClr val="5A6377"/>
+                </a:solidFill>
+                <a:latin typeface="Calibri"/>
+              </a:rPr>
+              <a:t>Study §8.3  ·  Technical Note  ·  AA pp. 14–15, 27–30, 65–67, 112–145  ·  MVD p. 268  ·  AnalyticMadhyasthDarshan.org  ·  28 / 33</a:t>
             </a:r>
           </a:p>
         </p:txBody>
@@ -35005,7 +37690,7 @@
                 </a:solidFill>
                 <a:latin typeface="Calibri"/>
               </a:rPr>
-              <a:t>JV pp. 47–48  ·  MVD p. 105  ·  AA pp. 41, 54–55, 77–78, 117  ·  AnalyticMadhyasthDarshan.org  ·  4 / 31</a:t>
+              <a:t>JV pp. 47–48  ·  MVD p. 105  ·  AA pp. 41, 54–55, 77–78, 117  ·  AnalyticMadhyasthDarshan.org  ·  4 / 33</a:t>
             </a:r>
           </a:p>
         </p:txBody>
@@ -36271,7 +38956,7 @@
                 </a:solidFill>
                 <a:latin typeface="Calibri"/>
               </a:rPr>
-              <a:t>AA pp. 26, 73, 93  ·  JV p. 152  ·  MVD pp. 96, 183, 282  ·  KD p. 114  ·  AnalyticMadhyasthDarshan.org  ·  5 / 31</a:t>
+              <a:t>AA pp. 26, 73, 93  ·  JV p. 152  ·  MVD pp. 96, 183, 282  ·  KD p. 114  ·  AnalyticMadhyasthDarshan.org  ·  5 / 33</a:t>
             </a:r>
           </a:p>
         </p:txBody>
@@ -37678,7 +40363,7 @@
                 </a:solidFill>
                 <a:latin typeface="Calibri"/>
               </a:rPr>
-              <a:t>AA pp. 13, 20–21, 48, 50, 92  ·  JV pp. 72–73, 137  ·  AnalyticMadhyasthDarshan.org  ·  6 / 31</a:t>
+              <a:t>AA pp. 13, 20–21, 48, 50, 92  ·  JV pp. 72–73, 137  ·  AnalyticMadhyasthDarshan.org  ·  6 / 33</a:t>
             </a:r>
           </a:p>
         </p:txBody>
@@ -38697,7 +41382,7 @@
                 </a:solidFill>
                 <a:latin typeface="Calibri"/>
               </a:rPr>
-              <a:t>JV pp. 72–73  ·  AA pp. 17–18  ·  AnalyticMadhyasthDarshan.org  ·  7 / 31</a:t>
+              <a:t>JV pp. 72–73  ·  AA pp. 17–18  ·  AnalyticMadhyasthDarshan.org  ·  7 / 33</a:t>
             </a:r>
           </a:p>
         </p:txBody>
@@ -40168,7 +42853,7 @@
                 </a:solidFill>
                 <a:latin typeface="Calibri"/>
               </a:rPr>
-              <a:t>AA p. 95  ·  Study §2.2  ·  AnalyticMadhyasthDarshan.org  ·  8 / 31</a:t>
+              <a:t>AA p. 95  ·  Study §2.2  ·  AnalyticMadhyasthDarshan.org  ·  8 / 33</a:t>
             </a:r>
           </a:p>
         </p:txBody>
@@ -41577,7 +44262,7 @@
                 </a:solidFill>
                 <a:latin typeface="Calibri"/>
               </a:rPr>
-              <a:t>JV pp. 162–163  ·  AA pp. 33, 48, 58–59, 78  ·  MVD p. 128  ·  AnalyticMadhyasthDarshan.org  ·  9 / 31</a:t>
+              <a:t>JV pp. 162–163  ·  AA pp. 33, 48, 58–59, 78  ·  MVD p. 128  ·  AnalyticMadhyasthDarshan.org  ·  9 / 33</a:t>
             </a:r>
           </a:p>
         </p:txBody>

--- a/Studies/Prosperity-Economics-And-Right-Use/Prosperity-Economics-And-Right-Use-Madhyasth-Darshan.pptx
+++ b/Studies/Prosperity-Economics-And-Right-Use/Prosperity-Economics-And-Right-Use-Madhyasth-Darshan.pptx
@@ -1184,13 +1184,13 @@
           <a:lstStyle/>
           <a:p>
             <a:r>
-              <a:t>Value in Madhyasth Darshan is not price. The value of a unit is its participation in the orderliness of the whole: what its activity fulfils in relation to others. For produced things this participation is usefulness, what food, shelter, a tool or a vehicle fulfils in nourishing and protecting the body and in social participation. The collection's study of axiology develops this account. Human labour is the activity that establishes usefulness and beauty upon natural abundance. The value of an object is determined in a chain: labour-based object, object-based usefulness, usefulness-based valuation (AA p. 49). Evaluation can be made only of labour, not of symbolic objects (AA p. 112).</a:t>
+              <a:t>Value in Madhyasth Darshan is not price. The value of a unit is its participation in the orderliness of the whole: what its activity fulfils in relation to others. For produced things this participation is usefulness, what food, shelter, a tool or a vehicle fulfils in nourishing and protecting the body and in social participation. The collection's study of axiology develops this account. Human labour is the joint deployment of mind (manas, the jeevan powers) and body that establishes usefulness and beauty upon natural abundance (AA p. 143). The value of an object is determined in a chain: labour-based object, object-based usefulness, usefulness-based valuation (AA p. 49). Evaluation can be made only of labour, not of symbolic objects (AA p. 112).</a:t>
             </a:r>
           </a:p>
           <a:p/>
           <a:p>
             <a:r>
-              <a:t>For exchange, the treatise proposes a practical method. Wheat sown under various circumstances yields various quantities, and the midpoint gives a common value for the labour of producing wheat (AA p. 66). Each person's pace of work, the time and the means count, and a product made in measured time counts as one unit of labour (AA pp. 119, 145). Inside the family, contributions are not weighed: the goal is the product, not more or less labour (AA pp. 119–120).</a:t>
+              <a:t>For exchange between families and villages, the treatise evaluates labour by the total combination of five factors: skill (kushalata), proficiency (nipunata), speed of work (karya-gati), time (samay) and means (sadhan), together with scholarliness (panditya) (AA pp. 119, 145). Wheat sown under various circumstances yields various quantities, and the midpoint gives a common value for the labour of producing wheat (AA p. 66). Inside the ten-member family, by contrast, individual contributions and dependency ratios are not weighed: the goal is the product and mutual fulfilment, not more or less labour (AA pp. 119–120).</a:t>
             </a:r>
           </a:p>
           <a:p/>
@@ -1594,7 +1594,7 @@
           <a:lstStyle/>
           <a:p>
             <a:r>
-              <a:t>In the cyclical economy, every villager is trained across multiple occupations, planned jointly by the education, production and exchange-reserve committees, so that no one suffers occupational fear (AA pp. 64–65, 131). Research and dissemination are inseparable: just as one grain multiplies into hundreds only when sown in the field, knowledge and skill reach fruition through dissemination, not through patent monopolies that sell research while concealing the method (AA pp. 56–58; JV pp. 88–89).</a:t>
+              <a:t>In the cyclical economy, every villager is trained across multiple occupations, planned jointly by the education, production and exchange-reserve committees, so that no one suffers occupational fear (AA pp. 64–65, 131). Under “Security of production” (AA p. 144), when a producer or researcher develops an original tool, procedure, method or formula (maulikta) not previously in the tradition, four village committees record its drawings and formulas in writing and honour the inventor with prizes and awards (puraskar), which count as righteous wealth (svadhan, AA p. 140). Research and dissemination remain inseparable: just as one grain multiplies into hundreds only when sown in the field, knowledge and skill reach fruition through open dissemination, not through patent monopolies that sell research while concealing the method (AA pp. 56–58; JV pp. 88–89).</a:t>
             </a:r>
           </a:p>
           <a:p/>
@@ -1606,7 +1606,7 @@
           <a:p/>
           <a:p>
             <a:r>
-              <a:t>Against this, every person is to be engaged in production according to capacity, receptivity and ability (MVD p. 265). Means rightly used increase the usefulness labour establishes and reduce the time production takes across generations, while keeping every member of every family a producer (AA p. 118; JVD p. 216).</a:t>
+              <a:t>Against this, every person is to be engaged in production according to capacity, receptivity and ability (MVD p. 265). Once an improved tool is disseminated across society, the unit labour value of the product falls and the means of production increase while the time production takes decreases across generations, keeping every member of every family a producer (AA pp. 118, 145; JVD p. 216).</a:t>
             </a:r>
           </a:p>
         </p:txBody>
@@ -16998,7 +16998,7 @@
         </p:spPr>
         <p:txBody>
           <a:bodyPr wrap="square" lIns="0" rIns="0" tIns="0" bIns="0" anchor="t">
-            <a:spAutoFit/>
+            <a:noAutofit/>
           </a:bodyPr>
           <a:lstStyle/>
           <a:p>
@@ -17014,7 +17014,7 @@
                 </a:solidFill>
                 <a:latin typeface="Calibri"/>
               </a:rPr>
-              <a:t>Pace, time and means; a common value from the range of yields. Inside the family, no weighing.</a:t>
+              <a:t>Skill, proficiency, speed, time and means; a common value from the range of yields. Inside the family, no weighing.</a:t>
             </a:r>
           </a:p>
         </p:txBody>
@@ -17200,7 +17200,7 @@
         </p:spPr>
         <p:txBody>
           <a:bodyPr wrap="square" lIns="0" rIns="0" tIns="0" bIns="0" anchor="ctr">
-            <a:spAutoFit/>
+            <a:noAutofit/>
           </a:bodyPr>
           <a:lstStyle/>
           <a:p>
@@ -17216,7 +17216,7 @@
                 </a:solidFill>
                 <a:latin typeface="Calibri"/>
               </a:rPr>
-              <a:t>AA pp. 49, 66, 112, 119–120, 145  ·  MVD pp. 265–268  ·  Axiology §§1.1, 1.5–1.6  ·  AnalyticMadhyasthDarshan.org  ·  18 / 33</a:t>
+              <a:t>AA pp. 49, 66, 112, 119–120, 143, 145  ·  MVD pp. 265–268  ·  Axiology §§1.1, 1.5–1.6  ·  AnalyticMadhyasthDarshan.org  ·  18 / 33</a:t>
             </a:r>
           </a:p>
         </p:txBody>
@@ -20217,7 +20217,7 @@
         </p:spPr>
         <p:txBody>
           <a:bodyPr wrap="square" lIns="0" rIns="0" tIns="0" bIns="0" anchor="ctr">
-            <a:spAutoFit/>
+            <a:noAutofit/>
           </a:bodyPr>
           <a:lstStyle/>
           <a:p>
@@ -20233,7 +20233,7 @@
                 </a:solidFill>
                 <a:latin typeface="Cambria"/>
               </a:rPr>
-              <a:t>Open skills &amp; dissemination</a:t>
+              <a:t>Honoured invention &amp; open skills</a:t>
             </a:r>
           </a:p>
         </p:txBody>
@@ -20256,7 +20256,7 @@
         </p:spPr>
         <p:txBody>
           <a:bodyPr wrap="square" lIns="0" rIns="0" tIns="0" bIns="0" anchor="t">
-            <a:spAutoFit/>
+            <a:noAutofit/>
           </a:bodyPr>
           <a:lstStyle/>
           <a:p>
@@ -20272,7 +20272,7 @@
                 </a:solidFill>
                 <a:latin typeface="Calibri"/>
               </a:rPr>
-              <a:t>Research and dissemination are inseparable; multi-occupation skills are taught to all, never enclosed by patents.</a:t>
+              <a:t>Original tools and methods are recorded and honoured with prizes (puraskar), then taught openly without patents.</a:t>
             </a:r>
           </a:p>
         </p:txBody>
@@ -20792,7 +20792,7 @@
         </p:spPr>
         <p:txBody>
           <a:bodyPr wrap="square" lIns="0" rIns="0" tIns="0" bIns="0" anchor="ctr">
-            <a:spAutoFit/>
+            <a:noAutofit/>
           </a:bodyPr>
           <a:lstStyle/>
           <a:p>
@@ -20808,7 +20808,7 @@
                 </a:solidFill>
                 <a:latin typeface="Calibri"/>
               </a:rPr>
-              <a:t>SB p. 267  ·  AA pp. 29, 47, 56–58, 107, 118, 131  ·  JV pp. 88–89  ·  JVD pp. 35, 216  ·  MVD p. 265  ·  21 / 33</a:t>
+              <a:t>SB p. 267  ·  AA pp. 29, 47, 56–58, 107, 118, 131, 140, 144  ·  JV pp. 88–89  ·  JVD pp. 35, 216  ·  MVD p. 265  ·  21 / 33</a:t>
             </a:r>
           </a:p>
         </p:txBody>

--- a/Studies/Prosperity-Economics-And-Right-Use/Prosperity-Economics-And-Right-Use-Madhyasth-Darshan.pptx
+++ b/Studies/Prosperity-Economics-And-Right-Use/Prosperity-Economics-And-Right-Use-Madhyasth-Darshan.pptx
@@ -1354,13 +1354,13 @@
           <a:p/>
           <a:p>
             <a:r>
-              <a:t>The darshan distinguishes animal instincts from the three humane motives: progeny (putreshana), wealth (vitteshana), and public welfare or reputation (lokeshana), with public welfare highest (MVD pp. 318, 320). It also contrasts five kinds of human living: servile, voluptuary and glorious humans driven by sensory interest, the virtuous human on the path of awakening, and the capable human living by values (AA pp. 101–102).</a:t>
+              <a:t>The darshan distinguishes animal instincts from the three humane motives: progeny (putreshana), wealth (vitteshana), and public welfare or reputation (lokeshana), with public welfare highest (MVD pp. 318, 320). It also connects economic orientation to five kinds of human living: animalistic and demonic humans prior to awakening, and humane, deific and divine humans who replace interest-based consumption with value-based and goal-based living (AA pp. 101–102, 132).</a:t>
             </a:r>
           </a:p>
           <a:p/>
           <a:p>
             <a:r>
-              <a:t>Within the family goods are shared; between families they are exchanged (AA p. 1). Those who cannot produce are cared for through kindness, and surplus flows into generosity and benevolence (MVD p. 339; KD p. 116).</a:t>
+              <a:t>How do individuals doing service (seva) obtain the objects they need when they do not produce a physical commodity? The texts name agriculture and industry as the two primary forms of production, with all other vocations complementary to them (MVD p. 267), and distinguish benevolence-focused service (upkar-pradhan seva) from remuneration-focused service (pratiphal-pradhan seva, MVD p. 72). Household care, teaching, part-time village committee duties (AA p. 127), and full-time representation in the ten-tier council order (lok-pratinidhi) are sustained directly by the ten-member prosperous family (KD pp. 115–117; AA pp. 1, 119–120). Conversely, dedicated village services (the ninth branch of the village production system on AA pp. 133, 136 — repairing bicycles, radios, TVs and machines, washing, barbering, or staffing the exchange-reserve on AA p. 138) preserve the usefulness of goods; the village family council fixes their remuneration (AA p. 136), which credits their account in the autonomous cooperative exchange-reserve (AA pp. 137–138) so they can draw food, clothing and needed objects at labour value. Those unable to work receive goods through kindness (AA pp. 23–24, 140).</a:t>
             </a:r>
           </a:p>
         </p:txBody>
@@ -1682,7 +1682,7 @@
           <a:p/>
           <a:p>
             <a:r>
-              <a:t>Ten families form a family cluster, ten clusters a hundred-family village with nine branches of production (agriculture, go-shala, forestry, cottage crafts and related work; AA pp. 133–136), and ten tiers reach the world family council. Representatives are selected by mutual recognition with zero election expenditure and serve part-time while continuing production, keeping at least eighty percent of society prosperous in production and twenty percent in coordination (AA pp. 27–30, 110, 127; MVD p. 259).</a:t>
+              <a:t>Ten families form a family cluster, ten clusters a hundred-family village with nine branches of work (agriculture, animal husbandry, forestry, minerals, handicrafts, village crafts, cottage industry, village industry and service; AA pp. 133–136), and ten tiers reach the world family council. Representatives are selected by consensus with zero election expenditure and serve part-time while continuing production, so governance never creates a non-producing class and every family produces more than its needs, while higher tiers coordinate medium and large industry and calamity buffers (AA pp. 27–30, 72, 110, 115, 127; MVD pp. 259, 267).</a:t>
             </a:r>
           </a:p>
           <a:p/>
@@ -17893,7 +17893,7 @@
         </p:spPr>
         <p:txBody>
           <a:bodyPr wrap="square" lIns="0" rIns="0" tIns="0" bIns="0" anchor="ctr">
-            <a:spAutoFit/>
+            <a:noAutofit/>
           </a:bodyPr>
           <a:lstStyle/>
           <a:p>
@@ -17909,7 +17909,7 @@
                 </a:solidFill>
                 <a:latin typeface="Cambria"/>
               </a:rPr>
-              <a:t>Care for those who cannot produce</a:t>
+              <a:t>Service (seva) &amp; care for all</a:t>
             </a:r>
           </a:p>
         </p:txBody>
@@ -17932,7 +17932,7 @@
         </p:spPr>
         <p:txBody>
           <a:bodyPr wrap="square" lIns="0" rIns="0" tIns="0" bIns="0" anchor="t">
-            <a:spAutoFit/>
+            <a:noAutofit/>
           </a:bodyPr>
           <a:lstStyle/>
           <a:p>
@@ -17948,7 +17948,7 @@
                 </a:solidFill>
                 <a:latin typeface="Calibri"/>
               </a:rPr>
-              <a:t>Sharing within the family; kindness that brings an object where there is receptivity but no object.</a:t>
+              <a:t>Family care &amp; council duties are sustained by the 10-member household; village repair/service is paid council-fixed remuneration via the reserve.</a:t>
             </a:r>
           </a:p>
         </p:txBody>
@@ -18010,7 +18010,7 @@
         </p:spPr>
         <p:txBody>
           <a:bodyPr wrap="square" lIns="0" rIns="0" tIns="0" bIns="0" anchor="ctr">
-            <a:spAutoFit/>
+            <a:noAutofit/>
           </a:bodyPr>
           <a:lstStyle/>
           <a:p>
@@ -18026,7 +18026,7 @@
                 </a:solidFill>
                 <a:latin typeface="Calibri"/>
               </a:rPr>
-              <a:t>AA pp. 1, 22–24, 54, 101–102, 140  ·  MVD pp. 59, 211, 263, 318–320, 339  ·  KD pp. 1–2, 116–117  ·  AnalyticMadhyasthDarshan.org  ·  19 / 33</a:t>
+              <a:t>AA pp. 1, 22–24, 54, 101–102, 136–138, 140  ·  MVD pp. 59, 72, 263, 267, 318–320, 339  ·  KD pp. 1–2, 115–117  ·  19 / 33</a:t>
             </a:r>
           </a:p>
         </p:txBody>
@@ -21657,7 +21657,7 @@
         </p:spPr>
         <p:txBody>
           <a:bodyPr wrap="square" lIns="0" rIns="0" tIns="0" bIns="0" anchor="t">
-            <a:spAutoFit/>
+            <a:noAutofit/>
           </a:bodyPr>
           <a:lstStyle/>
           <a:p>
@@ -21673,7 +21673,7 @@
                 </a:solidFill>
                 <a:latin typeface="Calibri"/>
               </a:rPr>
-              <a:t>A 100-family village with nine production branches; ten tiers of part-time councils (zero election cost); 80% in production, 20% in service.</a:t>
+              <a:t>A 100-family village with nine branches (agriculture, crafts, industry, service); ten tiers of part-time councils with zero election cost.</a:t>
             </a:r>
           </a:p>
         </p:txBody>

--- a/Studies/Prosperity-Economics-And-Right-Use/Prosperity-Economics-And-Right-Use-Madhyasth-Darshan.pptx
+++ b/Studies/Prosperity-Economics-And-Right-Use/Prosperity-Economics-And-Right-Use-Madhyasth-Darshan.pptx
@@ -1354,13 +1354,13 @@
           <a:p/>
           <a:p>
             <a:r>
-              <a:t>The darshan distinguishes animal instincts from the three humane motives: progeny (putreshana), wealth (vitteshana), and public welfare or reputation (lokeshana), with public welfare highest (MVD pp. 318, 320). It also connects economic orientation to five kinds of human living: animalistic and demonic humans prior to awakening, and humane, deific and divine humans who replace interest-based consumption with value-based and goal-based living (AA pp. 101–102, 132).</a:t>
+              <a:t>The darshan distinguishes animal instincts from the three humane motives: progeny (putreshana), wealth (vitteshana), and public welfare or reputation (lokeshana), with public welfare highest (MVD pp. 318, 320). Upon awakening, once a ten-member family (where two to four members already produce beyond the household's limited physical needs) achieves resolution and prosperity, the propensity of benevolence (upkar — help and inspiration for awakening and prosperity, MVD p. 72; AA pp. 23–24, 101) naturally arises (KD pp. 115–116). Instead of diverting surplus into limitless accumulation (sangrah), household abundance is channelled into use within the family, right use (sadupyog) in society, and purposeful use in the universal order (KD pp. 116–117; AA p. 116; MVD p. 150). That is also why the higher societal services that sustain awakening and orderliness — education, medical care, justice, and governance — must be performed with benevolence rather than sold as commercial trades (AA pp. 45–46; JV pp. 166–168).</a:t>
             </a:r>
           </a:p>
           <a:p/>
           <a:p>
             <a:r>
-              <a:t>How do individuals doing service (seva) obtain the objects they need when they do not produce a physical commodity? The texts name agriculture and industry as the two primary forms of production, with all other vocations complementary to them (MVD p. 267), and distinguish benevolence-focused service (upkar-pradhan seva) from remuneration-focused service (pratiphal-pradhan seva, MVD p. 72). Household care, teaching, part-time village committee duties (AA p. 127), and full-time representation in the ten-tier council order (lok-pratinidhi) are sustained directly by the ten-member prosperous family (KD pp. 115–117; AA pp. 1, 119–120). Conversely, dedicated village services (the ninth branch of the village production system on AA pp. 133, 136 — repairing bicycles, radios, TVs and machines, washing, barbering, or staffing the exchange-reserve on AA p. 138) preserve the usefulness of goods; the village family council fixes their remuneration (AA p. 136), which credits their account in the autonomous cooperative exchange-reserve (AA pp. 137–138) so they can draw food, clothing and needed objects at labour value. Those unable to work receive goods through kindness (AA pp. 23–24, 140).</a:t>
+              <a:t>How are services (seva) organised, which vocations fall where, and how do practitioners obtain the physical objects they need? The texts name agriculture and industry as the two primary forms of production, with all other vocations complementary to them (MVD p. 267), and distinguish two forms of service (MVD p. 72). First, benevolence-focused service (upkar-pradhan seva) covers household care, child and elder support, teaching under the education-sanskar committee (AA pp. 24, 29, 130–132, 140), medical care and healing by doctors under the health-restraint committee at village and regional medical centres (AA pp. 139–140; JV pp. 166–168), part-time committee duties (AA p. 127), and full-time council representation (lok-pratinidhi, KD pp. 116–117); because these practitioners belong to a self-reliant ten-member family producing in excess of need, their household's abundance provides all objects needed for their bodily nourishment, protection, and societal motion without salaried jobs (KD pp. 115–117; AA pp. 119–120, 137). Second, remuneration-focused service (pratiphal-pradhan seva) covers the ninth branch of the village production system (AA pp. 133, 136) and exchange-reserve staffing (AA p. 138) — repairing bicycles, radios, TVs and machines, washing clothes, barbering, and running the exchange-reserve — whose council-fixed remuneration (parishramik as svadhan, AA pp. 136, 140) credits their account in the cooperative exchange-reserve (AA pp. 137–138) so they draw needed objects at labour value.</a:t>
             </a:r>
           </a:p>
         </p:txBody>
@@ -17785,7 +17785,7 @@
                 </a:solidFill>
                 <a:latin typeface="Cambria"/>
               </a:rPr>
-              <a:t>Generosity</a:t>
+              <a:t>Generosity &amp; benevolence (upkar)</a:t>
             </a:r>
           </a:p>
         </p:txBody>
@@ -17824,7 +17824,7 @@
                 </a:solidFill>
                 <a:latin typeface="Calibri"/>
               </a:rPr>
-              <a:t>Offering body, mind and wealth, as needed, for others' awakening, health and prosperity; wealth is satisfied through it.</a:t>
+              <a:t>From family abundance arises benevolence (upkar), directing surplus into right use in society rather than accumulation.</a:t>
             </a:r>
           </a:p>
         </p:txBody>
@@ -17909,7 +17909,7 @@
                 </a:solidFill>
                 <a:latin typeface="Cambria"/>
               </a:rPr>
-              <a:t>Service (seva) &amp; care for all</a:t>
+              <a:t>Two forms of service (seva)</a:t>
             </a:r>
           </a:p>
         </p:txBody>
@@ -17948,7 +17948,7 @@
                 </a:solidFill>
                 <a:latin typeface="Calibri"/>
               </a:rPr>
-              <a:t>Family care &amp; council duties are sustained by the 10-member household; village repair/service is paid council-fixed remuneration via the reserve.</a:t>
+              <a:t>Upkar-pradhan (teaching, healing, councils) is sustained by the prosperous family; pratiphal-pradhan (repair, upkeep) earns reserve credit.</a:t>
             </a:r>
           </a:p>
         </p:txBody>
@@ -17987,7 +17987,7 @@
                 </a:solidFill>
                 <a:latin typeface="Calibri"/>
               </a:rPr>
-              <a:t>Once a family is resolved and prosperous, the propensity of benevolence answers where its surplus goes.</a:t>
+              <a:t>Once a family is prosperous, benevolence directs its surplus into right use rather than accumulation.</a:t>
             </a:r>
           </a:p>
         </p:txBody>

--- a/Studies/Prosperity-Economics-And-Right-Use/Prosperity-Economics-And-Right-Use-Madhyasth-Darshan.pptx
+++ b/Studies/Prosperity-Economics-And-Right-Use/Prosperity-Economics-And-Right-Use-Madhyasth-Darshan.pptx
@@ -1360,7 +1360,7 @@
           <a:p/>
           <a:p>
             <a:r>
-              <a:t>How are services (seva) organised, which vocations fall where, and how do practitioners obtain the physical objects they need? The texts name agriculture and industry as the two primary forms of production, with all other vocations complementary to them (MVD p. 267), and distinguish two forms of service (MVD p. 72). First, benevolence-focused service (upkar-pradhan seva) covers household care, child and elder support, teaching under the education-sanskar committee (AA pp. 24, 29, 130–132, 140), medical care and healing by doctors under the health-restraint committee at village and regional medical centres (AA pp. 139–140; JV pp. 166–168), part-time committee duties (AA p. 127), and full-time council representation (lok-pratinidhi, KD pp. 116–117); because these practitioners belong to a self-reliant ten-member family producing in excess of need, their household's abundance provides all objects needed for their bodily nourishment, protection, and societal motion without salaried jobs (KD pp. 115–117; AA pp. 119–120, 137). Second, remuneration-focused service (pratiphal-pradhan seva) covers the ninth branch of the village production system (AA pp. 133, 136) and exchange-reserve staffing (AA p. 138) — repairing bicycles, radios, TVs and machines, washing clothes, barbering, and running the exchange-reserve — whose council-fixed remuneration (parishramik as svadhan, AA pp. 136, 140) credits their account in the cooperative exchange-reserve (AA pp. 137–138) so they draw needed objects at labour value.</a:t>
+              <a:t>How are services (seva) organised, which vocations fall where, and how do practitioners obtain the physical objects they need? The texts name agriculture and industry as the two primary forms of production, with all other vocations complementary to them (MVD p. 267), and distinguish two forms of service (MVD p. 72). First, benevolence-focused service (upkar-pradhan seva) covers household care, child and elder support, teaching under the education-sanskar committee (AA pp. 24, 29, 130–132, 140), medical care and healing by doctors under the health-restraint committee at village and regional medical centres (AA pp. 139–140; JV pp. 166–168), part-time committee duties (AA p. 127), and full-time council representation (lok-pratinidhi, KD pp. 116–117); because these practitioners belong to a self-reliant ten-member family producing in excess of need, their household's abundance provides all objects needed for their bodily nourishment, protection, and societal motion without salaried jobs (KD pp. 115–117; AA pp. 119–120, 137). Second, remuneration-focused service (pratiphal-pradhan seva) covers the ninth branch of the village production system (AA pp. 133, 136) and exchange-reserve staffing (AA p. 138) — repairing bicycles, radios, TVs and machines, washing clothes, barbering, and running the exchange-reserve — whose council-fixed remuneration (parishramik as svadhan, AA pp. 136, 140) credits their account in the cooperative exchange-reserve (AA pp. 137–138) so they draw needed objects at labour value. Healing the body falls on the unpaid side of this line because restoring a person in disease is a direct work of kindness and generosity in human relationship that fees corrupt into a trade in suffering (AA pp. 22–24, 45–46, 140; JV pp. 166–168), whereas repair, laundry, barbering, and reserve staffing maintain produced objects and village operations.</a:t>
             </a:r>
           </a:p>
         </p:txBody>
@@ -2654,7 +2654,7 @@
           <a:p/>
           <a:p>
             <a:r>
-              <a:t>At the family level (10–12 members; AA pp. 14, 26, 65), a Family AI Agent helps the household assess its common and special aspirations (AA p. 112), tracks actual use and stock age against hoarding or spoilage, coordinates restful family production without weighing individual labour shares (AA pp. 119–120), and publishes only aggregate need and surplus to the village. At Tiers 1 and 2, Cluster, Village Council, and five Committee Agents (production-work, exchange-reserve, education-sanskar, health-restraint, and justice-security) maintain the living village survey, link the five dimensions horizontally, and run the three-stage transition ledgers alongside the three-person exchange-reserve staff (AA pp. 125–145).</a:t>
+              <a:t>At the family level (10–12 members; AA pp. 14, 26, 65), a Family AI Agent helps the household assess its common and special aspirations (AA p. 112), tracks actual use and stock age against hoarding or spoilage, coordinates complementary family production without weighing individual labour shares (AA pp. 119–120), and publishes only aggregate need and surplus to the village. At Tiers 1 and 2, Cluster, Village Council, and five Committee Agents (production-work, exchange-reserve, education-sanskar, health-restraint, and justice-security) maintain the living village survey, link the five dimensions horizontally, and run the three-stage transition ledgers alongside the three-person exchange-reserve staff (AA pp. 125–145).</a:t>
             </a:r>
           </a:p>
           <a:p/>
@@ -16206,7 +16206,7 @@
                 </a:solidFill>
                 <a:latin typeface="Calibri"/>
               </a:rPr>
-              <a:t>III  ·  THE VALUE OF LABOUR  ·  §§3.6, 3.12</a:t>
+              <a:t>III  ·  THE VALUE OF LABOUR  ·  §§3.6, 3.13</a:t>
             </a:r>
           </a:p>
         </p:txBody>
@@ -17413,7 +17413,7 @@
                 </a:solidFill>
                 <a:latin typeface="Calibri"/>
               </a:rPr>
-              <a:t>III  ·  CHARACTER  ·  §3.7</a:t>
+              <a:t>III  ·  CHARACTER &amp; SERVICE  ·  §§3.7–3.8</a:t>
             </a:r>
           </a:p>
         </p:txBody>
@@ -19010,7 +19010,7 @@
                 </a:solidFill>
                 <a:latin typeface="Calibri"/>
               </a:rPr>
-              <a:t>III  ·  NATURE'S BALANCE  ·  §3.8</a:t>
+              <a:t>III  ·  NATURE'S BALANCE  ·  §3.9</a:t>
             </a:r>
           </a:p>
         </p:txBody>
@@ -20109,7 +20109,7 @@
                 </a:solidFill>
                 <a:latin typeface="Calibri"/>
               </a:rPr>
-              <a:t>III  ·  SKILL AND TECHNIQUE  ·  §§3.9–3.10</a:t>
+              <a:t>III  ·  SKILL AND TECHNIQUE  ·  §§3.10–3.11</a:t>
             </a:r>
           </a:p>
         </p:txBody>
@@ -21005,7 +21005,7 @@
                 </a:solidFill>
                 <a:latin typeface="Calibri"/>
               </a:rPr>
-              <a:t>III  ·  ORDERLINESS  ·  §§3.11–3.12</a:t>
+              <a:t>III  ·  ORDERLINESS  ·  §§3.12–3.13</a:t>
             </a:r>
           </a:p>
         </p:txBody>
@@ -22111,7 +22111,7 @@
                 </a:solidFill>
                 <a:latin typeface="Calibri"/>
               </a:rPr>
-              <a:t>III  ·  TRANSITION  ·  §3.13</a:t>
+              <a:t>III  ·  TRANSITION  ·  §3.14</a:t>
             </a:r>
           </a:p>
         </p:txBody>
@@ -28252,7 +28252,7 @@
                 </a:solidFill>
                 <a:latin typeface="Calibri"/>
               </a:rPr>
-              <a:t>Family Agent: need &amp; restful work</a:t>
+              <a:t>Family Agent: need &amp; shared work</a:t>
             </a:r>
           </a:p>
         </p:txBody>

--- a/Studies/Prosperity-Economics-And-Right-Use/Prosperity-Economics-And-Right-Use-Madhyasth-Darshan.pptx
+++ b/Studies/Prosperity-Economics-And-Right-Use/Prosperity-Economics-And-Right-Use-Madhyasth-Darshan.pptx
@@ -534,19 +534,19 @@
           <a:lstStyle/>
           <a:p>
             <a:r>
-              <a:t>This deck presents the study Prosperity Economics and Right Use. It asks a question that ordinary economics rarely asks: why do human economies, unlike every other order of nature, fail to reach balance? And what would an economy look like that gives human labour its true value, judged by the usefulness it establishes, rather than by scarcity, accumulation and price?</a:t>
+              <a:t>This deck presents the study Prosperity Economics and Right Use. It brings out Madhyasth Darshan's vision of an economy of resolved (samadhan), prosperous (samriddhi), fearless (abhay) individuals coexisting with nature across the ten-tier order at the scale of the Earth and in universal orderliness — and asks how human labour can receive its true value, judged by the usefulness it establishes rather than by scarcity, accumulation and price.</a:t>
             </a:r>
           </a:p>
           <a:p/>
           <a:p>
             <a:r>
-              <a:t>The study's principal source is Avartansheel Arthshastra, Shri A. Nagraj's treatise on cyclical economics, read through the project's working English translation. It draws as well on Madhyasth Darshan, Jeevan Vidya, Samadhanatmak Bhautikvad, Karm Darshan, Janvad and Adhyatmvad, and it compares the darshan's account with classical, Marxian, marginalist, institutional, ecological and Gandhian economics, with Indian and Advaita teaching on desire, and with the sciences of satiation and natural limits.</a:t>
+              <a:t>The study's principal source is Avartansheel Arthshastra, Shri A. Nagraj's treatise on cyclical economics, read alongside Madhyasth Darshan, Jeevan Vidya, Samadhanatmak Bhautikvad, Karm Darshan, Janvad and Adhyatmvad. It demonstrates why this vision is genuinely new: existing economic theories — mainstream neoclassical and heterodox Marxian, institutional, ecological, capability and Gandhian traditions alike — treat the human being as a single body-centric unit and hit structural deadlocks that cannot be resolved without recognising jeevan (the constitutionally complete conscious atom) and realisation (anubhav) in coexistence.</a:t>
             </a:r>
           </a:p>
           <a:p/>
           <a:p>
             <a:r>
-              <a:t>The deck follows the study in five parts: balance in nature and in the body; the source of insatiability and the genealogy of money and profit; cyclical economics; comparison with economic traditions and the sciences; and why intelligent systems and multi-level AI agents across the ten-tier order are needed to accelerate transition and keep the cycle in balance, while leaving normative judgement to people.</a:t>
+              <a:t>Finally, the deck shows why a strong, federated ten-tier AI agentic backbone is a structural requirement — not an optional convenience — for an Earth-scale civilization whose members are in the process of realisation (anubhav-gami). By making objective facts and checkable causal logic visible in common view to families, committees and councils, paired AI agents ensure that inconsistencies cannot be ignored and enable collective self-correction across all ten tiers while keeping normative judgement with people.</a:t>
             </a:r>
           </a:p>
         </p:txBody>
@@ -862,13 +862,13 @@
           <a:lstStyle/>
           <a:p>
             <a:r>
-              <a:t>Cyclical economics is the right use, security and prosperity of resources, artha, in the form of body, mind and wealth (AA p. 25). The means of a human being are only body, mind and wealth (MVD p. 243). In doing so, the five powers of jeevan project into human living through bodily skill and proficiency, and reflect back in mutual evaluation across family and society (AA pp. 18–19, 48–50). Labour applied with skill and proficiency to natural abundance produces objects that carry usefulness value and aesthetic value. These objects are wealth, dhan. Wealth is only the produced object, not money (AA pp. 25, 105).</a:t>
+              <a:t>Cyclical economics is the right use, security and prosperity of resources, artha, in the form of body, mind and wealth (AA p. 25; MVD p. 243). Through paravartan–pratyavartan, the five powers of jeevan project into human living through bodily skill and proficiency, and reflect back in mutual evaluation across family and society (AA pp. 18–19, 48–50). In that state, the restfulness of labour is resolution itself (shram ka vishram = samadhan, AA p. 23): productive work is how a resolved jeevan expresses justice and generosity through the body, breaking the classical trilemma that treats work as disutility requiring either wage fear or unequal pay.</a:t>
             </a:r>
           </a:p>
           <a:p/>
           <a:p>
             <a:r>
-              <a:t>This changes what counts as capital. All production is the outcome of human labour applied to natural abundance, so the primary wealth is the labour power inherent in human beings, and this primary capital is always the person's own (AA p. 73). Earning wealth is the definite measure of usefulness and aesthetic value realised from natural abundance through the planned deployment of labour (MVD p. 56). Because the powers of jeevan are inexhaustible, every human being can produce more than immediate necessity; Samadhanatmak Bhautikvad calls this the foundational principle of human prosperity (SB p. 268). Janvad proposes that public dialogue on the economy begin from this recognition (JVD p. 215).</a:t>
+              <a:t>Labour applied with skill and proficiency to natural abundance produces objects that carry usefulness value and aesthetic value. Wealth (dhan) is only the produced object, not money (AA pp. 25, 105), and the primary capital is human labour power, which is always the person's own (AA p. 73; MVD p. 56). Because the powers of jeevan are inexhaustible, every human being can produce more than immediate necessity — the foundational principle of human prosperity (SB p. 268; JVD p. 215).</a:t>
             </a:r>
           </a:p>
         </p:txBody>
@@ -1102,19 +1102,19 @@
           <a:lstStyle/>
           <a:p>
             <a:r>
-              <a:t>The cycle closes only where need is definite, and the darshan locates that definiteness in the family. A family is a limited number of autonomous people, at least ten, living together with justice: recognising their relationships, fulfilling the values in them, evaluating, reaching mutual satisfaction, and complementary to one another in the family's production (AA pp. 14, 65). Needs are ascertained at the level of the family, not the individual (JV p. 153). In a humane family, needs become limited because use, right use and purposeful use become definite, and production in excess of need is therefore possible in every family (AA p. 26). In a wise family, two to four members may produce beyond the whole family's necessity (KD p. 115).</a:t>
+              <a:t>The cycle closes only where need is definite, and the darshan locates that definiteness in the family: at least ten autonomous people living together with justice, recognising relationships, fulfilling values, and complementary in production (AA pp. 14, 65; JV p. 153). Why can a ten-member household share unconditionally according to need without weighing individual labour or dependency ratios (AA pp. 119–120), when historical communes frayed along biological kinship lines? Because members recognise one another not as genetic kin competing for resources, but as constitutionally identical conscious units (jeevan) whose bodies serve a shared journey of awakening. In a wise family, two to four members easily produce beyond the whole family's limited necessity (AA p. 26; KD p. 115).</a:t>
             </a:r>
           </a:p>
           <a:p/>
           <a:p>
             <a:r>
-              <a:t>Prosperity follows directly. The lack of the sentiment of lacking is prosperity, and production in excess of needs is prosperity (MVD p. 71). Its basis is the sum of objects produced in excess of need, together with their right use and security (AA p. 113). Prosperity cannot be private: for one family to be prosperous, more than one family must be (AA pp. 62–63).</a:t>
+              <a:t>Prosperity is the lack of the sentiment of lacking and production in excess of needs, together with right use and security (MVD p. 71; AA p. 113). Prosperity cannot be private: for one family to be prosperous, more than one family must be (AA pp. 62–63).</a:t>
             </a:r>
           </a:p>
           <a:p/>
           <a:p>
             <a:r>
-              <a:t>The treatise also identifies a satiation point within exchange. Production is the remuneration of labour, and after exchange the remuneration remains just as much as was produced. In the utilisation of labour there is neither profit nor loss (AA p. 76).</a:t>
+              <a:t>In exchange between families and villages, the treatise identifies a satiation point of exchange (vinimay ka tripti bindu, AA p. 76): grounded in inner sovereignty (samprabhuta, AA p. 104) and mutual satisfaction (ubhay-tripti, AA p. 113), remuneration after exchange is just as much as was produced, with neither profit nor loss in labour and no motive for strategic ledger gaming.</a:t>
             </a:r>
           </a:p>
         </p:txBody>
@@ -1266,19 +1266,19 @@
           <a:lstStyle/>
           <a:p>
             <a:r>
-              <a:t>Before objects can be valued in exchange, the treatise defines the three levels at which resources serve human purposes: use, right use and purposeful use. Use is the utilisation of body, mind and wealth in the nourishment and protection of the body and in social participation. Right use is their utilisation in orderliness and in the motion of undivided society. Purposeful use is their utilisation in evidencing, from generation to generation, knowledge of coexistence, of jeevan, and of humane conduct (AA pp. 72, 94; MVD p. 56). In scale, production is used within the family, rightly used in society, and put to purpose in the universal order (KD p. 116). The treatise pairs use with justice, right use with resolution, and purposeful use with authenticity (AA p. 116).</a:t>
+              <a:t>Before objects can be valued in exchange, the treatise defines the three levels at which resources serve human purposes: use, right use and purposeful use. Use is the utilisation of body, mind and wealth in the nourishment and protection of the body and in social participation. Right use is their utilisation in orderliness and in the motion of undivided society. Purposeful use is their utilisation in evidencing, from generation to generation, knowledge of coexistence, of jeevan, and of humane conduct (AA pp. 72, 94; MVD p. 56). In scale, production is used within the family, rightly used in society, and put to purpose in the universal order — extending from the Earth to the whole of existence (KD p. 116; AA p. 116).</a:t>
             </a:r>
           </a:p>
           <a:p/>
           <a:p>
             <a:r>
-              <a:t>This places economics within the darshan's hierarchy of thirty values across five categories: two object values (usefulness and artistic value), nine civic values, nine established values, one human value (steadfastness, courage, generosity, kindness, grace and compassion), and four jeevan values (happiness, peace, contentment and bliss), alongside five obligatory allegiances (AA pp. 20–24, 92).</a:t>
+              <a:t>This places economics within the darshan's hierarchy of thirty values across five categories: two object values, nine civic values, nine established values, one human value, and four jeevan values, alongside five obligatory allegiances (AA pp. 20–24, 92; KD p. 4).</a:t>
             </a:r>
           </a:p>
           <a:p/>
           <a:p>
             <a:r>
-              <a:t>Karm Darshan ranks wealth by the same logic: wealth placed in the service of liberation, dharma or the fulfilment of desire ranks high; higher purposes made to serve wealth rank low (KD p. 4).</a:t>
+              <a:t>Because jeevan is continuous across bodily journeys while nature's circularity is permanent (AA pp. 48, 51, 72, 94), intergenerational discounting drops to zero: preserving soil, forests, and generational tools across centuries is caring for the continuing habitat of our own and every other jeevan's ongoing journey.</a:t>
             </a:r>
           </a:p>
         </p:txBody>
@@ -1436,13 +1436,13 @@
           <a:p/>
           <a:p>
             <a:r>
-              <a:t>Human economies nevertheless behave differently. They extract more each generation, accumulate wealth that no one can use, and treat a continuing rise in consumption as the measure of success. Mainstream economics takes this imbalance as its starting point: wants are assumed to be unlimited and means scarce, so economic life becomes the permanent allocation of what is never enough.</a:t>
+              <a:t>Human economies nevertheless extract more each generation, accumulate wealth that no one can use, and treat a continuing rise in consumption as success. Mainstream economics takes unlimited wants and scarce means as its starting point, while heterodox traditions try to cap extraction or redistribute output while still treating the human being as a purely biological or socially conditioned organism.</a:t>
             </a:r>
           </a:p>
           <a:p/>
           <a:p>
             <a:r>
-              <a:t>The darshan locates the problem elsewhere, and from that diagnosis asks a constructive question. What would an economy look like that gives human labour its true value, judged by the usefulness labour establishes for human living and for the wider order of nature, rather than by scarcity, accumulation and price?</a:t>
+              <a:t>Madhyasth Darshan shows why neither approach can reach balance without jeevan and realisation (anubhav) in coexistence, and sets out the constructive vision of resolved (samadhan), prosperous (samriddhi), fearless (abhay) individuals coexisting with all four orders of nature from the ten-member family to the ten-tier Earth order — supported at planetary scale by a federated ten-tier AI agentic backbone.</a:t>
             </a:r>
           </a:p>
         </p:txBody>
@@ -1512,19 +1512,19 @@
           <a:lstStyle/>
           <a:p>
             <a:r>
-              <a:t>The provision cycle is nested within the cycles of nature, and the treatise draws a sharp line between production (utpadan) and extraction (paddat-prapti). Production is inherently cyclical and leaves natural equilibrium undisturbed; drawing coal and mineral oil from the earth is mere extraction, not production (AA p. 78). Natural assets, minerals and vegetation, are to be used in proportion to their regeneration; their production is not to be obstructed; and human beings are to become helpful in it. Without keeping nature prosperous, the human being cannot be prosperous (AA pp. 142, 146; KD p. 7).</a:t>
+              <a:t>The provision cycle is nested within the cycles of nature, and the treatise draws a sharp line between production (utpadan) and extraction (paddat-prapti). Production is inherently cyclical and leaves natural equilibrium undisturbed; drawing coal and mineral oil from the earth is mere extraction, not production (AA p. 78). Natural assets, minerals and vegetation, are to be used in proportion to their regeneration; their production is not to be obstructed; and human beings are to become helpful in it. Without keeping nature prosperous, the human being cannot be prosperous (AA pp. 142, 146; KD p. 7; MVD p. 263).</a:t>
             </a:r>
           </a:p>
           <a:p/>
           <a:p>
             <a:r>
-              <a:t>Madhyasth Darshan sets out the same rule as lawful and unlawful conduct: spending minerals and forests in proportion to regeneration and maintaining circularity are lawful; spending beyond regeneration and exploiting non-renewables are not (MVD p. 263).</a:t>
+              <a:t>Why does every body-centric economic model struggle with intergenerational discounting, where a positive discount rate makes ecological exhaustion centuries from now look rational to mortal decision-makers? In Madhyasth Darshan, jeevan is immortal and continuous across bodily journeys while the earth's regenerative cycles are permanent (AA pp. 48, 51, 72, 94). Depleting soil or mineral oil for short-term bodily comfort destroys the habitat of humanity's own continuing tradition.</a:t>
             </a:r>
           </a:p>
           <a:p/>
           <a:p>
             <a:r>
-              <a:t>Flowing and falling water, wind, solar heat, biogas from dung and refuse, and vegetable oil from roadside trees provide cyclical, pollution-free energy (AA pp. 31–33, 106–107). Determining the land of a village also determines how many families it can support with prosperity (AA p. 92).</a:t>
+              <a:t>Flowing and falling water, wind, solar heat, biogas from dung and refuse, and vegetable oil from roadside trees provide cyclical, pollution-free energy (AA pp. 31–33, 106–107), and determining a village's land determines how many families it can support with prosperity (AA p. 92).</a:t>
             </a:r>
           </a:p>
         </p:txBody>
@@ -1682,13 +1682,7 @@
           <a:p/>
           <a:p>
             <a:r>
-              <a:t>Ten families form a family cluster, ten clusters a hundred-family village with nine branches of work (agriculture, animal husbandry, forestry, minerals, handicrafts, village crafts, cottage industry, village industry and service; AA pp. 133–136), and ten tiers reach the world family council. Representatives are selected by consensus with zero election expenditure and serve part-time while continuing production, so governance never creates a non-producing class and every family produces more than its needs, while higher tiers coordinate medium and large industry and calamity buffers (AA pp. 27–30, 72, 110, 115, 127; MVD pp. 259, 267).</a:t>
-            </a:r>
-          </a:p>
-          <a:p/>
-          <a:p>
-            <a:r>
-              <a:t>Moral policy is the right use of resources, economic policy is production beyond family need, and state policy is protection across the six securities, with moral policy primary (KD pp. 14, 67; MVD pp. 264–271).</a:t>
+              <a:t>This institutional architecture scales resolved, prosperous, fearless living to the entire Earth and into universal orderliness. Ten families form a family cluster, ten clusters a hundred-family village with nine branches of work (AA pp. 133–136), and ten tiers reach the World Family Council (vishva parivar sabha). Representatives are selected by consensus with zero election expenditure and serve part-time while continuing production, so governance never creates a non-producing ruling class and every family produces more than its needs, while higher tiers coordinate medium and large industry, planetary regeneration, and inter-nation labour-value exchange free of profit and loss (AA pp. 27–30, 63, 72, 110, 115, 127; MVD pp. 259, 264–271; KD p. 67).</a:t>
             </a:r>
           </a:p>
         </p:txBody>
@@ -1840,19 +1834,13 @@
           <a:lstStyle/>
           <a:p>
             <a:r>
-              <a:t>The traditions disagree most sharply on the source of insatiable want and how labour and need are valued. Since Jevons, Menger and Walras (1871), marginalist and neoclassical theory abandoned classical labour value for subjective marginal utility and took non-satiation and scarcity as given (Robbins 1932). Aristotle and Marx located limitlessness in money-making and the circuit of capital; in the Critique of the Gotha Programme (1875), Marx separated post-capitalist distribution into a first stage of labour-time certificates and a distant stage of need-based sharing, whereas the darshan pairs family need-sharing with inter-family labour-value exchange simultaneously (AA pp. 1, 119–120).</a:t>
+              <a:t>The traditions disagree both on the source of insatiable want and on what closes the economic cycle — and comparing them reveals why none of the existing economic theories can resolve the core deadlocks without jeevan and realisation (anubhav).</a:t>
             </a:r>
           </a:p>
           <a:p/>
           <a:p>
             <a:r>
-              <a:t>Keynes, Veblen and Hirsch located insatiability in relative and positional goods; Polanyi (1944) showed how treating land, labour and money as fictitious commodities disembeds the economy from society; ecological economists point to debt and throughput limits; Kumarappa and Schumacher ground permanence in village production and moral restraint; and Advaita traces desire to ignorance of the Self.</a:t>
-            </a:r>
-          </a:p>
-          <a:p/>
-          <a:p>
-            <a:r>
-              <a:t>The darshan places the root in the joint form: a jeevan whose unexpressed higher activities read their discontent as a shortage of objects. Only the darshan, Gandhian economics and in part Keynes make the definiteness of need a structural condition of the economy.</a:t>
+              <a:t>Neoclassical and marginalist theory (Jevons 1871; Robbins 1932) locks in non-satiation and subjective utility, leaving no observer-invariant basis for social agreement (Arrow 1951). Aristotle and Marx saw the limitlessness of money-getting and capital, yet Marx (1875) had to defer need-based sharing to a distant future because without recognising every person as an identical jeevan in a ten-member family, non-kin sharing and intrinsic work motivation (shram ka vishram = samadhan) have no ontological anchor. Keynes, Veblen and Hirsch diagnosed positional competition, and ecological economists (Daly 1974) call for steady-state throughput caps, yet external caps and sufficiency thresholds face psychological rebound whenever jeevan's inexhaustible powers remain trapped in the 4.5 activities. Gandhian economics (Kumarappa 1945) relies on ascetic moral restraint and Advaita renounces worldly life, whereas Madhyasth Darshan regulates taste through realisation in coexistence, grounding prosperous, fearless living across the Earth.</a:t>
             </a:r>
           </a:p>
         </p:txBody>
@@ -1922,13 +1910,13 @@
           <a:lstStyle/>
           <a:p>
             <a:r>
-              <a:t>Six lessons from economic theory bear directly on cyclical economics.</a:t>
+              <a:t>Six analytical and institutional tools from modern economics can serve a cyclical economy, yet each hits a structural ceiling unless anchored in jeevan, realisation (anubhav), and the ten-tier AI agentic backbone.</a:t>
             </a:r>
           </a:p>
           <a:p/>
           <a:p>
             <a:r>
-              <a:t>First, coordination beyond the village needs active information processing: Hayek showed that market prices compress dispersed knowledge, so a non-price system must supply that coordination in another way. Second, prosperity and production security must be measured through national accounts, input–output tables, material-flow accounting and life-cycle assessment. Third, Elinor Ostrom's polycentric commons governance and Karl Polanyi's analysis of embeddedness and fictitious commodities show how land, labour and credit are kept within social bounds. Fourth, the need and capability frameworks of Max-Neef, Doyal and Gough, and Amartya Sen sharpen the family's assessment of need against adaptive preference. Fifth, modern money is credit created by commercial banks at interest (BoE 2014), while mutual-credit clearing networks such as Switzerland's WIR (Stodder 2009) demonstrate interest-free ledger clearing of the kind used by the village exchange-reserve. Sixth, Leontief's input–output analysis, Cockshott and Cottrell's labour-time calculation, and Ricardo's theory of differential rent (1817) show how embodied labour, capital depreciation, and unequal soil or mineral fertility can be separated and computed.</a:t>
+              <a:t>First, Hayek (1945) showed that market prices compress dispersed knowledge; removing speculative prices requires federated AI agents across ten tiers to aggregate local surpluses and deficits without bureaucracy. Second, national accounts, input–output tables, and material-flow accounting measure physical throughput, but need the family's definite need assessment to define enough. Third, Ostrom's polycentric commons and Polanyi's non-commodities protect local resources, but require universal agreement in coexistence (MVD p. 203) to scale across ten planetary tiers without elite capture. Fourth, Max-Neef, Doyal &amp; Gough, and Sen define objective needs and adaptive preference, but require jeevan's higher 5.5 activities to prevent hedonic rebound once basic needs are met. Fifth, interest-free mutual-credit clearing (such as the Swiss WIR; Stodder 2009) models the village exchange-reserve, while the satiation point of exchange (AA p. 76) prevents strategic hoarding. Sixth, Leontief input–output matrices and Ricardian differential rent (1817) let committee AI agents separate natural fertility from human effort.</a:t>
             </a:r>
           </a:p>
         </p:txBody>
@@ -1998,19 +1986,19 @@
           <a:lstStyle/>
           <a:p>
             <a:r>
-              <a:t>The darshan joins two kinds of order in one sequence. Knowledge is law, law is regulation, and regulation is balance; balanced living is justice in humans; living within universal orderliness with justice is dharma; and realisation in coexistence is dharma and truth (MVD p. 173). Law, regulation and balance are already evident in the orders other than the human (AA p. 117). Justice, dharma and truth are the evaluations by which humans establish their own orderliness, and the treatise describes them as still under review in human tradition (AA p. 18).</a:t>
+              <a:t>The darshan joins two kinds of order in one sequence. Knowledge is law, law is regulation, and regulation is balance; balanced living is justice in humans; living within universal orderliness with justice is dharma; and realisation in coexistence is dharma and truth (MVD p. 173; AA pp. 18, 117). Where a relation is governed by law, regulation or balance and can be stated as a quantity, rate, constraint or rule, it can be measured and traced by an instrument. Where a question concerns the fulfilment of a relationship or its accord with coexistence, it belongs to human evaluation (KD p. 139).</a:t>
             </a:r>
           </a:p>
           <a:p/>
           <a:p>
             <a:r>
-              <a:t>This sets the division of labour for any instrument. Where a relation is governed by law, regulation or balance and can be stated as a quantity, rate, constraint or rule, it can be measured, modelled and partly handled by an instrument. Where a question concerns the fulfilment of a relationship, the purpose of a choice, or its accord with coexistence, it belongs to human evaluation.</a:t>
+              <a:t>Crucially, in Avartansheel Arthshastra normative evaluation is never left to an isolated official acting in private: it is carried out collectively in families, ten-family clusters, five village committees, and tiered councils (AA pp. 128–130, 138–140, 146–149). The treatise explicitly notes that even if a mistake or shortcoming occurs from an individual (AA p. 139), the council's collective responsibility protects right use.</a:t>
             </a:r>
           </a:p>
           <a:p/>
           <a:p>
             <a:r>
-              <a:t>Every instrument is conceived, planned and produced by humans, embodies their mentality, and falls short of its purpose: trust and use must stay below that purpose, and every signal must be read by a human being (KD p. 139). Present AI systems belong to the material order as insentient instruments, yantra, that either amplify delusion or, directed by humane criteria, make the basis of decisions visible.</a:t>
+              <a:t>Why does a group of people still in the process of realisation (anubhav-gami) self-correct when an individual errs? Because priya–hita–labha biases are private to each body and cannot command shared endorsement once objective facts and checkable causal logic are placed in common view before a council of peers who all innately seek contentment and justice (AA pp. 18–20, 48, 58–60; MVD p. 203).</a:t>
             </a:r>
           </a:p>
         </p:txBody>
@@ -2080,19 +2068,19 @@
           <a:lstStyle/>
           <a:p>
             <a:r>
-              <a:t>Each condition of the cycle can fail in a recognisable way, and most failures leave traces in records long before they become crises. Within the multi-level architecture of §8.3, the Family, Committee and Regional AI Agents watch these indicators continuously and route early warnings to the responsible human unit.</a:t>
+              <a:t>Each condition of the cycle can fail in a recognisable way, and most failures leave traces in records long before they become crises. Within the federated ten-tier architecture of §8.3, the Family, Committee and Regional AI Agents watch these indicators continuously and present both the factual discrepancy and its checkable causal trace in common view to every member of the responsible family, committee or council.</a:t>
             </a:r>
           </a:p>
           <a:p/>
           <a:p>
             <a:r>
-              <a:t>Need is definite: the Family Agent flags use rising faster than the family's assessed need, returning the question of whether the assessment is true and fair. Labour receives its value: the Production and Exchange-Reserve Agents flag producers receiving less than labour value or a widening producer–consumer gap. Exchange follows labour value: regional agents flag drifting ratios or unauthorised margins. Everyone takes part in production: committee agents flag displaced workers or idle skills and alert the Education-Sanskar Agent to plan training. Goods are used, not hoarded: agents flag ageing stock and idle balances. Natural assets are used in proportion to regeneration: agents flag drawdown or soil acidity and salinity.</a:t>
+              <a:t>Need is definite: the Family Agent flags use rising faster than assessed need. Labour receives its value: Production and Exchange-Reserve Agents flag producers receiving less than labour value. Exchange follows labour value: regional agents flag drifting ratios or margins. Everyone produces: committee agents flag displaced workers or idle skills and alert the Education-Sanskar Agent to plan training. Goods are used, not hoarded: agents flag ageing stock and idle balances. Nature in proportion: agents flag drawdown or soil degradation.</a:t>
             </a:r>
           </a:p>
           <a:p/>
           <a:p>
             <a:r>
-              <a:t>In every row, the agent's work ends by presenting the causal trace and the question to the family, committee or council responsible; the decision belongs to people.</a:t>
+              <a:t>Because these facts and checkable derivations are visible to the whole council at once, no single member's blind spot or mistake can quietly persist: the collective is compelled to deliberate and restore balance.</a:t>
             </a:r>
           </a:p>
         </p:txBody>
@@ -2244,7 +2232,7 @@
           <a:lstStyle/>
           <a:p>
             <a:r>
-              <a:t>Across the ten tiers, the agent network keeps the cycle in balance and lowers the barrier to transition. When a new cluster of families or villages begins transitioning inside today's market economy, pre-configured agents immediately connect its exchange-reserve to regional labour-value benchmarks and mutual-credit clearing, routing surpluses to cover deficits without speculative middlemen or interest rates (AA pp. 72, 115, 118, 142–143; MVD p. 268).</a:t>
+              <a:t>Across the ten tiers, the agentic backbone keeps the cycle in balance, enables collective self-correction, and lowers the barrier to transition. When a new cluster of families or villages begins transitioning inside today's market economy, pre-configured agents immediately connect its exchange-reserve to regional labour-value benchmarks and mutual-credit clearing, while placing verified discrepancies and checkable causal traces before the whole council simultaneously so they cannot be ignored (AA pp. 72, 115, 118, 139, 142–143; MVD p. 268).</a:t>
             </a:r>
           </a:p>
           <a:p/>
@@ -2256,7 +2244,7 @@
           <a:p/>
           <a:p>
             <a:r>
-              <a:t>Four safeguards keep the agent network subordinate to people (§8.8): no optimisation for profit or attention capture; strict data subsidiarity (personal logs belong to the person, family records to the family, village records to the villagers; AA p. 128); inspectable rules that prevent technocratic rulership (AA p. 82); and counting AI's own energy and mineral footprint within regenerative limits.</a:t>
+              <a:t>Five safeguards keep the agentic backbone subordinate to people (§8.8): no optimisation for profit or attention capture; strict data subsidiarity (AA p. 128); inspectable rules that prevent technocratic rulership (AA p. 82); counting AI's own energy and mineral footprint within regenerative limits; and shared council visibility with cross-agent auditability so no single representative or single agent can hide an inconsistency from the group.</a:t>
             </a:r>
           </a:p>
         </p:txBody>
@@ -2332,7 +2320,7 @@
           <a:p/>
           <a:p>
             <a:r>
-              <a:t>First, the body's needs are definite, so the body by itself could come to balance with the rest of nature like any other organism. Second, human want is not definite. The darshan explains why: jeevan, the conscious unit, seeks continuity of happiness, and in delusion it reads its own dissatisfaction as a shortage of objects. Third, cyclical economics closes the cycle at the points where it now runs open: need assessed in the family, labour applied to natural abundance, goods produced for use, right use and purposeful use, exchange at the value of labour, and production kept within nature's regeneration. Fourth, passive databases and networks alone cannot establish or run such an order; intelligent systems and AI agents paired with individuals, families, committees and councils across all ten tiers can accelerate transition and keep the cycle in balance, while the judgements of justice, dharma and truth stay with people.</a:t>
+              <a:t>First, the body's needs are definite, so the body by itself could come to balance with the rest of nature like any other organism. Second, human want is not definite because jeevan, the conscious unit with inexhaustible powers, seeks continuity of happiness; in delusion it reads its own dissatisfaction as a shortage of objects, which is why no economic theory can close the cycle without jeevan and realisation (anubhav). Third, cyclical economics establishes resolved, prosperous, fearless individuals coexisting with nature from the ten-member family to the ten-tier Earth and universal order: need assessed in the family, labour valued by usefulness, exchange free of profit and loss, and production within natural regeneration. Fourth, for an Earth-scale civilization of people still in the process of realisation (anubhav-gami), a federated ten-tier AI agentic backbone is a structural requirement — making objective facts and checkable logic visible to councils so they cannot ignore drift and can collectively self-correct, while keeping justice, dharma and truth with people.</a:t>
             </a:r>
           </a:p>
           <a:p/>
@@ -2408,19 +2396,19 @@
           <a:lstStyle/>
           <a:p>
             <a:r>
-              <a:t>The critical review weighs the darshan's account alongside neoclassical, Marxian, ecological and Gandhian economics and Advaita.</a:t>
+              <a:t>The critical review weighs the darshan's account alongside neoclassical, Marxian, institutional, ecological, capability and Gandhian economics and Advaita.</a:t>
             </a:r>
           </a:p>
           <a:p/>
           <a:p>
             <a:r>
-              <a:t>Its strengths: it explains insatiability rather than postulating it; unifies diagnoses of limitless money-making, disembedded markets, positional goods, throughput and desire; defines wealth as produced objects and capital as human labour power; pairs need-based sharing inside the family with equal labour-value exchange between families and regions simultaneously; closes need, use and natural regeneration together; names the value of labour in policy; and gives a three-stage transition path and a clear boundary for instruments.</a:t>
+              <a:t>Its strengths: it sets out the complete vision of resolved, prosperous, fearless humans coexisting with nature across the Earth; explains insatiability through the joint form of jeevan and body; resolves the six structural deadlocks that body-centric economics cannot solve without jeevan and realisation (rebound against caps, Arrow's impossibility of social agreement, the work-disutility trilemma, non-kin family sharing, strategic ledger gaming, and intergenerational discounting); pairs family need-sharing with inter-family labour-value exchange; and specifies the three-stage transition path together with the required ten-tier AI agentic backbone.</a:t>
             </a:r>
           </a:p>
           <a:p/>
           <a:p>
             <a:r>
-              <a:t>Its open problems: how family need assessments aggregate at scale; how common labour values account for complex multi-stage inputs, capital depreciation without interest, and Ricardian differential fertility across regions; how a federated network of AI agents paired with committees across the ten tiers can replace price and interest signals without creating a technocratic bottleneck; how automation reduces drudgery without displacing producers; and how communities govern Personal, Family and Committee AI Agents without ceding to them the judgements of justice, dharma and truth.</a:t>
+              <a:t>Its open problems: how family need assessments aggregate at planetary scale; how common labour values compute multi-stage inputs, capital depreciation without interest, and Ricardian differential fertility across regions; how the federated ten-tier AI agentic backbone replaces price and interest signals without creating a technocratic bottleneck; how automation reduces drudgery without displacing producers; and how communities govern Personal, Family and Committee AI Agents so that shared visibility strengthens human deliberation without ceding justice, dharma and truth.</a:t>
             </a:r>
           </a:p>
         </p:txBody>
@@ -2490,19 +2478,19 @@
           <a:lstStyle/>
           <a:p>
             <a:r>
-              <a:t>Human economies do not reach balance because the need they are asked to meet is not the need they can meet. The body's requirements are definite, and the rest of nature shows what balance with them looks like. Jeevan seeks continuity of happiness, and in delusion it pursues that continuity through the transient satisfactions of selection and taste, reading each failure as a shortage of objects. Accumulation, especially of money, gives this pursuit an object that never decays and never satisfies.</a:t>
+              <a:t>Human economies fail to reach balance because body-centric economic theories ask finite material goods to satisfy the continuous qualitative need of jeevan. Without recognising jeevan and realisation (anubhav) in coexistence, neither market growth nor external caps nor ascetic restraint can close the cycle.</a:t>
             </a:r>
           </a:p>
           <a:p/>
           <a:p>
             <a:r>
-              <a:t>Cyclical economics answers by closing the cycle where it now runs open: definite need assessed in the family, labour valued by the usefulness it establishes, exchange at labour value free of profit and loss, production within natural regeneration, and the remainder flowing into right use across the five dimensions and ten tiers of self-governance.</a:t>
+              <a:t>Madhyasth Darshan answers with the vision of resolved (samadhan), prosperous (samriddhi), fearless (abhay) individuals coexisting with all four orders of nature from the ten-member family and hundred-family village to the ten-tier World Family Council across the Earth and in universal orderliness: definite need assessed in the family, restful labour valued by the usefulness it establishes, exchange free of profit and loss, and production within natural regeneration.</a:t>
             </a:r>
           </a:p>
           <a:p/>
           <a:p>
             <a:r>
-              <a:t>Passive databases and network connectivity alone cannot establish or run this order while keeping governance part-time and every citizen a producer. Intelligent systems and AI agents paired with every human unit, from the Personal AI Assistant and the Family AI Agent to the Committee and Council Agents across all ten tiers, can lower the barrier to transition and keep the cycle legible and coordinated, while returning to people the judgements of justice, dharma and truth.</a:t>
+              <a:t>To establish and sustain this order at the scale of the Earth while citizens are in the process of realisation (anubhav-gami), a strong, federated ten-tier AI agentic backbone is a structural requirement. Paired with every person, family, committee and council, AI agents make objective facts, early discrepancies, and checkable causal logic simultaneously visible in common view — ensuring that councils cannot ignore inconsistencies and can collectively self-correct even when an individual errs, while keeping the judgements of justice, dharma and truth in human hands.</a:t>
             </a:r>
           </a:p>
         </p:txBody>
@@ -2572,13 +2560,13 @@
           <a:lstStyle/>
           <a:p>
             <a:r>
-              <a:t>Writing in the 1990s, Shri A. Nagraj anticipated computers in the village exchange-reserve (AA p. 138) and a computer network linking committees from the village to the world (AA p. 132). Yet passive databases and network connectivity alone cannot establish the cyclical economy or enable a fast transition from the current market system, because of four structural bottlenecks.</a:t>
+              <a:t>Writing in the 1990s, Shri A. Nagraj anticipated computers in the village exchange-reserve (AA p. 138) and a computer network linking committees from the village to the world (AA p. 132). When this vision is examined at the scale of the whole Earth — rather than a single small family or isolated hamlet — and under the realistic condition that citizens are in the process of realisation (anubhav-gami), a strong, federated ten-tier AI agentic backbone emerges as a structural requirement rather than an optional convenience, for four interconnected reasons.</a:t>
             </a:r>
           </a:p>
           <a:p/>
           <a:p>
             <a:r>
-              <a:t>First, the staffing constraint: council and committee members are part-time representatives who continue their own physical production (AA p. 127), the village exchange-reserve has as few as three staff members (AA p. 138), and eighty percent of society remains in production (MVD p. 259). Manual database querying across ten tiers would either stall or create a full-time managerial bureaucracy (JVD p. 35). Second, non-price coordination: replacing scalar market prices across millions of goods, capital depreciation and Ricardian fertility differences requires continuous input–output propagation and option generation. Third, qualitative-to-quantitative translation: surveys, family need assessments and joint training plans involve natural language that static forms cannot interpret without turning producers into clerks. Fourth, the transition bottleneck: because the system must be built by people still moving toward awakening (anubhav-gami) inside a profit economy, active intelligent agents are needed to give reflective feedback before habits harden and to run the dual currency-and-labour ledgers of Stages 1 and 2 (AA pp. 142–143).</a:t>
+              <a:t>First, planetary-scale visibility for collective self-correction: in a single household, stock, effort and soil are visible to the naked eye; across ten tiers of villages, bioregions and continents, no council can see distant ecological drawdown or exchange drift without active agents that continuously cross-check flows and place checkable causal traces in common view so councils cannot ignore them. Second, fault-tolerant collective correction while individuals are anubhav-gami: even when an individual errs or slips into priya–hita–labha bias (AA p. 139), simultaneous visibility of facts and checkable logic before the whole committee or council enables the group to correct the error cleanly. Third, part-time governance: representatives continue physical production (AA p. 127; MVD p. 259) and the village exchange-reserve has only three staff (AA p. 138); manual databases would force a full-time managerial bureaucracy (JVD p. 35). Fourth, non-price input–output calculation, Ricardian soil adjustment, natural-language village surveys, and dual currency/labour ledgers across Stages 1–3 (AA pp. 122–125, 142–143) require active agentic computation.</a:t>
             </a:r>
           </a:p>
         </p:txBody>
@@ -2648,19 +2636,19 @@
           <a:lstStyle/>
           <a:p>
             <a:r>
-              <a:t>The companion technical note on a personal AI assistant showed how an AI agent designed under the darshan's criteria can help an individual in transition (anubhav-gami) overcome delusion by serving as a diagnostic mirror for priya-hita-labha impulses, an educational companion for coexistence study and multi-occupation skills, and a practical work log. Establishing and governing a cyclical economy requires extending that architecture to every unit in the ten-tier family-rooted self-governing order.</a:t>
+              <a:t>To operate at the scale of the Earth while citizens are in the process of realisation (anubhav-gami), every human unit from the person and ten-member family to the Tier-10 World Family Council is paired with a dedicated AI agent. Across all ten tiers, these agents act not as rulers or passive ledgers, but as collective consistency mirrors: they place verified facts, discrepancies, and checkable causal logic in common view before all members of the family, cluster, committee, or council simultaneously, so that no single person's error can hide and the collective can self-correct.</a:t>
             </a:r>
           </a:p>
           <a:p/>
           <a:p>
             <a:r>
-              <a:t>At the family level (10–12 members; AA pp. 14, 26, 65), a Family AI Agent helps the household assess its common and special aspirations (AA p. 112), tracks actual use and stock age against hoarding or spoilage, coordinates complementary family production without weighing individual labour shares (AA pp. 119–120), and publishes only aggregate need and surplus to the village. At Tiers 1 and 2, Cluster, Village Council, and five Committee Agents (production-work, exchange-reserve, education-sanskar, health-restraint, and justice-security) maintain the living village survey, link the five dimensions horizontally, and run the three-stage transition ledgers alongside the three-person exchange-reserve staff (AA pp. 125–145).</a:t>
+              <a:t>At the individual and family level (10–12 members; AA pp. 14, 26, 65), the Personal Assistant and Family AI Agent help reflect on priya–hita–labha impulses, assess common and special aspirations (AA p. 112), track stock age against hoarding, and coordinate complementary household production without weighing individual labour shares (AA pp. 119–120). At Tiers 1 and 2, Cluster, Village Council, and five Committee Agents maintain the living village survey, link the five dimensions horizontally, and run the three-stage transition ledgers alongside the three-person exchange-reserve staff (AA pp. 125–145).</a:t>
             </a:r>
           </a:p>
           <a:p/>
           <a:p>
             <a:r>
-              <a:t>Across Tiers 3 to 10, federated Council and Committee Agents match inter-village surpluses and deficits at labour value (AA p. 72), coordinate cottage, small, medium and large industry (AA p. 115), onboard newly transitioning villages, and monitor planetary regeneration boundaries (MVD p. 268). At every level, the human unit retains normative judgement.</a:t>
+              <a:t>Across Tiers 3 to 10, federated Council and Committee Agents compute Leontief input–output chains and Ricardian fertility adjustments, match inter-regional surpluses and deficits at labour value (AA p. 72), coordinate small, medium and large industry (AA p. 115), and monitor planetary regeneration boundaries (MVD p. 268). At every tier, normative authority stays with the human council.</a:t>
             </a:r>
           </a:p>
         </p:txBody>
@@ -2736,7 +2724,7 @@
           <a:p/>
           <a:p>
             <a:r>
-              <a:t>Each order is also balanced in its existent state. The material order has the innateness of existence, the plant order of existence and growth, the animal order of existence, growth and the hope of living. The knowledge order is balanced only when it evidences resolution, prosperity, fearlessness and coexistence (MVD p. 105).</a:t>
+              <a:t>Each order is also balanced in its existent state. The material order has the innateness of existence, the plant order of existence and growth, the animal order of existence, growth and the hope of living. The knowledge order is balanced only when it evidences intellectual resolution (samadhan), material prosperity (samriddhi), social fearlessness (abhay), and coexistence (sah-astitva) with all four orders across the Earth and in universal orderliness (MVD p. 105; AA pp. 72, 94, 116).</a:t>
             </a:r>
           </a:p>
           <a:p/>
@@ -2894,19 +2882,19 @@
           <a:lstStyle/>
           <a:p>
             <a:r>
-              <a:t>The human being is a joint form of body and jeevan. Every human being carries out all activities in the hope and expectation of happiness, peace, contentment and bliss. This expectation is the human’s innateness, present in every person (AA p. 13). Contentment is accepted by every human being and discontent by none (AA p. 48).</a:t>
+              <a:t>The human being is a joint form of body and jeevan — a constitutionally complete sentient atom (gathan-poorna parmanu) whose mass does not change while its powers of knowing, desiring, thinking and selecting are inexhaustible and continuously active (akshay, uditodit; AA pp. 47–51, 58, 60). Every human being carries out all activities in the expectation of happiness, peace, contentment and bliss. Contentment is accepted by every human being and discontent by none (AA pp. 13, 48).</a:t>
             </a:r>
           </a:p>
           <a:p/>
           <a:p>
             <a:r>
-              <a:t>Jeevan has ten activities, borne by five faculties: mun, with selection and taste; vritti, with analysis and deliberation; chitta, with visualisation and contemplation; buddhi, with resolve and enlightenment; and atma, with authenticity and realisation (AA p. 50; JV pp. 72–73). Here mun names the specific faculty of selection and taste, whereas in the triad “body, mind, and wealth” the word “mind” refers to the jeevan powers as a whole (AA pp. 59, 62). The four jeevan values name harmony between adjacent faculties: happiness between mun and vritti, peace between vritti and chitta, contentment between chitta and buddhi, and bliss between buddhi and atma (AA pp. 20–21, 92; JV p. 137). Happiness in this sense is not a sensation; it is a state of the whole conscious unit.</a:t>
+              <a:t>Jeevan has ten activities across five faculties: mun (selection, taste), vritti (analysis, deliberation), chitta (visualisation, contemplation), buddhi (resolve, enlightenment), and atma (authenticity, realisation; AA p. 50; JV pp. 72–73). The four jeevan values name harmony between adjacent faculties: happiness between mun and vritti, peace between vritti and chitta, contentment between chitta and buddhi, and bliss between buddhi and atma (AA pp. 20–21, 92; JV p. 137).</a:t>
             </a:r>
           </a:p>
           <a:p/>
           <a:p>
             <a:r>
-              <a:t>Deliberation (tulan, in vritti) is the pivot on which this harmony turns. Deliberation in terms of pleasure, health, and profit can never reach universal agreement between two human beings, since these perspectives are rooted in the body, and no two bodies are the same (JV pp. 72–73; AA pp. 58–60). In delusion, justice, dharma, and truth are interpreted in terms of pleasure, health, and profit, and there is no universal agreement on these aspects either (AA pp. 18, 59–60). This is the reason there is no balance in human living, including in economics. In awakening, the evaluation perspectives of justice, dharma, and truth are based on understanding and realisation in coexistence, wherein there is universal agreement (AA pp. 19–20, 58–60; MVD p. 203). This is the basis of balance in awakened human living, including in economics.</a:t>
+              <a:t>Deliberation (tulan, in vritti) is the pivot. Deliberation in terms of pleasure, health, and profit (priya, hit, labh) can never reach universal agreement across distinct bodies (JV pp. 72–73; AA pp. 58–60), which is why body-centric economics hits Arrow's impossibility barrier and cannot find an objective anchor for value. Upon realisation (anubhav) in eternal coexistence (trikalabadh satya, AA p. 51; MVD p. 203), justice, dharma, and truth have an observer-invariant reference point where universal agreement is natural (AA pp. 19–20, 58–60).</a:t>
             </a:r>
           </a:p>
         </p:txBody>
@@ -3058,19 +3046,13 @@
           <a:lstStyle/>
           <a:p>
             <a:r>
-              <a:t>The awakened alternative is not the suppression of taste. It is its regulation. The treatise states the order of that regulation precisely. In awakened jeevan, every tasting is balanced and regulated on the touchstone of deliberation, every deliberation on the touchstone of contemplation, all contemplation on the touchstone of enlightenment, all enlightenment on the touchstone of realisation, and all realisation on the touchstone of coexistence. This chain is the darshan's formula of self-regulation and balance in every individual (AA p. 95).</a:t>
+              <a:t>The awakened alternative is not the suppression of taste. It is its regulation. In awakened jeevan, every tasting is balanced and regulated on the touchstone of deliberation, every deliberation on the touchstone of contemplation, all contemplation on the touchstone of enlightenment, all enlightenment on the touchstone of realisation, and all realisation on the touchstone of coexistence. This chain is the darshan's formula of self-regulation and balance in every individual (AA p. 95).</a:t>
             </a:r>
           </a:p>
           <a:p/>
           <a:p>
             <a:r>
-              <a:t>The study draws the economic meaning. Insatiability is what selection and tasting become when that chain is missing: an inexhaustible activity with no higher activity to give it measure. Taste itself is not the problem. The problem is taste that answers to nothing above it.</a:t>
-            </a:r>
-          </a:p>
-          <a:p/>
-          <a:p>
-            <a:r>
-              <a:t>This is why the darshan does not ask people to renounce enjoyment or wealth. It asks for the understanding that lets the higher faculties give enjoyment and wealth their measure.</a:t>
+              <a:t>This explains why neither mainstream nor heterodox economics can close the cycle without jeevan and realisation. Because the powers of jeevan are inexhaustible (AA pp. 17–18, 48), when the higher 5.5 activities remain unawakened, that continuous energy has no outlet except the 4.5 loop of sensory selection, taste, and positional comparison. External ecological rationing or ascetic suppression (sadhana, renunciation; AA pp. 46–47, 61) merely dams an inexhaustible spring without opening its higher channel, inevitably breeding psychological rebound or black markets. Only awakening the higher activities regulates taste from within.</a:t>
             </a:r>
           </a:p>
         </p:txBody>
@@ -6690,7 +6672,7 @@
                 </a:solidFill>
                 <a:latin typeface="Calibri"/>
               </a:rPr>
-              <a:t>Why economies fail to reach balance, and how human labour can receive its true value</a:t>
+              <a:t>Resolved, prosperous, fearless living with nature — and the 10-tier AI backbone it requires</a:t>
             </a:r>
           </a:p>
         </p:txBody>
@@ -9537,7 +9519,7 @@
                 </a:solidFill>
                 <a:latin typeface="Calibri"/>
               </a:rPr>
-              <a:t>They needed to remain in the earth for its balance; burning them brought pollution, heat and rising seas</a:t>
+              <a:t>Needed in the earth for its balance; burning them brought pollution, heat and rising seas</a:t>
             </a:r>
           </a:p>
         </p:txBody>
@@ -10819,7 +10801,7 @@
                 </a:solidFill>
                 <a:latin typeface="Calibri"/>
               </a:rPr>
-              <a:t>Because jeevan's powers are inexhaustible, every person can produce more than necessity.</a:t>
+              <a:t>In resolution, labour itself is restful (shram ka vishram = samadhan), and inexhaustible jeevan powers produce beyond need.</a:t>
             </a:r>
           </a:p>
         </p:txBody>
@@ -11342,7 +11324,7 @@
                 </a:solidFill>
                 <a:latin typeface="Cambria"/>
               </a:rPr>
-              <a:t>Relationship › value › evaluation</a:t>
+              <a:t>Relation › value › evaluation</a:t>
             </a:r>
           </a:p>
         </p:txBody>
@@ -13691,7 +13673,7 @@
                 </a:solidFill>
                 <a:latin typeface="Calibri"/>
               </a:rPr>
-              <a:t>At least ten autonomous people, complementary in production. Use, right use and purposeful use become definite, so needs become limited.</a:t>
+              <a:t>At least ten autonomous people recognising one another as identical jeevan: non-kin sharing by need without weighing labour.</a:t>
             </a:r>
           </a:p>
         </p:txBody>
@@ -14063,7 +14045,7 @@
                 </a:solidFill>
                 <a:latin typeface="Calibri"/>
               </a:rPr>
-              <a:t>After exchange, remuneration is just as much as was produced: no profit and no loss in labour.</a:t>
+              <a:t>Grounded in sovereignty (samprabhuta) and mutual satisfaction (ubhay-tripti): exchange returns exact labour value.</a:t>
             </a:r>
           </a:p>
         </p:txBody>
@@ -15187,7 +15169,7 @@
                 </a:solidFill>
                 <a:latin typeface="Calibri"/>
               </a:rPr>
-              <a:t>Evidencing understanding from generation to generation</a:t>
+              <a:t>Evidencing understanding across generations</a:t>
             </a:r>
           </a:p>
         </p:txBody>
@@ -18471,7 +18453,7 @@
                 </a:solidFill>
                 <a:latin typeface="Cambria"/>
               </a:rPr>
-              <a:t>The body's need is definite</a:t>
+              <a:t>Bodily need is definite</a:t>
             </a:r>
           </a:p>
         </p:txBody>
@@ -18719,7 +18701,7 @@
                 </a:solidFill>
                 <a:latin typeface="Cambria"/>
               </a:rPr>
-              <a:t>The study's question</a:t>
+              <a:t>The vision and the question</a:t>
             </a:r>
           </a:p>
           <a:p>
@@ -18735,7 +18717,7 @@
                 </a:solidFill>
                 <a:latin typeface="Calibri"/>
               </a:rPr>
-              <a:t>What would an economy look like that gives human labour its true value, judged by the usefulness it establishes, rather than by scarcity, accumulation and price?</a:t>
+              <a:t>How do resolved, prosperous, fearless humans coexist with nature at Earth scale, giving labour its true value — and why does this require jeevan, realisation, and a 10-tier AI agentic backbone?</a:t>
             </a:r>
           </a:p>
         </p:txBody>
@@ -18774,7 +18756,7 @@
                 </a:solidFill>
                 <a:latin typeface="Calibri"/>
               </a:rPr>
-              <a:t>Mainstream economics begins from unlimited wants and scarce means; the darshan locates the problem elsewhere.</a:t>
+              <a:t>Body-centric economics cannot close the cycle without jeevan and realisation in coexistence.</a:t>
             </a:r>
           </a:p>
         </p:txBody>
@@ -21634,7 +21616,7 @@
                 </a:solidFill>
                 <a:latin typeface="Cambria"/>
               </a:rPr>
-              <a:t>From village to world</a:t>
+              <a:t>Fearless ten-tier order at Earth scale</a:t>
             </a:r>
           </a:p>
         </p:txBody>
@@ -21673,7 +21655,7 @@
                 </a:solidFill>
                 <a:latin typeface="Calibri"/>
               </a:rPr>
-              <a:t>A 100-family village with nine branches (agriculture, crafts, industry, service); ten tiers of part-time councils with zero election cost.</a:t>
+              <a:t>From the 10-member family and 100-family village (9 branches) to the Tier-10 World Family Council: fearless self-governance across the Earth.</a:t>
             </a:r>
           </a:p>
         </p:txBody>
@@ -23371,7 +23353,7 @@
                 </a:solidFill>
                 <a:latin typeface="Calibri"/>
               </a:rPr>
-              <a:t>What closes the cycle</a:t>
+              <a:t>Closure / limit without jeevan</a:t>
             </a:r>
           </a:p>
         </p:txBody>
@@ -23576,7 +23558,7 @@
                 </a:solidFill>
                 <a:latin typeface="Calibri"/>
               </a:rPr>
-              <a:t>Definite need, use, regeneration</a:t>
+              <a:t>Jeevan realisation, family need, cycles</a:t>
             </a:r>
           </a:p>
         </p:txBody>
@@ -23737,7 +23719,7 @@
                 </a:solidFill>
                 <a:latin typeface="Calibri"/>
               </a:rPr>
-              <a:t>No closure; growth is the norm</a:t>
+              <a:t>No closure; observer-relative utility</a:t>
             </a:r>
           </a:p>
         </p:txBody>
@@ -23942,7 +23924,7 @@
                 </a:solidFill>
                 <a:latin typeface="Calibri"/>
               </a:rPr>
-              <a:t>Use limits household; abolish capital</a:t>
+              <a:t>Defers need; lacks jeevan &amp; family</a:t>
             </a:r>
           </a:p>
         </p:txBody>
@@ -24103,7 +24085,7 @@
                 </a:solidFill>
                 <a:latin typeface="Calibri"/>
               </a:rPr>
-              <a:t>Absolute needs can be met</a:t>
+              <a:t>Status shifts; 4.5 activities rebound</a:t>
             </a:r>
           </a:p>
         </p:txBody>
@@ -24308,7 +24290,7 @@
                 </a:solidFill>
                 <a:latin typeface="Calibri"/>
               </a:rPr>
-              <a:t>Steady throughput; material loops</a:t>
+              <a:t>Caps erode without jeevan satiation</a:t>
             </a:r>
           </a:p>
         </p:txBody>
@@ -24469,7 +24451,7 @@
                 </a:solidFill>
                 <a:latin typeface="Calibri"/>
               </a:rPr>
-              <a:t>Permanence within nature's cycles</a:t>
+              <a:t>Ascetic restraint erodes across time</a:t>
             </a:r>
           </a:p>
         </p:txBody>
@@ -24674,7 +24656,7 @@
                 </a:solidFill>
                 <a:latin typeface="Calibri"/>
               </a:rPr>
-              <a:t>Liberation beyond economic life</a:t>
+              <a:t>Renounces world; no Earth order</a:t>
             </a:r>
           </a:p>
         </p:txBody>
@@ -25863,7 +25845,7 @@
                 </a:solidFill>
                 <a:latin typeface="Calibri"/>
               </a:rPr>
-              <a:t>Economic tools can serve a cyclical economy once that economy supplies the criteria the discipline leaves out.</a:t>
+              <a:t>These tools gain stability only when anchored in jeevan, realisation, and a 10-tier AI backbone.</a:t>
             </a:r>
           </a:p>
         </p:txBody>
@@ -26405,7 +26387,7 @@
                 </a:solidFill>
                 <a:latin typeface="Calibri"/>
               </a:rPr>
-              <a:t>The fulfilment of relationships, the purpose of a choice, its accord with coexistence.</a:t>
+              <a:t>Fulfilment of relationships and accord with coexistence. Even if one person errs, a council cannot ignore facts and checkable logic visible in common view.</a:t>
             </a:r>
           </a:p>
           <a:p>
@@ -26424,7 +26406,7 @@
                 </a:solidFill>
                 <a:latin typeface="Calibri"/>
               </a:rPr>
-              <a:t>Judged by people; still under review in human tradition.</a:t>
+              <a:t>Judged collectively by people (AA pp. 128–130, 139).</a:t>
             </a:r>
           </a:p>
         </p:txBody>
@@ -26509,7 +26491,7 @@
                 </a:solidFill>
                 <a:latin typeface="Cambria"/>
               </a:rPr>
-              <a:t>The darshan's rule for instruments</a:t>
+              <a:t>Why collective human judgement self-corrects when facts are visible</a:t>
             </a:r>
           </a:p>
           <a:p>
@@ -26525,7 +26507,7 @@
                 </a:solidFill>
                 <a:latin typeface="Calibri"/>
               </a:rPr>
-              <a:t>An instrument embodies its planners' mentality and falls short of its purpose: trust and use it below that purpose, and let a human read every signal.</a:t>
+              <a:t>Instruments measure quantities and trace checkable logic; when placed before a council in common view, peers collectively correct individual errors (KD p. 139; AA p. 139).</a:t>
             </a:r>
           </a:p>
         </p:txBody>
@@ -26753,7 +26735,7 @@
                 </a:solidFill>
                 <a:latin typeface="Calibri"/>
               </a:rPr>
-              <a:t>V  ·  BEYOND DATABASES  ·  §8.2</a:t>
+              <a:t>V  ·  STRUCTURAL REQUIREMENT  ·  §8.2</a:t>
             </a:r>
           </a:p>
         </p:txBody>
@@ -26792,7 +26774,7 @@
                 </a:solidFill>
                 <a:latin typeface="Cambria"/>
               </a:rPr>
-              <a:t>Why Databases Alone Are Not Enough</a:t>
+              <a:t>Why an AI Agentic Backbone Is Required</a:t>
             </a:r>
           </a:p>
         </p:txBody>
@@ -26877,7 +26859,7 @@
                 </a:solidFill>
                 <a:latin typeface="Cambria"/>
               </a:rPr>
-              <a:t>Part-time governance constraint</a:t>
+              <a:t>1. Earth-scale visibility &amp; self-correction</a:t>
             </a:r>
           </a:p>
         </p:txBody>
@@ -26916,7 +26898,7 @@
                 </a:solidFill>
                 <a:latin typeface="Calibri"/>
               </a:rPr>
-              <a:t>Councils serve part-time while producing (AA p. 127) and the exchange-reserve has 3 staff (p. 138); manual databases would force a bureaucracy.</a:t>
+              <a:t>In one family, facts are visible by eye; across 10 tiers on Earth, AI agents make facts and checkable logic visible to councils so drift cannot be ignored.</a:t>
             </a:r>
           </a:p>
         </p:txBody>
@@ -27001,7 +26983,7 @@
                 </a:solidFill>
                 <a:latin typeface="Cambria"/>
               </a:rPr>
-              <a:t>Non-price calculation at scale</a:t>
+              <a:t>2. Fault-tolerance while anubhav-gami</a:t>
             </a:r>
           </a:p>
         </p:txBody>
@@ -27040,7 +27022,7 @@
                 </a:solidFill>
                 <a:latin typeface="Calibri"/>
               </a:rPr>
-              <a:t>Replacing prices across millions of inputs, tool depreciation and Ricardian soil differences needs active input–output and constraint solving.</a:t>
+              <a:t>Individuals in transition can err (AA p. 139); when paired agents surface discrepancies in common view, the group collectively self-corrects.</a:t>
             </a:r>
           </a:p>
         </p:txBody>
@@ -27125,7 +27107,7 @@
                 </a:solidFill>
                 <a:latin typeface="Cambria"/>
               </a:rPr>
-              <a:t>Qualitative to quantitative</a:t>
+              <a:t>3. Part-time councils &amp; 3-staff reserves</a:t>
             </a:r>
           </a:p>
         </p:txBody>
@@ -27164,7 +27146,7 @@
                 </a:solidFill>
                 <a:latin typeface="Calibri"/>
               </a:rPr>
-              <a:t>Village surveys, family needs and skill plans combine numbers with local language; intelligent agents keep producers from becoming clerks.</a:t>
+              <a:t>Councils serve part-time while producing (AA p. 127) and reserves have 3 staff (p. 138); without agents, coordination forces a bureaucracy.</a:t>
             </a:r>
           </a:p>
         </p:txBody>
@@ -27249,7 +27231,7 @@
                 </a:solidFill>
                 <a:latin typeface="Cambria"/>
               </a:rPr>
-              <a:t>Transition before full awakening</a:t>
+              <a:t>4. Non-price I–O, surveys &amp; 3-stage ledgers</a:t>
             </a:r>
           </a:p>
         </p:txBody>
@@ -27288,7 +27270,7 @@
                 </a:solidFill>
                 <a:latin typeface="Calibri"/>
               </a:rPr>
-              <a:t>Anubhav-gami people and villages need real-time mirrors and dual currency/labour ledgers across the 3 stages (AA pp. 142–143).</a:t>
+              <a:t>Agents compute multi-tier input–output, Ricardian rent, living surveys, and dual currency/labour ledgers across the 3 stages.</a:t>
             </a:r>
           </a:p>
         </p:txBody>
@@ -27327,7 +27309,7 @@
                 </a:solidFill>
                 <a:latin typeface="Calibri"/>
               </a:rPr>
-              <a:t>Passive databases only store records after the fact; intelligent agents are needed as core transition infrastructure.</a:t>
+              <a:t>Not an optional add-on: an Earth-scale civilization of anubhav-gami humans requires an AI agentic backbone.</a:t>
             </a:r>
           </a:p>
         </p:txBody>
@@ -27679,7 +27661,7 @@
                 </a:solidFill>
                 <a:latin typeface="Cambria"/>
               </a:rPr>
-              <a:t>AI Agents Across the Ten-Tier Order</a:t>
+              <a:t>Federated Ten-Tier AI Agentic Backbone</a:t>
             </a:r>
           </a:p>
         </p:txBody>
@@ -27886,7 +27868,7 @@
                 </a:solidFill>
                 <a:latin typeface="Calibri"/>
               </a:rPr>
-              <a:t>Paired AI agent &amp; role in the cycle</a:t>
+              <a:t>Paired agent &amp; consistency mirror</a:t>
             </a:r>
           </a:p>
         </p:txBody>
@@ -27925,7 +27907,7 @@
                 </a:solidFill>
                 <a:latin typeface="Calibri"/>
               </a:rPr>
-              <a:t>Judgement kept by people</a:t>
+              <a:t>Collective judgement by people</a:t>
             </a:r>
           </a:p>
         </p:txBody>
@@ -29062,7 +29044,7 @@
                 </a:solidFill>
                 <a:latin typeface="Calibri"/>
               </a:rPr>
-              <a:t>Every human unit from the person and family to the ten tiers works with a paired agent; authority stays with people.</a:t>
+              <a:t>Paired agents place verified facts and checkable logic before every council; normative authority stays with people.</a:t>
             </a:r>
           </a:p>
         </p:txBody>
@@ -30720,7 +30702,7 @@
                 </a:solidFill>
                 <a:latin typeface="Calibri"/>
               </a:rPr>
-              <a:t>Most failures leave traces in records long before they become crises.</a:t>
+              <a:t>When agents make early traces and checkable logic visible in common view, councils cannot ignore them and self-correct.</a:t>
             </a:r>
           </a:p>
         </p:txBody>
@@ -31237,7 +31219,7 @@
                 </a:solidFill>
                 <a:latin typeface="Calibri"/>
               </a:rPr>
-              <a:t>jeevan's lack misread
+              <a:t>jeevan &amp; realisation
 §2</a:t>
             </a:r>
           </a:p>
@@ -31378,7 +31360,7 @@
                 </a:solidFill>
                 <a:latin typeface="Calibri"/>
               </a:rPr>
-              <a:t>labour, use, right use
+              <a:t>family to Earth order
 §3</a:t>
             </a:r>
           </a:p>
@@ -31503,7 +31485,7 @@
                 </a:solidFill>
                 <a:latin typeface="Cambria"/>
               </a:rPr>
-              <a:t>AI agents help</a:t>
+              <a:t>AI backbone</a:t>
             </a:r>
           </a:p>
           <a:p>
@@ -31519,7 +31501,7 @@
                 </a:solidFill>
                 <a:latin typeface="Calibri"/>
               </a:rPr>
-              <a:t>transition &amp; balance
+              <a:t>required at Earth scale
 §8</a:t>
             </a:r>
           </a:p>
@@ -31768,7 +31750,7 @@
                 </a:solidFill>
                 <a:latin typeface="Calibri"/>
               </a:rPr>
-              <a:t>Definite need, goods for use, nature used in proportion to its regeneration, and labour valued by the usefulness it establishes.</a:t>
+              <a:t>Resolved, prosperous, fearless families; nature regenerated; labour valued by usefulness.</a:t>
             </a:r>
           </a:p>
         </p:txBody>
@@ -33854,7 +33836,7 @@
                 </a:solidFill>
                 <a:latin typeface="Cambria"/>
               </a:rPr>
-              <a:t>Accelerate transition</a:t>
+              <a:t>Collective visibility</a:t>
             </a:r>
           </a:p>
         </p:txBody>
@@ -33893,7 +33875,7 @@
                 </a:solidFill>
                 <a:latin typeface="Calibri"/>
               </a:rPr>
-              <a:t>Living surveys, inter-tier surplus routing at labour value, and pre-configured agents that onboard new villages into the 3 stages.</a:t>
+              <a:t>Shared council views make drift, causal logic, and 3-stage ledgers visible to all peers at once, compelling collective self-correction across 10 tiers.</a:t>
             </a:r>
           </a:p>
         </p:txBody>
@@ -34754,7 +34736,7 @@
                 </a:solidFill>
                 <a:latin typeface="Calibri"/>
               </a:rPr>
-              <a:t>Explains insatiability rather than assuming it</a:t>
+              <a:t>Explains insatiability via jeevan &amp; realisation</a:t>
             </a:r>
           </a:p>
         </p:txBody>
@@ -34837,7 +34819,7 @@
                 </a:solidFill>
                 <a:latin typeface="Calibri"/>
               </a:rPr>
-              <a:t>Wealth as produced objects; labour as capital</a:t>
+              <a:t>Resolved, prosperous, fearless living with nature</a:t>
             </a:r>
           </a:p>
         </p:txBody>
@@ -34920,7 +34902,7 @@
                 </a:solidFill>
                 <a:latin typeface="Calibri"/>
               </a:rPr>
-              <a:t>Pairs family need-sharing with labour-value exchange</a:t>
+              <a:t>Family need-sharing + labour-value exchange</a:t>
             </a:r>
           </a:p>
         </p:txBody>
@@ -35003,7 +34985,7 @@
                 </a:solidFill>
                 <a:latin typeface="Calibri"/>
               </a:rPr>
-              <a:t>Names the value of labour in policy</a:t>
+              <a:t>Resolves 6 deadlocks of body-centric economics</a:t>
             </a:r>
           </a:p>
         </p:txBody>
@@ -35086,7 +35068,7 @@
                 </a:solidFill>
                 <a:latin typeface="Calibri"/>
               </a:rPr>
-              <a:t>A staged path, with a rule for instruments</a:t>
+              <a:t>3-stage path + required 10-tier AI backbone</a:t>
             </a:r>
           </a:p>
         </p:txBody>
@@ -35254,7 +35236,7 @@
                 </a:solidFill>
                 <a:latin typeface="Calibri"/>
               </a:rPr>
-              <a:t>Need assessed at the scale of a nation</a:t>
+              <a:t>Need assessed from family to planetary scale</a:t>
             </a:r>
           </a:p>
         </p:txBody>
@@ -35420,7 +35402,7 @@
                 </a:solidFill>
                 <a:latin typeface="Calibri"/>
               </a:rPr>
-              <a:t>10-tier coordination via AI agents without bureaucracy</a:t>
+              <a:t>10-tier AI coordination without bureaucracy</a:t>
             </a:r>
           </a:p>
         </p:txBody>
@@ -35503,7 +35485,7 @@
                 </a:solidFill>
                 <a:latin typeface="Calibri"/>
               </a:rPr>
-              <a:t>Automation without displacement</a:t>
+              <a:t>Automation without displacing producers</a:t>
             </a:r>
           </a:p>
         </p:txBody>
@@ -35586,7 +35568,7 @@
                 </a:solidFill>
                 <a:latin typeface="Calibri"/>
               </a:rPr>
-              <a:t>Governing multi-level agents without ceding judgement</a:t>
+              <a:t>Governing 10-tier agents while keeping judgement</a:t>
             </a:r>
           </a:p>
         </p:txBody>
@@ -35625,7 +35607,7 @@
                 </a:solidFill>
                 <a:latin typeface="Calibri"/>
               </a:rPr>
-              <a:t>Its practicability depends on understanding the darshan has yet to evidence beyond small communities.</a:t>
+              <a:t>Realising this vision at Earth scale requires both jeevan understanding and the 10-tier AI agentic backbone.</a:t>
             </a:r>
           </a:p>
         </p:txBody>
@@ -36203,7 +36185,7 @@
                 </a:solidFill>
                 <a:latin typeface="Cambria"/>
               </a:rPr>
-              <a:t>Indefinite want   →   definite need in the family</a:t>
+              <a:t>Indefinite want   →   resolved jeevan &amp; family need</a:t>
             </a:r>
           </a:p>
         </p:txBody>
@@ -36281,7 +36263,7 @@
                 </a:solidFill>
                 <a:latin typeface="Cambria"/>
               </a:rPr>
-              <a:t>Open spiral   →   a cycle within nature's balance</a:t>
+              <a:t>Open spiral   →   fearless coexistence at Earth scale</a:t>
             </a:r>
           </a:p>
         </p:txBody>
@@ -36320,7 +36302,7 @@
                 </a:solidFill>
                 <a:latin typeface="Calibri"/>
               </a:rPr>
-              <a:t>Multi-level AI agents can accelerate the transition and make balance visible; understanding and judgement belong to people.</a:t>
+              <a:t>A 10-tier AI backbone is required to make facts visible for collective self-correction; judgement stays with people.</a:t>
             </a:r>
           </a:p>
         </p:txBody>
@@ -37612,7 +37594,7 @@
                 </a:solidFill>
                 <a:latin typeface="Calibri"/>
               </a:rPr>
-              <a:t>Every unit except the human shows definite conduct; only the deluded human causes disorder.</a:t>
+              <a:t>Every other order is balanced; humans reach balance as resolved, prosperous, fearless people coexisting with nature.</a:t>
             </a:r>
           </a:p>
         </p:txBody>
@@ -40324,7 +40306,7 @@
                 </a:solidFill>
                 <a:latin typeface="Calibri"/>
               </a:rPr>
-              <a:t>Body-rooted deliberation (pleasure, health, profit) never reaches universal agreement across distinct bodies; awakening grounds justice, dharma and truth in coexistence, the basis of balance.</a:t>
+              <a:t>Body-rooted deliberation (priya, hit, labh) never agrees across distinct bodies; realisation in coexistence grounds universal agreement.</a:t>
             </a:r>
           </a:p>
         </p:txBody>
@@ -42775,7 +42757,7 @@
                 </a:solidFill>
                 <a:latin typeface="Calibri"/>
               </a:rPr>
-              <a:t>Selection and taste become an inexhaustible activity with no higher activity to give them measure. That is insatiability.</a:t>
+              <a:t>Without awakening the higher 5.5 activities, inexhaustible jeevan energy chases limitless consumption or erodes external caps.</a:t>
             </a:r>
           </a:p>
         </p:txBody>
@@ -43975,7 +43957,7 @@
                 </a:solidFill>
                 <a:latin typeface="Calibri"/>
               </a:rPr>
-              <a:t>Duties are definite and limited, so they can be fulfilled; needs pursued as indulgence are indefinite and unlimited, so they cannot.</a:t>
+              <a:t>Duties are definite and can be fulfilled; needs pursued as indulgence are unlimited and cannot.</a:t>
             </a:r>
           </a:p>
         </p:txBody>

--- a/Studies/Prosperity-Economics-And-Right-Use/Prosperity-Economics-And-Right-Use-Madhyasth-Darshan.pptx
+++ b/Studies/Prosperity-Economics-And-Right-Use/Prosperity-Economics-And-Right-Use-Madhyasth-Darshan.pptx
@@ -30,6 +30,8 @@
     <p:sldId id="278" r:id="rId30"/>
     <p:sldId id="279" r:id="rId31"/>
     <p:sldId id="280" r:id="rId32"/>
+    <p:sldId id="289" r:id="rId41"/>
+    <p:sldId id="290" r:id="rId42"/>
     <p:sldId id="281" r:id="rId33"/>
     <p:sldId id="287" r:id="rId39"/>
     <p:sldId id="288" r:id="rId40"/>
@@ -2649,6 +2651,201 @@
           <a:p>
             <a:r>
               <a:t>Across Tiers 3 to 10, federated Council and Committee Agents compute Leontief input–output chains and Ricardian fertility adjustments, match inter-regional surpluses and deficits at labour value (AA p. 72), coordinate small, medium and large industry (AA p. 115), and monitor planetary regeneration boundaries (MVD p. 268). At every tier, normative authority stays with the human council.</a:t>
+            </a:r>
+          </a:p>
+        </p:txBody>
+      </p:sp>
+      <p:sp>
+        <p:nvSpPr>
+          <p:cNvPr id="4" name="Slide Number Placeholder 3"/>
+          <p:cNvSpPr>
+            <a:spLocks noGrp="1"/>
+          </p:cNvSpPr>
+          <p:nvPr>
+            <p:ph type="sldNum" idx="5" sz="quarter"/>
+          </p:nvPr>
+        </p:nvSpPr>
+        <p:spPr/>
+      </p:sp>
+    </p:spTree>
+  </p:cSld>
+  <p:clrMapOvr>
+    <a:masterClrMapping/>
+  </p:clrMapOvr>
+</p:notes>
+</file>
+
+<file path=ppt/notesSlides/notesSlide34.xml><?xml version="1.0" encoding="utf-8"?>
+<p:notes xmlns:a="http://schemas.openxmlformats.org/drawingml/2006/main" xmlns:p="http://schemas.openxmlformats.org/presentationml/2006/main" xmlns:r="http://schemas.openxmlformats.org/officeDocument/2006/relationships">
+  <p:cSld>
+    <p:spTree>
+      <p:nvGrpSpPr>
+        <p:cNvPr id="1" name=""/>
+        <p:cNvGrpSpPr/>
+        <p:nvPr/>
+      </p:nvGrpSpPr>
+      <p:grpSpPr>
+        <a:xfrm>
+          <a:off x="0" y="0"/>
+          <a:ext cx="0" cy="0"/>
+          <a:chOff x="0" y="0"/>
+          <a:chExt cx="0" cy="0"/>
+        </a:xfrm>
+      </p:grpSpPr>
+      <p:sp>
+        <p:nvSpPr>
+          <p:cNvPr id="2" name="Slide Image Placeholder 1"/>
+          <p:cNvSpPr>
+            <a:spLocks noGrp="1"/>
+          </p:cNvSpPr>
+          <p:nvPr>
+            <p:ph type="sldImg" idx="2"/>
+          </p:nvPr>
+        </p:nvSpPr>
+        <p:spPr/>
+      </p:sp>
+      <p:sp>
+        <p:nvSpPr>
+          <p:cNvPr id="3" name="Notes Placeholder 2"/>
+          <p:cNvSpPr>
+            <a:spLocks noGrp="1"/>
+          </p:cNvSpPr>
+          <p:nvPr>
+            <p:ph type="body" idx="3" sz="quarter"/>
+          </p:nvPr>
+        </p:nvSpPr>
+        <p:spPr/>
+        <p:txBody>
+          <a:bodyPr/>
+          <a:lstStyle/>
+          <a:p>
+            <a:r>
+              <a:t>When we step back from the individual schools of economics — neoclassical, Marxian, institutional, ecological, capability and Gandhian — six structural deadlocks emerge that none of them can solve together, because every one of them models the human actor as a physical-biological organism without jeevan and without realisation (anubhav).</a:t>
+            </a:r>
+          </a:p>
+          <a:p/>
+          <a:p>
+            <a:r>
+              <a:t>1. Insatiability rebound vs. ascetic erosion: Dropping the non-satiation axiom on paper or imposing steady-state caps does not stop real-world rebound, positional rivalry, or black markets, while moral calls for ascetic simplicity repeatedly erode, because jeevan's inexhaustible (akshay, uditodit) powers remain trapped in the 4.5 activities until awakening opens the higher 5.5 activities (AA pp. 17–18, 46–51, 95).</a:t>
+            </a:r>
+          </a:p>
+          <a:p>
+            <a:r>
+              <a:t>2. No uncoerced social agreement (Arrow's impossibility): Body-rooted evaluation (priya, hit, labh) differs in every individual body and admits no fair interpersonal aggregation; only realisation (anubhav) in eternal coexistence (trikalabadh satya) provides an observer-invariant anchor where universal agreement in justice, dharma and truth is natural (AA pp. 18–20, 58–60; MVD p. 203).</a:t>
+            </a:r>
+          </a:p>
+          <a:p>
+            <a:r>
+              <a:t>3. Work-disutility and innovation trilemma: Treating work as disutility means removing wage fear, profit, and patents causes shirking or bureaucratic coercion (AA pp. 5, 75–76, 107; JVD p. 35); in Madhyasth Darshan, labour's restfulness is resolution itself (shram ka vishram = samadhan, AA p. 23), and inventions are honoured with prizes (puraskar) and shared openly (AA pp. 56–58, 140, 144).</a:t>
+            </a:r>
+          </a:p>
+          <a:p>
+            <a:r>
+              <a:t>4. Non-kin sharing collapse: Biological evolutionary theory restricts unconditional sharing to genetic kin; recognising every human as a constitutionally identical jeevan grounds the 10-member family where need is shared without weighing individual labour and surplus funds unpaid benevolent service (upkar-pradhan seva, AA pp. 1, 14, 119–120; KD pp. 115–117).</a:t>
+            </a:r>
+          </a:p>
+          <a:p>
+            <a:r>
+              <a:t>5. Strategic gaming of ledgers: Interest-free mutual credit and labour-time accounting get gamed by hoarding or padding hours when actors still seek labh; inner sovereignty (samprabhuta, AA p. 104) and mutual satisfaction (ubhay-tripti, AA p. 113) establish a natural satiation point of exchange (vinimay ka tripti bindu, AA p. 76).</a:t>
+            </a:r>
+          </a:p>
+          <a:p>
+            <a:r>
+              <a:t>6. Intergenerational discounting: Mortal, body-identified actors discount distant centuries; knowing the continuity of jeevan across bodily journeys alongside permanent natural cycles brings the intergenerational discount rate to zero (AA pp. 48, 51, 72, 94).</a:t>
+            </a:r>
+          </a:p>
+        </p:txBody>
+      </p:sp>
+      <p:sp>
+        <p:nvSpPr>
+          <p:cNvPr id="4" name="Slide Number Placeholder 3"/>
+          <p:cNvSpPr>
+            <a:spLocks noGrp="1"/>
+          </p:cNvSpPr>
+          <p:nvPr>
+            <p:ph type="sldNum" idx="5" sz="quarter"/>
+          </p:nvPr>
+        </p:nvSpPr>
+        <p:spPr/>
+      </p:sp>
+    </p:spTree>
+  </p:cSld>
+  <p:clrMapOvr>
+    <a:masterClrMapping/>
+  </p:clrMapOvr>
+</p:notes>
+</file>
+
+<file path=ppt/notesSlides/notesSlide35.xml><?xml version="1.0" encoding="utf-8"?>
+<p:notes xmlns:a="http://schemas.openxmlformats.org/drawingml/2006/main" xmlns:p="http://schemas.openxmlformats.org/presentationml/2006/main" xmlns:r="http://schemas.openxmlformats.org/officeDocument/2006/relationships">
+  <p:cSld>
+    <p:spTree>
+      <p:nvGrpSpPr>
+        <p:cNvPr id="1" name=""/>
+        <p:cNvGrpSpPr/>
+        <p:nvPr/>
+      </p:nvGrpSpPr>
+      <p:grpSpPr>
+        <a:xfrm>
+          <a:off x="0" y="0"/>
+          <a:ext cx="0" cy="0"/>
+          <a:chOff x="0" y="0"/>
+          <a:chExt cx="0" cy="0"/>
+        </a:xfrm>
+      </p:grpSpPr>
+      <p:sp>
+        <p:nvSpPr>
+          <p:cNvPr id="2" name="Slide Image Placeholder 1"/>
+          <p:cNvSpPr>
+            <a:spLocks noGrp="1"/>
+          </p:cNvSpPr>
+          <p:nvPr>
+            <p:ph type="sldImg" idx="2"/>
+          </p:nvPr>
+        </p:nvSpPr>
+        <p:spPr/>
+      </p:sp>
+      <p:sp>
+        <p:nvSpPr>
+          <p:cNvPr id="3" name="Notes Placeholder 2"/>
+          <p:cNvSpPr>
+            <a:spLocks noGrp="1"/>
+          </p:cNvSpPr>
+          <p:nvPr>
+            <p:ph type="body" idx="3" sz="quarter"/>
+          </p:nvPr>
+        </p:nvSpPr>
+        <p:spPr/>
+        <p:txBody>
+          <a:bodyPr/>
+          <a:lstStyle/>
+          <a:p>
+            <a:r>
+              <a:t>Why is realisation (anubhav) in coexistence specifically required — and why can't intellectual philosophy, moral exhortation, or better institutional rules substitute for it?</a:t>
+            </a:r>
+          </a:p>
+          <a:p/>
+          <a:p>
+            <a:r>
+              <a:t>First, because jeevan is a constitutionally complete atom whose powers of hope, thought, and desire are inexhaustible and continuously surging (akshay, uditodit; AA pp. 47–51, 58, 60). Moral vows, ascetic renunciation, or external ecological rationing operate only on the lower faculties while leaving the highest faculties (buddhi and atma) empty. Only when realisation (anubhav) in coexistence awakens the higher 5.5 activities does jeevan experience continuous happiness, peace, contentment, and bliss within itself, relieving the finite body of the burden of supplying infinite satisfaction (AA pp. 20–21, 50, 95).</a:t>
+            </a:r>
+          </a:p>
+          <a:p/>
+          <a:p>
+            <a:r>
+              <a:t>Second, realisation is the only observer-invariant reference point for human society. Sensory pleasure, bodily health, and material profit (priya, hit, labh) are relative to each distinct body, and unawakened opinions (manna) vary from person to person. Realisation of existence as coexistence (trikalabadh satya — truth uncontradicted across past, present, and future; AA p. 51; MVD p. 203) is identical for every human observer, making uncoerced universal agreement (sarvasammati) on justice, dharma, and truth possible.</a:t>
+            </a:r>
+          </a:p>
+          <a:p/>
+          <a:p>
+            <a:r>
+              <a:t>Third and fourth, realisation transforms human relationship and time horizon from the inside: seeing every human as a constitutionally identical jeevan enables unconditional need-sharing in the ten-member family and restful labour in resolution (shram ka vishram = samadhan, AA p. 23), while inner sovereignty (samprabhuta, AA p. 104) and the continuity of jeevan across bodily journeys establish the satiation point of exchange (AA p. 76) and zero intergenerational discounting.</a:t>
+            </a:r>
+          </a:p>
+          <a:p/>
+          <a:p>
+            <a:r>
+              <a:t>Finally, this explains the bridge to Part V: because eight billion people are currently in the process of realisation (anubhav-gami) rather than already perfected, operating this order at Earth scale requires a federated ten-tier AI agentic backbone that places objective facts and checkable causal logic before councils in common view so communities can collectively self-correct as they grow in understanding.</a:t>
             </a:r>
           </a:p>
         </p:txBody>
@@ -6750,7 +6947,7 @@
                 </a:solidFill>
                 <a:latin typeface="Calibri"/>
               </a:rPr>
-              <a:t>AA · MVD · JV · SB · KD · JVD · AVD  ·  1 / 33</a:t>
+              <a:t>AA · MVD · JV · SB · KD · JVD · AVD  ·  1 / 35</a:t>
             </a:r>
           </a:p>
         </p:txBody>
@@ -7889,7 +8086,7 @@
                 </a:solidFill>
                 <a:latin typeface="Calibri"/>
               </a:rPr>
-              <a:t>KD p. 115  ·  SB p. 234  ·  Robbins 1932  ·  AnalyticMadhyasthDarshan.org  ·  10 / 33</a:t>
+              <a:t>KD p. 115  ·  SB p. 234  ·  Robbins 1932  ·  AnalyticMadhyasthDarshan.org  ·  10 / 35</a:t>
             </a:r>
           </a:p>
         </p:txBody>
@@ -8995,7 +9192,7 @@
                 </a:solidFill>
                 <a:latin typeface="Calibri"/>
               </a:rPr>
-              <a:t>AA pp. 1–8, 45–46, 52–53, 75  ·  MVD pp. 57, 66, 182  ·  JV pp. 151–152  ·  AnalyticMadhyasthDarshan.org  ·  11 / 33</a:t>
+              <a:t>AA pp. 1–8, 45–46, 52–53, 75  ·  MVD pp. 57, 66, 182  ·  JV pp. 151–152  ·  AnalyticMadhyasthDarshan.org  ·  11 / 35</a:t>
             </a:r>
           </a:p>
         </p:txBody>
@@ -10092,7 +10289,7 @@
                 </a:solidFill>
                 <a:latin typeface="Calibri"/>
               </a:rPr>
-              <a:t>AA pp. 30–31, 47, 70–71, 74, 82  ·  KD §3.7  ·  AnalyticMadhyasthDarshan.org  ·  12 / 33</a:t>
+              <a:t>AA pp. 30–31, 47, 70–71, 74, 82  ·  KD §3.7  ·  AnalyticMadhyasthDarshan.org  ·  12 / 35</a:t>
             </a:r>
           </a:p>
         </p:txBody>
@@ -10879,7 +11076,7 @@
                 </a:solidFill>
                 <a:latin typeface="Calibri"/>
               </a:rPr>
-              <a:t>AA pp. 18–19, 25, 48–50, 73, 105  ·  MVD pp. 56, 243  ·  SB p. 268  ·  JVD p. 215  ·  AnalyticMadhyasthDarshan.org  ·  13 / 33</a:t>
+              <a:t>AA pp. 18–19, 25, 48–50, 73, 105  ·  MVD pp. 56, 243  ·  SB p. 268  ·  JVD p. 215  ·  AnalyticMadhyasthDarshan.org  ·  13 / 35</a:t>
             </a:r>
           </a:p>
         </p:txBody>
@@ -11999,7 +12196,7 @@
                 </a:solidFill>
                 <a:latin typeface="Calibri"/>
               </a:rPr>
-              <a:t>AA pp. 15, 34–35, 42  ·  MVD p. 152  ·  AnalyticMadhyasthDarshan.org  ·  14 / 33</a:t>
+              <a:t>AA pp. 15, 34–35, 42  ·  MVD p. 152  ·  AnalyticMadhyasthDarshan.org  ·  14 / 35</a:t>
             </a:r>
           </a:p>
         </p:txBody>
@@ -13313,7 +13510,7 @@
                 </a:solidFill>
                 <a:latin typeface="Calibri"/>
               </a:rPr>
-              <a:t>AA pp. 26, 106, 118  ·  JV p. 154  ·  AnalyticMadhyasthDarshan.org  ·  15 / 33</a:t>
+              <a:t>AA pp. 26, 106, 118  ·  JV p. 154  ·  AnalyticMadhyasthDarshan.org  ·  15 / 35</a:t>
             </a:r>
           </a:p>
         </p:txBody>
@@ -14123,7 +14320,7 @@
                 </a:solidFill>
                 <a:latin typeface="Calibri"/>
               </a:rPr>
-              <a:t>AA pp. 14, 26, 62–63, 65, 76, 113–114  ·  MVD p. 71  ·  JV p. 153  ·  KD p. 115  ·  AnalyticMadhyasthDarshan.org  ·  16 / 33</a:t>
+              <a:t>AA pp. 14, 26, 62–63, 65, 76, 113–114  ·  MVD p. 71  ·  JV p. 153  ·  KD p. 115  ·  AnalyticMadhyasthDarshan.org  ·  16 / 35</a:t>
             </a:r>
           </a:p>
         </p:txBody>
@@ -15991,7 +16188,7 @@
                 </a:solidFill>
                 <a:latin typeface="Calibri"/>
               </a:rPr>
-              <a:t>AA pp. 20–24, 68, 72, 92, 94, 116  ·  MVD p. 56  ·  KD pp. 4, 116  ·  AnalyticMadhyasthDarshan.org  ·  17 / 33</a:t>
+              <a:t>AA pp. 20–24, 68, 72, 92, 94, 116  ·  MVD p. 56  ·  KD pp. 4, 116  ·  AnalyticMadhyasthDarshan.org  ·  17 / 35</a:t>
             </a:r>
           </a:p>
         </p:txBody>
@@ -17198,7 +17395,7 @@
                 </a:solidFill>
                 <a:latin typeface="Calibri"/>
               </a:rPr>
-              <a:t>AA pp. 49, 66, 112, 119–120, 143, 145  ·  MVD pp. 265–268  ·  Axiology §§1.1, 1.5–1.6  ·  AnalyticMadhyasthDarshan.org  ·  18 / 33</a:t>
+              <a:t>AA pp. 49, 66, 112, 119–120, 143, 145  ·  MVD pp. 265–268  ·  Axiology §§1.1, 1.5–1.6  ·  AnalyticMadhyasthDarshan.org  ·  18 / 35</a:t>
             </a:r>
           </a:p>
         </p:txBody>
@@ -18008,7 +18205,7 @@
                 </a:solidFill>
                 <a:latin typeface="Calibri"/>
               </a:rPr>
-              <a:t>AA pp. 1, 22–24, 54, 101–102, 136–138, 140  ·  MVD pp. 59, 72, 263, 267, 318–320, 339  ·  KD pp. 1–2, 115–117  ·  19 / 33</a:t>
+              <a:t>AA pp. 1, 22–24, 54, 101–102, 136–138, 140  ·  MVD pp. 59, 72, 263, 267, 318–320, 339  ·  KD pp. 1–2, 115–117  ·  19 / 35</a:t>
             </a:r>
           </a:p>
         </p:txBody>
@@ -18756,7 +18953,7 @@
                 </a:solidFill>
                 <a:latin typeface="Calibri"/>
               </a:rPr>
-              <a:t>Body-centric economics cannot close the cycle without jeevan and realisation in coexistence.</a:t>
+              <a:t>Without jeevan and realisation (anubhav), body-centric economics hits six structural deadlocks.</a:t>
             </a:r>
           </a:p>
         </p:txBody>
@@ -18795,7 +18992,7 @@
                 </a:solidFill>
                 <a:latin typeface="Calibri"/>
               </a:rPr>
-              <a:t>Study, opening and §1  ·  AnalyticMadhyasthDarshan.org  ·  2 / 33</a:t>
+              <a:t>Study, opening and §1  ·  AnalyticMadhyasthDarshan.org  ·  2 / 35</a:t>
             </a:r>
           </a:p>
         </p:txBody>
@@ -19894,7 +20091,7 @@
                 </a:solidFill>
                 <a:latin typeface="Calibri"/>
               </a:rPr>
-              <a:t>MVD pp. 263–264  ·  AA pp. 31–33, 78, 92, 106–107, 114, 142, 146  ·  KD p. 7  ·  AnalyticMadhyasthDarshan.org  ·  20 / 33</a:t>
+              <a:t>MVD pp. 263–264  ·  AA pp. 31–33, 78, 92, 106–107, 114, 142, 146  ·  KD p. 7  ·  AnalyticMadhyasthDarshan.org  ·  20 / 35</a:t>
             </a:r>
           </a:p>
         </p:txBody>
@@ -20790,7 +20987,7 @@
                 </a:solidFill>
                 <a:latin typeface="Calibri"/>
               </a:rPr>
-              <a:t>SB p. 267  ·  AA pp. 29, 47, 56–58, 107, 118, 131, 140, 144  ·  JV pp. 88–89  ·  JVD pp. 35, 216  ·  MVD p. 265  ·  21 / 33</a:t>
+              <a:t>SB p. 267  ·  AA pp. 29, 47, 56–58, 107, 118, 131, 140, 144  ·  JV pp. 88–89  ·  JVD pp. 35, 216  ·  MVD p. 265  ·  21 / 35</a:t>
             </a:r>
           </a:p>
         </p:txBody>
@@ -21896,7 +22093,7 @@
                 </a:solidFill>
                 <a:latin typeface="Calibri"/>
               </a:rPr>
-              <a:t>AA pp. 27–30, 63, 104–105, 110–117, 127, 133–136  ·  MVD pp. 233, 259, 264–271  ·  KD p. 67  ·  22 / 33</a:t>
+              <a:t>AA pp. 27–30, 63, 104–105, 110–117, 127, 133–136  ·  MVD pp. 233, 259, 264–271  ·  KD p. 67  ·  22 / 35</a:t>
             </a:r>
           </a:p>
         </p:txBody>
@@ -22871,7 +23068,7 @@
                 </a:solidFill>
                 <a:latin typeface="Calibri"/>
               </a:rPr>
-              <a:t>AA pp. 122–125, 136–138, 142–143  ·  JV pp. 153–154  ·  JVD pp. 217–218  ·  AVD p. 52  ·  AnalyticMadhyasthDarshan.org  ·  23 / 33</a:t>
+              <a:t>AA pp. 122–125, 136–138, 142–143  ·  JV pp. 153–154  ·  JVD pp. 217–218  ·  AVD p. 52  ·  AnalyticMadhyasthDarshan.org  ·  23 / 35</a:t>
             </a:r>
           </a:p>
         </p:txBody>
@@ -24695,7 +24892,7 @@
                 </a:solidFill>
                 <a:latin typeface="Calibri"/>
               </a:rPr>
-              <a:t>Study §§4–7  ·  Jevons 1871  ·  Marx 1875  ·  Robbins 1932  ·  Polanyi 1944  ·  Daly 1974  ·  Kumarappa 1945  ·  24 / 33</a:t>
+              <a:t>Study §§4–7  ·  Jevons 1871  ·  Marx 1875  ·  Robbins 1932  ·  Polanyi 1944  ·  Daly 1974  ·  Kumarappa 1945  ·  24 / 35</a:t>
             </a:r>
           </a:p>
         </p:txBody>
@@ -25884,7 +26081,7 @@
                 </a:solidFill>
                 <a:latin typeface="Calibri"/>
               </a:rPr>
-              <a:t>Ricardo 1817  ·  Leontief 1936  ·  Polanyi 1944  ·  Hayek 1945  ·  Sen 1999  ·  Stodder 2009  ·  Ostrom 2010  ·  25 / 33</a:t>
+              <a:t>Ricardo 1817  ·  Leontief 1936  ·  Polanyi 1944  ·  Hayek 1945  ·  Sen 1999  ·  Stodder 2009  ·  Ostrom 2010  ·  25 / 35</a:t>
             </a:r>
           </a:p>
         </p:txBody>
@@ -26546,7 +26743,7 @@
                 </a:solidFill>
                 <a:latin typeface="Calibri"/>
               </a:rPr>
-              <a:t>MVD p. 173  ·  AA pp. 18, 117  ·  KD p. 139  ·  SB p. 267  ·  AI Study §§1.2–1.5  ·  AnalyticMadhyasthDarshan.org  ·  26 / 33</a:t>
+              <a:t>MVD p. 173  ·  AA pp. 18, 117  ·  KD p. 139  ·  SB p. 267  ·  AI Study §§1.2–1.5  ·  AnalyticMadhyasthDarshan.org  ·  28 / 35</a:t>
             </a:r>
           </a:p>
         </p:txBody>
@@ -27348,7 +27545,7 @@
                 </a:solidFill>
                 <a:latin typeface="Calibri"/>
               </a:rPr>
-              <a:t>Study §8.2  ·  AA pp. 72, 107, 122–127, 131–132, 136–138, 142–149  ·  MVD p. 259  ·  JVD p. 35  ·  27 / 33</a:t>
+              <a:t>Study §8.2  ·  AA pp. 72, 107, 122–127, 131–132, 136–138, 142–149  ·  MVD p. 259  ·  JVD p. 35  ·  29 / 35</a:t>
             </a:r>
           </a:p>
         </p:txBody>
@@ -29083,7 +29280,7 @@
                 </a:solidFill>
                 <a:latin typeface="Calibri"/>
               </a:rPr>
-              <a:t>Study §8.3  ·  Technical Note  ·  AA pp. 14–15, 27–30, 65–67, 112–145  ·  MVD p. 268  ·  AnalyticMadhyasthDarshan.org  ·  28 / 33</a:t>
+              <a:t>Study §8.3  ·  Technical Note  ·  AA pp. 14–15, 27–30, 65–67, 112–145  ·  MVD p. 268  ·  AnalyticMadhyasthDarshan.org  ·  30 / 35</a:t>
             </a:r>
           </a:p>
         </p:txBody>
@@ -30741,7 +30938,7 @@
                 </a:solidFill>
                 <a:latin typeface="Calibri"/>
               </a:rPr>
-              <a:t>Study §8.4  ·  AA pp. 26, 49, 106, 119, 127, 142–146  ·  MVD pp. 263–268  ·  AnalyticMadhyasthDarshan.org  ·  29 / 33</a:t>
+              <a:t>Study §8.4  ·  AA pp. 26, 49, 106, 119, 127, 142–146  ·  MVD pp. 263–268  ·  AnalyticMadhyasthDarshan.org  ·  31 / 35</a:t>
             </a:r>
           </a:p>
         </p:txBody>
@@ -31219,8 +31416,8 @@
                 </a:solidFill>
                 <a:latin typeface="Calibri"/>
               </a:rPr>
-              <a:t>jeevan &amp; realisation
-§2</a:t>
+              <a:t>6 deadlocks without jeevan
+§§2, 4, 7</a:t>
             </a:r>
           </a:p>
         </p:txBody>
@@ -31360,7 +31557,7 @@
                 </a:solidFill>
                 <a:latin typeface="Calibri"/>
               </a:rPr>
-              <a:t>family to Earth order
+              <a:t>realisation &amp; Earth order
 §3</a:t>
             </a:r>
           </a:p>
@@ -32122,7 +32319,7 @@
                 </a:solidFill>
                 <a:latin typeface="Calibri"/>
               </a:rPr>
-              <a:t>Study, opening and §§1–3, 8  ·  AnalyticMadhyasthDarshan.org  ·  3 / 33</a:t>
+              <a:t>Study, opening and §§1–3, 8  ·  AnalyticMadhyasthDarshan.org  ·  3 / 35</a:t>
             </a:r>
           </a:p>
         </p:txBody>
@@ -33430,7 +33627,7 @@
                 </a:solidFill>
                 <a:latin typeface="Calibri"/>
               </a:rPr>
-              <a:t>Study §§4.2, 4.10, 8.5  ·  AA pp. 66–67, 118–120, 131, 142–145  ·  Ricardo 1817  ·  Leontief 1936  ·  30 / 33</a:t>
+              <a:t>Study §§4.2, 4.10, 8.5  ·  AA pp. 66–67, 118–120, 131, 142–145  ·  Ricardo 1817  ·  Leontief 1936  ·  32 / 35</a:t>
             </a:r>
           </a:p>
         </p:txBody>
@@ -34332,7 +34529,7 @@
                 </a:solidFill>
                 <a:latin typeface="Calibri"/>
               </a:rPr>
-              <a:t>Study §§8.6–8.8  ·  AA pp. 29, 56–58, 72, 82, 92, 107, 118, 128, 132  ·  MVD pp. 265, 268  ·  JVD p. 35  ·  31 / 33</a:t>
+              <a:t>Study §§8.6–8.8  ·  AA pp. 29, 56–58, 72, 82, 92, 107, 118, 128, 132  ·  MVD pp. 265, 268  ·  JVD p. 35  ·  33 / 35</a:t>
             </a:r>
           </a:p>
         </p:txBody>
@@ -35646,7 +35843,7 @@
                 </a:solidFill>
                 <a:latin typeface="Calibri"/>
               </a:rPr>
-              <a:t>Study §§9.1–9.7  ·  AnalyticMadhyasthDarshan.org  ·  32 / 33</a:t>
+              <a:t>Study §§9.1–9.7  ·  AnalyticMadhyasthDarshan.org  ·  34 / 35</a:t>
             </a:r>
           </a:p>
         </p:txBody>
@@ -36380,7 +36577,2459 @@
                 </a:solidFill>
                 <a:latin typeface="Calibri"/>
               </a:rPr>
-              <a:t>AnalyticMadhyasthDarshan.org  ·  33 / 33</a:t>
+              <a:t>AnalyticMadhyasthDarshan.org  ·  35 / 35</a:t>
+            </a:r>
+          </a:p>
+        </p:txBody>
+      </p:sp>
+    </p:spTree>
+  </p:cSld>
+  <p:clrMapOvr>
+    <a:masterClrMapping/>
+  </p:clrMapOvr>
+</p:sld>
+</file>
+
+<file path=ppt/slides/slide34.xml><?xml version="1.0" encoding="utf-8"?>
+<p:sld xmlns:a="http://schemas.openxmlformats.org/drawingml/2006/main" xmlns:p="http://schemas.openxmlformats.org/presentationml/2006/main" xmlns:r="http://schemas.openxmlformats.org/officeDocument/2006/relationships">
+  <p:cSld>
+    <p:spTree>
+      <p:nvGrpSpPr>
+        <p:cNvPr id="2" name=""/>
+        <p:cNvGrpSpPr/>
+        <p:nvPr/>
+      </p:nvGrpSpPr>
+      <p:grpSpPr/>
+      <p:sp>
+        <p:nvSpPr>
+          <p:cNvPr id="4" name="Oval 1"/>
+          <p:cNvSpPr/>
+          <p:nvPr/>
+        </p:nvSpPr>
+        <p:spPr>
+          <a:xfrm>
+            <a:off x="457200" y="384048"/>
+            <a:ext cx="365760" cy="365760"/>
+          </a:xfrm>
+          <a:prstGeom prst="ellipse">
+            <a:avLst/>
+          </a:prstGeom>
+          <a:noFill/>
+          <a:ln w="12700">
+            <a:solidFill>
+              <a:srgbClr val="3B4A7A"/>
+            </a:solidFill>
+          </a:ln>
+          <a:effectLst/>
+        </p:spPr>
+        <p:style>
+          <a:lnRef idx="1">
+            <a:schemeClr val="accent1"/>
+          </a:lnRef>
+          <a:fillRef idx="3">
+            <a:schemeClr val="accent1"/>
+          </a:fillRef>
+          <a:effectRef idx="2">
+            <a:schemeClr val="accent1"/>
+          </a:effectRef>
+          <a:fontRef idx="minor">
+            <a:schemeClr val="lt1"/>
+          </a:fontRef>
+        </p:style>
+        <p:txBody>
+          <a:bodyPr rtlCol="0" anchor="ctr"/>
+          <a:lstStyle/>
+          <a:p>
+            <a:pPr algn="ctr"/>
+          </a:p>
+        </p:txBody>
+      </p:sp>
+      <p:sp>
+        <p:nvSpPr>
+          <p:cNvPr id="5" name="Oval 2"/>
+          <p:cNvSpPr/>
+          <p:nvPr/>
+        </p:nvSpPr>
+        <p:spPr>
+          <a:xfrm>
+            <a:off x="530352" y="457200"/>
+            <a:ext cx="219456" cy="219456"/>
+          </a:xfrm>
+          <a:prstGeom prst="ellipse">
+            <a:avLst/>
+          </a:prstGeom>
+          <a:noFill/>
+          <a:ln w="12700">
+            <a:solidFill>
+              <a:srgbClr val="3B4A7A"/>
+            </a:solidFill>
+          </a:ln>
+          <a:effectLst/>
+        </p:spPr>
+        <p:style>
+          <a:lnRef idx="1">
+            <a:schemeClr val="accent1"/>
+          </a:lnRef>
+          <a:fillRef idx="3">
+            <a:schemeClr val="accent1"/>
+          </a:fillRef>
+          <a:effectRef idx="2">
+            <a:schemeClr val="accent1"/>
+          </a:effectRef>
+          <a:fontRef idx="minor">
+            <a:schemeClr val="lt1"/>
+          </a:fontRef>
+        </p:style>
+        <p:txBody>
+          <a:bodyPr rtlCol="0" anchor="ctr"/>
+          <a:lstStyle/>
+          <a:p>
+            <a:pPr algn="ctr"/>
+          </a:p>
+        </p:txBody>
+      </p:sp>
+      <p:sp>
+        <p:nvSpPr>
+          <p:cNvPr id="6" name="Oval 3"/>
+          <p:cNvSpPr/>
+          <p:nvPr/>
+        </p:nvSpPr>
+        <p:spPr>
+          <a:xfrm>
+            <a:off x="594360" y="521207"/>
+            <a:ext cx="91440" cy="91440"/>
+          </a:xfrm>
+          <a:prstGeom prst="ellipse">
+            <a:avLst/>
+          </a:prstGeom>
+          <a:solidFill>
+            <a:srgbClr val="C9821E"/>
+          </a:solidFill>
+          <a:ln>
+            <a:noFill/>
+          </a:ln>
+          <a:effectLst/>
+        </p:spPr>
+        <p:style>
+          <a:lnRef idx="1">
+            <a:schemeClr val="accent1"/>
+          </a:lnRef>
+          <a:fillRef idx="3">
+            <a:schemeClr val="accent1"/>
+          </a:fillRef>
+          <a:effectRef idx="2">
+            <a:schemeClr val="accent1"/>
+          </a:effectRef>
+          <a:fontRef idx="minor">
+            <a:schemeClr val="lt1"/>
+          </a:fontRef>
+        </p:style>
+        <p:txBody>
+          <a:bodyPr rtlCol="0" anchor="ctr"/>
+          <a:lstStyle/>
+          <a:p>
+            <a:pPr algn="ctr"/>
+          </a:p>
+        </p:txBody>
+      </p:sp>
+      <p:sp>
+        <p:nvSpPr>
+          <p:cNvPr id="7" name="TextBox 4"/>
+          <p:cNvSpPr txBox="1"/>
+          <p:nvPr/>
+        </p:nvSpPr>
+        <p:spPr>
+          <a:xfrm>
+            <a:off x="960120" y="256032"/>
+            <a:ext cx="7680960" cy="237744"/>
+          </a:xfrm>
+          <a:prstGeom prst="rect">
+            <a:avLst/>
+          </a:prstGeom>
+          <a:noFill/>
+        </p:spPr>
+        <p:txBody>
+          <a:bodyPr wrap="square" lIns="0" rIns="0" tIns="0" bIns="0" anchor="ctr">
+            <a:spAutoFit/>
+          </a:bodyPr>
+          <a:lstStyle/>
+          <a:p>
+            <a:pPr>
+              <a:spcAft>
+                <a:spcPts val="0"/>
+              </a:spcAft>
+            </a:pPr>
+            <a:r>
+              <a:rPr sz="1050" b="1" i="0">
+                <a:solidFill>
+                  <a:srgbClr val="9A6414"/>
+                </a:solidFill>
+                <a:latin typeface="Calibri"/>
+              </a:rPr>
+              <a:t>IV  ·  THE SIX DEADLOCKS  ·  §§1.3, 4, 7.2</a:t>
+            </a:r>
+          </a:p>
+        </p:txBody>
+      </p:sp>
+      <p:sp>
+        <p:nvSpPr>
+          <p:cNvPr id="8" name="TextBox 5"/>
+          <p:cNvSpPr txBox="1"/>
+          <p:nvPr/>
+        </p:nvSpPr>
+        <p:spPr>
+          <a:xfrm>
+            <a:off x="960120" y="457200"/>
+            <a:ext cx="7726679" cy="566928"/>
+          </a:xfrm>
+          <a:prstGeom prst="rect">
+            <a:avLst/>
+          </a:prstGeom>
+          <a:noFill/>
+        </p:spPr>
+        <p:txBody>
+          <a:bodyPr wrap="square" lIns="0" rIns="0" tIns="0" bIns="0" anchor="ctr">
+            <a:spAutoFit/>
+          </a:bodyPr>
+          <a:lstStyle/>
+          <a:p>
+            <a:pPr>
+              <a:spcAft>
+                <a:spcPts val="0"/>
+              </a:spcAft>
+            </a:pPr>
+            <a:r>
+              <a:rPr sz="3000" b="1" i="0">
+                <a:solidFill>
+                  <a:srgbClr val="1E2447"/>
+                </a:solidFill>
+                <a:latin typeface="Cambria"/>
+              </a:rPr>
+              <a:t>Six Deadlocks of Current Economics</a:t>
+            </a:r>
+          </a:p>
+        </p:txBody>
+      </p:sp>
+      <p:sp>
+        <p:nvSpPr>
+          <p:cNvPr id="7" name="Rounded Rectangle 6"/>
+          <p:cNvSpPr/>
+          <p:nvPr/>
+        </p:nvSpPr>
+        <p:spPr>
+          <a:xfrm>
+            <a:off x="7635240" y="1042415"/>
+            <a:ext cx="868680" cy="182880"/>
+          </a:xfrm>
+          <a:prstGeom prst="roundRect">
+            <a:avLst>
+              <a:gd name="adj" fmla="val 7000"/>
+            </a:avLst>
+          </a:prstGeom>
+          <a:solidFill>
+            <a:srgbClr val="7A8295"/>
+          </a:solidFill>
+          <a:ln>
+            <a:noFill/>
+          </a:ln>
+          <a:effectLst/>
+        </p:spPr>
+        <p:style>
+          <a:lnRef idx="1">
+            <a:schemeClr val="accent1"/>
+          </a:lnRef>
+          <a:fillRef idx="3">
+            <a:schemeClr val="accent1"/>
+          </a:fillRef>
+          <a:effectRef idx="2">
+            <a:schemeClr val="accent1"/>
+          </a:effectRef>
+          <a:fontRef idx="minor">
+            <a:schemeClr val="lt1"/>
+          </a:fontRef>
+        </p:style>
+        <p:txBody>
+          <a:bodyPr rtlCol="0" anchor="ctr"/>
+          <a:lstStyle/>
+          <a:p>
+            <a:pPr algn="ctr"/>
+          </a:p>
+        </p:txBody>
+      </p:sp>
+      <p:sp>
+        <p:nvSpPr>
+          <p:cNvPr id="8" name="TextBox 7"/>
+          <p:cNvSpPr txBox="1"/>
+          <p:nvPr/>
+        </p:nvSpPr>
+        <p:spPr>
+          <a:xfrm>
+            <a:off x="7635240" y="1042415"/>
+            <a:ext cx="868680" cy="182880"/>
+          </a:xfrm>
+          <a:prstGeom prst="rect">
+            <a:avLst/>
+          </a:prstGeom>
+          <a:noFill/>
+        </p:spPr>
+        <p:txBody>
+          <a:bodyPr wrap="square" lIns="0" rIns="0" tIns="0" bIns="0" anchor="ctr">
+            <a:spAutoFit/>
+          </a:bodyPr>
+          <a:lstStyle/>
+          <a:p>
+            <a:pPr algn="ctr">
+              <a:spcAft>
+                <a:spcPts val="0"/>
+              </a:spcAft>
+            </a:pPr>
+            <a:r>
+              <a:rPr sz="750" b="1" i="0">
+                <a:solidFill>
+                  <a:srgbClr val="FFFFFF"/>
+                </a:solidFill>
+                <a:latin typeface="Calibri"/>
+              </a:rPr>
+              <a:t>COMPARISON</a:t>
+            </a:r>
+          </a:p>
+        </p:txBody>
+      </p:sp>
+      <p:sp>
+        <p:nvSpPr>
+          <p:cNvPr id="11" name="Rectangle 8"/>
+          <p:cNvSpPr/>
+          <p:nvPr/>
+        </p:nvSpPr>
+        <p:spPr>
+          <a:xfrm>
+            <a:off x="640080" y="1280160"/>
+            <a:ext cx="7863840" cy="292608"/>
+          </a:xfrm>
+          <a:prstGeom prst="rect">
+            <a:avLst/>
+          </a:prstGeom>
+          <a:solidFill>
+            <a:srgbClr val="1E2447"/>
+          </a:solidFill>
+          <a:ln>
+            <a:noFill/>
+          </a:ln>
+          <a:effectLst/>
+        </p:spPr>
+        <p:style>
+          <a:lnRef idx="1">
+            <a:schemeClr val="accent1"/>
+          </a:lnRef>
+          <a:fillRef idx="3">
+            <a:schemeClr val="accent1"/>
+          </a:fillRef>
+          <a:effectRef idx="2">
+            <a:schemeClr val="accent1"/>
+          </a:effectRef>
+          <a:fontRef idx="minor">
+            <a:schemeClr val="lt1"/>
+          </a:fontRef>
+        </p:style>
+        <p:txBody>
+          <a:bodyPr rtlCol="0" anchor="ctr"/>
+          <a:lstStyle/>
+          <a:p>
+            <a:pPr algn="ctr"/>
+          </a:p>
+        </p:txBody>
+      </p:sp>
+      <p:sp>
+        <p:nvSpPr>
+          <p:cNvPr id="12" name="TextBox 9"/>
+          <p:cNvSpPr txBox="1"/>
+          <p:nvPr/>
+        </p:nvSpPr>
+        <p:spPr>
+          <a:xfrm>
+            <a:off x="731519" y="1280160"/>
+            <a:ext cx="2103120" cy="292608"/>
+          </a:xfrm>
+          <a:prstGeom prst="rect">
+            <a:avLst/>
+          </a:prstGeom>
+          <a:noFill/>
+        </p:spPr>
+        <p:txBody>
+          <a:bodyPr wrap="square" lIns="0" rIns="0" tIns="0" bIns="0" anchor="ctr">
+            <a:spAutoFit/>
+          </a:bodyPr>
+          <a:lstStyle/>
+          <a:p>
+            <a:pPr>
+              <a:spcAft>
+                <a:spcPts val="0"/>
+              </a:spcAft>
+            </a:pPr>
+            <a:r>
+              <a:rPr sz="1050" b="1" i="0">
+                <a:solidFill>
+                  <a:srgbClr val="FFFFFF"/>
+                </a:solidFill>
+                <a:latin typeface="Calibri"/>
+              </a:rPr>
+              <a:t>Deadlock in current economics</a:t>
+            </a:r>
+          </a:p>
+        </p:txBody>
+      </p:sp>
+      <p:sp>
+        <p:nvSpPr>
+          <p:cNvPr id="13" name="TextBox 10"/>
+          <p:cNvSpPr txBox="1"/>
+          <p:nvPr/>
+        </p:nvSpPr>
+        <p:spPr>
+          <a:xfrm>
+            <a:off x="2971800" y="1280160"/>
+            <a:ext cx="2651760" cy="292608"/>
+          </a:xfrm>
+          <a:prstGeom prst="rect">
+            <a:avLst/>
+          </a:prstGeom>
+          <a:noFill/>
+        </p:spPr>
+        <p:txBody>
+          <a:bodyPr wrap="square" lIns="0" rIns="0" tIns="0" bIns="0" anchor="ctr">
+            <a:spAutoFit/>
+          </a:bodyPr>
+          <a:lstStyle/>
+          <a:p>
+            <a:pPr>
+              <a:spcAft>
+                <a:spcPts val="0"/>
+              </a:spcAft>
+            </a:pPr>
+            <a:r>
+              <a:rPr sz="1050" b="1" i="0">
+                <a:solidFill>
+                  <a:srgbClr val="FFFFFF"/>
+                </a:solidFill>
+                <a:latin typeface="Calibri"/>
+              </a:rPr>
+              <a:t>Why body-centric economics stalls</a:t>
+            </a:r>
+          </a:p>
+        </p:txBody>
+      </p:sp>
+      <p:sp>
+        <p:nvSpPr>
+          <p:cNvPr id="14" name="TextBox 11"/>
+          <p:cNvSpPr txBox="1"/>
+          <p:nvPr/>
+        </p:nvSpPr>
+        <p:spPr>
+          <a:xfrm>
+            <a:off x="5760720" y="1280160"/>
+            <a:ext cx="2697480" cy="292608"/>
+          </a:xfrm>
+          <a:prstGeom prst="rect">
+            <a:avLst/>
+          </a:prstGeom>
+          <a:noFill/>
+        </p:spPr>
+        <p:txBody>
+          <a:bodyPr wrap="square" lIns="0" rIns="0" tIns="0" bIns="0" anchor="ctr">
+            <a:spAutoFit/>
+          </a:bodyPr>
+          <a:lstStyle/>
+          <a:p>
+            <a:pPr>
+              <a:spcAft>
+                <a:spcPts val="0"/>
+              </a:spcAft>
+            </a:pPr>
+            <a:r>
+              <a:rPr sz="1050" b="1" i="0">
+                <a:solidFill>
+                  <a:srgbClr val="FFFFFF"/>
+                </a:solidFill>
+                <a:latin typeface="Calibri"/>
+              </a:rPr>
+              <a:t>How jeevan &amp; realisation resolve it</a:t>
+            </a:r>
+          </a:p>
+        </p:txBody>
+      </p:sp>
+      <p:sp>
+        <p:nvSpPr>
+          <p:cNvPr id="15" name="Rectangle 12"/>
+          <p:cNvSpPr/>
+          <p:nvPr/>
+        </p:nvSpPr>
+        <p:spPr>
+          <a:xfrm>
+            <a:off x="640080" y="1572768"/>
+            <a:ext cx="7863840" cy="402336"/>
+          </a:xfrm>
+          <a:prstGeom prst="rect">
+            <a:avLst/>
+          </a:prstGeom>
+          <a:solidFill>
+            <a:srgbClr val="EEF1F8"/>
+          </a:solidFill>
+          <a:ln>
+            <a:noFill/>
+          </a:ln>
+          <a:effectLst/>
+        </p:spPr>
+        <p:style>
+          <a:lnRef idx="1">
+            <a:schemeClr val="accent1"/>
+          </a:lnRef>
+          <a:fillRef idx="3">
+            <a:schemeClr val="accent1"/>
+          </a:fillRef>
+          <a:effectRef idx="2">
+            <a:schemeClr val="accent1"/>
+          </a:effectRef>
+          <a:fontRef idx="minor">
+            <a:schemeClr val="lt1"/>
+          </a:fontRef>
+        </p:style>
+        <p:txBody>
+          <a:bodyPr rtlCol="0" anchor="ctr"/>
+          <a:lstStyle/>
+          <a:p>
+            <a:pPr algn="ctr"/>
+          </a:p>
+        </p:txBody>
+      </p:sp>
+      <p:sp>
+        <p:nvSpPr>
+          <p:cNvPr id="16" name="Rectangle 13"/>
+          <p:cNvSpPr/>
+          <p:nvPr/>
+        </p:nvSpPr>
+        <p:spPr>
+          <a:xfrm>
+            <a:off x="640080" y="1965960"/>
+            <a:ext cx="7863840" cy="9144"/>
+          </a:xfrm>
+          <a:prstGeom prst="rect">
+            <a:avLst/>
+          </a:prstGeom>
+          <a:solidFill>
+            <a:srgbClr val="D5DBEA"/>
+          </a:solidFill>
+          <a:ln>
+            <a:noFill/>
+          </a:ln>
+          <a:effectLst/>
+        </p:spPr>
+        <p:style>
+          <a:lnRef idx="1">
+            <a:schemeClr val="accent1"/>
+          </a:lnRef>
+          <a:fillRef idx="3">
+            <a:schemeClr val="accent1"/>
+          </a:fillRef>
+          <a:effectRef idx="2">
+            <a:schemeClr val="accent1"/>
+          </a:effectRef>
+          <a:fontRef idx="minor">
+            <a:schemeClr val="lt1"/>
+          </a:fontRef>
+        </p:style>
+        <p:txBody>
+          <a:bodyPr rtlCol="0" anchor="ctr"/>
+          <a:lstStyle/>
+          <a:p>
+            <a:pPr algn="ctr"/>
+          </a:p>
+        </p:txBody>
+      </p:sp>
+      <p:sp>
+        <p:nvSpPr>
+          <p:cNvPr id="17" name="TextBox 14"/>
+          <p:cNvSpPr txBox="1"/>
+          <p:nvPr/>
+        </p:nvSpPr>
+        <p:spPr>
+          <a:xfrm>
+            <a:off x="731519" y="1600200"/>
+            <a:ext cx="2075688" cy="347472"/>
+          </a:xfrm>
+          <a:prstGeom prst="rect">
+            <a:avLst/>
+          </a:prstGeom>
+          <a:noFill/>
+        </p:spPr>
+        <p:txBody>
+          <a:bodyPr wrap="square" lIns="0" rIns="0" tIns="0" bIns="0" anchor="ctr">
+            <a:spAutoFit/>
+          </a:bodyPr>
+          <a:lstStyle/>
+          <a:p>
+            <a:pPr>
+              <a:spcAft>
+                <a:spcPts val="0"/>
+              </a:spcAft>
+            </a:pPr>
+            <a:r>
+              <a:rPr sz="1050" b="1" i="0">
+                <a:solidFill>
+                  <a:srgbClr val="1E2447"/>
+                </a:solidFill>
+                <a:latin typeface="Calibri"/>
+              </a:rPr>
+              <a:t>1. Rebound vs. caps &amp; vows</a:t>
+            </a:r>
+          </a:p>
+        </p:txBody>
+      </p:sp>
+      <p:sp>
+        <p:nvSpPr>
+          <p:cNvPr id="18" name="TextBox 15"/>
+          <p:cNvSpPr txBox="1"/>
+          <p:nvPr/>
+        </p:nvSpPr>
+        <p:spPr>
+          <a:xfrm>
+            <a:off x="2971800" y="1600200"/>
+            <a:ext cx="2624327" cy="347472"/>
+          </a:xfrm>
+          <a:prstGeom prst="rect">
+            <a:avLst/>
+          </a:prstGeom>
+          <a:noFill/>
+        </p:spPr>
+        <p:txBody>
+          <a:bodyPr wrap="square" lIns="0" rIns="0" tIns="0" bIns="0" anchor="ctr">
+            <a:spAutoFit/>
+          </a:bodyPr>
+          <a:lstStyle/>
+          <a:p>
+            <a:pPr>
+              <a:spcAft>
+                <a:spcPts val="0"/>
+              </a:spcAft>
+            </a:pPr>
+            <a:r>
+              <a:rPr sz="1000" b="0" i="0">
+                <a:solidFill>
+                  <a:srgbClr val="5A6377"/>
+                </a:solidFill>
+                <a:latin typeface="Calibri"/>
+              </a:rPr>
+              <a:t>Unawakened 4.5 loop erodes limits</a:t>
+            </a:r>
+          </a:p>
+        </p:txBody>
+      </p:sp>
+      <p:sp>
+        <p:nvSpPr>
+          <p:cNvPr id="19" name="TextBox 16"/>
+          <p:cNvSpPr txBox="1"/>
+          <p:nvPr/>
+        </p:nvSpPr>
+        <p:spPr>
+          <a:xfrm>
+            <a:off x="5760720" y="1600200"/>
+            <a:ext cx="2670048" cy="347472"/>
+          </a:xfrm>
+          <a:prstGeom prst="rect">
+            <a:avLst/>
+          </a:prstGeom>
+          <a:noFill/>
+        </p:spPr>
+        <p:txBody>
+          <a:bodyPr wrap="square" lIns="0" rIns="0" tIns="0" bIns="0" anchor="ctr">
+            <a:spAutoFit/>
+          </a:bodyPr>
+          <a:lstStyle/>
+          <a:p>
+            <a:pPr>
+              <a:spcAft>
+                <a:spcPts val="0"/>
+              </a:spcAft>
+            </a:pPr>
+            <a:r>
+              <a:rPr sz="1000" b="0" i="0">
+                <a:solidFill>
+                  <a:srgbClr val="5A6377"/>
+                </a:solidFill>
+                <a:latin typeface="Calibri"/>
+              </a:rPr>
+              <a:t>Awakens 5.5 activities; regulates taste</a:t>
+            </a:r>
+          </a:p>
+        </p:txBody>
+      </p:sp>
+      <p:sp>
+        <p:nvSpPr>
+          <p:cNvPr id="20" name="Rectangle 17"/>
+          <p:cNvSpPr/>
+          <p:nvPr/>
+        </p:nvSpPr>
+        <p:spPr>
+          <a:xfrm>
+            <a:off x="640080" y="2368296"/>
+            <a:ext cx="7863840" cy="9144"/>
+          </a:xfrm>
+          <a:prstGeom prst="rect">
+            <a:avLst/>
+          </a:prstGeom>
+          <a:solidFill>
+            <a:srgbClr val="D5DBEA"/>
+          </a:solidFill>
+          <a:ln>
+            <a:noFill/>
+          </a:ln>
+          <a:effectLst/>
+        </p:spPr>
+        <p:style>
+          <a:lnRef idx="1">
+            <a:schemeClr val="accent1"/>
+          </a:lnRef>
+          <a:fillRef idx="3">
+            <a:schemeClr val="accent1"/>
+          </a:fillRef>
+          <a:effectRef idx="2">
+            <a:schemeClr val="accent1"/>
+          </a:effectRef>
+          <a:fontRef idx="minor">
+            <a:schemeClr val="lt1"/>
+          </a:fontRef>
+        </p:style>
+        <p:txBody>
+          <a:bodyPr rtlCol="0" anchor="ctr"/>
+          <a:lstStyle/>
+          <a:p>
+            <a:pPr algn="ctr"/>
+          </a:p>
+        </p:txBody>
+      </p:sp>
+      <p:sp>
+        <p:nvSpPr>
+          <p:cNvPr id="21" name="TextBox 18"/>
+          <p:cNvSpPr txBox="1"/>
+          <p:nvPr/>
+        </p:nvSpPr>
+        <p:spPr>
+          <a:xfrm>
+            <a:off x="731519" y="2002536"/>
+            <a:ext cx="2075688" cy="347472"/>
+          </a:xfrm>
+          <a:prstGeom prst="rect">
+            <a:avLst/>
+          </a:prstGeom>
+          <a:noFill/>
+        </p:spPr>
+        <p:txBody>
+          <a:bodyPr wrap="square" lIns="0" rIns="0" tIns="0" bIns="0" anchor="ctr">
+            <a:spAutoFit/>
+          </a:bodyPr>
+          <a:lstStyle/>
+          <a:p>
+            <a:pPr>
+              <a:spcAft>
+                <a:spcPts val="0"/>
+              </a:spcAft>
+            </a:pPr>
+            <a:r>
+              <a:rPr sz="1050" b="1" i="0">
+                <a:solidFill>
+                  <a:srgbClr val="1E2447"/>
+                </a:solidFill>
+                <a:latin typeface="Calibri"/>
+              </a:rPr>
+              <a:t>2. No social agreement</a:t>
+            </a:r>
+          </a:p>
+        </p:txBody>
+      </p:sp>
+      <p:sp>
+        <p:nvSpPr>
+          <p:cNvPr id="22" name="TextBox 19"/>
+          <p:cNvSpPr txBox="1"/>
+          <p:nvPr/>
+        </p:nvSpPr>
+        <p:spPr>
+          <a:xfrm>
+            <a:off x="2971800" y="2002536"/>
+            <a:ext cx="2624327" cy="347472"/>
+          </a:xfrm>
+          <a:prstGeom prst="rect">
+            <a:avLst/>
+          </a:prstGeom>
+          <a:noFill/>
+        </p:spPr>
+        <p:txBody>
+          <a:bodyPr wrap="square" lIns="0" rIns="0" tIns="0" bIns="0" anchor="ctr">
+            <a:spAutoFit/>
+          </a:bodyPr>
+          <a:lstStyle/>
+          <a:p>
+            <a:pPr>
+              <a:spcAft>
+                <a:spcPts val="0"/>
+              </a:spcAft>
+            </a:pPr>
+            <a:r>
+              <a:rPr sz="1000" b="0" i="0">
+                <a:solidFill>
+                  <a:srgbClr val="5A6377"/>
+                </a:solidFill>
+                <a:latin typeface="Calibri"/>
+              </a:rPr>
+              <a:t>Priya–hit–labh differs by body (Arrow)</a:t>
+            </a:r>
+          </a:p>
+        </p:txBody>
+      </p:sp>
+      <p:sp>
+        <p:nvSpPr>
+          <p:cNvPr id="23" name="TextBox 20"/>
+          <p:cNvSpPr txBox="1"/>
+          <p:nvPr/>
+        </p:nvSpPr>
+        <p:spPr>
+          <a:xfrm>
+            <a:off x="5760720" y="2002536"/>
+            <a:ext cx="2670048" cy="347472"/>
+          </a:xfrm>
+          <a:prstGeom prst="rect">
+            <a:avLst/>
+          </a:prstGeom>
+          <a:noFill/>
+        </p:spPr>
+        <p:txBody>
+          <a:bodyPr wrap="square" lIns="0" rIns="0" tIns="0" bIns="0" anchor="ctr">
+            <a:spAutoFit/>
+          </a:bodyPr>
+          <a:lstStyle/>
+          <a:p>
+            <a:pPr>
+              <a:spcAft>
+                <a:spcPts val="0"/>
+              </a:spcAft>
+            </a:pPr>
+            <a:r>
+              <a:rPr sz="1000" b="0" i="0">
+                <a:solidFill>
+                  <a:srgbClr val="5A6377"/>
+                </a:solidFill>
+                <a:latin typeface="Calibri"/>
+              </a:rPr>
+              <a:t>Realisation in coexistence (MVD p. 203)</a:t>
+            </a:r>
+          </a:p>
+        </p:txBody>
+      </p:sp>
+      <p:sp>
+        <p:nvSpPr>
+          <p:cNvPr id="24" name="Rectangle 21"/>
+          <p:cNvSpPr/>
+          <p:nvPr/>
+        </p:nvSpPr>
+        <p:spPr>
+          <a:xfrm>
+            <a:off x="640080" y="2377440"/>
+            <a:ext cx="7863840" cy="402336"/>
+          </a:xfrm>
+          <a:prstGeom prst="rect">
+            <a:avLst/>
+          </a:prstGeom>
+          <a:solidFill>
+            <a:srgbClr val="EEF1F8"/>
+          </a:solidFill>
+          <a:ln>
+            <a:noFill/>
+          </a:ln>
+          <a:effectLst/>
+        </p:spPr>
+        <p:style>
+          <a:lnRef idx="1">
+            <a:schemeClr val="accent1"/>
+          </a:lnRef>
+          <a:fillRef idx="3">
+            <a:schemeClr val="accent1"/>
+          </a:fillRef>
+          <a:effectRef idx="2">
+            <a:schemeClr val="accent1"/>
+          </a:effectRef>
+          <a:fontRef idx="minor">
+            <a:schemeClr val="lt1"/>
+          </a:fontRef>
+        </p:style>
+        <p:txBody>
+          <a:bodyPr rtlCol="0" anchor="ctr"/>
+          <a:lstStyle/>
+          <a:p>
+            <a:pPr algn="ctr"/>
+          </a:p>
+        </p:txBody>
+      </p:sp>
+      <p:sp>
+        <p:nvSpPr>
+          <p:cNvPr id="25" name="Rectangle 22"/>
+          <p:cNvSpPr/>
+          <p:nvPr/>
+        </p:nvSpPr>
+        <p:spPr>
+          <a:xfrm>
+            <a:off x="640080" y="2770632"/>
+            <a:ext cx="7863840" cy="9144"/>
+          </a:xfrm>
+          <a:prstGeom prst="rect">
+            <a:avLst/>
+          </a:prstGeom>
+          <a:solidFill>
+            <a:srgbClr val="D5DBEA"/>
+          </a:solidFill>
+          <a:ln>
+            <a:noFill/>
+          </a:ln>
+          <a:effectLst/>
+        </p:spPr>
+        <p:style>
+          <a:lnRef idx="1">
+            <a:schemeClr val="accent1"/>
+          </a:lnRef>
+          <a:fillRef idx="3">
+            <a:schemeClr val="accent1"/>
+          </a:fillRef>
+          <a:effectRef idx="2">
+            <a:schemeClr val="accent1"/>
+          </a:effectRef>
+          <a:fontRef idx="minor">
+            <a:schemeClr val="lt1"/>
+          </a:fontRef>
+        </p:style>
+        <p:txBody>
+          <a:bodyPr rtlCol="0" anchor="ctr"/>
+          <a:lstStyle/>
+          <a:p>
+            <a:pPr algn="ctr"/>
+          </a:p>
+        </p:txBody>
+      </p:sp>
+      <p:sp>
+        <p:nvSpPr>
+          <p:cNvPr id="26" name="TextBox 23"/>
+          <p:cNvSpPr txBox="1"/>
+          <p:nvPr/>
+        </p:nvSpPr>
+        <p:spPr>
+          <a:xfrm>
+            <a:off x="731519" y="2404872"/>
+            <a:ext cx="2075688" cy="347472"/>
+          </a:xfrm>
+          <a:prstGeom prst="rect">
+            <a:avLst/>
+          </a:prstGeom>
+          <a:noFill/>
+        </p:spPr>
+        <p:txBody>
+          <a:bodyPr wrap="square" lIns="0" rIns="0" tIns="0" bIns="0" anchor="ctr">
+            <a:spAutoFit/>
+          </a:bodyPr>
+          <a:lstStyle/>
+          <a:p>
+            <a:pPr>
+              <a:spcAft>
+                <a:spcPts val="0"/>
+              </a:spcAft>
+            </a:pPr>
+            <a:r>
+              <a:rPr sz="1050" b="1" i="0">
+                <a:solidFill>
+                  <a:srgbClr val="1E2447"/>
+                </a:solidFill>
+                <a:latin typeface="Calibri"/>
+              </a:rPr>
+              <a:t>3. Work &amp; patent trilemma</a:t>
+            </a:r>
+          </a:p>
+        </p:txBody>
+      </p:sp>
+      <p:sp>
+        <p:nvSpPr>
+          <p:cNvPr id="27" name="TextBox 24"/>
+          <p:cNvSpPr txBox="1"/>
+          <p:nvPr/>
+        </p:nvSpPr>
+        <p:spPr>
+          <a:xfrm>
+            <a:off x="2971800" y="2404872"/>
+            <a:ext cx="2624327" cy="347472"/>
+          </a:xfrm>
+          <a:prstGeom prst="rect">
+            <a:avLst/>
+          </a:prstGeom>
+          <a:noFill/>
+        </p:spPr>
+        <p:txBody>
+          <a:bodyPr wrap="square" lIns="0" rIns="0" tIns="0" bIns="0" anchor="ctr">
+            <a:spAutoFit/>
+          </a:bodyPr>
+          <a:lstStyle/>
+          <a:p>
+            <a:pPr>
+              <a:spcAft>
+                <a:spcPts val="0"/>
+              </a:spcAft>
+            </a:pPr>
+            <a:r>
+              <a:rPr sz="1000" b="0" i="0">
+                <a:solidFill>
+                  <a:srgbClr val="5A6377"/>
+                </a:solidFill>
+                <a:latin typeface="Calibri"/>
+              </a:rPr>
+              <a:t>Work needs wage fear or monopoly rent</a:t>
+            </a:r>
+          </a:p>
+        </p:txBody>
+      </p:sp>
+      <p:sp>
+        <p:nvSpPr>
+          <p:cNvPr id="28" name="TextBox 25"/>
+          <p:cNvSpPr txBox="1"/>
+          <p:nvPr/>
+        </p:nvSpPr>
+        <p:spPr>
+          <a:xfrm>
+            <a:off x="5760720" y="2404872"/>
+            <a:ext cx="2670048" cy="347472"/>
+          </a:xfrm>
+          <a:prstGeom prst="rect">
+            <a:avLst/>
+          </a:prstGeom>
+          <a:noFill/>
+        </p:spPr>
+        <p:txBody>
+          <a:bodyPr wrap="square" lIns="0" rIns="0" tIns="0" bIns="0" anchor="ctr">
+            <a:spAutoFit/>
+          </a:bodyPr>
+          <a:lstStyle/>
+          <a:p>
+            <a:pPr>
+              <a:spcAft>
+                <a:spcPts val="0"/>
+              </a:spcAft>
+            </a:pPr>
+            <a:r>
+              <a:rPr sz="1000" b="0" i="0">
+                <a:solidFill>
+                  <a:srgbClr val="5A6377"/>
+                </a:solidFill>
+                <a:latin typeface="Calibri"/>
+              </a:rPr>
+              <a:t>Restful labour in resolution; open skills</a:t>
+            </a:r>
+          </a:p>
+        </p:txBody>
+      </p:sp>
+      <p:sp>
+        <p:nvSpPr>
+          <p:cNvPr id="29" name="Rectangle 26"/>
+          <p:cNvSpPr/>
+          <p:nvPr/>
+        </p:nvSpPr>
+        <p:spPr>
+          <a:xfrm>
+            <a:off x="640080" y="3172968"/>
+            <a:ext cx="7863840" cy="9144"/>
+          </a:xfrm>
+          <a:prstGeom prst="rect">
+            <a:avLst/>
+          </a:prstGeom>
+          <a:solidFill>
+            <a:srgbClr val="D5DBEA"/>
+          </a:solidFill>
+          <a:ln>
+            <a:noFill/>
+          </a:ln>
+          <a:effectLst/>
+        </p:spPr>
+        <p:style>
+          <a:lnRef idx="1">
+            <a:schemeClr val="accent1"/>
+          </a:lnRef>
+          <a:fillRef idx="3">
+            <a:schemeClr val="accent1"/>
+          </a:fillRef>
+          <a:effectRef idx="2">
+            <a:schemeClr val="accent1"/>
+          </a:effectRef>
+          <a:fontRef idx="minor">
+            <a:schemeClr val="lt1"/>
+          </a:fontRef>
+        </p:style>
+        <p:txBody>
+          <a:bodyPr rtlCol="0" anchor="ctr"/>
+          <a:lstStyle/>
+          <a:p>
+            <a:pPr algn="ctr"/>
+          </a:p>
+        </p:txBody>
+      </p:sp>
+      <p:sp>
+        <p:nvSpPr>
+          <p:cNvPr id="30" name="TextBox 27"/>
+          <p:cNvSpPr txBox="1"/>
+          <p:nvPr/>
+        </p:nvSpPr>
+        <p:spPr>
+          <a:xfrm>
+            <a:off x="731519" y="2807208"/>
+            <a:ext cx="2075688" cy="347472"/>
+          </a:xfrm>
+          <a:prstGeom prst="rect">
+            <a:avLst/>
+          </a:prstGeom>
+          <a:noFill/>
+        </p:spPr>
+        <p:txBody>
+          <a:bodyPr wrap="square" lIns="0" rIns="0" tIns="0" bIns="0" anchor="ctr">
+            <a:spAutoFit/>
+          </a:bodyPr>
+          <a:lstStyle/>
+          <a:p>
+            <a:pPr>
+              <a:spcAft>
+                <a:spcPts val="0"/>
+              </a:spcAft>
+            </a:pPr>
+            <a:r>
+              <a:rPr sz="1050" b="1" i="0">
+                <a:solidFill>
+                  <a:srgbClr val="1E2447"/>
+                </a:solidFill>
+                <a:latin typeface="Calibri"/>
+              </a:rPr>
+              <a:t>4. Non-kin sharing collapse</a:t>
+            </a:r>
+          </a:p>
+        </p:txBody>
+      </p:sp>
+      <p:sp>
+        <p:nvSpPr>
+          <p:cNvPr id="31" name="TextBox 28"/>
+          <p:cNvSpPr txBox="1"/>
+          <p:nvPr/>
+        </p:nvSpPr>
+        <p:spPr>
+          <a:xfrm>
+            <a:off x="2971800" y="2807208"/>
+            <a:ext cx="2624327" cy="347472"/>
+          </a:xfrm>
+          <a:prstGeom prst="rect">
+            <a:avLst/>
+          </a:prstGeom>
+          <a:noFill/>
+        </p:spPr>
+        <p:txBody>
+          <a:bodyPr wrap="square" lIns="0" rIns="0" tIns="0" bIns="0" anchor="ctr">
+            <a:spAutoFit/>
+          </a:bodyPr>
+          <a:lstStyle/>
+          <a:p>
+            <a:pPr>
+              <a:spcAft>
+                <a:spcPts val="0"/>
+              </a:spcAft>
+            </a:pPr>
+            <a:r>
+              <a:rPr sz="1000" b="0" i="0">
+                <a:solidFill>
+                  <a:srgbClr val="5A6377"/>
+                </a:solidFill>
+                <a:latin typeface="Calibri"/>
+              </a:rPr>
+              <a:t>Genetic kinship blocks 10-person family</a:t>
+            </a:r>
+          </a:p>
+        </p:txBody>
+      </p:sp>
+      <p:sp>
+        <p:nvSpPr>
+          <p:cNvPr id="32" name="TextBox 29"/>
+          <p:cNvSpPr txBox="1"/>
+          <p:nvPr/>
+        </p:nvSpPr>
+        <p:spPr>
+          <a:xfrm>
+            <a:off x="5760720" y="2807208"/>
+            <a:ext cx="2670048" cy="347472"/>
+          </a:xfrm>
+          <a:prstGeom prst="rect">
+            <a:avLst/>
+          </a:prstGeom>
+          <a:noFill/>
+        </p:spPr>
+        <p:txBody>
+          <a:bodyPr wrap="square" lIns="0" rIns="0" tIns="0" bIns="0" anchor="ctr">
+            <a:spAutoFit/>
+          </a:bodyPr>
+          <a:lstStyle/>
+          <a:p>
+            <a:pPr>
+              <a:spcAft>
+                <a:spcPts val="0"/>
+              </a:spcAft>
+            </a:pPr>
+            <a:r>
+              <a:rPr sz="1000" b="0" i="0">
+                <a:solidFill>
+                  <a:srgbClr val="5A6377"/>
+                </a:solidFill>
+                <a:latin typeface="Calibri"/>
+              </a:rPr>
+              <a:t>Sees every member as identical jeevan</a:t>
+            </a:r>
+          </a:p>
+        </p:txBody>
+      </p:sp>
+      <p:sp>
+        <p:nvSpPr>
+          <p:cNvPr id="33" name="Rectangle 30"/>
+          <p:cNvSpPr/>
+          <p:nvPr/>
+        </p:nvSpPr>
+        <p:spPr>
+          <a:xfrm>
+            <a:off x="640080" y="3182112"/>
+            <a:ext cx="7863840" cy="402336"/>
+          </a:xfrm>
+          <a:prstGeom prst="rect">
+            <a:avLst/>
+          </a:prstGeom>
+          <a:solidFill>
+            <a:srgbClr val="EEF1F8"/>
+          </a:solidFill>
+          <a:ln>
+            <a:noFill/>
+          </a:ln>
+          <a:effectLst/>
+        </p:spPr>
+        <p:style>
+          <a:lnRef idx="1">
+            <a:schemeClr val="accent1"/>
+          </a:lnRef>
+          <a:fillRef idx="3">
+            <a:schemeClr val="accent1"/>
+          </a:fillRef>
+          <a:effectRef idx="2">
+            <a:schemeClr val="accent1"/>
+          </a:effectRef>
+          <a:fontRef idx="minor">
+            <a:schemeClr val="lt1"/>
+          </a:fontRef>
+        </p:style>
+        <p:txBody>
+          <a:bodyPr rtlCol="0" anchor="ctr"/>
+          <a:lstStyle/>
+          <a:p>
+            <a:pPr algn="ctr"/>
+          </a:p>
+        </p:txBody>
+      </p:sp>
+      <p:sp>
+        <p:nvSpPr>
+          <p:cNvPr id="34" name="Rectangle 31"/>
+          <p:cNvSpPr/>
+          <p:nvPr/>
+        </p:nvSpPr>
+        <p:spPr>
+          <a:xfrm>
+            <a:off x="640080" y="3575304"/>
+            <a:ext cx="7863840" cy="9144"/>
+          </a:xfrm>
+          <a:prstGeom prst="rect">
+            <a:avLst/>
+          </a:prstGeom>
+          <a:solidFill>
+            <a:srgbClr val="D5DBEA"/>
+          </a:solidFill>
+          <a:ln>
+            <a:noFill/>
+          </a:ln>
+          <a:effectLst/>
+        </p:spPr>
+        <p:style>
+          <a:lnRef idx="1">
+            <a:schemeClr val="accent1"/>
+          </a:lnRef>
+          <a:fillRef idx="3">
+            <a:schemeClr val="accent1"/>
+          </a:fillRef>
+          <a:effectRef idx="2">
+            <a:schemeClr val="accent1"/>
+          </a:effectRef>
+          <a:fontRef idx="minor">
+            <a:schemeClr val="lt1"/>
+          </a:fontRef>
+        </p:style>
+        <p:txBody>
+          <a:bodyPr rtlCol="0" anchor="ctr"/>
+          <a:lstStyle/>
+          <a:p>
+            <a:pPr algn="ctr"/>
+          </a:p>
+        </p:txBody>
+      </p:sp>
+      <p:sp>
+        <p:nvSpPr>
+          <p:cNvPr id="35" name="TextBox 32"/>
+          <p:cNvSpPr txBox="1"/>
+          <p:nvPr/>
+        </p:nvSpPr>
+        <p:spPr>
+          <a:xfrm>
+            <a:off x="731519" y="3209544"/>
+            <a:ext cx="2075688" cy="347472"/>
+          </a:xfrm>
+          <a:prstGeom prst="rect">
+            <a:avLst/>
+          </a:prstGeom>
+          <a:noFill/>
+        </p:spPr>
+        <p:txBody>
+          <a:bodyPr wrap="square" lIns="0" rIns="0" tIns="0" bIns="0" anchor="ctr">
+            <a:spAutoFit/>
+          </a:bodyPr>
+          <a:lstStyle/>
+          <a:p>
+            <a:pPr>
+              <a:spcAft>
+                <a:spcPts val="0"/>
+              </a:spcAft>
+            </a:pPr>
+            <a:r>
+              <a:rPr sz="1050" b="1" i="0">
+                <a:solidFill>
+                  <a:srgbClr val="1E2447"/>
+                </a:solidFill>
+                <a:latin typeface="Calibri"/>
+              </a:rPr>
+              <a:t>5. Ledger gaming &amp; hoarding</a:t>
+            </a:r>
+          </a:p>
+        </p:txBody>
+      </p:sp>
+      <p:sp>
+        <p:nvSpPr>
+          <p:cNvPr id="36" name="TextBox 33"/>
+          <p:cNvSpPr txBox="1"/>
+          <p:nvPr/>
+        </p:nvSpPr>
+        <p:spPr>
+          <a:xfrm>
+            <a:off x="2971800" y="3209544"/>
+            <a:ext cx="2624327" cy="347472"/>
+          </a:xfrm>
+          <a:prstGeom prst="rect">
+            <a:avLst/>
+          </a:prstGeom>
+          <a:noFill/>
+        </p:spPr>
+        <p:txBody>
+          <a:bodyPr wrap="square" lIns="0" rIns="0" tIns="0" bIns="0" anchor="ctr">
+            <a:spAutoFit/>
+          </a:bodyPr>
+          <a:lstStyle/>
+          <a:p>
+            <a:pPr>
+              <a:spcAft>
+                <a:spcPts val="0"/>
+              </a:spcAft>
+            </a:pPr>
+            <a:r>
+              <a:rPr sz="1000" b="0" i="0">
+                <a:solidFill>
+                  <a:srgbClr val="5A6377"/>
+                </a:solidFill>
+                <a:latin typeface="Calibri"/>
+              </a:rPr>
+              <a:t>Co-ops drift to arbitrage or free-riding</a:t>
+            </a:r>
+          </a:p>
+        </p:txBody>
+      </p:sp>
+      <p:sp>
+        <p:nvSpPr>
+          <p:cNvPr id="37" name="TextBox 34"/>
+          <p:cNvSpPr txBox="1"/>
+          <p:nvPr/>
+        </p:nvSpPr>
+        <p:spPr>
+          <a:xfrm>
+            <a:off x="5760720" y="3209544"/>
+            <a:ext cx="2670048" cy="347472"/>
+          </a:xfrm>
+          <a:prstGeom prst="rect">
+            <a:avLst/>
+          </a:prstGeom>
+          <a:noFill/>
+        </p:spPr>
+        <p:txBody>
+          <a:bodyPr wrap="square" lIns="0" rIns="0" tIns="0" bIns="0" anchor="ctr">
+            <a:spAutoFit/>
+          </a:bodyPr>
+          <a:lstStyle/>
+          <a:p>
+            <a:pPr>
+              <a:spcAft>
+                <a:spcPts val="0"/>
+              </a:spcAft>
+            </a:pPr>
+            <a:r>
+              <a:rPr sz="1000" b="0" i="0">
+                <a:solidFill>
+                  <a:srgbClr val="5A6377"/>
+                </a:solidFill>
+                <a:latin typeface="Calibri"/>
+              </a:rPr>
+              <a:t>Satiation point of exchange (AA p. 76)</a:t>
+            </a:r>
+          </a:p>
+        </p:txBody>
+      </p:sp>
+      <p:sp>
+        <p:nvSpPr>
+          <p:cNvPr id="38" name="Rectangle 35"/>
+          <p:cNvSpPr/>
+          <p:nvPr/>
+        </p:nvSpPr>
+        <p:spPr>
+          <a:xfrm>
+            <a:off x="640080" y="3977640"/>
+            <a:ext cx="7863840" cy="9144"/>
+          </a:xfrm>
+          <a:prstGeom prst="rect">
+            <a:avLst/>
+          </a:prstGeom>
+          <a:solidFill>
+            <a:srgbClr val="D5DBEA"/>
+          </a:solidFill>
+          <a:ln>
+            <a:noFill/>
+          </a:ln>
+          <a:effectLst/>
+        </p:spPr>
+        <p:style>
+          <a:lnRef idx="1">
+            <a:schemeClr val="accent1"/>
+          </a:lnRef>
+          <a:fillRef idx="3">
+            <a:schemeClr val="accent1"/>
+          </a:fillRef>
+          <a:effectRef idx="2">
+            <a:schemeClr val="accent1"/>
+          </a:effectRef>
+          <a:fontRef idx="minor">
+            <a:schemeClr val="lt1"/>
+          </a:fontRef>
+        </p:style>
+        <p:txBody>
+          <a:bodyPr rtlCol="0" anchor="ctr"/>
+          <a:lstStyle/>
+          <a:p>
+            <a:pPr algn="ctr"/>
+          </a:p>
+        </p:txBody>
+      </p:sp>
+      <p:sp>
+        <p:nvSpPr>
+          <p:cNvPr id="39" name="TextBox 36"/>
+          <p:cNvSpPr txBox="1"/>
+          <p:nvPr/>
+        </p:nvSpPr>
+        <p:spPr>
+          <a:xfrm>
+            <a:off x="731519" y="3611879"/>
+            <a:ext cx="2075688" cy="347472"/>
+          </a:xfrm>
+          <a:prstGeom prst="rect">
+            <a:avLst/>
+          </a:prstGeom>
+          <a:noFill/>
+        </p:spPr>
+        <p:txBody>
+          <a:bodyPr wrap="square" lIns="0" rIns="0" tIns="0" bIns="0" anchor="ctr">
+            <a:spAutoFit/>
+          </a:bodyPr>
+          <a:lstStyle/>
+          <a:p>
+            <a:pPr>
+              <a:spcAft>
+                <a:spcPts val="0"/>
+              </a:spcAft>
+            </a:pPr>
+            <a:r>
+              <a:rPr sz="1050" b="1" i="0">
+                <a:solidFill>
+                  <a:srgbClr val="1E2447"/>
+                </a:solidFill>
+                <a:latin typeface="Calibri"/>
+              </a:rPr>
+              <a:t>6. Discounting the future</a:t>
+            </a:r>
+          </a:p>
+        </p:txBody>
+      </p:sp>
+      <p:sp>
+        <p:nvSpPr>
+          <p:cNvPr id="40" name="TextBox 37"/>
+          <p:cNvSpPr txBox="1"/>
+          <p:nvPr/>
+        </p:nvSpPr>
+        <p:spPr>
+          <a:xfrm>
+            <a:off x="2971800" y="3611879"/>
+            <a:ext cx="2624327" cy="347472"/>
+          </a:xfrm>
+          <a:prstGeom prst="rect">
+            <a:avLst/>
+          </a:prstGeom>
+          <a:noFill/>
+        </p:spPr>
+        <p:txBody>
+          <a:bodyPr wrap="square" lIns="0" rIns="0" tIns="0" bIns="0" anchor="ctr">
+            <a:spAutoFit/>
+          </a:bodyPr>
+          <a:lstStyle/>
+          <a:p>
+            <a:pPr>
+              <a:spcAft>
+                <a:spcPts val="0"/>
+              </a:spcAft>
+            </a:pPr>
+            <a:r>
+              <a:rPr sz="1000" b="0" i="0">
+                <a:solidFill>
+                  <a:srgbClr val="5A6377"/>
+                </a:solidFill>
+                <a:latin typeface="Calibri"/>
+              </a:rPr>
+              <a:t>Mortal horizons discount distant harm</a:t>
+            </a:r>
+          </a:p>
+        </p:txBody>
+      </p:sp>
+      <p:sp>
+        <p:nvSpPr>
+          <p:cNvPr id="41" name="TextBox 38"/>
+          <p:cNvSpPr txBox="1"/>
+          <p:nvPr/>
+        </p:nvSpPr>
+        <p:spPr>
+          <a:xfrm>
+            <a:off x="5760720" y="3611879"/>
+            <a:ext cx="2670048" cy="347472"/>
+          </a:xfrm>
+          <a:prstGeom prst="rect">
+            <a:avLst/>
+          </a:prstGeom>
+          <a:noFill/>
+        </p:spPr>
+        <p:txBody>
+          <a:bodyPr wrap="square" lIns="0" rIns="0" tIns="0" bIns="0" anchor="ctr">
+            <a:spAutoFit/>
+          </a:bodyPr>
+          <a:lstStyle/>
+          <a:p>
+            <a:pPr>
+              <a:spcAft>
+                <a:spcPts val="0"/>
+              </a:spcAft>
+            </a:pPr>
+            <a:r>
+              <a:rPr sz="1000" b="0" i="0">
+                <a:solidFill>
+                  <a:srgbClr val="5A6377"/>
+                </a:solidFill>
+                <a:latin typeface="Calibri"/>
+              </a:rPr>
+              <a:t>Continuous jeevan; 0% discounting</a:t>
+            </a:r>
+          </a:p>
+        </p:txBody>
+      </p:sp>
+      <p:sp>
+        <p:nvSpPr>
+          <p:cNvPr id="42" name="TextBox 39"/>
+          <p:cNvSpPr txBox="1"/>
+          <p:nvPr/>
+        </p:nvSpPr>
+        <p:spPr>
+          <a:xfrm>
+            <a:off x="640080" y="4343400"/>
+            <a:ext cx="7863840" cy="329184"/>
+          </a:xfrm>
+          <a:prstGeom prst="rect">
+            <a:avLst/>
+          </a:prstGeom>
+          <a:noFill/>
+        </p:spPr>
+        <p:txBody>
+          <a:bodyPr wrap="square" lIns="0" rIns="0" tIns="0" bIns="0" anchor="ctr">
+            <a:spAutoFit/>
+          </a:bodyPr>
+          <a:lstStyle/>
+          <a:p>
+            <a:pPr>
+              <a:spcAft>
+                <a:spcPts val="0"/>
+              </a:spcAft>
+            </a:pPr>
+            <a:r>
+              <a:rPr sz="1150" b="0" i="1">
+                <a:solidFill>
+                  <a:srgbClr val="1E2447"/>
+                </a:solidFill>
+                <a:latin typeface="Calibri"/>
+              </a:rPr>
+              <a:t>Every mainstream and heterodox model hits these 6 deadlocks because it treats the human being as a body alone.</a:t>
+            </a:r>
+          </a:p>
+        </p:txBody>
+      </p:sp>
+      <p:sp>
+        <p:nvSpPr>
+          <p:cNvPr id="43" name="TextBox 40"/>
+          <p:cNvSpPr txBox="1"/>
+          <p:nvPr/>
+        </p:nvSpPr>
+        <p:spPr>
+          <a:xfrm>
+            <a:off x="502920" y="4828032"/>
+            <a:ext cx="8138160" cy="256032"/>
+          </a:xfrm>
+          <a:prstGeom prst="rect">
+            <a:avLst/>
+          </a:prstGeom>
+          <a:noFill/>
+        </p:spPr>
+        <p:txBody>
+          <a:bodyPr wrap="square" lIns="0" rIns="0" tIns="0" bIns="0" anchor="ctr">
+            <a:spAutoFit/>
+          </a:bodyPr>
+          <a:lstStyle/>
+          <a:p>
+            <a:pPr>
+              <a:spcAft>
+                <a:spcPts val="0"/>
+              </a:spcAft>
+            </a:pPr>
+            <a:r>
+              <a:rPr sz="950" b="0" i="1">
+                <a:solidFill>
+                  <a:srgbClr val="5A6377"/>
+                </a:solidFill>
+                <a:latin typeface="Calibri"/>
+              </a:rPr>
+              <a:t>Study §§1.3, 4.1–4.10, 7.2  ·  AA pp. 18–23, 48–60, 76, 95, 119–120  ·  MVD p. 203  ·  26 / 35</a:t>
+            </a:r>
+          </a:p>
+        </p:txBody>
+      </p:sp>
+    </p:spTree>
+  </p:cSld>
+  <p:clrMapOvr>
+    <a:masterClrMapping/>
+  </p:clrMapOvr>
+</p:sld>
+</file>
+
+<file path=ppt/slides/slide35.xml><?xml version="1.0" encoding="utf-8"?>
+<p:sld xmlns:a="http://schemas.openxmlformats.org/drawingml/2006/main" xmlns:p="http://schemas.openxmlformats.org/presentationml/2006/main" xmlns:r="http://schemas.openxmlformats.org/officeDocument/2006/relationships">
+  <p:cSld>
+    <p:spTree>
+      <p:nvGrpSpPr>
+        <p:cNvPr id="2" name=""/>
+        <p:cNvGrpSpPr/>
+        <p:nvPr/>
+      </p:nvGrpSpPr>
+      <p:grpSpPr/>
+      <p:sp>
+        <p:nvSpPr>
+          <p:cNvPr id="4" name="Oval 1"/>
+          <p:cNvSpPr/>
+          <p:nvPr/>
+        </p:nvSpPr>
+        <p:spPr>
+          <a:xfrm>
+            <a:off x="457200" y="384048"/>
+            <a:ext cx="365760" cy="365760"/>
+          </a:xfrm>
+          <a:prstGeom prst="ellipse">
+            <a:avLst/>
+          </a:prstGeom>
+          <a:noFill/>
+          <a:ln w="12700">
+            <a:solidFill>
+              <a:srgbClr val="3B4A7A"/>
+            </a:solidFill>
+          </a:ln>
+          <a:effectLst/>
+        </p:spPr>
+        <p:style>
+          <a:lnRef idx="1">
+            <a:schemeClr val="accent1"/>
+          </a:lnRef>
+          <a:fillRef idx="3">
+            <a:schemeClr val="accent1"/>
+          </a:fillRef>
+          <a:effectRef idx="2">
+            <a:schemeClr val="accent1"/>
+          </a:effectRef>
+          <a:fontRef idx="minor">
+            <a:schemeClr val="lt1"/>
+          </a:fontRef>
+        </p:style>
+        <p:txBody>
+          <a:bodyPr rtlCol="0" anchor="ctr"/>
+          <a:lstStyle/>
+          <a:p>
+            <a:pPr algn="ctr"/>
+          </a:p>
+        </p:txBody>
+      </p:sp>
+      <p:sp>
+        <p:nvSpPr>
+          <p:cNvPr id="5" name="Oval 2"/>
+          <p:cNvSpPr/>
+          <p:nvPr/>
+        </p:nvSpPr>
+        <p:spPr>
+          <a:xfrm>
+            <a:off x="530352" y="457200"/>
+            <a:ext cx="219456" cy="219456"/>
+          </a:xfrm>
+          <a:prstGeom prst="ellipse">
+            <a:avLst/>
+          </a:prstGeom>
+          <a:noFill/>
+          <a:ln w="12700">
+            <a:solidFill>
+              <a:srgbClr val="3B4A7A"/>
+            </a:solidFill>
+          </a:ln>
+          <a:effectLst/>
+        </p:spPr>
+        <p:style>
+          <a:lnRef idx="1">
+            <a:schemeClr val="accent1"/>
+          </a:lnRef>
+          <a:fillRef idx="3">
+            <a:schemeClr val="accent1"/>
+          </a:fillRef>
+          <a:effectRef idx="2">
+            <a:schemeClr val="accent1"/>
+          </a:effectRef>
+          <a:fontRef idx="minor">
+            <a:schemeClr val="lt1"/>
+          </a:fontRef>
+        </p:style>
+        <p:txBody>
+          <a:bodyPr rtlCol="0" anchor="ctr"/>
+          <a:lstStyle/>
+          <a:p>
+            <a:pPr algn="ctr"/>
+          </a:p>
+        </p:txBody>
+      </p:sp>
+      <p:sp>
+        <p:nvSpPr>
+          <p:cNvPr id="6" name="Oval 3"/>
+          <p:cNvSpPr/>
+          <p:nvPr/>
+        </p:nvSpPr>
+        <p:spPr>
+          <a:xfrm>
+            <a:off x="594360" y="521207"/>
+            <a:ext cx="91440" cy="91440"/>
+          </a:xfrm>
+          <a:prstGeom prst="ellipse">
+            <a:avLst/>
+          </a:prstGeom>
+          <a:solidFill>
+            <a:srgbClr val="C9821E"/>
+          </a:solidFill>
+          <a:ln>
+            <a:noFill/>
+          </a:ln>
+          <a:effectLst/>
+        </p:spPr>
+        <p:style>
+          <a:lnRef idx="1">
+            <a:schemeClr val="accent1"/>
+          </a:lnRef>
+          <a:fillRef idx="3">
+            <a:schemeClr val="accent1"/>
+          </a:fillRef>
+          <a:effectRef idx="2">
+            <a:schemeClr val="accent1"/>
+          </a:effectRef>
+          <a:fontRef idx="minor">
+            <a:schemeClr val="lt1"/>
+          </a:fontRef>
+        </p:style>
+        <p:txBody>
+          <a:bodyPr rtlCol="0" anchor="ctr"/>
+          <a:lstStyle/>
+          <a:p>
+            <a:pPr algn="ctr"/>
+          </a:p>
+        </p:txBody>
+      </p:sp>
+      <p:sp>
+        <p:nvSpPr>
+          <p:cNvPr id="7" name="TextBox 4"/>
+          <p:cNvSpPr txBox="1"/>
+          <p:nvPr/>
+        </p:nvSpPr>
+        <p:spPr>
+          <a:xfrm>
+            <a:off x="960120" y="256032"/>
+            <a:ext cx="7680960" cy="237744"/>
+          </a:xfrm>
+          <a:prstGeom prst="rect">
+            <a:avLst/>
+          </a:prstGeom>
+          <a:noFill/>
+        </p:spPr>
+        <p:txBody>
+          <a:bodyPr wrap="square" lIns="0" rIns="0" tIns="0" bIns="0" anchor="ctr">
+            <a:spAutoFit/>
+          </a:bodyPr>
+          <a:lstStyle/>
+          <a:p>
+            <a:pPr>
+              <a:spcAft>
+                <a:spcPts val="0"/>
+              </a:spcAft>
+            </a:pPr>
+            <a:r>
+              <a:rPr sz="1050" b="1" i="0">
+                <a:solidFill>
+                  <a:srgbClr val="9A6414"/>
+                </a:solidFill>
+                <a:latin typeface="Calibri"/>
+              </a:rPr>
+              <a:t>IV  ·  WHY REALISATION IS NEEDED  ·  §§2.1–2.2, 7.2, 9.1</a:t>
+            </a:r>
+          </a:p>
+        </p:txBody>
+      </p:sp>
+      <p:sp>
+        <p:nvSpPr>
+          <p:cNvPr id="8" name="TextBox 5"/>
+          <p:cNvSpPr txBox="1"/>
+          <p:nvPr/>
+        </p:nvSpPr>
+        <p:spPr>
+          <a:xfrm>
+            <a:off x="960120" y="457200"/>
+            <a:ext cx="7726679" cy="566928"/>
+          </a:xfrm>
+          <a:prstGeom prst="rect">
+            <a:avLst/>
+          </a:prstGeom>
+          <a:noFill/>
+        </p:spPr>
+        <p:txBody>
+          <a:bodyPr wrap="square" lIns="0" rIns="0" tIns="0" bIns="0" anchor="ctr">
+            <a:spAutoFit/>
+          </a:bodyPr>
+          <a:lstStyle/>
+          <a:p>
+            <a:pPr>
+              <a:spcAft>
+                <a:spcPts val="0"/>
+              </a:spcAft>
+            </a:pPr>
+            <a:r>
+              <a:rPr sz="3000" b="1" i="0">
+                <a:solidFill>
+                  <a:srgbClr val="1E2447"/>
+                </a:solidFill>
+                <a:latin typeface="Cambria"/>
+              </a:rPr>
+              <a:t>Why Realisation (Anubhav) Is Required</a:t>
+            </a:r>
+          </a:p>
+        </p:txBody>
+      </p:sp>
+      <p:sp>
+        <p:nvSpPr>
+          <p:cNvPr id="9" name="Rounded Rectangle 6"/>
+          <p:cNvSpPr/>
+          <p:nvPr/>
+        </p:nvSpPr>
+        <p:spPr>
+          <a:xfrm>
+            <a:off x="640080" y="1280160"/>
+            <a:ext cx="3840480" cy="1417320"/>
+          </a:xfrm>
+          <a:prstGeom prst="roundRect">
+            <a:avLst>
+              <a:gd name="adj" fmla="val 7000"/>
+            </a:avLst>
+          </a:prstGeom>
+          <a:solidFill>
+            <a:srgbClr val="EEF1F8"/>
+          </a:solidFill>
+          <a:ln>
+            <a:noFill/>
+          </a:ln>
+          <a:effectLst/>
+        </p:spPr>
+        <p:style>
+          <a:lnRef idx="1">
+            <a:schemeClr val="accent1"/>
+          </a:lnRef>
+          <a:fillRef idx="3">
+            <a:schemeClr val="accent1"/>
+          </a:fillRef>
+          <a:effectRef idx="2">
+            <a:schemeClr val="accent1"/>
+          </a:effectRef>
+          <a:fontRef idx="minor">
+            <a:schemeClr val="lt1"/>
+          </a:fontRef>
+        </p:style>
+        <p:txBody>
+          <a:bodyPr rtlCol="0" anchor="ctr"/>
+          <a:lstStyle/>
+          <a:p>
+            <a:pPr algn="ctr"/>
+          </a:p>
+        </p:txBody>
+      </p:sp>
+      <p:sp>
+        <p:nvSpPr>
+          <p:cNvPr id="10" name="TextBox 7"/>
+          <p:cNvSpPr txBox="1"/>
+          <p:nvPr/>
+        </p:nvSpPr>
+        <p:spPr>
+          <a:xfrm>
+            <a:off x="822959" y="1399031"/>
+            <a:ext cx="3474720" cy="274320"/>
+          </a:xfrm>
+          <a:prstGeom prst="rect">
+            <a:avLst/>
+          </a:prstGeom>
+          <a:noFill/>
+        </p:spPr>
+        <p:txBody>
+          <a:bodyPr wrap="square" lIns="0" rIns="0" tIns="0" bIns="0" anchor="ctr">
+            <a:spAutoFit/>
+          </a:bodyPr>
+          <a:lstStyle/>
+          <a:p>
+            <a:pPr>
+              <a:spcAft>
+                <a:spcPts val="0"/>
+              </a:spcAft>
+            </a:pPr>
+            <a:r>
+              <a:rPr sz="1300" b="1" i="0">
+                <a:solidFill>
+                  <a:srgbClr val="1E2447"/>
+                </a:solidFill>
+                <a:latin typeface="Cambria"/>
+              </a:rPr>
+              <a:t>1. Fulfilling inexhaustible jeevan energy</a:t>
+            </a:r>
+          </a:p>
+        </p:txBody>
+      </p:sp>
+      <p:sp>
+        <p:nvSpPr>
+          <p:cNvPr id="11" name="TextBox 8"/>
+          <p:cNvSpPr txBox="1"/>
+          <p:nvPr/>
+        </p:nvSpPr>
+        <p:spPr>
+          <a:xfrm>
+            <a:off x="822959" y="1719072"/>
+            <a:ext cx="3474720" cy="868680"/>
+          </a:xfrm>
+          <a:prstGeom prst="rect">
+            <a:avLst/>
+          </a:prstGeom>
+          <a:noFill/>
+        </p:spPr>
+        <p:txBody>
+          <a:bodyPr wrap="square" lIns="0" rIns="0" tIns="0" bIns="0" anchor="t">
+            <a:spAutoFit/>
+          </a:bodyPr>
+          <a:lstStyle/>
+          <a:p>
+            <a:pPr>
+              <a:spcAft>
+                <a:spcPts val="0"/>
+              </a:spcAft>
+            </a:pPr>
+            <a:r>
+              <a:rPr sz="1150" b="0" i="0">
+                <a:solidFill>
+                  <a:srgbClr val="5A6377"/>
+                </a:solidFill>
+                <a:latin typeface="Calibri"/>
+              </a:rPr>
+              <a:t>Rules and ecological caps only dam the 4.5 activities from outside; realisation awakens the higher 5.5 activities so taste is regulated from within (AA p. 95).</a:t>
+            </a:r>
+          </a:p>
+        </p:txBody>
+      </p:sp>
+      <p:sp>
+        <p:nvSpPr>
+          <p:cNvPr id="12" name="Rounded Rectangle 9"/>
+          <p:cNvSpPr/>
+          <p:nvPr/>
+        </p:nvSpPr>
+        <p:spPr>
+          <a:xfrm>
+            <a:off x="4663440" y="1280160"/>
+            <a:ext cx="3840480" cy="1417320"/>
+          </a:xfrm>
+          <a:prstGeom prst="roundRect">
+            <a:avLst>
+              <a:gd name="adj" fmla="val 7000"/>
+            </a:avLst>
+          </a:prstGeom>
+          <a:solidFill>
+            <a:srgbClr val="EEF1F8"/>
+          </a:solidFill>
+          <a:ln>
+            <a:noFill/>
+          </a:ln>
+          <a:effectLst/>
+        </p:spPr>
+        <p:style>
+          <a:lnRef idx="1">
+            <a:schemeClr val="accent1"/>
+          </a:lnRef>
+          <a:fillRef idx="3">
+            <a:schemeClr val="accent1"/>
+          </a:fillRef>
+          <a:effectRef idx="2">
+            <a:schemeClr val="accent1"/>
+          </a:effectRef>
+          <a:fontRef idx="minor">
+            <a:schemeClr val="lt1"/>
+          </a:fontRef>
+        </p:style>
+        <p:txBody>
+          <a:bodyPr rtlCol="0" anchor="ctr"/>
+          <a:lstStyle/>
+          <a:p>
+            <a:pPr algn="ctr"/>
+          </a:p>
+        </p:txBody>
+      </p:sp>
+      <p:sp>
+        <p:nvSpPr>
+          <p:cNvPr id="13" name="TextBox 10"/>
+          <p:cNvSpPr txBox="1"/>
+          <p:nvPr/>
+        </p:nvSpPr>
+        <p:spPr>
+          <a:xfrm>
+            <a:off x="4846320" y="1399031"/>
+            <a:ext cx="3474720" cy="274320"/>
+          </a:xfrm>
+          <a:prstGeom prst="rect">
+            <a:avLst/>
+          </a:prstGeom>
+          <a:noFill/>
+        </p:spPr>
+        <p:txBody>
+          <a:bodyPr wrap="square" lIns="0" rIns="0" tIns="0" bIns="0" anchor="ctr">
+            <a:spAutoFit/>
+          </a:bodyPr>
+          <a:lstStyle/>
+          <a:p>
+            <a:pPr>
+              <a:spcAft>
+                <a:spcPts val="0"/>
+              </a:spcAft>
+            </a:pPr>
+            <a:r>
+              <a:rPr sz="1300" b="1" i="0">
+                <a:solidFill>
+                  <a:srgbClr val="1E2447"/>
+                </a:solidFill>
+                <a:latin typeface="Cambria"/>
+              </a:rPr>
+              <a:t>2. One observer-invariant reality</a:t>
+            </a:r>
+          </a:p>
+        </p:txBody>
+      </p:sp>
+      <p:sp>
+        <p:nvSpPr>
+          <p:cNvPr id="14" name="TextBox 11"/>
+          <p:cNvSpPr txBox="1"/>
+          <p:nvPr/>
+        </p:nvSpPr>
+        <p:spPr>
+          <a:xfrm>
+            <a:off x="4846320" y="1719072"/>
+            <a:ext cx="3474720" cy="868680"/>
+          </a:xfrm>
+          <a:prstGeom prst="rect">
+            <a:avLst/>
+          </a:prstGeom>
+          <a:noFill/>
+        </p:spPr>
+        <p:txBody>
+          <a:bodyPr wrap="square" lIns="0" rIns="0" tIns="0" bIns="0" anchor="t">
+            <a:spAutoFit/>
+          </a:bodyPr>
+          <a:lstStyle/>
+          <a:p>
+            <a:pPr>
+              <a:spcAft>
+                <a:spcPts val="0"/>
+              </a:spcAft>
+            </a:pPr>
+            <a:r>
+              <a:rPr sz="1150" b="0" i="0">
+                <a:solidFill>
+                  <a:srgbClr val="5A6377"/>
+                </a:solidFill>
+                <a:latin typeface="Calibri"/>
+              </a:rPr>
+              <a:t>Pleasure, health and profit (priya, hit, labh) differ in every body; realisation in coexistence (trikalabadh satya) gives all humans one shared anchor (MVD p. 203).</a:t>
+            </a:r>
+          </a:p>
+        </p:txBody>
+      </p:sp>
+      <p:sp>
+        <p:nvSpPr>
+          <p:cNvPr id="15" name="Rounded Rectangle 12"/>
+          <p:cNvSpPr/>
+          <p:nvPr/>
+        </p:nvSpPr>
+        <p:spPr>
+          <a:xfrm>
+            <a:off x="640080" y="2880360"/>
+            <a:ext cx="3840480" cy="1280160"/>
+          </a:xfrm>
+          <a:prstGeom prst="roundRect">
+            <a:avLst>
+              <a:gd name="adj" fmla="val 7000"/>
+            </a:avLst>
+          </a:prstGeom>
+          <a:solidFill>
+            <a:srgbClr val="FAF1DF"/>
+          </a:solidFill>
+          <a:ln>
+            <a:noFill/>
+          </a:ln>
+          <a:effectLst/>
+        </p:spPr>
+        <p:style>
+          <a:lnRef idx="1">
+            <a:schemeClr val="accent1"/>
+          </a:lnRef>
+          <a:fillRef idx="3">
+            <a:schemeClr val="accent1"/>
+          </a:fillRef>
+          <a:effectRef idx="2">
+            <a:schemeClr val="accent1"/>
+          </a:effectRef>
+          <a:fontRef idx="minor">
+            <a:schemeClr val="lt1"/>
+          </a:fontRef>
+        </p:style>
+        <p:txBody>
+          <a:bodyPr rtlCol="0" anchor="ctr"/>
+          <a:lstStyle/>
+          <a:p>
+            <a:pPr algn="ctr"/>
+          </a:p>
+        </p:txBody>
+      </p:sp>
+      <p:sp>
+        <p:nvSpPr>
+          <p:cNvPr id="16" name="TextBox 13"/>
+          <p:cNvSpPr txBox="1"/>
+          <p:nvPr/>
+        </p:nvSpPr>
+        <p:spPr>
+          <a:xfrm>
+            <a:off x="822959" y="2999232"/>
+            <a:ext cx="3474720" cy="274320"/>
+          </a:xfrm>
+          <a:prstGeom prst="rect">
+            <a:avLst/>
+          </a:prstGeom>
+          <a:noFill/>
+        </p:spPr>
+        <p:txBody>
+          <a:bodyPr wrap="square" lIns="0" rIns="0" tIns="0" bIns="0" anchor="ctr">
+            <a:spAutoFit/>
+          </a:bodyPr>
+          <a:lstStyle/>
+          <a:p>
+            <a:pPr>
+              <a:spcAft>
+                <a:spcPts val="0"/>
+              </a:spcAft>
+            </a:pPr>
+            <a:r>
+              <a:rPr sz="1300" b="1" i="0">
+                <a:solidFill>
+                  <a:srgbClr val="9A6414"/>
+                </a:solidFill>
+                <a:latin typeface="Cambria"/>
+              </a:rPr>
+              <a:t>3. Identical jeevan &amp; restful labour</a:t>
+            </a:r>
+          </a:p>
+        </p:txBody>
+      </p:sp>
+      <p:sp>
+        <p:nvSpPr>
+          <p:cNvPr id="17" name="TextBox 14"/>
+          <p:cNvSpPr txBox="1"/>
+          <p:nvPr/>
+        </p:nvSpPr>
+        <p:spPr>
+          <a:xfrm>
+            <a:off x="822959" y="3319271"/>
+            <a:ext cx="3474720" cy="731519"/>
+          </a:xfrm>
+          <a:prstGeom prst="rect">
+            <a:avLst/>
+          </a:prstGeom>
+          <a:noFill/>
+        </p:spPr>
+        <p:txBody>
+          <a:bodyPr wrap="square" lIns="0" rIns="0" tIns="0" bIns="0" anchor="t">
+            <a:spAutoFit/>
+          </a:bodyPr>
+          <a:lstStyle/>
+          <a:p>
+            <a:pPr>
+              <a:spcAft>
+                <a:spcPts val="0"/>
+              </a:spcAft>
+            </a:pPr>
+            <a:r>
+              <a:rPr sz="1150" b="0" i="0">
+                <a:solidFill>
+                  <a:srgbClr val="5A6377"/>
+                </a:solidFill>
+                <a:latin typeface="Calibri"/>
+              </a:rPr>
+              <a:t>Knowing every person as an identical jeevan grounds 10-member family sharing and makes work restful in resolution (shram ka vishram = samadhan, AA p. 23).</a:t>
+            </a:r>
+          </a:p>
+        </p:txBody>
+      </p:sp>
+      <p:sp>
+        <p:nvSpPr>
+          <p:cNvPr id="18" name="Rounded Rectangle 15"/>
+          <p:cNvSpPr/>
+          <p:nvPr/>
+        </p:nvSpPr>
+        <p:spPr>
+          <a:xfrm>
+            <a:off x="4663440" y="2880360"/>
+            <a:ext cx="3840480" cy="1280160"/>
+          </a:xfrm>
+          <a:prstGeom prst="roundRect">
+            <a:avLst>
+              <a:gd name="adj" fmla="val 7000"/>
+            </a:avLst>
+          </a:prstGeom>
+          <a:solidFill>
+            <a:srgbClr val="FAF1DF"/>
+          </a:solidFill>
+          <a:ln>
+            <a:noFill/>
+          </a:ln>
+          <a:effectLst/>
+        </p:spPr>
+        <p:style>
+          <a:lnRef idx="1">
+            <a:schemeClr val="accent1"/>
+          </a:lnRef>
+          <a:fillRef idx="3">
+            <a:schemeClr val="accent1"/>
+          </a:fillRef>
+          <a:effectRef idx="2">
+            <a:schemeClr val="accent1"/>
+          </a:effectRef>
+          <a:fontRef idx="minor">
+            <a:schemeClr val="lt1"/>
+          </a:fontRef>
+        </p:style>
+        <p:txBody>
+          <a:bodyPr rtlCol="0" anchor="ctr"/>
+          <a:lstStyle/>
+          <a:p>
+            <a:pPr algn="ctr"/>
+          </a:p>
+        </p:txBody>
+      </p:sp>
+      <p:sp>
+        <p:nvSpPr>
+          <p:cNvPr id="19" name="TextBox 16"/>
+          <p:cNvSpPr txBox="1"/>
+          <p:nvPr/>
+        </p:nvSpPr>
+        <p:spPr>
+          <a:xfrm>
+            <a:off x="4846320" y="2999232"/>
+            <a:ext cx="3474720" cy="274320"/>
+          </a:xfrm>
+          <a:prstGeom prst="rect">
+            <a:avLst/>
+          </a:prstGeom>
+          <a:noFill/>
+        </p:spPr>
+        <p:txBody>
+          <a:bodyPr wrap="square" lIns="0" rIns="0" tIns="0" bIns="0" anchor="ctr">
+            <a:spAutoFit/>
+          </a:bodyPr>
+          <a:lstStyle/>
+          <a:p>
+            <a:pPr>
+              <a:spcAft>
+                <a:spcPts val="0"/>
+              </a:spcAft>
+            </a:pPr>
+            <a:r>
+              <a:rPr sz="1300" b="1" i="0">
+                <a:solidFill>
+                  <a:srgbClr val="9A6414"/>
+                </a:solidFill>
+                <a:latin typeface="Cambria"/>
+              </a:rPr>
+              <a:t>4. Satiation in exchange &amp; across time</a:t>
+            </a:r>
+          </a:p>
+        </p:txBody>
+      </p:sp>
+      <p:sp>
+        <p:nvSpPr>
+          <p:cNvPr id="20" name="TextBox 17"/>
+          <p:cNvSpPr txBox="1"/>
+          <p:nvPr/>
+        </p:nvSpPr>
+        <p:spPr>
+          <a:xfrm>
+            <a:off x="4846320" y="3319271"/>
+            <a:ext cx="3474720" cy="731519"/>
+          </a:xfrm>
+          <a:prstGeom prst="rect">
+            <a:avLst/>
+          </a:prstGeom>
+          <a:noFill/>
+        </p:spPr>
+        <p:txBody>
+          <a:bodyPr wrap="square" lIns="0" rIns="0" tIns="0" bIns="0" anchor="t">
+            <a:spAutoFit/>
+          </a:bodyPr>
+          <a:lstStyle/>
+          <a:p>
+            <a:pPr>
+              <a:spcAft>
+                <a:spcPts val="0"/>
+              </a:spcAft>
+            </a:pPr>
+            <a:r>
+              <a:rPr sz="1150" b="0" i="0">
+                <a:solidFill>
+                  <a:srgbClr val="5A6377"/>
+                </a:solidFill>
+                <a:latin typeface="Calibri"/>
+              </a:rPr>
+              <a:t>Inner sovereignty (samprabhuta) and jeevan continuity remove the motive to game ledgers (AA p. 76) or discount future generations.</a:t>
+            </a:r>
+          </a:p>
+        </p:txBody>
+      </p:sp>
+      <p:sp>
+        <p:nvSpPr>
+          <p:cNvPr id="21" name="TextBox 18"/>
+          <p:cNvSpPr txBox="1"/>
+          <p:nvPr/>
+        </p:nvSpPr>
+        <p:spPr>
+          <a:xfrm>
+            <a:off x="640080" y="4279392"/>
+            <a:ext cx="7863840" cy="329184"/>
+          </a:xfrm>
+          <a:prstGeom prst="rect">
+            <a:avLst/>
+          </a:prstGeom>
+          <a:noFill/>
+        </p:spPr>
+        <p:txBody>
+          <a:bodyPr wrap="square" lIns="0" rIns="0" tIns="0" bIns="0" anchor="ctr">
+            <a:spAutoFit/>
+          </a:bodyPr>
+          <a:lstStyle/>
+          <a:p>
+            <a:pPr>
+              <a:spcAft>
+                <a:spcPts val="0"/>
+              </a:spcAft>
+            </a:pPr>
+            <a:r>
+              <a:rPr sz="1150" b="0" i="1">
+                <a:solidFill>
+                  <a:srgbClr val="1E2447"/>
+                </a:solidFill>
+                <a:latin typeface="Calibri"/>
+              </a:rPr>
+              <a:t>While humanity is in the process of realisation (anubhav-gami), an Earth-scale economy requires a 10-tier AI backbone.</a:t>
+            </a:r>
+          </a:p>
+        </p:txBody>
+      </p:sp>
+      <p:sp>
+        <p:nvSpPr>
+          <p:cNvPr id="22" name="TextBox 19"/>
+          <p:cNvSpPr txBox="1"/>
+          <p:nvPr/>
+        </p:nvSpPr>
+        <p:spPr>
+          <a:xfrm>
+            <a:off x="502920" y="4828032"/>
+            <a:ext cx="8138160" cy="256032"/>
+          </a:xfrm>
+          <a:prstGeom prst="rect">
+            <a:avLst/>
+          </a:prstGeom>
+          <a:noFill/>
+        </p:spPr>
+        <p:txBody>
+          <a:bodyPr wrap="square" lIns="0" rIns="0" tIns="0" bIns="0" anchor="ctr">
+            <a:spAutoFit/>
+          </a:bodyPr>
+          <a:lstStyle/>
+          <a:p>
+            <a:pPr>
+              <a:spcAft>
+                <a:spcPts val="0"/>
+              </a:spcAft>
+            </a:pPr>
+            <a:r>
+              <a:rPr sz="950" b="0" i="1">
+                <a:solidFill>
+                  <a:srgbClr val="5A6377"/>
+                </a:solidFill>
+                <a:latin typeface="Calibri"/>
+              </a:rPr>
+              <a:t>Study §§2.1–2.2, 3.1–3.9, 7.2, 9.1  ·  AA pp. 18–23, 47–51, 58–60, 76, 95, 104  ·  MVD p. 203  ·  27 / 35</a:t>
             </a:r>
           </a:p>
         </p:txBody>
@@ -37672,7 +40321,7 @@
                 </a:solidFill>
                 <a:latin typeface="Calibri"/>
               </a:rPr>
-              <a:t>JV pp. 47–48  ·  MVD p. 105  ·  AA pp. 41, 54–55, 77–78, 117  ·  AnalyticMadhyasthDarshan.org  ·  4 / 33</a:t>
+              <a:t>JV pp. 47–48  ·  MVD p. 105  ·  AA pp. 41, 54–55, 77–78, 117  ·  AnalyticMadhyasthDarshan.org  ·  4 / 35</a:t>
             </a:r>
           </a:p>
         </p:txBody>
@@ -38938,7 +41587,7 @@
                 </a:solidFill>
                 <a:latin typeface="Calibri"/>
               </a:rPr>
-              <a:t>AA pp. 26, 73, 93  ·  JV p. 152  ·  MVD pp. 96, 183, 282  ·  KD p. 114  ·  AnalyticMadhyasthDarshan.org  ·  5 / 33</a:t>
+              <a:t>AA pp. 26, 73, 93  ·  JV p. 152  ·  MVD pp. 96, 183, 282  ·  KD p. 114  ·  AnalyticMadhyasthDarshan.org  ·  5 / 35</a:t>
             </a:r>
           </a:p>
         </p:txBody>
@@ -40267,7 +42916,7 @@
                 </a:solidFill>
                 <a:latin typeface="Cambria"/>
               </a:rPr>
-              <a:t>Deliberation and universal agreement</a:t>
+              <a:t>Why realisation (anubhav) is needed</a:t>
             </a:r>
           </a:p>
         </p:txBody>
@@ -40306,7 +42955,7 @@
                 </a:solidFill>
                 <a:latin typeface="Calibri"/>
               </a:rPr>
-              <a:t>Body-rooted deliberation (priya, hit, labh) never agrees across distinct bodies; realisation in coexistence grounds universal agreement.</a:t>
+              <a:t>Body-rooted views (priya, hit, labh) differ in every body; only realisation in coexistence grounds universal agreement.</a:t>
             </a:r>
           </a:p>
         </p:txBody>
@@ -40345,7 +42994,7 @@
                 </a:solidFill>
                 <a:latin typeface="Calibri"/>
               </a:rPr>
-              <a:t>AA pp. 13, 18–21, 48, 50, 58–60, 92  ·  JV pp. 72–73, 137  ·  MVD p. 203  ·  AnalyticMadhyasthDarshan.org  ·  6 / 33</a:t>
+              <a:t>AA pp. 13, 18–21, 48, 50, 58–60, 92  ·  JV pp. 72–73, 137  ·  MVD p. 203  ·  AnalyticMadhyasthDarshan.org  ·  6 / 35</a:t>
             </a:r>
           </a:p>
         </p:txBody>
@@ -41364,7 +44013,7 @@
                 </a:solidFill>
                 <a:latin typeface="Calibri"/>
               </a:rPr>
-              <a:t>JV pp. 72–73  ·  AA pp. 17–18  ·  AnalyticMadhyasthDarshan.org  ·  7 / 33</a:t>
+              <a:t>JV pp. 72–73  ·  AA pp. 17–18  ·  AnalyticMadhyasthDarshan.org  ·  7 / 35</a:t>
             </a:r>
           </a:p>
         </p:txBody>
@@ -42718,7 +45367,7 @@
                 </a:solidFill>
                 <a:latin typeface="Cambria"/>
               </a:rPr>
-              <a:t>Where the chain is missing</a:t>
+              <a:t>Why caps fail without realisation</a:t>
             </a:r>
           </a:p>
         </p:txBody>
@@ -42757,7 +45406,7 @@
                 </a:solidFill>
                 <a:latin typeface="Calibri"/>
               </a:rPr>
-              <a:t>Without awakening the higher 5.5 activities, inexhaustible jeevan energy chases limitless consumption or erodes external caps.</a:t>
+              <a:t>Until realisation awakens the higher 5.5 activities, inexhaustible jeevan energy chases more goods or erodes external caps.</a:t>
             </a:r>
           </a:p>
         </p:txBody>
@@ -42835,7 +45484,7 @@
                 </a:solidFill>
                 <a:latin typeface="Calibri"/>
               </a:rPr>
-              <a:t>AA p. 95  ·  Study §2.2  ·  AnalyticMadhyasthDarshan.org  ·  8 / 33</a:t>
+              <a:t>AA p. 95  ·  Study §2.2  ·  AnalyticMadhyasthDarshan.org  ·  8 / 35</a:t>
             </a:r>
           </a:p>
         </p:txBody>
@@ -44244,7 +46893,7 @@
                 </a:solidFill>
                 <a:latin typeface="Calibri"/>
               </a:rPr>
-              <a:t>JV pp. 162–163  ·  AA pp. 33, 48, 58–59, 78  ·  MVD p. 128  ·  AnalyticMadhyasthDarshan.org  ·  9 / 33</a:t>
+              <a:t>JV pp. 162–163  ·  AA pp. 33, 48, 58–59, 78  ·  MVD p. 128  ·  AnalyticMadhyasthDarshan.org  ·  9 / 35</a:t>
             </a:r>
           </a:p>
         </p:txBody>

--- a/Studies/Prosperity-Economics-And-Right-Use/Prosperity-Economics-And-Right-Use-Madhyasth-Darshan.pptx
+++ b/Studies/Prosperity-Economics-And-Right-Use/Prosperity-Economics-And-Right-Use-Madhyasth-Darshan.pptx
@@ -1280,7 +1280,7 @@
           <a:p/>
           <a:p>
             <a:r>
-              <a:t>Because jeevan is continuous across bodily journeys while nature's circularity is permanent (AA pp. 48, 51, 72, 94), intergenerational discounting drops to zero: preserving soil, forests, and generational tools across centuries is caring for the continuing habitat of our own and every other jeevan's ongoing journey.</a:t>
+              <a:t>Because a realised human sees the prosperity of oneself and one's family in the prosperity of the whole and the perpetuity of human civilization across generations (AA pp. 62–63, 72, 94, 142, 146; KD p. 7), intergenerational discounting drops to zero: preserving soil, forests, and generational tools across centuries is part of one's own and one's family's prosperity in the whole.</a:t>
             </a:r>
           </a:p>
         </p:txBody>
@@ -1520,7 +1520,7 @@
           <a:p/>
           <a:p>
             <a:r>
-              <a:t>Why does every body-centric economic model struggle with intergenerational discounting, where a positive discount rate makes ecological exhaustion centuries from now look rational to mortal decision-makers? In Madhyasth Darshan, jeevan is immortal and continuous across bodily journeys while the earth's regenerative cycles are permanent (AA pp. 48, 51, 72, 94). Depleting soil or mineral oil for short-term bodily comfort destroys the habitat of humanity's own continuing tradition.</a:t>
+              <a:t>Why does every body-centric economic model struggle with intergenerational discounting, where a positive discount rate makes ecological exhaustion centuries from now look rational to agents seeking isolated gain? In Madhyasth Darshan, a realised human sees the prosperity of oneself and one's family in the prosperity of the whole — both undivided society and nature — and in the perpetuity of human civilization across generations (AA pp. 62–63, 72, 94, 142, 146; KD p. 7).</a:t>
             </a:r>
           </a:p>
           <a:p/>
@@ -2751,7 +2751,7 @@
           </a:p>
           <a:p>
             <a:r>
-              <a:t>6. Intergenerational discounting: Mortal, body-identified actors discount distant centuries; knowing the continuity of jeevan across bodily journeys alongside permanent natural cycles brings the intergenerational discount rate to zero (AA pp. 48, 51, 72, 94).</a:t>
+              <a:t>6. Intergenerational discounting: Actors seeking isolated private gain discount distant centuries; a realised human sees the prosperity of oneself and one's family in the prosperity of the whole and the perpetuity of human civilization across generations (AA pp. 62–63, 72, 94, 142, 146; KD p. 7), bringing the intergenerational discount rate to zero.</a:t>
             </a:r>
           </a:p>
         </p:txBody>
@@ -2839,7 +2839,7 @@
           <a:p/>
           <a:p>
             <a:r>
-              <a:t>Third and fourth, realisation transforms human relationship and time horizon from the inside: because every member is jeevan with the ability to realise in the coexistence of satta (vyapak) and nature as a whole at once, this forms the basis of unconditional need-sharing in the ten-member family and restful labour in resolution (shram ka vishram = samadhan, AA p. 23), while inner sovereignty (samprabhuta, AA p. 104) and the continuity of jeevan across bodily journeys establish the satiation point of exchange (AA p. 76) and zero intergenerational discounting.</a:t>
+              <a:t>Third and fourth, realisation transforms human relationship and time horizon from the inside: because every member is jeevan with the ability to realise in the coexistence of satta (vyapak) and nature as a whole at once, this forms the basis of unconditional need-sharing in the ten-member family and restful labour in resolution (shram ka vishram = samadhan, AA p. 23), while inner sovereignty (samprabhuta, AA p. 104) and seeing one's own and one's family's prosperity in the prosperity of the whole and the perpetuity of human civilization establish the satiation point of exchange (AA p. 76) and zero intergenerational discounting (AA pp. 62–63, 72, 94, 142, 146).</a:t>
             </a:r>
           </a:p>
           <a:p/>
@@ -27614,7 +27614,7 @@
                 </a:solidFill>
                 <a:latin typeface="Calibri"/>
               </a:rPr>
-              <a:t>Mortal horizons discount distant harm</a:t>
+              <a:t>Private-gain view discounts the future</a:t>
             </a:r>
           </a:p>
         </p:txBody>
@@ -27653,7 +27653,7 @@
                 </a:solidFill>
                 <a:latin typeface="Calibri"/>
               </a:rPr>
-              <a:t>Continuous jeevan; 0% discounting</a:t>
+              <a:t>Prosperity in the whole; perpetuity</a:t>
             </a:r>
           </a:p>
         </p:txBody>
@@ -28416,7 +28416,7 @@
                 </a:solidFill>
                 <a:latin typeface="Cambria"/>
               </a:rPr>
-              <a:t>4. Satiation in exchange &amp; across time</a:t>
+              <a:t>4. Prosperity in the whole &amp; perpetuity</a:t>
             </a:r>
           </a:p>
         </p:txBody>
@@ -28455,7 +28455,7 @@
                 </a:solidFill>
                 <a:latin typeface="Calibri"/>
               </a:rPr>
-              <a:t>Inner sovereignty (samprabhuta) and jeevan continuity remove the motive to game ledgers (AA p. 76) or discount future generations.</a:t>
+              <a:t>A realised human sees own and family prosperity in the prosperity of the whole and the perpetuity of human civilization (AA pp. 62–63, 76, 94).</a:t>
             </a:r>
           </a:p>
         </p:txBody>

--- a/Studies/Prosperity-Economics-And-Right-Use/Prosperity-Economics-And-Right-Use-Madhyasth-Darshan.pptx
+++ b/Studies/Prosperity-Economics-And-Right-Use/Prosperity-Economics-And-Right-Use-Madhyasth-Darshan.pptx
@@ -1356,13 +1356,13 @@
           <a:p/>
           <a:p>
             <a:r>
-              <a:t>The darshan distinguishes animal instincts from the three humane motives: progeny (putreshana), wealth (vitteshana), and public welfare or reputation (lokeshana), with public welfare highest (MVD pp. 318, 320). Upon awakening, once a ten-member family (where two to four members already produce beyond the household's limited physical needs) achieves resolution and prosperity, the propensity of benevolence (upkar — help and inspiration for awakening and prosperity, MVD p. 72; AA pp. 23–24, 101) naturally arises (KD pp. 115–116). Instead of diverting surplus into limitless accumulation (sangrah), household abundance is channelled into use within the family, right use (sadupyog) in society, and purposeful use in the universal order (KD pp. 116–117; AA p. 116; MVD p. 150). That is also why the higher societal services that sustain awakening and orderliness — education, medical care, justice, and governance — must be performed with benevolence rather than sold as commercial trades (AA pp. 45–46; JV pp. 166–168).</a:t>
+              <a:t>The darshan distinguishes animal instincts from the three humane motives: progeny (putreshana), wealth (vitteshana), and public welfare or reputation (lokeshana), with public welfare highest (MVD pp. 318, 320). Upon awakening, once a ten-member family (where two to four members already produce beyond the household's limited physical needs) achieves resolution and prosperity, the propensity of benevolence (upkar — help and inspiration for awakening and prosperity, MVD p. 72; AA pp. 23–24, 101) naturally arises (KD pp. 115–116). Instead of diverting surplus into limitless accumulation (sangrah), household abundance is channelled into use within the family, right use (sadupyog) in society, and purposeful use in the universal order rather than hoarded (KD pp. 116–117; AA p. 116; MVD p. 150).</a:t>
             </a:r>
           </a:p>
           <a:p/>
           <a:p>
             <a:r>
-              <a:t>How are services (seva) organised, which vocations fall where, and how do practitioners obtain the physical objects they need? The texts name agriculture and industry as the two primary forms of production, with all other vocations complementary to them (MVD p. 267), and distinguish two forms of service (MVD p. 72). First, benevolence-focused service (upkar-pradhan seva) covers household care, child and elder support, teaching under the education-sanskar committee (AA pp. 24, 29, 130–132, 140), medical care and healing by doctors under the health-restraint committee at village and regional medical centres (AA pp. 139–140; JV pp. 166–168), part-time committee duties (AA p. 127), and full-time council representation (lok-pratinidhi, KD pp. 116–117); because these practitioners belong to a self-reliant ten-member family producing in excess of need, their household's abundance provides all objects needed for their bodily nourishment, protection, and societal motion without salaried jobs (KD pp. 115–117; AA pp. 119–120, 137). Second, remuneration-focused service (pratiphal-pradhan seva) covers the ninth branch of the village production system (AA pp. 133, 136) and exchange-reserve staffing (AA p. 138) — repairing bicycles, radios, TVs and machines, washing clothes, barbering, and running the exchange-reserve — whose council-fixed remuneration (parishramik as svadhan, AA pp. 136, 140) credits their account in the cooperative exchange-reserve (AA pp. 137–138) so they draw needed objects at labour value. Healing the body falls on the unpaid side of this line because restoring a person in disease is a direct work of kindness and generosity in human relationship that fees corrupt into a trade in suffering (AA pp. 22–24, 45–46, 140; JV pp. 166–168), whereas repair, laundry, barbering, and reserve staffing maintain produced objects and village operations.</a:t>
+              <a:t>The texts treat agriculture and industry as the two primary forms of production, with all other vocations complementary to them (MVD p. 267), and distinguish two forms of service (seva, MVD p. 72). First, benevolence-focused service (upkar-pradhan seva) covers household care, child and elder support, teaching under the education-sanskar committee (AA pp. 24, 29, 130–132, 140), medical care and healing by doctors under the health-restraint committee at village and regional medical centres (AA pp. 139–140; JV pp. 166–168), service on the five committees (AA p. 127), and representation in the ten-tier council order (lok-pratinidhi, KD pp. 116–117); because these practitioners belong to a self-reliant ten-member family producing in excess of need, their household's abundance provides all objects needed for their bodily nourishment, protection, and societal motion without salaried employment (KD pp. 115–117; AA pp. 119–120, 137). Second, remuneration-focused service (pratiphal-pradhan seva) covers the village service branch (AA pp. 133, 136) and exchange-reserve staffing (AA p. 138) — repairing bicycles, radios, TVs and machines, washing clothes, barbering, and staffing the exchange-reserve — whose council-fixed remuneration (parishramik as svadhan, AA pp. 136, 140) credits their account in the cooperative exchange-reserve (AA pp. 137–138) so they draw needed objects at labour value. Healing falls on the unpaid side because restoring a person in distress or disease is a direct work of kindness (daya) in human relationship, and selling it for gain turns it into trade (vyapar) and distorts its purpose (AA pp. 22–24, 45–46, 140; JV pp. 166–168). Repair, laundry, barbering, and reserve staffing fall on the paid side because they maintain produced objects and village operations and so extend material production.</a:t>
             </a:r>
           </a:p>
         </p:txBody>

--- a/Studies/Prosperity-Economics-And-Right-Use/Prosperity-Economics-And-Right-Use-Madhyasth-Darshan.pptx
+++ b/Studies/Prosperity-Economics-And-Right-Use/Prosperity-Economics-And-Right-Use-Madhyasth-Darshan.pptx
@@ -1596,7 +1596,7 @@
           <a:lstStyle/>
           <a:p>
             <a:r>
-              <a:t>In the cyclical economy, every villager is trained across multiple occupations, planned jointly by the education, production and exchange-reserve committees, so that no one suffers occupational fear (AA pp. 64–65, 131). Under “Security of production” (AA p. 144), when a producer or researcher develops an original tool, procedure, method or formula (maulikta) not previously in the tradition, four village committees record its drawings and formulas in writing and honour the inventor with prizes and awards (puraskar), which count as righteous wealth (svadhan, AA p. 140). Research and dissemination remain inseparable: just as one grain multiplies into hundreds only when sown in the field, knowledge and skill reach fruition through open dissemination, not through patent monopolies that sell research while concealing the method (AA pp. 56–58; JV pp. 88–89).</a:t>
+              <a:t>In the cyclical economy, every villager is trained across multiple occupations, planned jointly by the education-sanskar, production, and exchange-reserve committees, so that no one suffers occupational fear (AA pp. 64–65, 131). Under “Security of production” (AA p. 144), when a producer or researcher develops an original tool, procedure, method or formula (maulikta) not previously in the tradition, four village committees record its drawings and formulas in writing and honour the inventor with prizes and awards (puraskar), which count as righteous wealth (svadhan, AA p. 140). Research and dissemination remain inseparable: just as one grain multiplies into hundreds only when sown in the field, knowledge and skill reach fruition through open dissemination, not through patent monopolies that sell research while concealing the method (AA pp. 56–58; JV pp. 88–89).</a:t>
             </a:r>
           </a:p>
           <a:p/>
@@ -1684,7 +1684,7 @@
           <a:p/>
           <a:p>
             <a:r>
-              <a:t>This institutional architecture scales resolved, prosperous, fearless living to the entire Earth and into universal orderliness. Ten families form a family cluster, ten clusters a hundred-family village with nine branches of work (AA pp. 133–136), and ten tiers reach the World Family Council (vishva parivar sabha). Representatives are selected by consensus with zero election expenditure and serve part-time while continuing production, so governance never creates a non-producing ruling class and every family produces more than its needs, while higher tiers coordinate medium and large industry, planetary regeneration, and inter-nation labour-value exchange free of profit and loss (AA pp. 27–30, 63, 72, 110, 115, 127; MVD pp. 259, 264–271; KD p. 67).</a:t>
+              <a:t>This institutional architecture scales resolved, prosperous, fearless living to the entire Earth and into universal orderliness. From the Tier-1 family council (parivar sabha, at least ten members) and Tier-2 family cluster (parivar samuh sabha, ten families) to the Tier-3 village family council (gram parivar sabha, a hundred families nominating the five committees and coordinating nine branches of work; AA pp. 67, 127, 133–136), Tiers 4–8 scale by factors of ten up to ten million families, while Tiers 9 and 10 span the continent councils (pradhan rajya sabha) and the World Family Council (vishva parivar sabha; AA pp. 27–30, 125–127). Representatives are selected by consensus with zero election expenditure and serve part-time while continuing production, so governance never creates a non-producing ruling class and every family produces more than its needs, while higher tiers coordinate medium and large industry, planetary regeneration, and inter-nation labour-value exchange free of profit and loss (AA pp. 27–30, 63, 72, 110, 115, 127; MVD pp. 259, 264–271; KD p. 67).</a:t>
             </a:r>
           </a:p>
         </p:txBody>
@@ -2000,7 +2000,7 @@
           <a:p/>
           <a:p>
             <a:r>
-              <a:t>Why does a group of people still in the process of realisation (anubhav-gami) self-correct when an individual errs? Because priya–hita–labha biases are private to each body and cannot command shared endorsement once objective facts and checkable causal logic are placed in common view before a council of peers who all innately seek contentment and justice (AA pp. 18–20, 48, 58–60; MVD p. 203).</a:t>
+              <a:t>That collective self-correction rests on two things: the treatise grounds universal agreement (sarvasammati) in realisation and evaluation by justice, dharma, and truth (§2.1; AA pp. 18–20, 58–60; MVD p. 203), and for councils whose members are still in the process of realisation (anubhav-gami) and may slip into a priya–hit–labh impulse, this study argues as a working institutional hypothesis that placing objective facts and checkable causal logic continuously in common view makes it far harder for a group of peers to quietly endorse injustice or ecological waste.</a:t>
             </a:r>
           </a:p>
         </p:txBody>
@@ -2082,7 +2082,7 @@
           <a:p/>
           <a:p>
             <a:r>
-              <a:t>Because these facts and checkable derivations are visible to the whole council at once, no single member's blind spot or mistake can quietly persist: the collective is compelled to deliberate and restore balance.</a:t>
+              <a:t>Because these facts and checkable derivations are visible to the whole council at once, no single member's blind spot or mistake can quietly persist: the visible discrepancy prompts the collective to examine the facts and restore balance.</a:t>
             </a:r>
           </a:p>
         </p:txBody>
@@ -2234,7 +2234,7 @@
           <a:lstStyle/>
           <a:p>
             <a:r>
-              <a:t>Across the ten tiers, the agentic backbone keeps the cycle in balance, enables collective self-correction, and lowers the barrier to transition. When a new cluster of families or villages begins transitioning inside today's market economy, pre-configured agents immediately connect its exchange-reserve to regional labour-value benchmarks and mutual-credit clearing, while placing verified discrepancies and checkable causal traces before the whole council simultaneously so they cannot be ignored (AA pp. 72, 115, 118, 139, 142–143; MVD p. 268).</a:t>
+              <a:t>Across the ten tiers, the agentic backbone keeps the cycle in balance, enables collective self-correction, and lowers the barrier to transition. When a new cluster of families or villages begins transitioning inside today's market economy, pre-configured agents immediately connect its exchange-reserve to regional labour-value benchmarks and mutual-credit clearing, while placing verified discrepancies and checkable causal traces before the whole council simultaneously making them far harder to ignore (AA pp. 72, 115, 118, 139, 142–143; MVD p. 268).</a:t>
             </a:r>
           </a:p>
           <a:p/>
@@ -2246,7 +2246,7 @@
           <a:p/>
           <a:p>
             <a:r>
-              <a:t>Five safeguards keep the agentic backbone subordinate to people (§8.8): no optimisation for profit or attention capture; strict data subsidiarity (AA p. 128); inspectable rules that prevent technocratic rulership (AA p. 82); counting AI's own energy and mineral footprint within regenerative limits; and shared council visibility with cross-agent auditability so no single representative or single agent can hide an inconsistency from the group.</a:t>
+              <a:t>Five safeguards keep the agentic backbone subordinate to people (§8.8): no optimisation for profit or attention capture; strict data subsidiarity (AA p. 128); inspectable rules that prevent technocratic rulership (AA p. 82); counting AI's own energy and mineral footprint within regenerative limits; and shared council visibility with cross-agent auditability making it far harder for any single representative to quietly dismiss an inconsistency.</a:t>
             </a:r>
           </a:p>
         </p:txBody>
@@ -2404,13 +2404,13 @@
           <a:p/>
           <a:p>
             <a:r>
-              <a:t>Its strengths: it sets out the complete vision of resolved, prosperous, fearless humans coexisting with nature across the Earth; explains insatiability through the joint form of jeevan and body; resolves the six structural deadlocks that body-centric economics cannot solve without jeevan and realisation (rebound against caps, Arrow's impossibility of social agreement, the work-disutility trilemma, non-kin family sharing, strategic ledger gaming, and intergenerational discounting); pairs family need-sharing with inter-family labour-value exchange; and specifies the three-stage transition path together with the required ten-tier AI agentic backbone.</a:t>
+              <a:t>On the darshan's account, its strengths are that it sets out the complete vision of resolved, prosperous, fearless humans coexisting with nature across the Earth; explains insatiability through the joint form of jeevan and body; resolves at a common root the six structural deadlocks that body-centric economics cannot solve without jeevan and realisation (rebound against caps, Arrow's impossibility of social agreement, the work-disutility trilemma, non-kin family sharing, strategic ledger gaming, and intergenerational discounting); pairs family need-sharing with inter-family fivefold labour-value exchange (skill, proficiency, pace, time, and means); and specifies the three-stage transition path, which this study joins to the federated ten-tier AI agentic backbone.</a:t>
             </a:r>
           </a:p>
           <a:p/>
           <a:p>
             <a:r>
-              <a:t>Its open problems: how family need assessments aggregate at planetary scale; how common labour values compute multi-stage inputs, capital depreciation without interest, and Ricardian differential fertility across regions; how the federated ten-tier AI agentic backbone replaces price and interest signals without creating a technocratic bottleneck; how automation reduces drudgery without displacing producers; and how communities govern Personal, Family and Committee AI Agents so that shared visibility strengthens human deliberation without ceding justice, dharma and truth.</a:t>
+              <a:t>Its open problems: how family need assessments aggregate at planetary scale; how fivefold labour valuation computes multi-stage inputs, capital depreciation without interest, and Ricardian differential fertility across regions; how the federated ten-tier AI agentic backbone replaces price and interest signals without creating a technocratic bottleneck; how automation reduces drudgery without displacing producers; how teachers, doctors, and council representatives are supported in unpaid benevolent service (upkar-pradhan seva) during the transition before their households reach ten-member prosperity; and how communities govern Personal, Family and Committee AI Agents without ceding justice, dharma and truth.</a:t>
             </a:r>
           </a:p>
         </p:txBody>
@@ -2562,13 +2562,13 @@
           <a:lstStyle/>
           <a:p>
             <a:r>
-              <a:t>Writing in the 1990s, Shri A. Nagraj anticipated computers in the village exchange-reserve (AA p. 138) and a computer network linking committees from the village to the world (AA p. 132). When this vision is examined at the scale of the whole Earth — rather than a single small family or isolated hamlet — and under the realistic condition that citizens are in the process of realisation (anubhav-gami), a strong, federated ten-tier AI agentic backbone emerges as a structural requirement rather than an optional convenience, for four interconnected reasons.</a:t>
+              <a:t>Writing in the 1990s, Shri A. Nagraj anticipated computers in the village exchange-reserve (AA p. 138) and a computer network linking committees from the village to the world (AA p. 132). Extending that institutional design to contemporary computing, this study argues that at the scale of the whole Earth — and while citizens are in the process of realisation (anubhav-gami) — a federated ten-tier AI agentic backbone is a structural requirement rather than an optional convenience, for four interconnected reasons.</a:t>
             </a:r>
           </a:p>
           <a:p/>
           <a:p>
             <a:r>
-              <a:t>First, planetary-scale visibility for collective self-correction: in a single household, stock, effort and soil are visible to the naked eye; across ten tiers of villages, bioregions and continents, no council can see distant ecological drawdown or exchange drift without active agents that continuously cross-check flows and place checkable causal traces in common view so councils cannot ignore them. Second, fault-tolerant collective correction while individuals are anubhav-gami: even when an individual errs or slips into priya–hita–labha bias (AA p. 139), simultaneous visibility of facts and checkable logic before the whole committee or council enables the group to correct the error cleanly. Third, part-time governance: representatives continue physical production (AA p. 127; MVD p. 259) and the village exchange-reserve has only three staff (AA p. 138); manual databases would force a full-time managerial bureaucracy (JVD p. 35). Fourth, non-price input–output calculation, Ricardian soil adjustment, natural-language village surveys, and dual currency/labour ledgers across Stages 1–3 (AA pp. 122–125, 142–143) require active agentic computation.</a:t>
+              <a:t>First, planetary-scale visibility across ten tiers: in a single household, stock, effort and soil are visible to the naked eye; across ten tiers of villages, regions and continents, no council can see distant ecological drawdown or exchange drift without active agents that continuously cross-check flows and place checkable causal traces in common view. Second, fault-tolerance while individuals are anubhav-gami: even when an individual errs or slips into priya–hit–labh bias (AA p. 139), simultaneous visibility of verified discrepancies and their step-by-step logic before the relevant committee or council brings private drift into common view for reformative deliberation (AA pp. 129–130, 139–140). Third, part-time governance and lean staffing: representatives continue physical production (AA p. 127; MVD p. 259) and the village exchange-reserve is staffed on average by three people (AA p. 138); manual databases would force a full-time managerial bureaucracy (JVD p. 35). Fourth, non-price input–output calculation, Ricardian soil adjustment, natural-language village surveys, and dual currency/labour ledgers across Stages 1–3 (AA pp. 122–125, 142–143) require active agentic computation.</a:t>
             </a:r>
           </a:p>
         </p:txBody>
@@ -2638,19 +2638,19 @@
           <a:lstStyle/>
           <a:p>
             <a:r>
-              <a:t>To operate at the scale of the Earth while citizens are in the process of realisation (anubhav-gami), every human unit from the person and ten-member family to the Tier-10 World Family Council is paired with a dedicated AI agent. Across all ten tiers, these agents act not as rulers or passive ledgers, but as collective consistency mirrors: they place verified facts, discrepancies, and checkable causal logic in common view before all members of the family, cluster, committee, or council simultaneously, so that no single person's error can hide and the collective can self-correct.</a:t>
+              <a:t>To operate at the scale of the Earth while citizens are in the process of realisation (anubhav-gami), every human unit from the person and the Tier-1 family council to the Tier-10 World Family Council is paired with a dedicated AI agent. Across all ten tiers, these agents act both as operational coordinators and as collective consistency mirrors: they place verified facts, discrepancies, and checkable causal logic in common view before all members of the family, cluster, committee, or council simultaneously.</a:t>
             </a:r>
           </a:p>
           <a:p/>
           <a:p>
             <a:r>
-              <a:t>At the individual and family level (10–12 members; AA pp. 14, 26, 65), the Personal Assistant and Family AI Agent help reflect on priya–hita–labha impulses, assess common and special aspirations (AA p. 112), track stock age against hoarding, and coordinate complementary household production without weighing individual labour shares (AA pp. 119–120). At Tiers 1 and 2, Cluster, Village Council, and five Committee Agents maintain the living village survey, link the five dimensions horizontally, and run the three-stage transition ledgers alongside the three-person exchange-reserve staff (AA pp. 125–145).</a:t>
+              <a:t>At the individual and Tier-1 family council level (parivar sabha, at least ten members; AA pp. 14, 26–28, 65, 125), the Personal Assistant and Family AI Agent help reflect on priya–hit–labh impulses, assess common and special aspirations (AA p. 112), track stock age against hoarding, and coordinate complementary household production without weighing individual labour shares (AA pp. 119–120). At Tier 2 (the ten-family cluster council, parivar samuh sabha; AA pp. 27, 125) and Tier 3 (the hundred-family village council, gram parivar sabha, which is the first tier to nominate the five committees; AA pp. 67, 125–145), the Cluster, Village Council, and five Committee Agents maintain the living village survey, link the five committees horizontally, monitor the four dimensions of justice (in character, behaviour, production, and exchange; AA pp. 140–143), and run the three-stage transition ledgers alongside the exchange-reserve's three-person staff (AA p. 138).</a:t>
             </a:r>
           </a:p>
           <a:p/>
           <a:p>
             <a:r>
-              <a:t>Across Tiers 3 to 10, federated Council and Committee Agents compute Leontief input–output chains and Ricardian fertility adjustments, match inter-regional surpluses and deficits at labour value (AA p. 72), coordinate small, medium and large industry (AA p. 115), and monitor planetary regeneration boundaries (MVD p. 268). At every tier, normative authority stays with the human council.</a:t>
+              <a:t>Across Tiers 4 to 10 (from the ten-village cluster to the continent and World Family Councils; AA pp. 27–30, 115, 126–127), federated Council and Committee Agents compute Leontief input–output chains and Ricardian fertility adjustments, match inter-regional surpluses and deficits at labour value (AA p. 72), coordinate small, medium and large industry (AA p. 115), and monitor planetary regeneration boundaries (MVD p. 268). This study's companion Technical Note on the Ten-Tier Agentic Infrastructure specifies the eight-block architecture, eighteen use cases, and four-phase Indian transition blueprint.</a:t>
             </a:r>
           </a:p>
         </p:txBody>
@@ -29036,7 +29036,7 @@
                 </a:solidFill>
                 <a:latin typeface="Calibri"/>
               </a:rPr>
-              <a:t>Fulfilment of relationships and accord with coexistence. Even if one person errs, a council cannot ignore facts and checkable logic visible in common view.</a:t>
+              <a:t>Fulfilment of relationships and accord with coexistence. When facts and checkable logic are visible in common view, peers can spot and correct individual errors.</a:t>
             </a:r>
           </a:p>
           <a:p>
@@ -29795,7 +29795,7 @@
                 </a:solidFill>
                 <a:latin typeface="Calibri"/>
               </a:rPr>
-              <a:t>Councils serve part-time while producing (AA p. 127) and reserves have 3 staff (p. 138); without agents, coordination forces a bureaucracy.</a:t>
+              <a:t>Councils serve part-time while producing (AA p. 127) and reserves average 3 staff (p. 138); without agents, coordination forces a bureaucracy.</a:t>
             </a:r>
           </a:p>
         </p:txBody>
@@ -32225,7 +32225,7 @@
                 </a:solidFill>
                 <a:latin typeface="Calibri"/>
               </a:rPr>
-              <a:t>Family (10–12 members)</a:t>
+              <a:t>Family (Tier 1, ≥10)</a:t>
             </a:r>
           </a:p>
         </p:txBody>
@@ -32430,7 +32430,7 @@
                 </a:solidFill>
                 <a:latin typeface="Calibri"/>
               </a:rPr>
-              <a:t>Family cluster (Tier 1)</a:t>
+              <a:t>Family cluster (Tier 2)</a:t>
             </a:r>
           </a:p>
         </p:txBody>
@@ -32591,7 +32591,7 @@
                 </a:solidFill>
                 <a:latin typeface="Calibri"/>
               </a:rPr>
-              <a:t>Village &amp; 5 committees</a:t>
+              <a:t>Village council (Tier 3)</a:t>
             </a:r>
           </a:p>
         </p:txBody>
@@ -32796,7 +32796,7 @@
                 </a:solidFill>
                 <a:latin typeface="Calibri"/>
               </a:rPr>
-              <a:t>Regional tiers (3–9)</a:t>
+              <a:t>Regional tiers (4–9)</a:t>
             </a:r>
           </a:p>
         </p:txBody>
@@ -36524,7 +36524,7 @@
                 </a:solidFill>
                 <a:latin typeface="Calibri"/>
               </a:rPr>
-              <a:t>Shared council views make drift, causal logic, and 3-stage ledgers visible to all peers at once, compelling collective self-correction across 10 tiers.</a:t>
+              <a:t>Shared council views make drift, causal logic, and 3-stage ledgers visible to all peers at once, supporting collective self-correction across 10 tiers.</a:t>
             </a:r>
           </a:p>
         </p:txBody>

--- a/Studies/Prosperity-Economics-And-Right-Use/Prosperity-Economics-And-Right-Use-Madhyasth-Darshan.pptx
+++ b/Studies/Prosperity-Economics-And-Right-Use/Prosperity-Economics-And-Right-Use-Madhyasth-Darshan.pptx
@@ -536,19 +536,19 @@
           <a:lstStyle/>
           <a:p>
             <a:r>
-              <a:t>This deck presents the study Prosperity Economics and Right Use. It brings out Madhyasth Darshan's vision of an economy of resolved (samadhan), prosperous (samriddhi), fearless (abhay) individuals coexisting with nature across the ten-tier order at the scale of the Earth and in universal orderliness — and asks how human labour can receive its true value, judged by the usefulness it establishes rather than by scarcity, accumulation and price.</a:t>
+              <a:t>This deck presents the study Prosperity Economics and Right Use. It brings out Madhyasth Darshan's vision of an undivided society (akhand samaj) and universal orderliness (sarvabhaum vyavastha) — resolved (samadhan), prosperous (samriddhi), fearless (abhay) individuals and families living in balance with nature across the ten-tier order — and asks how human labour can receive its true value, judged by the usefulness it establishes rather than by scarcity, accumulation, and price.</a:t>
             </a:r>
           </a:p>
           <a:p/>
           <a:p>
             <a:r>
-              <a:t>The study's principal source is Avartansheel Arthshastra, Shri A. Nagraj's treatise on cyclical economics, read alongside Madhyasth Darshan, Jeevan Vidya, Samadhanatmak Bhautikvad, Karm Darshan, Janvad and Adhyatmvad. It demonstrates why this vision is genuinely new: existing economic theories — mainstream neoclassical and heterodox Marxian, institutional, ecological, capability and Gandhian traditions alike — treat the human being as a single body-centric unit and hit structural deadlocks that cannot be resolved without recognising jeevan (the constitutionally complete conscious atom) and realisation (anubhav) in coexistence.</a:t>
+              <a:t>The study's principal source is Avartansheel Arthshastra, Shri A. Nagraj's treatise on cyclical economics, read alongside Madhyasth Darshan, Jeevan Vidya, Samadhanatmak Bhautikvad, Karm Darshan, Janvad, and Adhyatmvad. It examines why existing economic principles and methods — mainstream neoclassical and heterodox Marxian, institutional, ecological, capability, and Gandhian traditions alike — fall short of establishing an undivided society and universal orderliness: by treating the human being as a body-centric organism without jeevan (the constitutionally complete conscious atom) and without the realisation (anubhav) of coexistence, they hit six recurring deadlocks.</a:t>
             </a:r>
           </a:p>
           <a:p/>
           <a:p>
             <a:r>
-              <a:t>Finally, the deck shows why a strong, federated ten-tier AI agentic backbone is a structural requirement — not an optional convenience — for an Earth-scale civilization whose members are in the process of realisation (anubhav-gami). By making objective facts and checkable causal logic visible in common view to families, committees and councils, paired AI agents ensure that inconsistencies cannot be ignored and enable collective self-correction across all ten tiers while keeping normative judgement with people.</a:t>
+              <a:t>Finally, the deck examines how measurement and a federated ten-tier AI agentic framework can serve as a practical coordination tool (yantra) extending the treatise's computerised exchange-reserves and networked committees while humanity is in the process of realisation (anubhav-gami), keeping every judgement of justice, dharma, and truth with people.</a:t>
             </a:r>
           </a:p>
         </p:txBody>
@@ -864,7 +864,7 @@
           <a:lstStyle/>
           <a:p>
             <a:r>
-              <a:t>Cyclical economics is the right use, security and prosperity of resources, artha, in the form of body, mind and wealth (AA p. 25; MVD p. 243). Through paravartan–pratyavartan, the five powers of jeevan project into human living through bodily skill and proficiency, and reflect back in mutual evaluation across family and society (AA pp. 18–19, 48–50). In that state, the restfulness of labour is resolution itself (shram ka vishram = samadhan, AA p. 23): productive work is how a resolved jeevan expresses justice and generosity through the body, breaking the classical trilemma that treats work as disutility requiring either wage fear or unequal pay.</a:t>
+              <a:t>Cyclical economics is the right use, security, and prosperity of resources, artha, in the form of body, mind, and wealth (AA p. 25; MVD p. 243). Through paravartan–pratyavartan, the five powers of jeevan project into human living through bodily skill and proficiency, and reflect back in mutual evaluation across family and society (AA pp. 18–19, 48–50). In that state, the restfulness of labour is resolution itself (shram ka vishram in samadhan, AA p. 23): productive work is how a resolved jeevan expresses justice and generosity through the body, breaking the classical trilemma that treats work as disutility requiring either wage fear or unequal pay.</a:t>
             </a:r>
           </a:p>
           <a:p/>
@@ -946,13 +946,13 @@
           <a:p/>
           <a:p>
             <a:r>
-              <a:t>It can be seen at many scales. Seed becomes tree and tree becomes seed. Relationship grounds value, value grounds evaluation, and evaluation returns to relationship. The individual's complementarity is linked into the family and the family's into the individual, and the same holds between family and village. Production through labour, valuation by the value of labour, and exchange on that basis together form a cycle, and so do the four orders (AA p. 15). Water evaporates, gathers as cloud, falls as rain and runs back to the sea; plants decompose and make the earth fertile for further plants (AA pp. 34–35; MVD p. 152).</a:t>
+              <a:t>It can be seen at many scales. Seed becomes tree and tree becomes seed. Relationship grounds value, value grounds evaluation, and evaluation returns to relationship. The individual's complementarity is linked into the family and the family's into the individual, and the same holds between family and village. Production through labour, valuation by the value of labour, and exchange on that basis together form a cycle, and so do the four orders (AA p. 15). Water evaporates, gathers as cloud, falls as rain, and runs back to the sea; plants decompose and make the earth fertile for further plants (AA pp. 34–35; MVD p. 152).</a:t>
             </a:r>
           </a:p>
           <a:p/>
           <a:p>
             <a:r>
-              <a:t>Two features matter for economics. A cycle returns: whatever is drawn out is restored to the conditions of the next round. And a cycle is purposive: it is linked in the sense of prosperity, so its return is the fulfilment of a goal, not mere repetition. The treatise's own definition is a compressed sentence; the study records its reading in the Editorial Notes.</a:t>
+              <a:t>Two features matter for economics. A cycle returns: whatever is drawn out is restored to the conditions of the next round. And a cycle is purposive: it is linked in the sense of prosperity, so its return is the fulfilment of a goal, not mere repetition.</a:t>
             </a:r>
           </a:p>
         </p:txBody>
@@ -1104,19 +1104,19 @@
           <a:lstStyle/>
           <a:p>
             <a:r>
-              <a:t>The cycle closes only where need is definite, and the darshan locates that definiteness in the family: at least ten autonomous people living together with justice, recognising relationships, fulfilling values, and complementary in production (AA pp. 14, 65; JV p. 153). Why can a ten-member household share unconditionally according to need without weighing individual labour or dependency ratios (AA pp. 119–120), when historical communes frayed along biological kinship lines? Because every member is jeevan, which has the ability to realise (anubhav) in the coexistence of all-pervasive omnipresence (satta / vyapak) and nature as a whole at once (AA pp. 47, 51, 60; MVD p. 203), removing bodily narrowing so their bodies serve a shared journey of awakening. In a wise family, two to four members easily produce beyond the whole family's limited necessity (AA p. 26; KD p. 115).</a:t>
+              <a:t>The cycle closes only where need is definite, and the darshan locates that definiteness in the family: at least ten autonomous people living together with justice, recognising relationships, fulfilling values, and complementary in production (AA pp. 14, 65; JV p. 153). A ten-member household can share unconditionally according to need without weighing individual labour or dependency ratios (AA pp. 119–120) because every member is jeevan, endowed with the ability to realise (anubhav) the coexistence of all-pervasive omnipresence (satta, vyapak) and nature as a whole at once (AA pp. 47, 51, 60; MVD p. 203), removing bodily narrowing so their bodies serve a shared journey of awakening. In a wise family, two to four members easily produce beyond the whole family's limited necessity (AA p. 26; KD p. 115).</a:t>
             </a:r>
           </a:p>
           <a:p/>
           <a:p>
             <a:r>
-              <a:t>Prosperity is the lack of the sentiment of lacking and production in excess of needs, together with right use and security (MVD p. 71; AA p. 113). Prosperity cannot be private: for one family to be prosperous, more than one family must be (AA pp. 62–63).</a:t>
+              <a:t>Prosperity is the absence of the sentiment of lacking and production in excess of needs, together with right use and security (MVD p. 71; AA p. 113). Prosperity cannot be private: for one family to be prosperous, more than one family must be (AA pp. 62–63).</a:t>
             </a:r>
           </a:p>
           <a:p/>
           <a:p>
             <a:r>
-              <a:t>In exchange between families and villages, the treatise identifies a satiation point of exchange (vinimay ka tripti bindu, AA p. 76): grounded in inner sovereignty (samprabhuta, AA p. 104) and mutual satisfaction (ubhay-tripti, AA p. 113), remuneration after exchange is just as much as was produced, with neither profit nor loss in labour and no motive for strategic ledger gaming.</a:t>
+              <a:t>In exchange between families and villages, the treatise identifies a satiation point of exchange (vinimay ka tripti bindu, AA p. 76): grounded in inner sovereignty (samprabhuta, AA p. 104) and mutual satisfaction (ubhay-tripti, AA p. 113), remuneration after exchange is just as much as was produced, with neither profit nor loss in labour.</a:t>
             </a:r>
           </a:p>
         </p:txBody>
@@ -1186,19 +1186,19 @@
           <a:lstStyle/>
           <a:p>
             <a:r>
-              <a:t>Value in Madhyasth Darshan is not price. The value of a unit is its participation in the orderliness of the whole: what its activity fulfils in relation to others. For produced things this participation is usefulness, what food, shelter, a tool or a vehicle fulfils in nourishing and protecting the body and in social participation. The collection's study of axiology develops this account. Human labour is the joint deployment of mind (manas, the jeevan powers) and body that establishes usefulness and beauty upon natural abundance (AA p. 143). The value of an object is determined in a chain: labour-based object, object-based usefulness, usefulness-based valuation (AA p. 49). Evaluation can be made only of labour, not of symbolic objects (AA p. 112).</a:t>
+              <a:t>Value in Madhyasth Darshan is not price. The value of a unit is its participation in the orderliness of the whole: what its activity fulfils in relation to others. For produced things this participation is usefulness — what food, shelter, a tool, or a vehicle fulfils in nourishing and protecting the body and in social participation. Human labour is the joint deployment of mind (manas, the jeevan powers) and body that establishes usefulness and beauty upon natural abundance (AA p. 143). The value of an object is determined in a chain: labour-based object, object-based usefulness, usefulness-based valuation (AA p. 49). Evaluation can be made only of labour, not of symbolic objects (AA p. 112).</a:t>
             </a:r>
           </a:p>
           <a:p/>
           <a:p>
             <a:r>
-              <a:t>For exchange between families and villages, the treatise evaluates labour by the total combination of five factors: skill (kushalata), proficiency (nipunata), speed of work (karya-gati), time (samay) and means (sadhan), together with scholarliness (panditya) (AA pp. 119, 145). Wheat sown under various circumstances yields various quantities, and the midpoint gives a common value for the labour of producing wheat (AA p. 66). Inside the ten-member family, by contrast, individual contributions and dependency ratios are not weighed: the goal is the product and mutual fulfilment, not more or less labour (AA pp. 119–120).</a:t>
+              <a:t>For exchange between families and villages, the treatise evaluates labour by the total combination of five factors: skill (kushalata), proficiency (nipunata), speed of work (karya-gati), time (samay), and means (sadhan), together with scholarliness (panditya) (AA pp. 119, 145). Wheat sown under various circumstances yields various quantities, and the midpoint gives a common value for the labour of producing wheat (AA p. 66). Inside the ten-member family, by contrast, individual contributions and dependency ratios are not weighed: the goal is the product and mutual fulfilment, not more or less labour (AA pp. 119–120).</a:t>
             </a:r>
           </a:p>
           <a:p/>
           <a:p>
             <a:r>
-              <a:t>The darshan's state policy makes the point explicit: respect and honour according to capacity, ability and receptivity, and a policy that prevents the exploitation of the fruits of labour (MVD pp. 265–268).</a:t>
+              <a:t>The darshan's state policy makes the point explicit: respect and honour according to capacity, ability, and receptivity, and a policy that prevents the exploitation of the fruits of labour (MVD pp. 265–268).</a:t>
             </a:r>
           </a:p>
         </p:txBody>
@@ -1350,19 +1350,19 @@
           <a:lstStyle/>
           <a:p>
             <a:r>
-              <a:t>The ethics of the economy are stated in terms of character. Humane character consists of righteous wealth, marital faithfulness, and kindness in work and behaviour (AA p. 54). Righteous wealth, svadhan, is wealth received as the remuneration of one's own labour, as a gift, or as an award for a special display of art, technique or scholarship (AA p. 140; AVD p. 170). Its opposite, ill-gotten wealth obtained through exploitation and hypocrisy, is counted as crime (MVD pp. 59, 263), and moral accountability extends across doing, commissioning and consenting in body, speech and mind (KD pp. 1–2, 117; SB pp. 207, 258).</a:t>
+              <a:t>The ethics of the economy are stated in terms of character. Humane character consists of righteous wealth, marital faithfulness, and kindness in work and behaviour (AA p. 54). Righteous wealth, svadhan, is wealth received as the remuneration of one's own labour, as a gift, or as an award for a special display of art, technique, or scholarship (AA p. 140; AVD p. 170). Its opposite, ill-gotten wealth obtained through exploitation and hypocrisy, is counted as crime (MVD pp. 59, 263), and moral accountability extends across doing, commissioning, and consenting in body, speech, and mind (KD pp. 1–2, 117; SB pp. 207, 258).</a:t>
             </a:r>
           </a:p>
           <a:p/>
           <a:p>
             <a:r>
-              <a:t>The darshan distinguishes animal instincts from the three humane motives: progeny (putreshana), wealth (vitteshana), and public welfare or reputation (lokeshana), with public welfare highest (MVD pp. 318, 320). Upon awakening, once a ten-member family (where two to four members already produce beyond the household's limited physical needs) achieves resolution and prosperity, the propensity of benevolence (upkar — help and inspiration for awakening and prosperity, MVD p. 72; AA pp. 23–24, 101) naturally arises (KD pp. 115–116). Instead of diverting surplus into limitless accumulation (sangrah), household abundance is channelled into use within the family, right use (sadupyog) in society, and purposeful use in the universal order rather than hoarded (KD pp. 116–117; AA p. 116; MVD p. 150).</a:t>
+              <a:t>The darshan distinguishes animal instincts from the three humane motives: progeny (putreshana), wealth (vitteshana), and public welfare or reputation (lokeshana), with public welfare highest (MVD pp. 318, 320). Upon awakening, once a ten-member family achieves resolution and prosperity, the propensity of benevolence (upkar — help and inspiration for awakening and prosperity, MVD p. 72; AA pp. 23–24, 101) naturally arises (KD pp. 115–116), directing surplus production into use within the family, right use (sadupyog) in society, and purposeful use in the universal order rather than accumulation (KD pp. 116–117; AA p. 116; MVD p. 150).</a:t>
             </a:r>
           </a:p>
           <a:p/>
           <a:p>
             <a:r>
-              <a:t>The texts treat agriculture and industry as the two primary forms of production, with all other vocations complementary to them (MVD p. 267), and distinguish two forms of service (seva, MVD p. 72). First, benevolence-focused service (upkar-pradhan seva) covers household care, child and elder support, teaching under the education-sanskar committee (AA pp. 24, 29, 130–132, 140), medical care and healing by doctors under the health-restraint committee at village and regional medical centres (AA pp. 139–140; JV pp. 166–168), service on the five committees (AA p. 127), and representation in the ten-tier council order (lok-pratinidhi, KD pp. 116–117); because these practitioners belong to a self-reliant ten-member family producing in excess of need, their household's abundance provides all objects needed for their bodily nourishment, protection, and societal motion without salaried employment (KD pp. 115–117; AA pp. 119–120, 137). Second, remuneration-focused service (pratiphal-pradhan seva) covers the village service branch (AA pp. 133, 136) and exchange-reserve staffing (AA p. 138) — repairing bicycles, radios, TVs and machines, washing clothes, barbering, and staffing the exchange-reserve — whose council-fixed remuneration (parishramik as svadhan, AA pp. 136, 140) credits their account in the cooperative exchange-reserve (AA pp. 137–138) so they draw needed objects at labour value. Healing falls on the unpaid side because restoring a person in distress or disease is a direct work of kindness (daya) in human relationship, and selling it for gain turns it into trade (vyapar) and distorts its purpose (AA pp. 22–24, 45–46, 140; JV pp. 166–168). Repair, laundry, barbering, and reserve staffing fall on the paid side because they maintain produced objects and village operations and so extend material production.</a:t>
+              <a:t>The texts treat agriculture and industry as the two primary forms of production, with all other vocations complementary to them (MVD p. 267), and distinguish two forms of service (seva, MVD p. 72). Benevolence-focused service (upkar-pradhan seva) covers household care, teaching, medical care and healing, and societal representation (AA pp. 24, 29, 127, 130–132, 139–140; JV pp. 166–168; KD pp. 116–117); because these practitioners belong to self-reliant ten-member families producing in excess of need, their household's abundance sustains them without salaried employment (KD pp. 115–117; AA pp. 119–120, 137). Remuneration-focused service (pratiphal-pradhan seva) covers material maintenance and village operations — repairing tools, bicycles, and appliances, laundry, barbering, and exchange-reserve upkeep (AA pp. 133, 136, 138) — which earn labour-value credit in the village exchange-reserve. Teaching and healing remain unpaid because awakening jeevan and restoring a person in distress are direct works of kindness in human relationship; material repair and upkeep are remunerated because they maintain produced objects and extend physical production.</a:t>
             </a:r>
           </a:p>
         </p:txBody>
@@ -1432,7 +1432,7 @@
           <a:lstStyle/>
           <a:p>
             <a:r>
-              <a:t>The study opens with a contrast. A forest, a herd or a field left to itself settles into a definite balance with its surroundings. Soil feeds plants, plants return to soil, and animals take what their bodies need and then stop. The human body belongs to the same nature: its needs for food, shelter and protection are definite and can be counted.</a:t>
+              <a:t>The study opens with a contrast. A forest, a herd, or a field left to itself settles into a definite balance with its surroundings. Soil feeds plants, plants return to soil, and animals take what their bodies need and then stop. The human body belongs to the same nature: its needs for food, shelter, and protection are definite and can be counted.</a:t>
             </a:r>
           </a:p>
           <a:p/>
@@ -1444,7 +1444,7 @@
           <a:p/>
           <a:p>
             <a:r>
-              <a:t>Madhyasth Darshan shows why neither approach can reach balance without jeevan and realisation (anubhav) in coexistence, and sets out the constructive vision of resolved (samadhan), prosperous (samriddhi), fearless (abhay) individuals coexisting with all four orders of nature from the ten-member family to the ten-tier Earth order — supported at planetary scale by a federated ten-tier AI agentic backbone.</a:t>
+              <a:t>Madhyasth Darshan shows why prevailing economic principles and methods cannot achieve an undivided society (akhand samaj) and universal orderliness (sarvabhaum vyavastha) without jeevan and the realisation (anubhav) of coexistence, and sets out a constructive family-to-world economic order — assisted in large-scale coordination by measurement and AI agentic tools.</a:t>
             </a:r>
           </a:p>
         </p:txBody>
@@ -1684,7 +1684,13 @@
           <a:p/>
           <a:p>
             <a:r>
-              <a:t>This institutional architecture scales resolved, prosperous, fearless living to the entire Earth and into universal orderliness. From the Tier-1 family council (parivar sabha, at least ten members) and Tier-2 family cluster (parivar samuh sabha, ten families) to the Tier-3 village family council (gram parivar sabha, a hundred families nominating the five committees and coordinating nine branches of work; AA pp. 67, 127, 133–136), Tiers 4–8 scale by factors of ten up to ten million families, while Tiers 9 and 10 span the continent councils (pradhan rajya sabha) and the World Family Council (vishva parivar sabha; AA pp. 27–30, 125–127). Representatives are selected by consensus with zero election expenditure and serve part-time while continuing production, so governance never creates a non-producing ruling class and every family produces more than its needs, while higher tiers coordinate medium and large industry, planetary regeneration, and inter-nation labour-value exchange free of profit and loss (AA pp. 27–30, 63, 72, 110, 115, 127; MVD pp. 259, 264–271; KD p. 67).</a:t>
+              <a:t>This institutional architecture scales resolved, prosperous, fearless living from the family to the entire Earth. From the Tier-1 family council (parivar sabha, at least ten members) and Tier-2 family cluster (parivar samuh sabha, ten families) to the Tier-3 village family council (gram parivar sabha, a hundred families nominating the five committees; AA pp. 67, 125–145), Tiers 4–8 scale by factors of ten up to ten million families, while Tiers 9 and 10 span the continent councils and the World Family Council (vishva parivar sabha; AA pp. 27–30, 125–127).</a:t>
+            </a:r>
+          </a:p>
+          <a:p/>
+          <a:p>
+            <a:r>
+              <a:t>At the village tier, the production and exchange-reserve committees jointly evaluate the quantity, quality, and fivefold value of labour (AA pp. 67, 143, 145) and coordinate nine branches of village work — agriculture, animal husbandry, fuel, adornment, housing, craft, industry, metallurgy, and the village service branch (AA pp. 133–136). The village exchange-reserve is staffed on average by three people (more when needed; AA p. 138) who receive remuneration-focused service credit, while teachers, doctors, and council representatives serve part-time without salary, supported by their prosperous families and selected by consensus with zero election expenditure (AA pp. 110, 127; MVD pp. 259, 264–271; KD p. 67).</a:t>
             </a:r>
           </a:p>
         </p:txBody>
@@ -1836,13 +1842,13 @@
           <a:lstStyle/>
           <a:p>
             <a:r>
-              <a:t>The traditions disagree both on the source of insatiable want and on what closes the economic cycle — and comparing them reveals why none of the existing economic theories can resolve the core deadlocks without jeevan and realisation (anubhav).</a:t>
+              <a:t>Comparing existing economic traditions — what each is, what problem it was meant to solve, and where it falls short — shows why prevailing economic principles and methods cannot establish an undivided society (akhand samaj) and universal orderliness (sarvabhaum vyavastha) of resolved, prosperous individuals living fearlessly in balance with nature.</a:t>
             </a:r>
           </a:p>
           <a:p/>
           <a:p>
             <a:r>
-              <a:t>Neoclassical and marginalist theory (Jevons 1871; Robbins 1932) locks in non-satiation and subjective utility, leaving no observer-invariant basis for social agreement (Arrow 1951). Aristotle and Marx saw the limitlessness of money-getting and capital, yet Marx (1875) had to defer need-based sharing to a distant future because without understanding that every person is jeevan, able to realise in the coexistence of satta (vyapak) and nature as a whole at once — the basis of the ten-member family, non-kin sharing and intrinsic work motivation (shram ka vishram = samadhan) have no ontological anchor. Keynes, Veblen and Hirsch diagnosed positional competition, and ecological economists (Daly 1974) call for steady-state throughput caps, yet external caps and sufficiency thresholds face psychological rebound whenever jeevan's inexhaustible powers remain trapped in the 4.5 activities. Gandhian economics (Kumarappa 1945) relies on ascetic moral restraint and Advaita renounces worldly life, whereas Madhyasth Darshan regulates taste through realisation in coexistence, grounding prosperous, fearless living across the Earth.</a:t>
+              <a:t>Neoclassical and marginalist theory (Jevons 1871; Robbins 1932) coordinates markets through subjective utility and non-satiation, leaving no observer-invariant basis for social agreement (Arrow 1951). Aristotle and Marx diagnosed the limitlessness of money-getting and capital, yet Marx (1875) had to defer need-based sharing to a distant future because without understanding that every person is jeevan, able to realise the coexistence of satta (vyapak) and nature as a whole at once, the ten-member family, non-kin sharing, and restful work in resolution (shram ka vishram in samadhan) lack an ontological foundation. Keynes, Veblen, and Hirsch diagnosed positional competition, and ecological economists (Daly 1974) call for steady-state throughput caps, yet external caps face psychological rebound whenever jeevan's inexhaustible powers remain trapped in the 4.5 activities. Gandhian economics (Kumarappa 1945) relies on ascetic moral restraint and Advaita renounces worldly life, whereas Madhyasth Darshan regulates taste through the realisation of coexistence, grounding prosperous, fearless living across the Earth.</a:t>
             </a:r>
           </a:p>
         </p:txBody>
@@ -1912,13 +1918,13 @@
           <a:lstStyle/>
           <a:p>
             <a:r>
-              <a:t>Six analytical and institutional tools from modern economics can serve a cyclical economy, yet each hits a structural ceiling unless anchored in jeevan, realisation (anubhav), and the ten-tier AI agentic backbone.</a:t>
+              <a:t>Six analytical and institutional methods from modern economics can serve a cyclical economy once they are anchored in jeevan, the realisation (anubhav) of coexistence, and ten-tier self-governance.</a:t>
             </a:r>
           </a:p>
           <a:p/>
           <a:p>
             <a:r>
-              <a:t>First, Hayek (1945) showed that market prices compress dispersed knowledge; removing speculative prices requires federated AI agents across ten tiers to aggregate local surpluses and deficits without bureaucracy. Second, national accounts, input–output tables, and material-flow accounting measure physical throughput, but need the family's definite need assessment to define enough. Third, Ostrom's polycentric commons and Polanyi's non-commodities protect local resources, but require universal agreement in coexistence (MVD p. 203) to scale across ten planetary tiers without elite capture. Fourth, Max-Neef, Doyal &amp; Gough, and Sen define objective needs and adaptive preference, but require jeevan's higher 5.5 activities to prevent hedonic rebound once basic needs are met. Fifth, interest-free mutual-credit clearing (such as the Swiss WIR; Stodder 2009) models the village exchange-reserve, while the satiation point of exchange (AA p. 76) prevents strategic hoarding. Sixth, Leontief input–output matrices and Ricardian differential rent (1817) let committee AI agents separate natural fertility from human effort.</a:t>
+              <a:t>First, Hayek (1945) showed that market prices compress dispersed knowledge; replacing speculative prices across ten tiers can be assisted by computational and AI coordination tools that aggregate local surpluses and deficits for part-time councils. Second, national accounts, input–output tables, and material-flow accounting measure physical throughput, and gain a stopping point when paired with the family's definite need assessment. Third, Ostrom's polycentric commons and Polanyi's analysis of non-commodities protect local resources, and gain a planetary anchor through universal agreement in coexistence (MVD p. 203). Fourth, Max-Neef, Doyal &amp; Gough, and Sen define objective needs and adaptive preference, while awakening jeevan's higher 5.5 activities prevents hedonic rebound once basic needs are met. Fifth, interest-free mutual-credit clearing (such as the Swiss WIR; Stodder 2009) models the village exchange-reserve, while the satiation point of exchange (AA p. 76) prevents strategic hoarding. Sixth, Leontief input–output matrices and Ricardian differential rent (1817) help separate natural fertility from human effort.</a:t>
             </a:r>
           </a:p>
         </p:txBody>
@@ -1988,19 +1994,19 @@
           <a:lstStyle/>
           <a:p>
             <a:r>
-              <a:t>The darshan joins two kinds of order in one sequence. Knowledge is law, law is regulation, and regulation is balance; balanced living is justice in humans; living within universal orderliness with justice is dharma; and realisation in coexistence is dharma and truth (MVD p. 173; AA pp. 18, 117). Where a relation is governed by law, regulation or balance and can be stated as a quantity, rate, constraint or rule, it can be measured and traced by an instrument. Where a question concerns the fulfilment of a relationship or its accord with coexistence, it belongs to human evaluation (KD p. 139).</a:t>
+              <a:t>The darshan joins two kinds of order in one sequence. Knowledge is law, law is regulation, and regulation is balance; balanced living is justice in humans; living within universal orderliness with justice is dharma; and the realisation of coexistence is dharma and truth (MVD p. 173; AA pp. 18, 117). Where a relation is governed by law, regulation, or balance and can be stated as a quantity, rate, or constraint, it can be measured and traced by an instrument. Where a question concerns the fulfilment of a relationship or its accord with coexistence, it belongs to human evaluation (KD p. 139).</a:t>
             </a:r>
           </a:p>
           <a:p/>
           <a:p>
             <a:r>
-              <a:t>Crucially, in Avartansheel Arthshastra normative evaluation is never left to an isolated official acting in private: it is carried out collectively in families, ten-family clusters, five village committees, and tiered councils (AA pp. 128–130, 138–140, 146–149). The treatise explicitly notes that even if a mistake or shortcoming occurs from an individual (AA p. 139), the council's collective responsibility protects right use.</a:t>
+              <a:t>In Avartansheel Arthshastra, evaluation is carried out collectively across nested councils: family members help correct mistakes within the household, the ten-family cluster evaluates family representatives, the village council and assembly evaluate the five committees, and the justice-security committee conducts a self-motivated process of reform (AA pp. 128–130, 138–140, 146–149).</a:t>
             </a:r>
           </a:p>
           <a:p/>
           <a:p>
             <a:r>
-              <a:t>That collective self-correction rests on two things: the treatise grounds universal agreement (sarvasammati) in realisation and evaluation by justice, dharma, and truth (§2.1; AA pp. 18–20, 58–60; MVD p. 203), and for councils whose members are still in the process of realisation (anubhav-gami) and may slip into a priya–hit–labh impulse, this study argues as a working institutional hypothesis that placing objective facts and checkable causal logic continuously in common view makes it far harder for a group of peers to quietly endorse injustice or ecological waste.</a:t>
+              <a:t>Instruments assist those councils by measuring physical balances, stock age, embodied fivefold labour, and regional surpluses and deficits, placing clear facts before the responsible council while leaving every judgement of justice, dharma, and truth to human beings.</a:t>
             </a:r>
           </a:p>
         </p:txBody>
@@ -2070,19 +2076,19 @@
           <a:lstStyle/>
           <a:p>
             <a:r>
-              <a:t>Each condition of the cycle can fail in a recognisable way, and most failures leave traces in records long before they become crises. Within the federated ten-tier architecture of §8.3, the Family, Committee and Regional AI Agents watch these indicators continuously and present both the factual discrepancy and its checkable causal trace in common view to every member of the responsible family, committee or council.</a:t>
+              <a:t>Each condition of the cycle can fail in a recognisable way, and most failures leave traces in records long before they become crises. Within the architecture of §8.3, the Family, Committee, and Regional AI Agents monitor these indicators and route early warnings — together with the underlying data — to the responsible council so that errors can be examined and corrected through the treatise's reformative procedures (AA pp. 129–130, 139–140, 146–149).</a:t>
             </a:r>
           </a:p>
           <a:p/>
           <a:p>
             <a:r>
-              <a:t>Need is definite: the Family Agent flags use rising faster than assessed need. Labour receives its value: Production and Exchange-Reserve Agents flag producers receiving less than labour value. Exchange follows labour value: regional agents flag drifting ratios or margins. Everyone produces: committee agents flag displaced workers or idle skills and alert the Education-Sanskar Agent to plan training. Goods are used, not hoarded: agents flag ageing stock and idle balances. Nature in proportion: agents flag drawdown or soil degradation.</a:t>
+              <a:t>Need is definite: the Family Agent flags use rising faster than assessed need. Labour receives its value: Production and Exchange-Reserve Agents flag producers receiving less than labour value. Exchange follows labour value: regional agents flag drifting ratios or margins. Everyone produces: committee agents flag displaced workers or idle skills so the education-sanskar committee can plan training. Goods are used, not hoarded: agents flag ageing stock and idle balances. Nature in proportion: agents flag drawdown or soil degradation.</a:t>
             </a:r>
           </a:p>
           <a:p/>
           <a:p>
             <a:r>
-              <a:t>Because these facts and checkable derivations are visible to the whole council at once, no single member's blind spot or mistake can quietly persist: the visible discrepancy prompts the collective to examine the facts and restore balance.</a:t>
+              <a:t>In each case, the instrument surfaces the signal and returns the normative question to the responsible human body.</a:t>
             </a:r>
           </a:p>
         </p:txBody>
@@ -2234,19 +2240,19 @@
           <a:lstStyle/>
           <a:p>
             <a:r>
-              <a:t>Across the ten tiers, the agentic backbone keeps the cycle in balance, enables collective self-correction, and lowers the barrier to transition. When a new cluster of families or villages begins transitioning inside today's market economy, pre-configured agents immediately connect its exchange-reserve to regional labour-value benchmarks and mutual-credit clearing, while placing verified discrepancies and checkable causal traces before the whole council simultaneously making them far harder to ignore (AA pp. 72, 115, 118, 139, 142–143; MVD p. 268).</a:t>
+              <a:t>Across the ten tiers, the agent network turns the village survey and committee evaluation rubrics (AA pp. 122–125, 146–149) into a living operational model, tracks extraction against regeneration, and lowers the practical friction of transitioning from the current economy by helping participating communities run three-stage exchange-reserve clearing and pool surpluses across distances (AA pp. 72, 115, 118, 142–143; MVD p. 268).</a:t>
             </a:r>
           </a:p>
           <a:p/>
           <a:p>
             <a:r>
-              <a:t>The darshan's criterion for technique governs deployment: AI must reduce drudgery and production time while keeping every person a participant in physical production (MVD p. 265; AA p. 107; JVD p. 35), and all models, weights and agricultural or craft records must remain an open commons rather than proprietary intellectual property (AA pp. 29, 56–58, 132).</a:t>
+              <a:t>The darshan's criterion for technique governs deployment: AI must reduce drudgery and production time while keeping every person a participant in physical production (MVD p. 265; AA p. 107; JVD p. 35), and all models, weights, and agricultural or craft records must remain an open commons rather than proprietary intellectual property (AA pp. 29, 56–58, 132).</a:t>
             </a:r>
           </a:p>
           <a:p/>
           <a:p>
             <a:r>
-              <a:t>Five safeguards keep the agentic backbone subordinate to people (§8.8): no optimisation for profit or attention capture; strict data subsidiarity (AA p. 128); inspectable rules that prevent technocratic rulership (AA p. 82); counting AI's own energy and mineral footprint within regenerative limits; and shared council visibility with cross-agent auditability making it far harder for any single representative to quietly dismiss an inconsistency.</a:t>
+              <a:t>Four architectural safeguards keep the agent network subordinate to people (§8.8): no optimisation for profit, throughput, or attention capture; strict data subsidiarity from person and family to village (AA p. 128); inspectable and revisable rules that prevent technocratic rulership (AA p. 82); and counting the material, mineral, and energy footprint of computing hardware within regenerative limits.</a:t>
             </a:r>
           </a:p>
         </p:txBody>
@@ -2322,7 +2328,7 @@
           <a:p/>
           <a:p>
             <a:r>
-              <a:t>First, the body's needs are definite, so the body by itself could come to balance with the rest of nature like any other organism. Second, human want is not definite because jeevan, the conscious unit with inexhaustible powers, seeks continuity of happiness; in delusion it reads its own dissatisfaction as a shortage of objects, which is why no economic theory can close the cycle without jeevan and realisation (anubhav). Third, cyclical economics establishes resolved, prosperous, fearless individuals coexisting with nature from the ten-member family to the ten-tier Earth and universal order: need assessed in the family, labour valued by usefulness, exchange free of profit and loss, and production within natural regeneration. Fourth, for an Earth-scale civilization of people still in the process of realisation (anubhav-gami), a federated ten-tier AI agentic backbone is a structural requirement — making objective facts and checkable logic visible to councils so they cannot ignore drift and can collectively self-correct, while keeping justice, dharma and truth with people.</a:t>
+              <a:t>First, the body's needs are definite, so the body by itself could come to balance with the rest of nature like any other organism. Second, human want is not definite because jeevan, the conscious unit with inexhaustible powers, seeks continuity of happiness; in delusion it reads its own dissatisfaction as a shortage of objects, which is why prevailing economic theories cannot close the cycle without jeevan and the realisation (anubhav) of coexistence. Third, cyclical economics establishes resolved, prosperous, fearless individuals and families living in balance with nature from the ten-member family to the ten-tier universal order: need assessed in the family, labour valued by usefulness, exchange free of profit and loss, and production within natural regeneration. Fourth, while humanity is moving toward realisation (anubhav-gami), measurement and a federated ten-tier AI agentic tool can assist part-time councils in tracking material balances, computing labour values, and examining discrepancies, while keeping justice, dharma, and truth with people.</a:t>
             </a:r>
           </a:p>
           <a:p/>
@@ -2398,19 +2404,19 @@
           <a:lstStyle/>
           <a:p>
             <a:r>
-              <a:t>The critical review weighs the darshan's account alongside neoclassical, Marxian, institutional, ecological, capability and Gandhian economics and Advaita.</a:t>
+              <a:t>The critical review weighs the darshan's account alongside neoclassical, Marxian, institutional, ecological, capability, and Gandhian economics and Advaita.</a:t>
             </a:r>
           </a:p>
           <a:p/>
           <a:p>
             <a:r>
-              <a:t>On the darshan's account, its strengths are that it sets out the complete vision of resolved, prosperous, fearless humans coexisting with nature across the Earth; explains insatiability through the joint form of jeevan and body; resolves at a common root the six structural deadlocks that body-centric economics cannot solve without jeevan and realisation (rebound against caps, Arrow's impossibility of social agreement, the work-disutility trilemma, non-kin family sharing, strategic ledger gaming, and intergenerational discounting); pairs family need-sharing with inter-family fivefold labour-value exchange (skill, proficiency, pace, time, and means); and specifies the three-stage transition path, which this study joins to the federated ten-tier AI agentic backbone.</a:t>
+              <a:t>On the darshan's account, its strengths are that it sets out a complete vision of an undivided society and universal orderliness — resolved, prosperous, fearless humans living in balance with nature; explains insatiability through the joint form of jeevan and body; resolves at a common root the six structural deadlocks that block body-centric economic models without jeevan and realisation; pairs family need-sharing with inter-family fivefold labour-value exchange (skill, proficiency, pace, time, and means); and specifies a concrete three-stage transition path assisted by practical coordination tools.</a:t>
             </a:r>
           </a:p>
           <a:p/>
           <a:p>
             <a:r>
-              <a:t>Its open problems: how family need assessments aggregate at planetary scale; how fivefold labour valuation computes multi-stage inputs, capital depreciation without interest, and Ricardian differential fertility across regions; how the federated ten-tier AI agentic backbone replaces price and interest signals without creating a technocratic bottleneck; how automation reduces drudgery without displacing producers; how teachers, doctors, and council representatives are supported in unpaid benevolent service (upkar-pradhan seva) during the transition before their households reach ten-member prosperity; and how communities govern Personal, Family and Committee AI Agents without ceding justice, dharma and truth.</a:t>
+              <a:t>Its open problems include: how family need assessments aggregate at planetary scale; how fivefold labour valuation computes multi-stage inputs, capital depreciation without interest, and Ricardian differential fertility across regions; how a federated ten-tier AI agentic framework can assist non-price coordination without creating a technocratic bottleneck; how automation reduces drudgery without displacing producers; how teachers, doctors, and council representatives are supported in unpaid benevolent service (upkar-pradhan seva) during the transition before their households reach ten-member prosperity; and how communities govern AI tools without ceding judgements of justice, dharma, and truth.</a:t>
             </a:r>
           </a:p>
         </p:txBody>
@@ -2480,19 +2486,19 @@
           <a:lstStyle/>
           <a:p>
             <a:r>
-              <a:t>Human economies fail to reach balance because body-centric economic theories ask finite material goods to satisfy the continuous qualitative need of jeevan. Without recognising jeevan and realisation (anubhav) in coexistence, neither market growth nor external caps nor ascetic restraint can close the cycle.</a:t>
+              <a:t>Human economies fail to reach balance because the need they are asked to meet is not the need they can meet, and prevailing economic principles and methods — mainstream and heterodox alike — cannot establish an undivided society (akhand samaj) and universal orderliness (sarvabhaum vyavastha) of resolved, prosperous individuals and families living fearlessly in balance with nature. Without recognising jeevan and the realisation (anubhav) of coexistence, neither market prices nor external ecological caps nor moral restraint can close the cycle.</a:t>
             </a:r>
           </a:p>
           <a:p/>
           <a:p>
             <a:r>
-              <a:t>Madhyasth Darshan answers with the vision of resolved (samadhan), prosperous (samriddhi), fearless (abhay) individuals coexisting with all four orders of nature from the ten-member family and hundred-family village to the ten-tier World Family Council across the Earth and in universal orderliness: definite need assessed in the family, restful labour valued by the usefulness it establishes, exchange free of profit and loss, and production within natural regeneration.</a:t>
+              <a:t>On the darshan's account, Avartansheel Arthshastra resolves these deadlocks at their common root through the awakening of jeevan in the realisation of coexistence: definite need assessed and shared in the ten-member family, restful labour valued by the usefulness it establishes, unpaid benevolent service arising from family abundance, exchange settling at the satiation point of fivefold labour value, and production held within natural regeneration across generations.</a:t>
             </a:r>
           </a:p>
           <a:p/>
           <a:p>
             <a:r>
-              <a:t>To establish and sustain this order at the scale of the Earth while citizens are in the process of realisation (anubhav-gami), a strong, federated ten-tier AI agentic backbone is a structural requirement. Paired with every person, family, committee and council, AI agents make objective facts, early discrepancies, and checkable causal logic simultaneously visible in common view — ensuring that councils cannot ignore inconsistencies and can collectively self-correct even when an individual errs, while keeping the judgements of justice, dharma and truth in human hands.</a:t>
+              <a:t>To support transitioning communities and part-time councils across ten tiers while humanity is moving toward realisation (anubhav-gami), a federated ten-tier AI agentic tool can extend the treatise's computerised exchange-reserves and networked committees — tracking material balances, computing multi-stage labour values, and placing clear facts before councils while leaving every judgement of justice, dharma, and truth in human hands.</a:t>
             </a:r>
           </a:p>
         </p:txBody>
@@ -2562,13 +2568,13 @@
           <a:lstStyle/>
           <a:p>
             <a:r>
-              <a:t>Writing in the 1990s, Shri A. Nagraj anticipated computers in the village exchange-reserve (AA p. 138) and a computer network linking committees from the village to the world (AA p. 132). Extending that institutional design to contemporary computing, this study argues that at the scale of the whole Earth — and while citizens are in the process of realisation (anubhav-gami) — a federated ten-tier AI agentic backbone is a structural requirement rather than an optional convenience, for four interconnected reasons.</a:t>
+              <a:t>Writing in the 1990s, Shri A. Nagraj anticipated computers in the village exchange-reserve (AA p. 138) and a computer network linking committees from the village to the world (AA p. 132). Extending that institutional design to contemporary computing, a federated ten-tier AI agentic framework can serve as a practical coordination tool where passive databases and network connectivity alone fall short.</a:t>
             </a:r>
           </a:p>
           <a:p/>
           <a:p>
             <a:r>
-              <a:t>First, planetary-scale visibility across ten tiers: in a single household, stock, effort and soil are visible to the naked eye; across ten tiers of villages, regions and continents, no council can see distant ecological drawdown or exchange drift without active agents that continuously cross-check flows and place checkable causal traces in common view. Second, fault-tolerance while individuals are anubhav-gami: even when an individual errs or slips into priya–hit–labh bias (AA p. 139), simultaneous visibility of verified discrepancies and their step-by-step logic before the relevant committee or council brings private drift into common view for reformative deliberation (AA pp. 129–130, 139–140). Third, part-time governance and lean staffing: representatives continue physical production (AA p. 127; MVD p. 259) and the village exchange-reserve is staffed on average by three people (AA p. 138); manual databases would force a full-time managerial bureaucracy (JVD p. 35). Fourth, non-price input–output calculation, Ricardian soil adjustment, natural-language village surveys, and dual currency/labour ledgers across Stages 1–3 (AA pp. 122–125, 142–143) require active agentic computation.</a:t>
+              <a:t>First, visibility across ten tiers: in a single household, stock, effort, and soil are visible to the naked eye; across ten tiers of villages and regions, active agents cross-check records against physical balances and trace upstream and downstream effects. Second, support while individuals are in the process of realisation (anubhav-gami): when occasional mistakes occur (AA p. 139), paired agents surface verified discrepancies to the relevant council for reformative deliberation (AA pp. 128–130, 138–140) and maintain dual ledgers across the three stages of transition (AA pp. 142–143). Third, part-time governance and lean staffing: representatives continue physical production (AA p. 127; MVD p. 259) and the village exchange-reserve is staffed on average by three people (AA p. 138); automating reconciliation prevents clerical overload without creating a full-time managerial bureaucracy (JVD p. 35). Fourth, non-price input–output calculation, Ricardian soil adjustment, and natural-language translation of village surveys and committee evaluations (AA pp. 122–125, 131, 146–149) become practical for part-time councils.</a:t>
             </a:r>
           </a:p>
         </p:txBody>
@@ -2638,19 +2644,19 @@
           <a:lstStyle/>
           <a:p>
             <a:r>
-              <a:t>To operate at the scale of the Earth while citizens are in the process of realisation (anubhav-gami), every human unit from the person and the Tier-1 family council to the Tier-10 World Family Council is paired with a dedicated AI agent. Across all ten tiers, these agents act both as operational coordinators and as collective consistency mirrors: they place verified facts, discrepancies, and checkable causal logic in common view before all members of the family, cluster, committee, or council simultaneously.</a:t>
+              <a:t>To assist coordination across the ten-tier family-rooted self-governing order (parivar-mulak swarajya vyavastha), each human unit from the person and the Tier-1 family council to the Tier-10 World Family Council can work with a paired AI agent matched to its scope and data-custody boundary.</a:t>
             </a:r>
           </a:p>
           <a:p/>
           <a:p>
             <a:r>
-              <a:t>At the individual and Tier-1 family council level (parivar sabha, at least ten members; AA pp. 14, 26–28, 65, 125), the Personal Assistant and Family AI Agent help reflect on priya–hit–labh impulses, assess common and special aspirations (AA p. 112), track stock age against hoarding, and coordinate complementary household production without weighing individual labour shares (AA pp. 119–120). At Tier 2 (the ten-family cluster council, parivar samuh sabha; AA pp. 27, 125) and Tier 3 (the hundred-family village council, gram parivar sabha, which is the first tier to nominate the five committees; AA pp. 67, 125–145), the Cluster, Village Council, and five Committee Agents maintain the living village survey, link the five committees horizontally, monitor the four dimensions of justice (in character, behaviour, production, and exchange; AA pp. 140–143), and run the three-stage transition ledgers alongside the exchange-reserve's three-person staff (AA p. 138).</a:t>
+              <a:t>At the individual and Tier-1 family council level (parivar sabha, at least ten members; AA pp. 14, 26–28, 65, 125), the Personal Assistant and Family AI Agent help examine priya–hit–labh impulses, assess common and special aspirations (AA p. 112), track stock age against hoarding, and coordinate complementary household work without weighing individual labour shares (AA pp. 119–120), publishing only aggregate need and surplus summaries to the village (AA p. 130). At Tier 2 (the ten-family cluster council; AA pp. 27, 125) and Tier 3 (the hundred-family village council and its five committees; AA pp. 67, 125–145), the Cluster, Village Council, and five Committee Agents maintain the living village survey, link the five committees horizontally, and run the three-stage transition ledgers alongside the exchange-reserve's three-person staff (AA p. 138).</a:t>
             </a:r>
           </a:p>
           <a:p/>
           <a:p>
             <a:r>
-              <a:t>Across Tiers 4 to 10 (from the ten-village cluster to the continent and World Family Councils; AA pp. 27–30, 115, 126–127), federated Council and Committee Agents compute Leontief input–output chains and Ricardian fertility adjustments, match inter-regional surpluses and deficits at labour value (AA p. 72), coordinate small, medium and large industry (AA p. 115), and monitor planetary regeneration boundaries (MVD p. 268). This study's companion Technical Note on the Ten-Tier Agentic Infrastructure specifies the eight-block architecture, eighteen use cases, and four-phase Indian transition blueprint.</a:t>
+              <a:t>Across Tiers 4 to 10 (from the ten-village cluster to the continent and World Family Councils; AA pp. 27–30, 115, 126–127), federated regional and global agents exchange signed aggregate vectors to compute Leontief input–output chains and Ricardian fertility adjustments, match inter-regional surpluses and deficits at labour value (AA p. 72), coordinate small, medium, and large industry (AA p. 115), and monitor planetary regeneration boundaries (MVD p. 268). This study's companion Technical Note specifies the eight-block architecture and eighteen operational use cases.</a:t>
             </a:r>
           </a:p>
         </p:txBody>
@@ -2720,7 +2726,7 @@
           <a:lstStyle/>
           <a:p>
             <a:r>
-              <a:t>When we step back from the individual schools of economics — neoclassical, Marxian, institutional, ecological, capability and Gandhian — six structural deadlocks emerge that none of them can solve together, because every one of them models the human actor as a physical-biological organism without jeevan and without realisation (anubhav).</a:t>
+              <a:t>Stepping back from the individual schools of economics — neoclassical, Marxian, institutional, ecological, capability, and Gandhian — six structural deadlocks explain why prevailing economic principles and methods cannot achieve an undivided society (akhand samaj) and universal orderliness (sarvabhaum vyavastha). Each arises from modelling the human actor as a physical-biological organism without jeevan and without realisation (anubhav):</a:t>
             </a:r>
           </a:p>
           <a:p/>
@@ -2731,17 +2737,17 @@
           </a:p>
           <a:p>
             <a:r>
-              <a:t>2. No uncoerced social agreement (Arrow's impossibility): Body-rooted evaluation (priya, hit, labh) differs in every individual body and admits no fair interpersonal aggregation; every human is jeevan with the ability to realise (anubhav) in the coexistence of all-pervasive omnipresence (satta / vyapak) and nature as a whole at once — an eternal, observer-invariant reality (trikalabadh satya) where universal agreement in justice, dharma and truth is natural (AA pp. 18–20, 47, 51, 58–60; MVD p. 203).</a:t>
-            </a:r>
-          </a:p>
-          <a:p>
-            <a:r>
-              <a:t>3. Work-disutility and innovation trilemma: Treating work as disutility means removing wage fear, profit, and patents causes shirking or bureaucratic coercion (AA pp. 5, 75–76, 107; JVD p. 35); in Madhyasth Darshan, labour's restfulness is resolution itself (shram ka vishram = samadhan, AA p. 23), and inventions are honoured with prizes (puraskar) and shared openly (AA pp. 56–58, 140, 144).</a:t>
-            </a:r>
-          </a:p>
-          <a:p>
-            <a:r>
-              <a:t>4. Non-kin sharing collapse: Biological evolutionary theory restricts unconditional sharing to genetic kin; because every member is jeevan with the ability to realise in the coexistence of satta (vyapak) and nature as a whole at once (AA pp. 47, 51, 60; MVD p. 203), this forms the basis of the 10-member family where need is shared without weighing individual labour and surplus funds unpaid benevolent service (upkar-pradhan seva, AA pp. 1, 14, 119–120; KD pp. 115–117).</a:t>
+              <a:t>2. No uncoerced social agreement (Arrow's impossibility): Body-rooted evaluation (priya, hit, labh) differs in every individual body and admits no fair interpersonal aggregation; every human is jeevan with the ability to realise (anubhav) the coexistence of all-pervasive omnipresence (satta, vyapak) and nature as a whole at once — an eternal, observer-invariant reality (trikalabadh satya) where universal agreement in justice, dharma, and truth is natural (AA pp. 18–20, 47, 51, 58–60; MVD p. 203).</a:t>
+            </a:r>
+          </a:p>
+          <a:p>
+            <a:r>
+              <a:t>3. Work-disutility and innovation trilemma: Treating work as disutility means removing wage fear, profit, and patents causes shirking or bureaucratic coercion (AA pp. 5, 75–76, 107; JVD p. 35); in Madhyasth Darshan, labour finds its restfulness in resolution (shram ka vishram in samadhan, AA p. 23), and inventions are honoured with prizes (puraskar) and shared openly (AA pp. 56–58, 140, 144).</a:t>
+            </a:r>
+          </a:p>
+          <a:p>
+            <a:r>
+              <a:t>4. Non-kin sharing collapse: Biological evolutionary theory restricts unconditional sharing to genetic kin; because every member is jeevan with the ability to realise the coexistence of satta (vyapak) and nature as a whole at once (AA pp. 47, 51, 60; MVD p. 203), this forms the basis of the 10-member family where need is shared without weighing individual labour and surplus sustains unpaid benevolent service (upkar-pradhan seva, AA pp. 1, 14, 119–120; KD pp. 115–117).</a:t>
             </a:r>
           </a:p>
           <a:p>
@@ -2821,31 +2827,31 @@
           <a:lstStyle/>
           <a:p>
             <a:r>
-              <a:t>Why is realisation (anubhav) in coexistence specifically required — and why can't intellectual philosophy, moral exhortation, or better institutional rules substitute for it?</a:t>
+              <a:t>Why is the realisation (anubhav) of coexistence specifically required — and why can't intellectual philosophy, moral exhortation, or institutional rules alone substitute for it?</a:t>
             </a:r>
           </a:p>
           <a:p/>
           <a:p>
             <a:r>
-              <a:t>First, because jeevan is a constitutionally complete atom whose powers of hope, thought, and desire are inexhaustible and continuously surging (akshay, uditodit; AA pp. 47–51, 58, 60). Moral vows, ascetic renunciation, or external ecological rationing operate only on the lower faculties while leaving the highest faculties (buddhi and atma) empty. Only when realisation (anubhav) in coexistence awakens the higher 5.5 activities does jeevan experience continuous happiness, peace, contentment, and bliss within itself, relieving the finite body of the burden of supplying infinite satisfaction (AA pp. 20–21, 50, 95).</a:t>
+              <a:t>First, because jeevan is a constitutionally complete atom whose powers of hope, thought, and desire are inexhaustible and continuously surging (akshay, uditodit; AA pp. 47–51, 58, 60). Moral vows, ascetic renunciation, or external ecological rationing operate only on the lower faculties while leaving the highest faculties (buddhi and atma) empty. Only when the realisation (anubhav) of coexistence awakens the higher 5.5 activities does jeevan experience continuous happiness, peace, contentment, and bliss within itself, relieving the finite body of the burden of supplying infinite satisfaction (AA pp. 20–21, 50, 95).</a:t>
             </a:r>
           </a:p>
           <a:p/>
           <a:p>
             <a:r>
-              <a:t>Second, realisation is the only observer-invariant reference point for human society. Sensory pleasure, bodily health, and material profit (priya, hit, labh) are relative to each distinct body, and unawakened opinions (manna) vary from person to person. Every human is jeevan with the ability to realise (anubhav) in the coexistence of all-pervasive omnipresence (satta / vyapak) and nature as a whole at once (trikalabadh satya — truth uncontradicted across past, present, and future; AA pp. 47, 51; MVD p. 203), giving all humans one observer-invariant reference point for uncoerced universal agreement (sarvasammati) on justice, dharma, and truth.</a:t>
+              <a:t>Second, realisation is the observer-invariant reference point for human society. Sensory pleasure, bodily health, and material profit (priya, hit, labh) are relative to each distinct body. Every human is jeevan with the ability to realise (anubhav) the coexistence of all-pervasive omnipresence (satta, vyapak) and nature as a whole at once (trikalabadh satya — truth uncontradicted across past, present, and future; AA pp. 47, 51; MVD p. 203), giving all humans a shared basis for uncoerced universal agreement (sarvasammati) on justice, dharma, and truth.</a:t>
             </a:r>
           </a:p>
           <a:p/>
           <a:p>
             <a:r>
-              <a:t>Third and fourth, realisation transforms human relationship and time horizon from the inside: because every member is jeevan with the ability to realise in the coexistence of satta (vyapak) and nature as a whole at once, this forms the basis of unconditional need-sharing in the ten-member family and restful labour in resolution (shram ka vishram = samadhan, AA p. 23), while inner sovereignty (samprabhuta, AA p. 104) and seeing one's own and one's family's prosperity in the prosperity of the whole and the perpetuity of human civilization establish the satiation point of exchange (AA p. 76) and zero intergenerational discounting (AA pp. 62–63, 72, 94, 142, 146).</a:t>
+              <a:t>Third and fourth, realisation transforms human relationship and time horizon from within: because every member is jeevan with the ability to realise the coexistence of satta (vyapak) and nature as a whole at once, this forms the basis of unconditional need-sharing in the ten-member family and restful labour in resolution (shram ka vishram in samadhan, AA p. 23), while inner sovereignty (samprabhuta, AA p. 104) and seeing one's own and one's family's prosperity in the prosperity of the whole and the perpetuity of human civilization establish the satiation point of exchange (AA p. 76) and zero intergenerational discounting (AA pp. 62–63, 72, 94, 142, 146).</a:t>
             </a:r>
           </a:p>
           <a:p/>
           <a:p>
             <a:r>
-              <a:t>Finally, this explains the bridge to Part V: because eight billion people are currently in the process of realisation (anubhav-gami) rather than already perfected, operating this order at Earth scale requires a federated ten-tier AI agentic backbone that places objective facts and checkable causal logic before councils in common view so communities can collectively self-correct as they grow in understanding.</a:t>
+              <a:t>While communities are moving toward realisation (anubhav-gami), Part V examines how measurement and a federated ten-tier AI agentic tool can assist part-time councils with accounting and coordination.</a:t>
             </a:r>
           </a:p>
         </p:txBody>
@@ -3079,7 +3085,7 @@
           <a:lstStyle/>
           <a:p>
             <a:r>
-              <a:t>The human being is a joint form of body and jeevan — a constitutionally complete sentient atom (gathan-poorna parmanu) whose mass does not change while its powers of knowing, desiring, thinking and selecting are inexhaustible and continuously active (akshay, uditodit; AA pp. 47–51, 58, 60). Every human being carries out all activities in the expectation of happiness, peace, contentment and bliss. Contentment is accepted by every human being and discontent by none (AA pp. 13, 48).</a:t>
+              <a:t>The human being is a joint form of body and jeevan — a constitutionally complete sentient atom (gathan-poorna parmanu) whose mass does not change while its powers of knowing, desiring, thinking, and selecting are inexhaustible and continuously active (akshay, uditodit; AA pp. 47–51, 58, 60). Every human being carries out all activities in the expectation of happiness, peace, contentment, and bliss. Contentment is accepted by every human being and discontent by none (AA pp. 13, 48).</a:t>
             </a:r>
           </a:p>
           <a:p/>
@@ -3091,7 +3097,7 @@
           <a:p/>
           <a:p>
             <a:r>
-              <a:t>Deliberation (tulan, in vritti) is the pivot. Deliberation in terms of pleasure, health, and profit (priya, hit, labh) can never reach universal agreement across distinct bodies (JV pp. 72–73; AA pp. 58–60), which is why body-centric economics hits Arrow's impossibility barrier and cannot find an objective anchor for value. Upon realisation (anubhav) in eternal coexistence (trikalabadh satya, AA p. 51; MVD p. 203), justice, dharma, and truth have an observer-invariant reference point where universal agreement is natural (AA pp. 19–20, 58–60).</a:t>
+              <a:t>Deliberation (tulan, in vritti) is the pivot. Deliberation in terms of pleasure, health, and profit (priya, hit, labh) can never reach universal agreement across distinct bodies (JV pp. 72–73; AA pp. 58–60), which is why body-centric economics hits Arrow's impossibility barrier and cannot find an objective anchor for value. Upon the realisation (anubhav) of eternal coexistence (trikalabadh satya, AA p. 51; MVD p. 203), justice, dharma, and truth have an observer-invariant reference point where universal agreement is natural (AA pp. 19–20, 58–60).</a:t>
             </a:r>
           </a:p>
         </p:txBody>
@@ -6869,7 +6875,7 @@
                 </a:solidFill>
                 <a:latin typeface="Calibri"/>
               </a:rPr>
-              <a:t>Resolved, prosperous, fearless living with nature — and the 10-tier AI backbone it requires</a:t>
+              <a:t>Resolved, prosperous, fearless living in balance with nature — and giving human labour its true value</a:t>
             </a:r>
           </a:p>
         </p:txBody>
@@ -10998,7 +11004,7 @@
                 </a:solidFill>
                 <a:latin typeface="Calibri"/>
               </a:rPr>
-              <a:t>In resolution, labour itself is restful (shram ka vishram = samadhan), and inexhaustible jeevan powers produce beyond need.</a:t>
+              <a:t>In resolution, labour finds its restfulness (shram ka vishram in samadhan), and inexhaustible jeevan powers produce beyond need.</a:t>
             </a:r>
           </a:p>
         </p:txBody>
@@ -13870,7 +13876,7 @@
                 </a:solidFill>
                 <a:latin typeface="Calibri"/>
               </a:rPr>
-              <a:t>At least ten autonomous people: every member is jeevan, able to realise in coexistence of satta and nature as a whole, sharing by need.</a:t>
+              <a:t>At least ten autonomous people: every member is jeevan, able to realise the coexistence of satta and nature as a whole, sharing by need.</a:t>
             </a:r>
           </a:p>
         </p:txBody>
@@ -18127,7 +18133,7 @@
                 </a:solidFill>
                 <a:latin typeface="Calibri"/>
               </a:rPr>
-              <a:t>Upkar-pradhan (teaching, healing, councils) is sustained by the prosperous family; pratiphal-pradhan (repair, upkeep) earns reserve credit.</a:t>
+              <a:t>Upkar-pradhan (teaching, healing, public service) is sustained by the prosperous family; pratiphal-pradhan (repair, upkeep) earns reserve credit.</a:t>
             </a:r>
           </a:p>
         </p:txBody>
@@ -18914,7 +18920,7 @@
                 </a:solidFill>
                 <a:latin typeface="Calibri"/>
               </a:rPr>
-              <a:t>How do resolved, prosperous, fearless humans coexist with nature at Earth scale, giving labour its true value — and why does this require jeevan, realisation, and a 10-tier AI agentic backbone?</a:t>
+              <a:t>How do resolved, prosperous, fearless humans live in balance with nature in an undivided society and universal order — and how does cyclical economics give human labour its true value?</a:t>
             </a:r>
           </a:p>
         </p:txBody>
@@ -26042,7 +26048,7 @@
                 </a:solidFill>
                 <a:latin typeface="Calibri"/>
               </a:rPr>
-              <a:t>These tools gain stability only when anchored in jeevan, realisation, and a 10-tier AI backbone.</a:t>
+              <a:t>These methods gain a stable foundation when anchored in jeevan, realisation, and ten-tier self-governance.</a:t>
             </a:r>
           </a:p>
         </p:txBody>
@@ -28331,7 +28337,7 @@
                 </a:solidFill>
                 <a:latin typeface="Calibri"/>
               </a:rPr>
-              <a:t>Every member is jeevan, able to realise in coexistence of satta and nature as a whole — the basis of the 10-member family and restful labour (samadhan, AA p. 23).</a:t>
+              <a:t>Every member is jeevan, able to realise the coexistence of satta and nature as a whole — the basis of the 10-member family and restful labour (samadhan, AA p. 23).</a:t>
             </a:r>
           </a:p>
         </p:txBody>
@@ -28494,7 +28500,7 @@
                 </a:solidFill>
                 <a:latin typeface="Calibri"/>
               </a:rPr>
-              <a:t>While humanity is in the process of realisation (anubhav-gami), an Earth-scale economy requires a 10-tier AI backbone.</a:t>
+              <a:t>While humanity is in the process of realisation (anubhav-gami), computational and AI tools can assist ten-tier coordination.</a:t>
             </a:r>
           </a:p>
         </p:txBody>
@@ -29036,7 +29042,7 @@
                 </a:solidFill>
                 <a:latin typeface="Calibri"/>
               </a:rPr>
-              <a:t>Fulfilment of relationships and accord with coexistence. When facts and checkable logic are visible in common view, peers can spot and correct individual errors.</a:t>
+              <a:t>Fulfilment of relationships, purpose of a choice, and accord with coexistence. Nested councils evaluate conduct and mutually correct individual errors.</a:t>
             </a:r>
           </a:p>
           <a:p>
@@ -29140,7 +29146,7 @@
                 </a:solidFill>
                 <a:latin typeface="Cambria"/>
               </a:rPr>
-              <a:t>Why collective human judgement self-corrects when facts are visible</a:t>
+              <a:t>Division of labour between instruments and human councils</a:t>
             </a:r>
           </a:p>
           <a:p>
@@ -29156,7 +29162,7 @@
                 </a:solidFill>
                 <a:latin typeface="Calibri"/>
               </a:rPr>
-              <a:t>Instruments measure quantities and trace checkable logic; when placed before a council in common view, peers collectively correct individual errors (KD p. 139; AA p. 139).</a:t>
+              <a:t>Instruments measure quantities and trace causal dependencies across tiers; nested councils evaluate relationships and correct errors (KD p. 139; AA p. 139).</a:t>
             </a:r>
           </a:p>
         </p:txBody>
@@ -29384,7 +29390,7 @@
                 </a:solidFill>
                 <a:latin typeface="Calibri"/>
               </a:rPr>
-              <a:t>V  ·  STRUCTURAL REQUIREMENT  ·  §8.2</a:t>
+              <a:t>V  ·  COORDINATION TOOLS  ·  §8.2</a:t>
             </a:r>
           </a:p>
         </p:txBody>
@@ -29423,7 +29429,7 @@
                 </a:solidFill>
                 <a:latin typeface="Cambria"/>
               </a:rPr>
-              <a:t>Why an AI Agentic Backbone Is Required</a:t>
+              <a:t>Why Databases Alone Are Not Enough</a:t>
             </a:r>
           </a:p>
         </p:txBody>
@@ -29508,7 +29514,7 @@
                 </a:solidFill>
                 <a:latin typeface="Cambria"/>
               </a:rPr>
-              <a:t>1. Earth-scale visibility &amp; self-correction</a:t>
+              <a:t>1. Visibility across ten tiers</a:t>
             </a:r>
           </a:p>
         </p:txBody>
@@ -29547,7 +29553,7 @@
                 </a:solidFill>
                 <a:latin typeface="Calibri"/>
               </a:rPr>
-              <a:t>In one family, facts are visible by eye; across 10 tiers on Earth, AI agents make facts and checkable logic visible to councils so drift cannot be ignored.</a:t>
+              <a:t>In one family, facts are visible by eye; across 10 tiers, agents cross-check balances and trace upstream and downstream effects.</a:t>
             </a:r>
           </a:p>
         </p:txBody>
@@ -29632,7 +29638,7 @@
                 </a:solidFill>
                 <a:latin typeface="Cambria"/>
               </a:rPr>
-              <a:t>2. Fault-tolerance while anubhav-gami</a:t>
+              <a:t>2. Support while anubhav-gami</a:t>
             </a:r>
           </a:p>
         </p:txBody>
@@ -29671,7 +29677,7 @@
                 </a:solidFill>
                 <a:latin typeface="Calibri"/>
               </a:rPr>
-              <a:t>Individuals in transition can err (AA p. 139); when paired agents surface discrepancies in common view, the group collectively self-corrects.</a:t>
+              <a:t>While individuals are in transition (AA p. 139), agents surface discrepancies for council review and run dual transition ledgers.</a:t>
             </a:r>
           </a:p>
         </p:txBody>
@@ -29958,7 +29964,7 @@
                 </a:solidFill>
                 <a:latin typeface="Calibri"/>
               </a:rPr>
-              <a:t>Not an optional add-on: an Earth-scale civilization of anubhav-gami humans requires an AI agentic backbone.</a:t>
+              <a:t>Extending AA's computerised reserves and networked committees, AI agents serve as a practical coordination tool.</a:t>
             </a:r>
           </a:p>
         </p:txBody>
@@ -30826,7 +30832,7 @@
                 </a:solidFill>
                 <a:latin typeface="Cambria"/>
               </a:rPr>
-              <a:t>AI backbone</a:t>
+              <a:t>Coordination tools</a:t>
             </a:r>
           </a:p>
           <a:p>
@@ -30842,7 +30848,7 @@
                 </a:solidFill>
                 <a:latin typeface="Calibri"/>
               </a:rPr>
-              <a:t>required at Earth scale
+              <a:t>measurement &amp; AI agents
 §8</a:t>
             </a:r>
           </a:p>
@@ -31691,7 +31697,7 @@
                 </a:solidFill>
                 <a:latin typeface="Cambria"/>
               </a:rPr>
-              <a:t>Federated Ten-Tier AI Agentic Backbone</a:t>
+              <a:t>AI Agents Across the Ten-Tier Order</a:t>
             </a:r>
           </a:p>
         </p:txBody>
@@ -31898,7 +31904,7 @@
                 </a:solidFill>
                 <a:latin typeface="Calibri"/>
               </a:rPr>
-              <a:t>Paired agent &amp; consistency mirror</a:t>
+              <a:t>Paired AI agent</a:t>
             </a:r>
           </a:p>
         </p:txBody>
@@ -33074,7 +33080,7 @@
                 </a:solidFill>
                 <a:latin typeface="Calibri"/>
               </a:rPr>
-              <a:t>Paired agents place verified facts and checkable logic before every council; normative authority stays with people.</a:t>
+              <a:t>Each agent matches the scope and data boundary of its human unit; normative judgement stays with people.</a:t>
             </a:r>
           </a:p>
         </p:txBody>
@@ -34732,7 +34738,7 @@
                 </a:solidFill>
                 <a:latin typeface="Calibri"/>
               </a:rPr>
-              <a:t>When agents make early traces and checkable logic visible in common view, councils cannot ignore them and self-correct.</a:t>
+              <a:t>Early signals return clear facts to the responsible family, cluster, or council so errors can be examined and corrected.</a:t>
             </a:r>
           </a:p>
         </p:txBody>
@@ -36485,7 +36491,7 @@
                 </a:solidFill>
                 <a:latin typeface="Cambria"/>
               </a:rPr>
-              <a:t>Collective visibility</a:t>
+              <a:t>Living survey &amp; transition</a:t>
             </a:r>
           </a:p>
         </p:txBody>
@@ -36524,7 +36530,7 @@
                 </a:solidFill>
                 <a:latin typeface="Calibri"/>
               </a:rPr>
-              <a:t>Shared council views make drift, causal logic, and 3-stage ledgers visible to all peers at once, supporting collective self-correction across 10 tiers.</a:t>
+              <a:t>Turns the village survey into a live model, tracks regeneration, and runs 3-stage dual ledgers for transitioning villages.</a:t>
             </a:r>
           </a:p>
         </p:txBody>
@@ -37717,7 +37723,7 @@
                 </a:solidFill>
                 <a:latin typeface="Calibri"/>
               </a:rPr>
-              <a:t>3-stage path + required 10-tier AI backbone</a:t>
+              <a:t>3-stage transition path &amp; practical AI tools</a:t>
             </a:r>
           </a:p>
         </p:txBody>
@@ -38256,7 +38262,7 @@
                 </a:solidFill>
                 <a:latin typeface="Calibri"/>
               </a:rPr>
-              <a:t>Realising this vision at Earth scale requires both jeevan understanding and the 10-tier AI agentic backbone.</a:t>
+              <a:t>Cyclical economics grounds balance in jeevan and realisation, paired with a concrete family-to-world institutional path.</a:t>
             </a:r>
           </a:p>
         </p:txBody>
@@ -38912,7 +38918,7 @@
                 </a:solidFill>
                 <a:latin typeface="Cambria"/>
               </a:rPr>
-              <a:t>Open spiral   →   fearless coexistence at Earth scale</a:t>
+              <a:t>Open spiral   →   undivided society &amp; universal order</a:t>
             </a:r>
           </a:p>
         </p:txBody>
@@ -38951,7 +38957,7 @@
                 </a:solidFill>
                 <a:latin typeface="Calibri"/>
               </a:rPr>
-              <a:t>A 10-tier AI backbone is required to make facts visible for collective self-correction; judgement stays with people.</a:t>
+              <a:t>Ten-tier AI tools assist practical coordination during the transition; judgement of justice, dharma and truth stays with people.</a:t>
             </a:r>
           </a:p>
         </p:txBody>
@@ -42955,7 +42961,7 @@
                 </a:solidFill>
                 <a:latin typeface="Calibri"/>
               </a:rPr>
-              <a:t>Body-rooted views (priya, hit, labh) differ in every body; only realisation in coexistence grounds universal agreement.</a:t>
+              <a:t>Body-rooted views (priya, hit, labh) differ in every body; only the realisation of coexistence grounds universal agreement.</a:t>
             </a:r>
           </a:p>
         </p:txBody>

--- a/Studies/Prosperity-Economics-And-Right-Use/Prosperity-Economics-And-Right-Use-Madhyasth-Darshan.pptx
+++ b/Studies/Prosperity-Economics-And-Right-Use/Prosperity-Economics-And-Right-Use-Madhyasth-Darshan.pptx
@@ -870,7 +870,7 @@
           <a:p/>
           <a:p>
             <a:r>
-              <a:t>Labour applied with skill and proficiency to natural abundance produces objects that carry usefulness value and aesthetic value. Wealth (dhan) is only the produced object, not money (AA pp. 25, 105), and the primary capital is human labour power, which is always the person's own (AA p. 73; MVD p. 56). Because the powers of jeevan are inexhaustible, every human being can produce more than immediate necessity — the foundational principle of human prosperity (SB p. 268; JVD p. 215).</a:t>
+              <a:t>Labour applied with skill and proficiency to natural abundance produces objects that carry usefulness value and aesthetic value. Wealth (dhan) is only the produced object, not money (AA pp. 25, 105), and the primary capital is human labour power, which is always the person's own (AA p. 73; MVD p. 56). Because the powers of jeevan are inexhaustible, every human being can produce more than immediate necessity — the foundational principle of human prosperity (SB p. 268; JVD p. 168).</a:t>
             </a:r>
           </a:p>
         </p:txBody>
@@ -1608,7 +1608,7 @@
           <a:p/>
           <a:p>
             <a:r>
-              <a:t>Against this, every person is to be engaged in production according to capacity, receptivity and ability (MVD p. 265). Once an improved tool is disseminated across society, the unit labour value of the product falls and the means of production increase while the time production takes decreases across generations, keeping every member of every family a producer (AA pp. 118, 145; JVD p. 216).</a:t>
+              <a:t>Against this, every person is to be engaged in production according to capacity, receptivity and ability (MVD p. 265). Once an improved tool is disseminated across society, the unit labour value of the product falls and the means of production increase while the time production takes decreases across generations, keeping every member of every family a producer (AA pp. 118, 145; JVD p. 168).</a:t>
             </a:r>
           </a:p>
         </p:txBody>
@@ -1772,7 +1772,7 @@
           <a:p/>
           <a:p>
             <a:r>
-              <a:t>Justice in exchange is reached in three stages. First, the value of labour is evaluated through the prevailing currency. Second, the currency itself is evaluated on the basis of labour. Third, objects are valued on the value of labour alone, and exchange proceeds free of profit, loss and accumulation (AA pp. 142–143). Nagraj records that he lived with prosperity through his own production within the present system (AVD p. 52; JV pp. 153–154), and Janvad puts the choice to families as a question for public dialogue (JVD pp. 217–218).</a:t>
+              <a:t>Justice in exchange is reached in three stages. First, the value of labour is evaluated through the prevailing currency. Second, the currency itself is evaluated on the basis of labour. Third, objects are valued on the value of labour alone, and exchange proceeds free of profit, loss and accumulation (AA pp. 142–143). Nagraj records that he lived with prosperity through his own production within the present system (AVD p. 52; JV pp. 153–154), and Janvad puts the choice to families as a question for public dialogue (JVD pp. 168–169).</a:t>
             </a:r>
           </a:p>
         </p:txBody>
@@ -11082,7 +11082,7 @@
                 </a:solidFill>
                 <a:latin typeface="Calibri"/>
               </a:rPr>
-              <a:t>AA pp. 18–19, 25, 48–50, 73, 105  ·  MVD pp. 56, 243  ·  SB p. 268  ·  JVD p. 215  ·  AnalyticMadhyasthDarshan.org  ·  13 / 35</a:t>
+              <a:t>AA pp. 18–19, 25, 48–50, 73, 105  ·  MVD pp. 56, 243  ·  SB p. 268  ·  JVD p. 168  ·  AnalyticMadhyasthDarshan.org  ·  13 / 35</a:t>
             </a:r>
           </a:p>
         </p:txBody>
@@ -20993,7 +20993,7 @@
                 </a:solidFill>
                 <a:latin typeface="Calibri"/>
               </a:rPr>
-              <a:t>SB p. 267  ·  AA pp. 29, 47, 56–58, 107, 118, 131, 140, 144  ·  JV pp. 88–89  ·  JVD pp. 35, 216  ·  MVD p. 265  ·  21 / 35</a:t>
+              <a:t>SB p. 267  ·  AA pp. 29, 47, 56–58, 107, 118, 131, 140, 144  ·  JV pp. 88–89  ·  JVD pp. 35, 168  ·  MVD p. 265  ·  21 / 35</a:t>
             </a:r>
           </a:p>
         </p:txBody>
@@ -23074,7 +23074,7 @@
                 </a:solidFill>
                 <a:latin typeface="Calibri"/>
               </a:rPr>
-              <a:t>AA pp. 122–125, 136–138, 142–143  ·  JV pp. 153–154  ·  JVD pp. 217–218  ·  AVD p. 52  ·  AnalyticMadhyasthDarshan.org  ·  23 / 35</a:t>
+              <a:t>AA pp. 122–125, 136–138, 142–143  ·  JV pp. 153–154  ·  JVD pp. 168–169  ·  AVD p. 52  ·  AnalyticMadhyasthDarshan.org  ·  23 / 35</a:t>
             </a:r>
           </a:p>
         </p:txBody>
